--- a/PPT/Bioinformatics_Agent_Architecture.pptx
+++ b/PPT/Bioinformatics_Agent_Architecture.pptx
@@ -5,7 +5,7 @@
     <p:sldMasterId id="2147483648" r:id="rId1"/>
   </p:sldMasterIdLst>
   <p:notesMasterIdLst>
-    <p:notesMasterId r:id="rId22"/>
+    <p:notesMasterId r:id="rId25"/>
   </p:notesMasterIdLst>
   <p:sldIdLst>
     <p:sldId id="256" r:id="rId2"/>
@@ -18,16 +18,19 @@
     <p:sldId id="263" r:id="rId9"/>
     <p:sldId id="264" r:id="rId10"/>
     <p:sldId id="270" r:id="rId11"/>
-    <p:sldId id="265" r:id="rId12"/>
-    <p:sldId id="266" r:id="rId13"/>
-    <p:sldId id="267" r:id="rId14"/>
-    <p:sldId id="268" r:id="rId15"/>
-    <p:sldId id="271" r:id="rId16"/>
-    <p:sldId id="269" r:id="rId17"/>
-    <p:sldId id="274" r:id="rId18"/>
-    <p:sldId id="272" r:id="rId19"/>
-    <p:sldId id="275" r:id="rId20"/>
-    <p:sldId id="273" r:id="rId21"/>
+    <p:sldId id="277" r:id="rId12"/>
+    <p:sldId id="278" r:id="rId13"/>
+    <p:sldId id="276" r:id="rId14"/>
+    <p:sldId id="265" r:id="rId15"/>
+    <p:sldId id="266" r:id="rId16"/>
+    <p:sldId id="267" r:id="rId17"/>
+    <p:sldId id="268" r:id="rId18"/>
+    <p:sldId id="271" r:id="rId19"/>
+    <p:sldId id="269" r:id="rId20"/>
+    <p:sldId id="274" r:id="rId21"/>
+    <p:sldId id="272" r:id="rId22"/>
+    <p:sldId id="275" r:id="rId23"/>
+    <p:sldId id="273" r:id="rId24"/>
   </p:sldIdLst>
   <p:sldSz cx="12192000" cy="6858000"/>
   <p:notesSz cx="6858000" cy="9144000"/>
@@ -216,7 +219,7 @@
           <a:p>
             <a:fld id="{C3A3113A-A8F2-41E1-BE9A-B655091E6EC1}" type="datetimeFigureOut">
               <a:rPr lang="zh-CN" altLang="en-US" smtClean="0"/>
-              <a:t>2026/7/9</a:t>
+              <a:t>2026/7/10</a:t>
             </a:fld>
             <a:endParaRPr lang="zh-CN" altLang="en-US"/>
           </a:p>
@@ -576,6 +579,230 @@
   <p:cSld>
     <p:spTree>
       <p:nvGrpSpPr>
+        <p:cNvPr id="1" name="">
+          <a:extLst>
+            <a:ext uri="{FF2B5EF4-FFF2-40B4-BE49-F238E27FC236}">
+              <a16:creationId xmlns:a16="http://schemas.microsoft.com/office/drawing/2014/main" id="{82E645CD-5A42-B747-BFAE-8BE3C81C3F3B}"/>
+            </a:ext>
+          </a:extLst>
+        </p:cNvPr>
+        <p:cNvGrpSpPr/>
+        <p:nvPr/>
+      </p:nvGrpSpPr>
+      <p:grpSpPr>
+        <a:xfrm>
+          <a:off x="0" y="0"/>
+          <a:ext cx="0" cy="0"/>
+          <a:chOff x="0" y="0"/>
+          <a:chExt cx="0" cy="0"/>
+        </a:xfrm>
+      </p:grpSpPr>
+      <p:sp>
+        <p:nvSpPr>
+          <p:cNvPr id="2" name="幻灯片图像占位符 1">
+            <a:extLst>
+              <a:ext uri="{FF2B5EF4-FFF2-40B4-BE49-F238E27FC236}">
+                <a16:creationId xmlns:a16="http://schemas.microsoft.com/office/drawing/2014/main" id="{67E840B9-39AA-D0F1-885D-257D85AA55B6}"/>
+              </a:ext>
+            </a:extLst>
+          </p:cNvPr>
+          <p:cNvSpPr>
+            <a:spLocks noGrp="1" noRot="1" noChangeAspect="1"/>
+          </p:cNvSpPr>
+          <p:nvPr>
+            <p:ph type="sldImg"/>
+          </p:nvPr>
+        </p:nvSpPr>
+        <p:spPr/>
+      </p:sp>
+      <p:sp>
+        <p:nvSpPr>
+          <p:cNvPr id="3" name="备注占位符 2">
+            <a:extLst>
+              <a:ext uri="{FF2B5EF4-FFF2-40B4-BE49-F238E27FC236}">
+                <a16:creationId xmlns:a16="http://schemas.microsoft.com/office/drawing/2014/main" id="{109C1A1A-3C84-7B4C-A17D-17AA222272E7}"/>
+              </a:ext>
+            </a:extLst>
+          </p:cNvPr>
+          <p:cNvSpPr>
+            <a:spLocks noGrp="1"/>
+          </p:cNvSpPr>
+          <p:nvPr>
+            <p:ph type="body" idx="1"/>
+          </p:nvPr>
+        </p:nvSpPr>
+        <p:spPr/>
+        <p:txBody>
+          <a:bodyPr/>
+          <a:lstStyle/>
+          <a:p>
+            <a:r>
+              <a:rPr lang="en-US" altLang="zh-CN" dirty="0" err="1"/>
+              <a:t>ToDo</a:t>
+            </a:r>
+            <a:endParaRPr lang="zh-CN" altLang="en-US" dirty="0"/>
+          </a:p>
+        </p:txBody>
+      </p:sp>
+      <p:sp>
+        <p:nvSpPr>
+          <p:cNvPr id="4" name="灯片编号占位符 3">
+            <a:extLst>
+              <a:ext uri="{FF2B5EF4-FFF2-40B4-BE49-F238E27FC236}">
+                <a16:creationId xmlns:a16="http://schemas.microsoft.com/office/drawing/2014/main" id="{D7B78025-965E-3DF8-910E-452F52919D67}"/>
+              </a:ext>
+            </a:extLst>
+          </p:cNvPr>
+          <p:cNvSpPr>
+            <a:spLocks noGrp="1"/>
+          </p:cNvSpPr>
+          <p:nvPr>
+            <p:ph type="sldNum" sz="quarter" idx="5"/>
+          </p:nvPr>
+        </p:nvSpPr>
+        <p:spPr/>
+        <p:txBody>
+          <a:bodyPr/>
+          <a:lstStyle/>
+          <a:p>
+            <a:fld id="{03498E8F-0E88-4000-8EEC-96D622E5BCA8}" type="slidenum">
+              <a:rPr lang="zh-CN" altLang="en-US" smtClean="0"/>
+              <a:t>11</a:t>
+            </a:fld>
+            <a:endParaRPr lang="zh-CN" altLang="en-US"/>
+          </a:p>
+        </p:txBody>
+      </p:sp>
+    </p:spTree>
+    <p:extLst>
+      <p:ext uri="{BB962C8B-B14F-4D97-AF65-F5344CB8AC3E}">
+        <p14:creationId xmlns:p14="http://schemas.microsoft.com/office/powerpoint/2010/main" val="2532790042"/>
+      </p:ext>
+    </p:extLst>
+  </p:cSld>
+  <p:clrMapOvr>
+    <a:masterClrMapping/>
+  </p:clrMapOvr>
+</p:notes>
+</file>
+
+<file path=ppt/notesSlides/notesSlide3.xml><?xml version="1.0" encoding="utf-8"?>
+<p:notes xmlns:a="http://schemas.openxmlformats.org/drawingml/2006/main" xmlns:r="http://schemas.openxmlformats.org/officeDocument/2006/relationships" xmlns:p="http://schemas.openxmlformats.org/presentationml/2006/main">
+  <p:cSld>
+    <p:spTree>
+      <p:nvGrpSpPr>
+        <p:cNvPr id="1" name="">
+          <a:extLst>
+            <a:ext uri="{FF2B5EF4-FFF2-40B4-BE49-F238E27FC236}">
+              <a16:creationId xmlns:a16="http://schemas.microsoft.com/office/drawing/2014/main" id="{1DBA6054-3D95-33A9-6F9D-A0E57CFC7208}"/>
+            </a:ext>
+          </a:extLst>
+        </p:cNvPr>
+        <p:cNvGrpSpPr/>
+        <p:nvPr/>
+      </p:nvGrpSpPr>
+      <p:grpSpPr>
+        <a:xfrm>
+          <a:off x="0" y="0"/>
+          <a:ext cx="0" cy="0"/>
+          <a:chOff x="0" y="0"/>
+          <a:chExt cx="0" cy="0"/>
+        </a:xfrm>
+      </p:grpSpPr>
+      <p:sp>
+        <p:nvSpPr>
+          <p:cNvPr id="2" name="幻灯片图像占位符 1">
+            <a:extLst>
+              <a:ext uri="{FF2B5EF4-FFF2-40B4-BE49-F238E27FC236}">
+                <a16:creationId xmlns:a16="http://schemas.microsoft.com/office/drawing/2014/main" id="{99C9EBF2-56BF-106F-A3DD-E81B03649AEC}"/>
+              </a:ext>
+            </a:extLst>
+          </p:cNvPr>
+          <p:cNvSpPr>
+            <a:spLocks noGrp="1" noRot="1" noChangeAspect="1"/>
+          </p:cNvSpPr>
+          <p:nvPr>
+            <p:ph type="sldImg"/>
+          </p:nvPr>
+        </p:nvSpPr>
+        <p:spPr/>
+      </p:sp>
+      <p:sp>
+        <p:nvSpPr>
+          <p:cNvPr id="3" name="备注占位符 2">
+            <a:extLst>
+              <a:ext uri="{FF2B5EF4-FFF2-40B4-BE49-F238E27FC236}">
+                <a16:creationId xmlns:a16="http://schemas.microsoft.com/office/drawing/2014/main" id="{AD35145B-6B5E-ADCB-370A-B903B869B003}"/>
+              </a:ext>
+            </a:extLst>
+          </p:cNvPr>
+          <p:cNvSpPr>
+            <a:spLocks noGrp="1"/>
+          </p:cNvSpPr>
+          <p:nvPr>
+            <p:ph type="body" idx="1"/>
+          </p:nvPr>
+        </p:nvSpPr>
+        <p:spPr/>
+        <p:txBody>
+          <a:bodyPr/>
+          <a:lstStyle/>
+          <a:p>
+            <a:r>
+              <a:rPr lang="en-US" altLang="zh-CN" dirty="0" err="1"/>
+              <a:t>ToDo</a:t>
+            </a:r>
+            <a:endParaRPr lang="zh-CN" altLang="en-US" dirty="0"/>
+          </a:p>
+        </p:txBody>
+      </p:sp>
+      <p:sp>
+        <p:nvSpPr>
+          <p:cNvPr id="4" name="灯片编号占位符 3">
+            <a:extLst>
+              <a:ext uri="{FF2B5EF4-FFF2-40B4-BE49-F238E27FC236}">
+                <a16:creationId xmlns:a16="http://schemas.microsoft.com/office/drawing/2014/main" id="{0690CC78-620E-E69E-A29A-0BAAD31BEDBC}"/>
+              </a:ext>
+            </a:extLst>
+          </p:cNvPr>
+          <p:cNvSpPr>
+            <a:spLocks noGrp="1"/>
+          </p:cNvSpPr>
+          <p:nvPr>
+            <p:ph type="sldNum" sz="quarter" idx="5"/>
+          </p:nvPr>
+        </p:nvSpPr>
+        <p:spPr/>
+        <p:txBody>
+          <a:bodyPr/>
+          <a:lstStyle/>
+          <a:p>
+            <a:fld id="{03498E8F-0E88-4000-8EEC-96D622E5BCA8}" type="slidenum">
+              <a:rPr lang="zh-CN" altLang="en-US" smtClean="0"/>
+              <a:t>13</a:t>
+            </a:fld>
+            <a:endParaRPr lang="zh-CN" altLang="en-US"/>
+          </a:p>
+        </p:txBody>
+      </p:sp>
+    </p:spTree>
+    <p:extLst>
+      <p:ext uri="{BB962C8B-B14F-4D97-AF65-F5344CB8AC3E}">
+        <p14:creationId xmlns:p14="http://schemas.microsoft.com/office/powerpoint/2010/main" val="3300291206"/>
+      </p:ext>
+    </p:extLst>
+  </p:cSld>
+  <p:clrMapOvr>
+    <a:masterClrMapping/>
+  </p:clrMapOvr>
+</p:notes>
+</file>
+
+<file path=ppt/notesSlides/notesSlide4.xml><?xml version="1.0" encoding="utf-8"?>
+<p:notes xmlns:a="http://schemas.openxmlformats.org/drawingml/2006/main" xmlns:r="http://schemas.openxmlformats.org/officeDocument/2006/relationships" xmlns:p="http://schemas.openxmlformats.org/presentationml/2006/main">
+  <p:cSld>
+    <p:spTree>
+      <p:nvGrpSpPr>
         <p:cNvPr id="1" name=""/>
         <p:cNvGrpSpPr/>
         <p:nvPr/>
@@ -660,7 +887,7 @@
           <a:p>
             <a:fld id="{03498E8F-0E88-4000-8EEC-96D622E5BCA8}" type="slidenum">
               <a:rPr lang="zh-CN" altLang="en-US" smtClean="0"/>
-              <a:t>11</a:t>
+              <a:t>14</a:t>
             </a:fld>
             <a:endParaRPr lang="zh-CN" altLang="en-US"/>
           </a:p>
@@ -826,7 +1053,7 @@
           <a:p>
             <a:fld id="{91418217-8E16-49AE-98DB-91CE6F89811F}" type="datetimeFigureOut">
               <a:rPr lang="zh-CN" altLang="en-US" smtClean="0"/>
-              <a:t>2026/7/9</a:t>
+              <a:t>2026/7/10</a:t>
             </a:fld>
             <a:endParaRPr lang="zh-CN" altLang="en-US"/>
           </a:p>
@@ -1024,7 +1251,7 @@
           <a:p>
             <a:fld id="{91418217-8E16-49AE-98DB-91CE6F89811F}" type="datetimeFigureOut">
               <a:rPr lang="zh-CN" altLang="en-US" smtClean="0"/>
-              <a:t>2026/7/9</a:t>
+              <a:t>2026/7/10</a:t>
             </a:fld>
             <a:endParaRPr lang="zh-CN" altLang="en-US"/>
           </a:p>
@@ -1232,7 +1459,7 @@
           <a:p>
             <a:fld id="{91418217-8E16-49AE-98DB-91CE6F89811F}" type="datetimeFigureOut">
               <a:rPr lang="zh-CN" altLang="en-US" smtClean="0"/>
-              <a:t>2026/7/9</a:t>
+              <a:t>2026/7/10</a:t>
             </a:fld>
             <a:endParaRPr lang="zh-CN" altLang="en-US"/>
           </a:p>
@@ -1430,7 +1657,7 @@
           <a:p>
             <a:fld id="{91418217-8E16-49AE-98DB-91CE6F89811F}" type="datetimeFigureOut">
               <a:rPr lang="zh-CN" altLang="en-US" smtClean="0"/>
-              <a:t>2026/7/9</a:t>
+              <a:t>2026/7/10</a:t>
             </a:fld>
             <a:endParaRPr lang="zh-CN" altLang="en-US"/>
           </a:p>
@@ -1705,7 +1932,7 @@
           <a:p>
             <a:fld id="{91418217-8E16-49AE-98DB-91CE6F89811F}" type="datetimeFigureOut">
               <a:rPr lang="zh-CN" altLang="en-US" smtClean="0"/>
-              <a:t>2026/7/9</a:t>
+              <a:t>2026/7/10</a:t>
             </a:fld>
             <a:endParaRPr lang="zh-CN" altLang="en-US"/>
           </a:p>
@@ -1970,7 +2197,7 @@
           <a:p>
             <a:fld id="{91418217-8E16-49AE-98DB-91CE6F89811F}" type="datetimeFigureOut">
               <a:rPr lang="zh-CN" altLang="en-US" smtClean="0"/>
-              <a:t>2026/7/9</a:t>
+              <a:t>2026/7/10</a:t>
             </a:fld>
             <a:endParaRPr lang="zh-CN" altLang="en-US"/>
           </a:p>
@@ -2382,7 +2609,7 @@
           <a:p>
             <a:fld id="{91418217-8E16-49AE-98DB-91CE6F89811F}" type="datetimeFigureOut">
               <a:rPr lang="zh-CN" altLang="en-US" smtClean="0"/>
-              <a:t>2026/7/9</a:t>
+              <a:t>2026/7/10</a:t>
             </a:fld>
             <a:endParaRPr lang="zh-CN" altLang="en-US"/>
           </a:p>
@@ -2523,7 +2750,7 @@
           <a:p>
             <a:fld id="{91418217-8E16-49AE-98DB-91CE6F89811F}" type="datetimeFigureOut">
               <a:rPr lang="zh-CN" altLang="en-US" smtClean="0"/>
-              <a:t>2026/7/9</a:t>
+              <a:t>2026/7/10</a:t>
             </a:fld>
             <a:endParaRPr lang="zh-CN" altLang="en-US"/>
           </a:p>
@@ -2636,7 +2863,7 @@
           <a:p>
             <a:fld id="{91418217-8E16-49AE-98DB-91CE6F89811F}" type="datetimeFigureOut">
               <a:rPr lang="zh-CN" altLang="en-US" smtClean="0"/>
-              <a:t>2026/7/9</a:t>
+              <a:t>2026/7/10</a:t>
             </a:fld>
             <a:endParaRPr lang="zh-CN" altLang="en-US"/>
           </a:p>
@@ -2947,7 +3174,7 @@
           <a:p>
             <a:fld id="{91418217-8E16-49AE-98DB-91CE6F89811F}" type="datetimeFigureOut">
               <a:rPr lang="zh-CN" altLang="en-US" smtClean="0"/>
-              <a:t>2026/7/9</a:t>
+              <a:t>2026/7/10</a:t>
             </a:fld>
             <a:endParaRPr lang="zh-CN" altLang="en-US"/>
           </a:p>
@@ -3235,7 +3462,7 @@
           <a:p>
             <a:fld id="{91418217-8E16-49AE-98DB-91CE6F89811F}" type="datetimeFigureOut">
               <a:rPr lang="zh-CN" altLang="en-US" smtClean="0"/>
-              <a:t>2026/7/9</a:t>
+              <a:t>2026/7/10</a:t>
             </a:fld>
             <a:endParaRPr lang="zh-CN" altLang="en-US"/>
           </a:p>
@@ -3476,7 +3703,7 @@
           <a:p>
             <a:fld id="{91418217-8E16-49AE-98DB-91CE6F89811F}" type="datetimeFigureOut">
               <a:rPr lang="zh-CN" altLang="en-US" smtClean="0"/>
-              <a:t>2026/7/9</a:t>
+              <a:t>2026/7/10</a:t>
             </a:fld>
             <a:endParaRPr lang="zh-CN" altLang="en-US"/>
           </a:p>
@@ -4265,6 +4492,950 @@
         <p:cNvPr id="1" name="">
           <a:extLst>
             <a:ext uri="{FF2B5EF4-FFF2-40B4-BE49-F238E27FC236}">
+              <a16:creationId xmlns:a16="http://schemas.microsoft.com/office/drawing/2014/main" id="{BC6CB686-6F39-1387-CF62-F5196FA06B10}"/>
+            </a:ext>
+          </a:extLst>
+        </p:cNvPr>
+        <p:cNvGrpSpPr/>
+        <p:nvPr/>
+      </p:nvGrpSpPr>
+      <p:grpSpPr>
+        <a:xfrm>
+          <a:off x="0" y="0"/>
+          <a:ext cx="0" cy="0"/>
+          <a:chOff x="0" y="0"/>
+          <a:chExt cx="0" cy="0"/>
+        </a:xfrm>
+      </p:grpSpPr>
+      <p:sp>
+        <p:nvSpPr>
+          <p:cNvPr id="2" name="标题 1">
+            <a:extLst>
+              <a:ext uri="{FF2B5EF4-FFF2-40B4-BE49-F238E27FC236}">
+                <a16:creationId xmlns:a16="http://schemas.microsoft.com/office/drawing/2014/main" id="{C64A497A-2890-7B15-B23B-49F33ACD26A0}"/>
+              </a:ext>
+            </a:extLst>
+          </p:cNvPr>
+          <p:cNvSpPr>
+            <a:spLocks noGrp="1"/>
+          </p:cNvSpPr>
+          <p:nvPr>
+            <p:ph type="title"/>
+          </p:nvPr>
+        </p:nvSpPr>
+        <p:spPr/>
+        <p:txBody>
+          <a:bodyPr/>
+          <a:lstStyle/>
+          <a:p>
+            <a:r>
+              <a:rPr lang="zh-CN" altLang="zh-CN" dirty="0">
+                <a:latin typeface="Times New Roman" panose="02020603050405020304" pitchFamily="18" charset="0"/>
+                <a:cs typeface="Times New Roman" panose="02020603050405020304" pitchFamily="18" charset="0"/>
+              </a:rPr>
+              <a:t>backend.api.server</a:t>
+            </a:r>
+            <a:r>
+              <a:rPr lang="en-US" altLang="zh-CN" dirty="0">
+                <a:latin typeface="Times New Roman" panose="02020603050405020304" pitchFamily="18" charset="0"/>
+                <a:cs typeface="Times New Roman" panose="02020603050405020304" pitchFamily="18" charset="0"/>
+              </a:rPr>
+              <a:t>.</a:t>
+            </a:r>
+            <a:r>
+              <a:rPr lang="en-US" altLang="zh-CN" dirty="0" err="1">
+                <a:latin typeface="Times New Roman" panose="02020603050405020304" pitchFamily="18" charset="0"/>
+                <a:cs typeface="Times New Roman" panose="02020603050405020304" pitchFamily="18" charset="0"/>
+              </a:rPr>
+              <a:t>py</a:t>
+            </a:r>
+            <a:endParaRPr lang="zh-CN" altLang="en-US" dirty="0">
+              <a:latin typeface="Times New Roman" panose="02020603050405020304" pitchFamily="18" charset="0"/>
+              <a:cs typeface="Times New Roman" panose="02020603050405020304" pitchFamily="18" charset="0"/>
+            </a:endParaRPr>
+          </a:p>
+        </p:txBody>
+      </p:sp>
+      <p:sp>
+        <p:nvSpPr>
+          <p:cNvPr id="3" name="内容占位符 2">
+            <a:extLst>
+              <a:ext uri="{FF2B5EF4-FFF2-40B4-BE49-F238E27FC236}">
+                <a16:creationId xmlns:a16="http://schemas.microsoft.com/office/drawing/2014/main" id="{D3BD08C5-9BA2-1B50-27C8-2EE0F93CDD49}"/>
+              </a:ext>
+            </a:extLst>
+          </p:cNvPr>
+          <p:cNvSpPr>
+            <a:spLocks noGrp="1"/>
+          </p:cNvSpPr>
+          <p:nvPr>
+            <p:ph idx="1"/>
+          </p:nvPr>
+        </p:nvSpPr>
+        <p:spPr/>
+        <p:txBody>
+          <a:bodyPr/>
+          <a:lstStyle/>
+          <a:p>
+            <a:r>
+              <a:rPr lang="zh-CN" altLang="en-US" dirty="0">
+                <a:latin typeface="黑体" panose="02010609060101010101" pitchFamily="49" charset="-122"/>
+                <a:ea typeface="黑体" panose="02010609060101010101" pitchFamily="49" charset="-122"/>
+              </a:rPr>
+              <a:t>后端接口</a:t>
+            </a:r>
+            <a:endParaRPr lang="en-US" altLang="zh-CN" dirty="0">
+              <a:latin typeface="黑体" panose="02010609060101010101" pitchFamily="49" charset="-122"/>
+              <a:ea typeface="黑体" panose="02010609060101010101" pitchFamily="49" charset="-122"/>
+            </a:endParaRPr>
+          </a:p>
+          <a:p>
+            <a:pPr lvl="1"/>
+            <a:r>
+              <a:rPr lang="zh-CN" altLang="zh-CN" dirty="0">
+                <a:solidFill>
+                  <a:schemeClr val="accent6">
+                    <a:lumMod val="75000"/>
+                  </a:schemeClr>
+                </a:solidFill>
+                <a:latin typeface="Times New Roman" panose="02020603050405020304" pitchFamily="18" charset="0"/>
+                <a:cs typeface="Times New Roman" panose="02020603050405020304" pitchFamily="18" charset="0"/>
+              </a:rPr>
+              <a:t>"</a:t>
+            </a:r>
+            <a:r>
+              <a:rPr lang="zh-CN" altLang="zh-CN" dirty="0">
+                <a:solidFill>
+                  <a:schemeClr val="accent6">
+                    <a:lumMod val="75000"/>
+                  </a:schemeClr>
+                </a:solidFill>
+                <a:latin typeface="Times New Roman" panose="02020603050405020304" pitchFamily="18" charset="0"/>
+                <a:ea typeface="黑体" panose="02010609060101010101" pitchFamily="49" charset="-122"/>
+                <a:cs typeface="Times New Roman" panose="02020603050405020304" pitchFamily="18" charset="0"/>
+              </a:rPr>
+              <a:t>/api/</a:t>
+            </a:r>
+            <a:r>
+              <a:rPr lang="en-US" altLang="zh-CN" dirty="0">
+                <a:solidFill>
+                  <a:schemeClr val="accent6">
+                    <a:lumMod val="75000"/>
+                  </a:schemeClr>
+                </a:solidFill>
+                <a:latin typeface="Times New Roman" panose="02020603050405020304" pitchFamily="18" charset="0"/>
+                <a:ea typeface="黑体" panose="02010609060101010101" pitchFamily="49" charset="-122"/>
+                <a:cs typeface="Times New Roman" panose="02020603050405020304" pitchFamily="18" charset="0"/>
+              </a:rPr>
+              <a:t>research</a:t>
+            </a:r>
+            <a:r>
+              <a:rPr lang="zh-CN" altLang="zh-CN" dirty="0">
+                <a:solidFill>
+                  <a:schemeClr val="accent6">
+                    <a:lumMod val="75000"/>
+                  </a:schemeClr>
+                </a:solidFill>
+                <a:latin typeface="Times New Roman" panose="02020603050405020304" pitchFamily="18" charset="0"/>
+                <a:cs typeface="Times New Roman" panose="02020603050405020304" pitchFamily="18" charset="0"/>
+              </a:rPr>
+              <a:t>"</a:t>
+            </a:r>
+            <a:endParaRPr lang="en-US" altLang="zh-CN" dirty="0">
+              <a:solidFill>
+                <a:schemeClr val="accent6">
+                  <a:lumMod val="75000"/>
+                </a:schemeClr>
+              </a:solidFill>
+              <a:latin typeface="Times New Roman" panose="02020603050405020304" pitchFamily="18" charset="0"/>
+              <a:ea typeface="黑体" panose="02010609060101010101" pitchFamily="49" charset="-122"/>
+              <a:cs typeface="Times New Roman" panose="02020603050405020304" pitchFamily="18" charset="0"/>
+            </a:endParaRPr>
+          </a:p>
+          <a:p>
+            <a:pPr lvl="2"/>
+            <a:endParaRPr lang="zh-CN" altLang="en-US" dirty="0">
+              <a:latin typeface="Times New Roman" panose="02020603050405020304" pitchFamily="18" charset="0"/>
+              <a:ea typeface="黑体" panose="02010609060101010101" pitchFamily="49" charset="-122"/>
+              <a:cs typeface="Times New Roman" panose="02020603050405020304" pitchFamily="18" charset="0"/>
+            </a:endParaRPr>
+          </a:p>
+        </p:txBody>
+      </p:sp>
+    </p:spTree>
+    <p:extLst>
+      <p:ext uri="{BB962C8B-B14F-4D97-AF65-F5344CB8AC3E}">
+        <p14:creationId xmlns:p14="http://schemas.microsoft.com/office/powerpoint/2010/main" val="934878214"/>
+      </p:ext>
+    </p:extLst>
+  </p:cSld>
+  <p:clrMapOvr>
+    <a:masterClrMapping/>
+  </p:clrMapOvr>
+</p:sld>
+</file>
+
+<file path=ppt/slides/slide12.xml><?xml version="1.0" encoding="utf-8"?>
+<p:sld xmlns:a="http://schemas.openxmlformats.org/drawingml/2006/main" xmlns:r="http://schemas.openxmlformats.org/officeDocument/2006/relationships" xmlns:p="http://schemas.openxmlformats.org/presentationml/2006/main">
+  <p:cSld>
+    <p:spTree>
+      <p:nvGrpSpPr>
+        <p:cNvPr id="1" name=""/>
+        <p:cNvGrpSpPr/>
+        <p:nvPr/>
+      </p:nvGrpSpPr>
+      <p:grpSpPr>
+        <a:xfrm>
+          <a:off x="0" y="0"/>
+          <a:ext cx="0" cy="0"/>
+          <a:chOff x="0" y="0"/>
+          <a:chExt cx="0" cy="0"/>
+        </a:xfrm>
+      </p:grpSpPr>
+      <p:sp>
+        <p:nvSpPr>
+          <p:cNvPr id="6" name="矩形: 圆角 5">
+            <a:extLst>
+              <a:ext uri="{FF2B5EF4-FFF2-40B4-BE49-F238E27FC236}">
+                <a16:creationId xmlns:a16="http://schemas.microsoft.com/office/drawing/2014/main" id="{1EF4B5A0-0E5A-6276-7ECD-522302DFE36C}"/>
+              </a:ext>
+            </a:extLst>
+          </p:cNvPr>
+          <p:cNvSpPr/>
+          <p:nvPr/>
+        </p:nvSpPr>
+        <p:spPr>
+          <a:xfrm>
+            <a:off x="1591357" y="166713"/>
+            <a:ext cx="1273087" cy="257649"/>
+          </a:xfrm>
+          <a:prstGeom prst="roundRect">
+            <a:avLst/>
+          </a:prstGeom>
+        </p:spPr>
+        <p:style>
+          <a:lnRef idx="2">
+            <a:schemeClr val="accent1"/>
+          </a:lnRef>
+          <a:fillRef idx="1">
+            <a:schemeClr val="lt1"/>
+          </a:fillRef>
+          <a:effectRef idx="0">
+            <a:schemeClr val="accent1"/>
+          </a:effectRef>
+          <a:fontRef idx="minor">
+            <a:schemeClr val="dk1"/>
+          </a:fontRef>
+        </p:style>
+        <p:txBody>
+          <a:bodyPr rtlCol="0" anchor="ctr"/>
+          <a:lstStyle/>
+          <a:p>
+            <a:pPr algn="ctr"/>
+            <a:r>
+              <a:rPr lang="zh-CN" altLang="zh-CN" sz="1200" dirty="0">
+                <a:latin typeface="Times New Roman" panose="02020603050405020304" pitchFamily="18" charset="0"/>
+                <a:cs typeface="Times New Roman" panose="02020603050405020304" pitchFamily="18" charset="0"/>
+              </a:rPr>
+              <a:t>execute_research</a:t>
+            </a:r>
+          </a:p>
+        </p:txBody>
+      </p:sp>
+      <p:cxnSp>
+        <p:nvCxnSpPr>
+          <p:cNvPr id="8" name="直接箭头连接符 7">
+            <a:extLst>
+              <a:ext uri="{FF2B5EF4-FFF2-40B4-BE49-F238E27FC236}">
+                <a16:creationId xmlns:a16="http://schemas.microsoft.com/office/drawing/2014/main" id="{8708A6F2-CFC8-6F83-5152-55DECE4EA9F7}"/>
+              </a:ext>
+            </a:extLst>
+          </p:cNvPr>
+          <p:cNvCxnSpPr>
+            <a:cxnSpLocks/>
+          </p:cNvCxnSpPr>
+          <p:nvPr/>
+        </p:nvCxnSpPr>
+        <p:spPr>
+          <a:xfrm>
+            <a:off x="2227900" y="424362"/>
+            <a:ext cx="0" cy="525402"/>
+          </a:xfrm>
+          <a:prstGeom prst="straightConnector1">
+            <a:avLst/>
+          </a:prstGeom>
+          <a:ln>
+            <a:tailEnd type="triangle"/>
+          </a:ln>
+        </p:spPr>
+        <p:style>
+          <a:lnRef idx="2">
+            <a:schemeClr val="accent1"/>
+          </a:lnRef>
+          <a:fillRef idx="0">
+            <a:schemeClr val="accent1"/>
+          </a:fillRef>
+          <a:effectRef idx="1">
+            <a:schemeClr val="accent1"/>
+          </a:effectRef>
+          <a:fontRef idx="minor">
+            <a:schemeClr val="tx1"/>
+          </a:fontRef>
+        </p:style>
+      </p:cxnSp>
+      <p:sp>
+        <p:nvSpPr>
+          <p:cNvPr id="11" name="矩形: 圆角 10">
+            <a:extLst>
+              <a:ext uri="{FF2B5EF4-FFF2-40B4-BE49-F238E27FC236}">
+                <a16:creationId xmlns:a16="http://schemas.microsoft.com/office/drawing/2014/main" id="{3E73FC4D-BA49-7337-74FF-3E8BAFAAB0D0}"/>
+              </a:ext>
+            </a:extLst>
+          </p:cNvPr>
+          <p:cNvSpPr/>
+          <p:nvPr/>
+        </p:nvSpPr>
+        <p:spPr>
+          <a:xfrm>
+            <a:off x="1591357" y="949764"/>
+            <a:ext cx="1273085" cy="257649"/>
+          </a:xfrm>
+          <a:prstGeom prst="roundRect">
+            <a:avLst/>
+          </a:prstGeom>
+        </p:spPr>
+        <p:style>
+          <a:lnRef idx="2">
+            <a:schemeClr val="accent1"/>
+          </a:lnRef>
+          <a:fillRef idx="1">
+            <a:schemeClr val="lt1"/>
+          </a:fillRef>
+          <a:effectRef idx="0">
+            <a:schemeClr val="accent1"/>
+          </a:effectRef>
+          <a:fontRef idx="minor">
+            <a:schemeClr val="dk1"/>
+          </a:fontRef>
+        </p:style>
+        <p:txBody>
+          <a:bodyPr rtlCol="0" anchor="ctr"/>
+          <a:lstStyle/>
+          <a:p>
+            <a:r>
+              <a:rPr lang="zh-CN" altLang="zh-CN" sz="800" dirty="0">
+                <a:latin typeface="Times New Roman" panose="02020603050405020304" pitchFamily="18" charset="0"/>
+                <a:cs typeface="Times New Roman" panose="02020603050405020304" pitchFamily="18" charset="0"/>
+              </a:rPr>
+              <a:t>_graph_run</a:t>
+            </a:r>
+            <a:r>
+              <a:rPr lang="en-US" altLang="zh-CN" sz="800" dirty="0">
+                <a:latin typeface="Times New Roman" panose="02020603050405020304" pitchFamily="18" charset="0"/>
+                <a:cs typeface="Times New Roman" panose="02020603050405020304" pitchFamily="18" charset="0"/>
+              </a:rPr>
+              <a:t>/</a:t>
+            </a:r>
+            <a:r>
+              <a:rPr lang="zh-CN" altLang="zh-CN" sz="800" dirty="0">
+                <a:latin typeface="Times New Roman" panose="02020603050405020304" pitchFamily="18" charset="0"/>
+                <a:cs typeface="Times New Roman" panose="02020603050405020304" pitchFamily="18" charset="0"/>
+              </a:rPr>
+              <a:t>run_research</a:t>
+            </a:r>
+          </a:p>
+        </p:txBody>
+      </p:sp>
+      <p:cxnSp>
+        <p:nvCxnSpPr>
+          <p:cNvPr id="13" name="直接连接符 12">
+            <a:extLst>
+              <a:ext uri="{FF2B5EF4-FFF2-40B4-BE49-F238E27FC236}">
+                <a16:creationId xmlns:a16="http://schemas.microsoft.com/office/drawing/2014/main" id="{D6787EA8-AFD5-F02D-9A73-8281DDD53EC6}"/>
+              </a:ext>
+            </a:extLst>
+          </p:cNvPr>
+          <p:cNvCxnSpPr>
+            <a:stCxn id="11" idx="2"/>
+          </p:cNvCxnSpPr>
+          <p:nvPr/>
+        </p:nvCxnSpPr>
+        <p:spPr>
+          <a:xfrm>
+            <a:off x="2227900" y="1207413"/>
+            <a:ext cx="0" cy="242492"/>
+          </a:xfrm>
+          <a:prstGeom prst="line">
+            <a:avLst/>
+          </a:prstGeom>
+        </p:spPr>
+        <p:style>
+          <a:lnRef idx="2">
+            <a:schemeClr val="accent1"/>
+          </a:lnRef>
+          <a:fillRef idx="0">
+            <a:schemeClr val="accent1"/>
+          </a:fillRef>
+          <a:effectRef idx="1">
+            <a:schemeClr val="accent1"/>
+          </a:effectRef>
+          <a:fontRef idx="minor">
+            <a:schemeClr val="tx1"/>
+          </a:fontRef>
+        </p:style>
+      </p:cxnSp>
+      <p:cxnSp>
+        <p:nvCxnSpPr>
+          <p:cNvPr id="15" name="直接连接符 14">
+            <a:extLst>
+              <a:ext uri="{FF2B5EF4-FFF2-40B4-BE49-F238E27FC236}">
+                <a16:creationId xmlns:a16="http://schemas.microsoft.com/office/drawing/2014/main" id="{DFCB6BA8-6407-639A-FFF6-EF3C06789D14}"/>
+              </a:ext>
+            </a:extLst>
+          </p:cNvPr>
+          <p:cNvCxnSpPr>
+            <a:cxnSpLocks/>
+          </p:cNvCxnSpPr>
+          <p:nvPr/>
+        </p:nvCxnSpPr>
+        <p:spPr>
+          <a:xfrm>
+            <a:off x="702219" y="1449905"/>
+            <a:ext cx="3182718" cy="0"/>
+          </a:xfrm>
+          <a:prstGeom prst="line">
+            <a:avLst/>
+          </a:prstGeom>
+        </p:spPr>
+        <p:style>
+          <a:lnRef idx="2">
+            <a:schemeClr val="accent1"/>
+          </a:lnRef>
+          <a:fillRef idx="0">
+            <a:schemeClr val="accent1"/>
+          </a:fillRef>
+          <a:effectRef idx="1">
+            <a:schemeClr val="accent1"/>
+          </a:effectRef>
+          <a:fontRef idx="minor">
+            <a:schemeClr val="tx1"/>
+          </a:fontRef>
+        </p:style>
+      </p:cxnSp>
+      <p:cxnSp>
+        <p:nvCxnSpPr>
+          <p:cNvPr id="19" name="直接箭头连接符 18">
+            <a:extLst>
+              <a:ext uri="{FF2B5EF4-FFF2-40B4-BE49-F238E27FC236}">
+                <a16:creationId xmlns:a16="http://schemas.microsoft.com/office/drawing/2014/main" id="{1422D711-1B0F-F82E-AC05-7F02DC1ACC12}"/>
+              </a:ext>
+            </a:extLst>
+          </p:cNvPr>
+          <p:cNvCxnSpPr/>
+          <p:nvPr/>
+        </p:nvCxnSpPr>
+        <p:spPr>
+          <a:xfrm>
+            <a:off x="712323" y="1439801"/>
+            <a:ext cx="0" cy="191973"/>
+          </a:xfrm>
+          <a:prstGeom prst="straightConnector1">
+            <a:avLst/>
+          </a:prstGeom>
+          <a:ln>
+            <a:tailEnd type="triangle"/>
+          </a:ln>
+        </p:spPr>
+        <p:style>
+          <a:lnRef idx="2">
+            <a:schemeClr val="accent1"/>
+          </a:lnRef>
+          <a:fillRef idx="0">
+            <a:schemeClr val="accent1"/>
+          </a:fillRef>
+          <a:effectRef idx="1">
+            <a:schemeClr val="accent1"/>
+          </a:effectRef>
+          <a:fontRef idx="minor">
+            <a:schemeClr val="tx1"/>
+          </a:fontRef>
+        </p:style>
+      </p:cxnSp>
+      <p:sp>
+        <p:nvSpPr>
+          <p:cNvPr id="21" name="矩形: 圆角 20">
+            <a:extLst>
+              <a:ext uri="{FF2B5EF4-FFF2-40B4-BE49-F238E27FC236}">
+                <a16:creationId xmlns:a16="http://schemas.microsoft.com/office/drawing/2014/main" id="{C04B8FFB-7B41-F212-6E87-C5A8B7018C2D}"/>
+              </a:ext>
+            </a:extLst>
+          </p:cNvPr>
+          <p:cNvSpPr/>
+          <p:nvPr/>
+        </p:nvSpPr>
+        <p:spPr>
+          <a:xfrm>
+            <a:off x="75779" y="1641878"/>
+            <a:ext cx="1273087" cy="257649"/>
+          </a:xfrm>
+          <a:prstGeom prst="roundRect">
+            <a:avLst/>
+          </a:prstGeom>
+        </p:spPr>
+        <p:style>
+          <a:lnRef idx="2">
+            <a:schemeClr val="accent1"/>
+          </a:lnRef>
+          <a:fillRef idx="1">
+            <a:schemeClr val="lt1"/>
+          </a:fillRef>
+          <a:effectRef idx="0">
+            <a:schemeClr val="accent1"/>
+          </a:effectRef>
+          <a:fontRef idx="minor">
+            <a:schemeClr val="dk1"/>
+          </a:fontRef>
+        </p:style>
+        <p:txBody>
+          <a:bodyPr rtlCol="0" anchor="ctr"/>
+          <a:lstStyle/>
+          <a:p>
+            <a:pPr algn="ctr"/>
+            <a:r>
+              <a:rPr lang="en-US" altLang="zh-CN" sz="1200" dirty="0" err="1">
+                <a:latin typeface="Times New Roman" panose="02020603050405020304" pitchFamily="18" charset="0"/>
+                <a:cs typeface="Times New Roman" panose="02020603050405020304" pitchFamily="18" charset="0"/>
+              </a:rPr>
+              <a:t>tid</a:t>
+            </a:r>
+            <a:r>
+              <a:rPr lang="en-US" altLang="zh-CN" sz="1200" dirty="0">
+                <a:latin typeface="Times New Roman" panose="02020603050405020304" pitchFamily="18" charset="0"/>
+                <a:cs typeface="Times New Roman" panose="02020603050405020304" pitchFamily="18" charset="0"/>
+              </a:rPr>
+              <a:t>(str)</a:t>
+            </a:r>
+            <a:endParaRPr lang="zh-CN" altLang="zh-CN" sz="1200" dirty="0">
+              <a:latin typeface="Times New Roman" panose="02020603050405020304" pitchFamily="18" charset="0"/>
+              <a:cs typeface="Times New Roman" panose="02020603050405020304" pitchFamily="18" charset="0"/>
+            </a:endParaRPr>
+          </a:p>
+        </p:txBody>
+      </p:sp>
+      <p:sp>
+        <p:nvSpPr>
+          <p:cNvPr id="23" name="矩形: 圆角 22">
+            <a:extLst>
+              <a:ext uri="{FF2B5EF4-FFF2-40B4-BE49-F238E27FC236}">
+                <a16:creationId xmlns:a16="http://schemas.microsoft.com/office/drawing/2014/main" id="{B19E3993-E39E-0334-53D6-F937DDF88701}"/>
+              </a:ext>
+            </a:extLst>
+          </p:cNvPr>
+          <p:cNvSpPr/>
+          <p:nvPr/>
+        </p:nvSpPr>
+        <p:spPr>
+          <a:xfrm>
+            <a:off x="1591355" y="1641878"/>
+            <a:ext cx="1273087" cy="257649"/>
+          </a:xfrm>
+          <a:prstGeom prst="roundRect">
+            <a:avLst/>
+          </a:prstGeom>
+        </p:spPr>
+        <p:style>
+          <a:lnRef idx="2">
+            <a:schemeClr val="accent1"/>
+          </a:lnRef>
+          <a:fillRef idx="1">
+            <a:schemeClr val="lt1"/>
+          </a:fillRef>
+          <a:effectRef idx="0">
+            <a:schemeClr val="accent1"/>
+          </a:effectRef>
+          <a:fontRef idx="minor">
+            <a:schemeClr val="dk1"/>
+          </a:fontRef>
+        </p:style>
+        <p:txBody>
+          <a:bodyPr rtlCol="0" anchor="ctr"/>
+          <a:lstStyle/>
+          <a:p>
+            <a:r>
+              <a:rPr lang="en-US" altLang="zh-CN" sz="1200">
+                <a:latin typeface="Times New Roman" panose="02020603050405020304" pitchFamily="18" charset="0"/>
+                <a:cs typeface="Times New Roman" panose="02020603050405020304" pitchFamily="18" charset="0"/>
+              </a:rPr>
+              <a:t>    </a:t>
+            </a:r>
+            <a:r>
+              <a:rPr lang="zh-CN" altLang="zh-CN" sz="1200">
+                <a:latin typeface="Times New Roman" panose="02020603050405020304" pitchFamily="18" charset="0"/>
+                <a:cs typeface="Times New Roman" panose="02020603050405020304" pitchFamily="18" charset="0"/>
+              </a:rPr>
+              <a:t>initial</a:t>
+            </a:r>
+            <a:r>
+              <a:rPr lang="zh-CN" altLang="zh-CN" sz="1200" dirty="0">
+                <a:latin typeface="Times New Roman" panose="02020603050405020304" pitchFamily="18" charset="0"/>
+                <a:cs typeface="Times New Roman" panose="02020603050405020304" pitchFamily="18" charset="0"/>
+              </a:rPr>
+              <a:t>_state</a:t>
+            </a:r>
+          </a:p>
+        </p:txBody>
+      </p:sp>
+      <p:cxnSp>
+        <p:nvCxnSpPr>
+          <p:cNvPr id="25" name="直接箭头连接符 24">
+            <a:extLst>
+              <a:ext uri="{FF2B5EF4-FFF2-40B4-BE49-F238E27FC236}">
+                <a16:creationId xmlns:a16="http://schemas.microsoft.com/office/drawing/2014/main" id="{A834767E-E8C5-2A53-8230-40E6949B27D9}"/>
+              </a:ext>
+            </a:extLst>
+          </p:cNvPr>
+          <p:cNvCxnSpPr>
+            <a:cxnSpLocks/>
+          </p:cNvCxnSpPr>
+          <p:nvPr/>
+        </p:nvCxnSpPr>
+        <p:spPr>
+          <a:xfrm>
+            <a:off x="2227899" y="1449905"/>
+            <a:ext cx="0" cy="191973"/>
+          </a:xfrm>
+          <a:prstGeom prst="straightConnector1">
+            <a:avLst/>
+          </a:prstGeom>
+          <a:ln>
+            <a:tailEnd type="triangle"/>
+          </a:ln>
+        </p:spPr>
+        <p:style>
+          <a:lnRef idx="2">
+            <a:schemeClr val="accent1"/>
+          </a:lnRef>
+          <a:fillRef idx="0">
+            <a:schemeClr val="accent1"/>
+          </a:fillRef>
+          <a:effectRef idx="1">
+            <a:schemeClr val="accent1"/>
+          </a:effectRef>
+          <a:fontRef idx="minor">
+            <a:schemeClr val="tx1"/>
+          </a:fontRef>
+        </p:style>
+      </p:cxnSp>
+    </p:spTree>
+    <p:extLst>
+      <p:ext uri="{BB962C8B-B14F-4D97-AF65-F5344CB8AC3E}">
+        <p14:creationId xmlns:p14="http://schemas.microsoft.com/office/powerpoint/2010/main" val="1427432766"/>
+      </p:ext>
+    </p:extLst>
+  </p:cSld>
+  <p:clrMapOvr>
+    <a:masterClrMapping/>
+  </p:clrMapOvr>
+</p:sld>
+</file>
+
+<file path=ppt/slides/slide13.xml><?xml version="1.0" encoding="utf-8"?>
+<p:sld xmlns:a="http://schemas.openxmlformats.org/drawingml/2006/main" xmlns:r="http://schemas.openxmlformats.org/officeDocument/2006/relationships" xmlns:p="http://schemas.openxmlformats.org/presentationml/2006/main">
+  <p:cSld>
+    <p:spTree>
+      <p:nvGrpSpPr>
+        <p:cNvPr id="1" name="">
+          <a:extLst>
+            <a:ext uri="{FF2B5EF4-FFF2-40B4-BE49-F238E27FC236}">
+              <a16:creationId xmlns:a16="http://schemas.microsoft.com/office/drawing/2014/main" id="{69F6EA63-E602-EF7A-0164-385D46A5EB8B}"/>
+            </a:ext>
+          </a:extLst>
+        </p:cNvPr>
+        <p:cNvGrpSpPr/>
+        <p:nvPr/>
+      </p:nvGrpSpPr>
+      <p:grpSpPr>
+        <a:xfrm>
+          <a:off x="0" y="0"/>
+          <a:ext cx="0" cy="0"/>
+          <a:chOff x="0" y="0"/>
+          <a:chExt cx="0" cy="0"/>
+        </a:xfrm>
+      </p:grpSpPr>
+      <p:sp>
+        <p:nvSpPr>
+          <p:cNvPr id="2" name="标题 1">
+            <a:extLst>
+              <a:ext uri="{FF2B5EF4-FFF2-40B4-BE49-F238E27FC236}">
+                <a16:creationId xmlns:a16="http://schemas.microsoft.com/office/drawing/2014/main" id="{3B968D58-4269-DB19-3B47-F1F73E4D9B5F}"/>
+              </a:ext>
+            </a:extLst>
+          </p:cNvPr>
+          <p:cNvSpPr>
+            <a:spLocks noGrp="1"/>
+          </p:cNvSpPr>
+          <p:nvPr>
+            <p:ph type="title"/>
+          </p:nvPr>
+        </p:nvSpPr>
+        <p:spPr/>
+        <p:txBody>
+          <a:bodyPr/>
+          <a:lstStyle/>
+          <a:p>
+            <a:r>
+              <a:rPr lang="zh-CN" altLang="zh-CN" dirty="0">
+                <a:latin typeface="Times New Roman" panose="02020603050405020304" pitchFamily="18" charset="0"/>
+                <a:cs typeface="Times New Roman" panose="02020603050405020304" pitchFamily="18" charset="0"/>
+              </a:rPr>
+              <a:t>backend.api.server</a:t>
+            </a:r>
+            <a:r>
+              <a:rPr lang="en-US" altLang="zh-CN" dirty="0">
+                <a:latin typeface="Times New Roman" panose="02020603050405020304" pitchFamily="18" charset="0"/>
+                <a:cs typeface="Times New Roman" panose="02020603050405020304" pitchFamily="18" charset="0"/>
+              </a:rPr>
+              <a:t>.</a:t>
+            </a:r>
+            <a:r>
+              <a:rPr lang="en-US" altLang="zh-CN" dirty="0" err="1">
+                <a:latin typeface="Times New Roman" panose="02020603050405020304" pitchFamily="18" charset="0"/>
+                <a:cs typeface="Times New Roman" panose="02020603050405020304" pitchFamily="18" charset="0"/>
+              </a:rPr>
+              <a:t>py</a:t>
+            </a:r>
+            <a:endParaRPr lang="zh-CN" altLang="en-US" dirty="0">
+              <a:latin typeface="Times New Roman" panose="02020603050405020304" pitchFamily="18" charset="0"/>
+              <a:cs typeface="Times New Roman" panose="02020603050405020304" pitchFamily="18" charset="0"/>
+            </a:endParaRPr>
+          </a:p>
+        </p:txBody>
+      </p:sp>
+      <p:sp>
+        <p:nvSpPr>
+          <p:cNvPr id="3" name="内容占位符 2">
+            <a:extLst>
+              <a:ext uri="{FF2B5EF4-FFF2-40B4-BE49-F238E27FC236}">
+                <a16:creationId xmlns:a16="http://schemas.microsoft.com/office/drawing/2014/main" id="{E9BD0207-87D7-B5BF-0CF5-ADD5C81A28A1}"/>
+              </a:ext>
+            </a:extLst>
+          </p:cNvPr>
+          <p:cNvSpPr>
+            <a:spLocks noGrp="1"/>
+          </p:cNvSpPr>
+          <p:nvPr>
+            <p:ph idx="1"/>
+          </p:nvPr>
+        </p:nvSpPr>
+        <p:spPr/>
+        <p:txBody>
+          <a:bodyPr/>
+          <a:lstStyle/>
+          <a:p>
+            <a:r>
+              <a:rPr lang="zh-CN" altLang="en-US" dirty="0">
+                <a:latin typeface="黑体" panose="02010609060101010101" pitchFamily="49" charset="-122"/>
+                <a:ea typeface="黑体" panose="02010609060101010101" pitchFamily="49" charset="-122"/>
+              </a:rPr>
+              <a:t>后端接口</a:t>
+            </a:r>
+            <a:endParaRPr lang="en-US" altLang="zh-CN" dirty="0">
+              <a:latin typeface="黑体" panose="02010609060101010101" pitchFamily="49" charset="-122"/>
+              <a:ea typeface="黑体" panose="02010609060101010101" pitchFamily="49" charset="-122"/>
+            </a:endParaRPr>
+          </a:p>
+          <a:p>
+            <a:pPr lvl="1"/>
+            <a:r>
+              <a:rPr lang="zh-CN" altLang="zh-CN" dirty="0">
+                <a:solidFill>
+                  <a:schemeClr val="accent6">
+                    <a:lumMod val="75000"/>
+                  </a:schemeClr>
+                </a:solidFill>
+                <a:latin typeface="Times New Roman" panose="02020603050405020304" pitchFamily="18" charset="0"/>
+                <a:cs typeface="Times New Roman" panose="02020603050405020304" pitchFamily="18" charset="0"/>
+              </a:rPr>
+              <a:t>"</a:t>
+            </a:r>
+            <a:r>
+              <a:rPr lang="zh-CN" altLang="zh-CN" dirty="0">
+                <a:solidFill>
+                  <a:schemeClr val="accent6">
+                    <a:lumMod val="75000"/>
+                  </a:schemeClr>
+                </a:solidFill>
+                <a:latin typeface="Times New Roman" panose="02020603050405020304" pitchFamily="18" charset="0"/>
+                <a:ea typeface="黑体" panose="02010609060101010101" pitchFamily="49" charset="-122"/>
+                <a:cs typeface="Times New Roman" panose="02020603050405020304" pitchFamily="18" charset="0"/>
+              </a:rPr>
+              <a:t>/api/</a:t>
+            </a:r>
+            <a:r>
+              <a:rPr lang="en-US" altLang="zh-CN" dirty="0">
+                <a:solidFill>
+                  <a:schemeClr val="accent6">
+                    <a:lumMod val="75000"/>
+                  </a:schemeClr>
+                </a:solidFill>
+                <a:latin typeface="Times New Roman" panose="02020603050405020304" pitchFamily="18" charset="0"/>
+                <a:ea typeface="黑体" panose="02010609060101010101" pitchFamily="49" charset="-122"/>
+                <a:cs typeface="Times New Roman" panose="02020603050405020304" pitchFamily="18" charset="0"/>
+              </a:rPr>
+              <a:t>research</a:t>
+            </a:r>
+            <a:r>
+              <a:rPr lang="zh-CN" altLang="zh-CN" dirty="0">
+                <a:solidFill>
+                  <a:schemeClr val="accent6">
+                    <a:lumMod val="75000"/>
+                  </a:schemeClr>
+                </a:solidFill>
+                <a:latin typeface="Times New Roman" panose="02020603050405020304" pitchFamily="18" charset="0"/>
+                <a:cs typeface="Times New Roman" panose="02020603050405020304" pitchFamily="18" charset="0"/>
+              </a:rPr>
+              <a:t>"</a:t>
+            </a:r>
+            <a:endParaRPr lang="en-US" altLang="zh-CN" dirty="0">
+              <a:solidFill>
+                <a:schemeClr val="accent6">
+                  <a:lumMod val="75000"/>
+                </a:schemeClr>
+              </a:solidFill>
+              <a:latin typeface="Times New Roman" panose="02020603050405020304" pitchFamily="18" charset="0"/>
+              <a:ea typeface="黑体" panose="02010609060101010101" pitchFamily="49" charset="-122"/>
+              <a:cs typeface="Times New Roman" panose="02020603050405020304" pitchFamily="18" charset="0"/>
+            </a:endParaRPr>
+          </a:p>
+          <a:p>
+            <a:pPr lvl="2"/>
+            <a:r>
+              <a:rPr lang="en-US" altLang="zh-CN" dirty="0" err="1">
+                <a:solidFill>
+                  <a:schemeClr val="accent6">
+                    <a:lumMod val="75000"/>
+                  </a:schemeClr>
+                </a:solidFill>
+                <a:latin typeface="Times New Roman" panose="02020603050405020304" pitchFamily="18" charset="0"/>
+                <a:ea typeface="黑体" panose="02010609060101010101" pitchFamily="49" charset="-122"/>
+                <a:cs typeface="Times New Roman" panose="02020603050405020304" pitchFamily="18" charset="0"/>
+              </a:rPr>
+              <a:t>event_stream</a:t>
+            </a:r>
+            <a:r>
+              <a:rPr lang="en-US" altLang="zh-CN" dirty="0">
+                <a:solidFill>
+                  <a:schemeClr val="accent6">
+                    <a:lumMod val="75000"/>
+                  </a:schemeClr>
+                </a:solidFill>
+                <a:latin typeface="Times New Roman" panose="02020603050405020304" pitchFamily="18" charset="0"/>
+                <a:ea typeface="黑体" panose="02010609060101010101" pitchFamily="49" charset="-122"/>
+                <a:cs typeface="Times New Roman" panose="02020603050405020304" pitchFamily="18" charset="0"/>
+              </a:rPr>
+              <a:t>()</a:t>
+            </a:r>
+            <a:endParaRPr lang="zh-CN" altLang="zh-CN" dirty="0">
+              <a:solidFill>
+                <a:schemeClr val="accent6">
+                  <a:lumMod val="75000"/>
+                </a:schemeClr>
+              </a:solidFill>
+              <a:latin typeface="Times New Roman" panose="02020603050405020304" pitchFamily="18" charset="0"/>
+              <a:ea typeface="黑体" panose="02010609060101010101" pitchFamily="49" charset="-122"/>
+              <a:cs typeface="Times New Roman" panose="02020603050405020304" pitchFamily="18" charset="0"/>
+            </a:endParaRPr>
+          </a:p>
+          <a:p>
+            <a:pPr lvl="1"/>
+            <a:endParaRPr lang="zh-CN" altLang="en-US" dirty="0">
+              <a:latin typeface="黑体" panose="02010609060101010101" pitchFamily="49" charset="-122"/>
+              <a:ea typeface="黑体" panose="02010609060101010101" pitchFamily="49" charset="-122"/>
+            </a:endParaRPr>
+          </a:p>
+        </p:txBody>
+      </p:sp>
+      <p:pic>
+        <p:nvPicPr>
+          <p:cNvPr id="5" name="图片 4">
+            <a:extLst>
+              <a:ext uri="{FF2B5EF4-FFF2-40B4-BE49-F238E27FC236}">
+                <a16:creationId xmlns:a16="http://schemas.microsoft.com/office/drawing/2014/main" id="{0598E31A-14A2-8C67-4E3C-55E2049ECAEB}"/>
+              </a:ext>
+            </a:extLst>
+          </p:cNvPr>
+          <p:cNvPicPr>
+            <a:picLocks noChangeAspect="1"/>
+          </p:cNvPicPr>
+          <p:nvPr/>
+        </p:nvPicPr>
+        <p:blipFill>
+          <a:blip r:embed="rId3"/>
+          <a:stretch>
+            <a:fillRect/>
+          </a:stretch>
+        </p:blipFill>
+        <p:spPr>
+          <a:xfrm>
+            <a:off x="838200" y="3273312"/>
+            <a:ext cx="3892750" cy="1016052"/>
+          </a:xfrm>
+          <a:prstGeom prst="rect">
+            <a:avLst/>
+          </a:prstGeom>
+        </p:spPr>
+      </p:pic>
+      <p:pic>
+        <p:nvPicPr>
+          <p:cNvPr id="7" name="图片 6">
+            <a:extLst>
+              <a:ext uri="{FF2B5EF4-FFF2-40B4-BE49-F238E27FC236}">
+                <a16:creationId xmlns:a16="http://schemas.microsoft.com/office/drawing/2014/main" id="{2636C9C9-720C-A1EF-AB88-E387F3972596}"/>
+              </a:ext>
+            </a:extLst>
+          </p:cNvPr>
+          <p:cNvPicPr>
+            <a:picLocks noChangeAspect="1"/>
+          </p:cNvPicPr>
+          <p:nvPr/>
+        </p:nvPicPr>
+        <p:blipFill>
+          <a:blip r:embed="rId4"/>
+          <a:stretch>
+            <a:fillRect/>
+          </a:stretch>
+        </p:blipFill>
+        <p:spPr>
+          <a:xfrm>
+            <a:off x="838200" y="4717623"/>
+            <a:ext cx="5372376" cy="711237"/>
+          </a:xfrm>
+          <a:prstGeom prst="rect">
+            <a:avLst/>
+          </a:prstGeom>
+        </p:spPr>
+      </p:pic>
+    </p:spTree>
+    <p:extLst>
+      <p:ext uri="{BB962C8B-B14F-4D97-AF65-F5344CB8AC3E}">
+        <p14:creationId xmlns:p14="http://schemas.microsoft.com/office/powerpoint/2010/main" val="2152931203"/>
+      </p:ext>
+    </p:extLst>
+  </p:cSld>
+  <p:clrMapOvr>
+    <a:masterClrMapping/>
+  </p:clrMapOvr>
+</p:sld>
+</file>
+
+<file path=ppt/slides/slide14.xml><?xml version="1.0" encoding="utf-8"?>
+<p:sld xmlns:a="http://schemas.openxmlformats.org/drawingml/2006/main" xmlns:r="http://schemas.openxmlformats.org/officeDocument/2006/relationships" xmlns:p="http://schemas.openxmlformats.org/presentationml/2006/main">
+  <p:cSld>
+    <p:spTree>
+      <p:nvGrpSpPr>
+        <p:cNvPr id="1" name="">
+          <a:extLst>
+            <a:ext uri="{FF2B5EF4-FFF2-40B4-BE49-F238E27FC236}">
               <a16:creationId xmlns:a16="http://schemas.microsoft.com/office/drawing/2014/main" id="{FBA4A1CF-9C26-9BF9-2214-F714252BDFF9}"/>
             </a:ext>
           </a:extLst>
@@ -4399,7 +5570,7 @@
 </p:sld>
 </file>
 
-<file path=ppt/slides/slide12.xml><?xml version="1.0" encoding="utf-8"?>
+<file path=ppt/slides/slide15.xml><?xml version="1.0" encoding="utf-8"?>
 <p:sld xmlns:a="http://schemas.openxmlformats.org/drawingml/2006/main" xmlns:r="http://schemas.openxmlformats.org/officeDocument/2006/relationships" xmlns:p="http://schemas.openxmlformats.org/presentationml/2006/main">
   <p:cSld>
     <p:spTree>
@@ -4544,7 +5715,7 @@
 </p:sld>
 </file>
 
-<file path=ppt/slides/slide13.xml><?xml version="1.0" encoding="utf-8"?>
+<file path=ppt/slides/slide16.xml><?xml version="1.0" encoding="utf-8"?>
 <p:sld xmlns:a="http://schemas.openxmlformats.org/drawingml/2006/main" xmlns:r="http://schemas.openxmlformats.org/officeDocument/2006/relationships" xmlns:p="http://schemas.openxmlformats.org/presentationml/2006/main">
   <p:cSld>
     <p:spTree>
@@ -4714,7 +5885,7 @@
 </p:sld>
 </file>
 
-<file path=ppt/slides/slide14.xml><?xml version="1.0" encoding="utf-8"?>
+<file path=ppt/slides/slide17.xml><?xml version="1.0" encoding="utf-8"?>
 <p:sld xmlns:a="http://schemas.openxmlformats.org/drawingml/2006/main" xmlns:r="http://schemas.openxmlformats.org/officeDocument/2006/relationships" xmlns:p="http://schemas.openxmlformats.org/presentationml/2006/main">
   <p:cSld>
     <p:spTree>
@@ -4877,7 +6048,7 @@
 </p:sld>
 </file>
 
-<file path=ppt/slides/slide15.xml><?xml version="1.0" encoding="utf-8"?>
+<file path=ppt/slides/slide18.xml><?xml version="1.0" encoding="utf-8"?>
 <p:sld xmlns:a="http://schemas.openxmlformats.org/drawingml/2006/main" xmlns:r="http://schemas.openxmlformats.org/officeDocument/2006/relationships" xmlns:p="http://schemas.openxmlformats.org/presentationml/2006/main">
   <p:cSld>
     <p:spTree>
@@ -5040,7 +6211,7 @@
 </p:sld>
 </file>
 
-<file path=ppt/slides/slide16.xml><?xml version="1.0" encoding="utf-8"?>
+<file path=ppt/slides/slide19.xml><?xml version="1.0" encoding="utf-8"?>
 <p:sld xmlns:a="http://schemas.openxmlformats.org/drawingml/2006/main" xmlns:r="http://schemas.openxmlformats.org/officeDocument/2006/relationships" xmlns:p="http://schemas.openxmlformats.org/presentationml/2006/main">
   <p:cSld>
     <p:spTree>
@@ -5225,536 +6396,6 @@
     <p:extLst>
       <p:ext uri="{BB962C8B-B14F-4D97-AF65-F5344CB8AC3E}">
         <p14:creationId xmlns:p14="http://schemas.microsoft.com/office/powerpoint/2010/main" val="30248799"/>
-      </p:ext>
-    </p:extLst>
-  </p:cSld>
-  <p:clrMapOvr>
-    <a:masterClrMapping/>
-  </p:clrMapOvr>
-</p:sld>
-</file>
-
-<file path=ppt/slides/slide17.xml><?xml version="1.0" encoding="utf-8"?>
-<p:sld xmlns:a="http://schemas.openxmlformats.org/drawingml/2006/main" xmlns:r="http://schemas.openxmlformats.org/officeDocument/2006/relationships" xmlns:p="http://schemas.openxmlformats.org/presentationml/2006/main">
-  <p:cSld>
-    <p:spTree>
-      <p:nvGrpSpPr>
-        <p:cNvPr id="1" name="">
-          <a:extLst>
-            <a:ext uri="{FF2B5EF4-FFF2-40B4-BE49-F238E27FC236}">
-              <a16:creationId xmlns:a16="http://schemas.microsoft.com/office/drawing/2014/main" id="{A54C4B85-D55B-6E9D-431B-2AF5422F5C78}"/>
-            </a:ext>
-          </a:extLst>
-        </p:cNvPr>
-        <p:cNvGrpSpPr/>
-        <p:nvPr/>
-      </p:nvGrpSpPr>
-      <p:grpSpPr>
-        <a:xfrm>
-          <a:off x="0" y="0"/>
-          <a:ext cx="0" cy="0"/>
-          <a:chOff x="0" y="0"/>
-          <a:chExt cx="0" cy="0"/>
-        </a:xfrm>
-      </p:grpSpPr>
-      <p:sp>
-        <p:nvSpPr>
-          <p:cNvPr id="2" name="标题 1">
-            <a:extLst>
-              <a:ext uri="{FF2B5EF4-FFF2-40B4-BE49-F238E27FC236}">
-                <a16:creationId xmlns:a16="http://schemas.microsoft.com/office/drawing/2014/main" id="{AE71DA56-CF90-19F9-CFFD-C3A5B506EAEB}"/>
-              </a:ext>
-            </a:extLst>
-          </p:cNvPr>
-          <p:cNvSpPr>
-            <a:spLocks noGrp="1"/>
-          </p:cNvSpPr>
-          <p:nvPr>
-            <p:ph type="title"/>
-          </p:nvPr>
-        </p:nvSpPr>
-        <p:spPr/>
-        <p:txBody>
-          <a:bodyPr/>
-          <a:lstStyle/>
-          <a:p>
-            <a:r>
-              <a:rPr lang="zh-CN" altLang="zh-CN" dirty="0">
-                <a:latin typeface="Times New Roman" panose="02020603050405020304" pitchFamily="18" charset="0"/>
-                <a:cs typeface="Times New Roman" panose="02020603050405020304" pitchFamily="18" charset="0"/>
-              </a:rPr>
-              <a:t>backend.api.server</a:t>
-            </a:r>
-            <a:r>
-              <a:rPr lang="en-US" altLang="zh-CN" dirty="0">
-                <a:latin typeface="Times New Roman" panose="02020603050405020304" pitchFamily="18" charset="0"/>
-                <a:cs typeface="Times New Roman" panose="02020603050405020304" pitchFamily="18" charset="0"/>
-              </a:rPr>
-              <a:t>.</a:t>
-            </a:r>
-            <a:r>
-              <a:rPr lang="en-US" altLang="zh-CN" dirty="0" err="1">
-                <a:latin typeface="Times New Roman" panose="02020603050405020304" pitchFamily="18" charset="0"/>
-                <a:cs typeface="Times New Roman" panose="02020603050405020304" pitchFamily="18" charset="0"/>
-              </a:rPr>
-              <a:t>py</a:t>
-            </a:r>
-            <a:endParaRPr lang="zh-CN" altLang="en-US" dirty="0">
-              <a:latin typeface="Times New Roman" panose="02020603050405020304" pitchFamily="18" charset="0"/>
-              <a:cs typeface="Times New Roman" panose="02020603050405020304" pitchFamily="18" charset="0"/>
-            </a:endParaRPr>
-          </a:p>
-        </p:txBody>
-      </p:sp>
-      <p:sp>
-        <p:nvSpPr>
-          <p:cNvPr id="3" name="内容占位符 2">
-            <a:extLst>
-              <a:ext uri="{FF2B5EF4-FFF2-40B4-BE49-F238E27FC236}">
-                <a16:creationId xmlns:a16="http://schemas.microsoft.com/office/drawing/2014/main" id="{896AE129-E713-5C11-E02B-52FBC78ED2AF}"/>
-              </a:ext>
-            </a:extLst>
-          </p:cNvPr>
-          <p:cNvSpPr>
-            <a:spLocks noGrp="1"/>
-          </p:cNvSpPr>
-          <p:nvPr>
-            <p:ph idx="1"/>
-          </p:nvPr>
-        </p:nvSpPr>
-        <p:spPr/>
-        <p:txBody>
-          <a:bodyPr/>
-          <a:lstStyle/>
-          <a:p>
-            <a:r>
-              <a:rPr lang="zh-CN" altLang="en-US" dirty="0">
-                <a:latin typeface="黑体" panose="02010609060101010101" pitchFamily="49" charset="-122"/>
-                <a:ea typeface="黑体" panose="02010609060101010101" pitchFamily="49" charset="-122"/>
-              </a:rPr>
-              <a:t>后端接口</a:t>
-            </a:r>
-            <a:endParaRPr lang="en-US" altLang="zh-CN" dirty="0">
-              <a:latin typeface="黑体" panose="02010609060101010101" pitchFamily="49" charset="-122"/>
-              <a:ea typeface="黑体" panose="02010609060101010101" pitchFamily="49" charset="-122"/>
-            </a:endParaRPr>
-          </a:p>
-          <a:p>
-            <a:pPr lvl="1"/>
-            <a:r>
-              <a:rPr lang="zh-CN" altLang="zh-CN" dirty="0">
-                <a:solidFill>
-                  <a:schemeClr val="accent6">
-                    <a:lumMod val="75000"/>
-                  </a:schemeClr>
-                </a:solidFill>
-                <a:latin typeface="Times New Roman" panose="02020603050405020304" pitchFamily="18" charset="0"/>
-                <a:cs typeface="Times New Roman" panose="02020603050405020304" pitchFamily="18" charset="0"/>
-              </a:rPr>
-              <a:t>“/api/conversations/{conv_id}“</a:t>
-            </a:r>
-            <a:r>
-              <a:rPr lang="en-US" altLang="zh-CN" dirty="0">
-                <a:solidFill>
-                  <a:schemeClr val="accent6">
-                    <a:lumMod val="75000"/>
-                  </a:schemeClr>
-                </a:solidFill>
-                <a:latin typeface="Times New Roman" panose="02020603050405020304" pitchFamily="18" charset="0"/>
-                <a:cs typeface="Times New Roman" panose="02020603050405020304" pitchFamily="18" charset="0"/>
-              </a:rPr>
-              <a:t>(delete)</a:t>
-            </a:r>
-          </a:p>
-          <a:p>
-            <a:pPr lvl="2"/>
-            <a:r>
-              <a:rPr lang="zh-CN" altLang="en-US" dirty="0">
-                <a:latin typeface="黑体" panose="02010609060101010101" pitchFamily="49" charset="-122"/>
-                <a:ea typeface="黑体" panose="02010609060101010101" pitchFamily="49" charset="-122"/>
-                <a:cs typeface="Times New Roman" panose="02020603050405020304" pitchFamily="18" charset="0"/>
-              </a:rPr>
-              <a:t>删除整个对话</a:t>
-            </a:r>
-            <a:r>
-              <a:rPr lang="en-US" altLang="zh-CN" dirty="0">
-                <a:latin typeface="黑体" panose="02010609060101010101" pitchFamily="49" charset="-122"/>
-                <a:ea typeface="黑体" panose="02010609060101010101" pitchFamily="49" charset="-122"/>
-                <a:cs typeface="Times New Roman" panose="02020603050405020304" pitchFamily="18" charset="0"/>
-              </a:rPr>
-              <a:t>(</a:t>
-            </a:r>
-            <a:r>
-              <a:rPr lang="zh-CN" altLang="en-US" dirty="0">
-                <a:latin typeface="黑体" panose="02010609060101010101" pitchFamily="49" charset="-122"/>
-                <a:ea typeface="黑体" panose="02010609060101010101" pitchFamily="49" charset="-122"/>
-                <a:cs typeface="Times New Roman" panose="02020603050405020304" pitchFamily="18" charset="0"/>
-              </a:rPr>
-              <a:t>删除对话及其关联的表</a:t>
-            </a:r>
-            <a:r>
-              <a:rPr lang="en-US" altLang="zh-CN" dirty="0">
-                <a:latin typeface="黑体" panose="02010609060101010101" pitchFamily="49" charset="-122"/>
-                <a:ea typeface="黑体" panose="02010609060101010101" pitchFamily="49" charset="-122"/>
-                <a:cs typeface="Times New Roman" panose="02020603050405020304" pitchFamily="18" charset="0"/>
-              </a:rPr>
-              <a:t>)</a:t>
-            </a:r>
-            <a:endParaRPr lang="zh-CN" altLang="zh-CN" dirty="0">
-              <a:latin typeface="黑体" panose="02010609060101010101" pitchFamily="49" charset="-122"/>
-              <a:ea typeface="黑体" panose="02010609060101010101" pitchFamily="49" charset="-122"/>
-              <a:cs typeface="Times New Roman" panose="02020603050405020304" pitchFamily="18" charset="0"/>
-            </a:endParaRPr>
-          </a:p>
-          <a:p>
-            <a:pPr lvl="1"/>
-            <a:endParaRPr lang="zh-CN" altLang="en-US" dirty="0">
-              <a:latin typeface="黑体" panose="02010609060101010101" pitchFamily="49" charset="-122"/>
-              <a:ea typeface="黑体" panose="02010609060101010101" pitchFamily="49" charset="-122"/>
-            </a:endParaRPr>
-          </a:p>
-        </p:txBody>
-      </p:sp>
-    </p:spTree>
-    <p:extLst>
-      <p:ext uri="{BB962C8B-B14F-4D97-AF65-F5344CB8AC3E}">
-        <p14:creationId xmlns:p14="http://schemas.microsoft.com/office/powerpoint/2010/main" val="4157934588"/>
-      </p:ext>
-    </p:extLst>
-  </p:cSld>
-  <p:clrMapOvr>
-    <a:masterClrMapping/>
-  </p:clrMapOvr>
-</p:sld>
-</file>
-
-<file path=ppt/slides/slide18.xml><?xml version="1.0" encoding="utf-8"?>
-<p:sld xmlns:a="http://schemas.openxmlformats.org/drawingml/2006/main" xmlns:r="http://schemas.openxmlformats.org/officeDocument/2006/relationships" xmlns:p="http://schemas.openxmlformats.org/presentationml/2006/main">
-  <p:cSld>
-    <p:spTree>
-      <p:nvGrpSpPr>
-        <p:cNvPr id="1" name="">
-          <a:extLst>
-            <a:ext uri="{FF2B5EF4-FFF2-40B4-BE49-F238E27FC236}">
-              <a16:creationId xmlns:a16="http://schemas.microsoft.com/office/drawing/2014/main" id="{3B80467A-86C7-C20C-CC90-7DFF55F63ED2}"/>
-            </a:ext>
-          </a:extLst>
-        </p:cNvPr>
-        <p:cNvGrpSpPr/>
-        <p:nvPr/>
-      </p:nvGrpSpPr>
-      <p:grpSpPr>
-        <a:xfrm>
-          <a:off x="0" y="0"/>
-          <a:ext cx="0" cy="0"/>
-          <a:chOff x="0" y="0"/>
-          <a:chExt cx="0" cy="0"/>
-        </a:xfrm>
-      </p:grpSpPr>
-      <p:sp>
-        <p:nvSpPr>
-          <p:cNvPr id="2" name="标题 1">
-            <a:extLst>
-              <a:ext uri="{FF2B5EF4-FFF2-40B4-BE49-F238E27FC236}">
-                <a16:creationId xmlns:a16="http://schemas.microsoft.com/office/drawing/2014/main" id="{D2E58956-3D1C-36C8-AE68-D4B625528170}"/>
-              </a:ext>
-            </a:extLst>
-          </p:cNvPr>
-          <p:cNvSpPr>
-            <a:spLocks noGrp="1"/>
-          </p:cNvSpPr>
-          <p:nvPr>
-            <p:ph type="title"/>
-          </p:nvPr>
-        </p:nvSpPr>
-        <p:spPr/>
-        <p:txBody>
-          <a:bodyPr/>
-          <a:lstStyle/>
-          <a:p>
-            <a:r>
-              <a:rPr lang="zh-CN" altLang="zh-CN" dirty="0">
-                <a:latin typeface="Times New Roman" panose="02020603050405020304" pitchFamily="18" charset="0"/>
-                <a:cs typeface="Times New Roman" panose="02020603050405020304" pitchFamily="18" charset="0"/>
-              </a:rPr>
-              <a:t>backend.api.server</a:t>
-            </a:r>
-            <a:r>
-              <a:rPr lang="en-US" altLang="zh-CN" dirty="0">
-                <a:latin typeface="Times New Roman" panose="02020603050405020304" pitchFamily="18" charset="0"/>
-                <a:cs typeface="Times New Roman" panose="02020603050405020304" pitchFamily="18" charset="0"/>
-              </a:rPr>
-              <a:t>.</a:t>
-            </a:r>
-            <a:r>
-              <a:rPr lang="en-US" altLang="zh-CN" dirty="0" err="1">
-                <a:latin typeface="Times New Roman" panose="02020603050405020304" pitchFamily="18" charset="0"/>
-                <a:cs typeface="Times New Roman" panose="02020603050405020304" pitchFamily="18" charset="0"/>
-              </a:rPr>
-              <a:t>py</a:t>
-            </a:r>
-            <a:endParaRPr lang="zh-CN" altLang="en-US" dirty="0">
-              <a:latin typeface="Times New Roman" panose="02020603050405020304" pitchFamily="18" charset="0"/>
-              <a:cs typeface="Times New Roman" panose="02020603050405020304" pitchFamily="18" charset="0"/>
-            </a:endParaRPr>
-          </a:p>
-        </p:txBody>
-      </p:sp>
-      <p:sp>
-        <p:nvSpPr>
-          <p:cNvPr id="3" name="内容占位符 2">
-            <a:extLst>
-              <a:ext uri="{FF2B5EF4-FFF2-40B4-BE49-F238E27FC236}">
-                <a16:creationId xmlns:a16="http://schemas.microsoft.com/office/drawing/2014/main" id="{95A0AE0D-BC25-7073-23E1-702B42F63E19}"/>
-              </a:ext>
-            </a:extLst>
-          </p:cNvPr>
-          <p:cNvSpPr>
-            <a:spLocks noGrp="1"/>
-          </p:cNvSpPr>
-          <p:nvPr>
-            <p:ph idx="1"/>
-          </p:nvPr>
-        </p:nvSpPr>
-        <p:spPr/>
-        <p:txBody>
-          <a:bodyPr/>
-          <a:lstStyle/>
-          <a:p>
-            <a:r>
-              <a:rPr lang="zh-CN" altLang="en-US" dirty="0">
-                <a:latin typeface="黑体" panose="02010609060101010101" pitchFamily="49" charset="-122"/>
-                <a:ea typeface="黑体" panose="02010609060101010101" pitchFamily="49" charset="-122"/>
-              </a:rPr>
-              <a:t>后端接口</a:t>
-            </a:r>
-            <a:endParaRPr lang="en-US" altLang="zh-CN" dirty="0">
-              <a:latin typeface="黑体" panose="02010609060101010101" pitchFamily="49" charset="-122"/>
-              <a:ea typeface="黑体" panose="02010609060101010101" pitchFamily="49" charset="-122"/>
-            </a:endParaRPr>
-          </a:p>
-          <a:p>
-            <a:pPr lvl="1"/>
-            <a:r>
-              <a:rPr lang="zh-CN" altLang="zh-CN" dirty="0">
-                <a:solidFill>
-                  <a:schemeClr val="accent6">
-                    <a:lumMod val="75000"/>
-                  </a:schemeClr>
-                </a:solidFill>
-                <a:latin typeface="Times New Roman" panose="02020603050405020304" pitchFamily="18" charset="0"/>
-                <a:ea typeface="黑体" panose="02010609060101010101" pitchFamily="49" charset="-122"/>
-                <a:cs typeface="Times New Roman" panose="02020603050405020304" pitchFamily="18" charset="0"/>
-              </a:rPr>
-              <a:t>"/api/conversations/{conv_id}“</a:t>
-            </a:r>
-            <a:endParaRPr lang="en-US" altLang="zh-CN" dirty="0">
-              <a:solidFill>
-                <a:schemeClr val="accent6">
-                  <a:lumMod val="75000"/>
-                </a:schemeClr>
-              </a:solidFill>
-              <a:latin typeface="Times New Roman" panose="02020603050405020304" pitchFamily="18" charset="0"/>
-              <a:ea typeface="黑体" panose="02010609060101010101" pitchFamily="49" charset="-122"/>
-              <a:cs typeface="Times New Roman" panose="02020603050405020304" pitchFamily="18" charset="0"/>
-            </a:endParaRPr>
-          </a:p>
-          <a:p>
-            <a:pPr lvl="2"/>
-            <a:r>
-              <a:rPr lang="zh-CN" altLang="en-US" dirty="0">
-                <a:latin typeface="Times New Roman" panose="02020603050405020304" pitchFamily="18" charset="0"/>
-                <a:ea typeface="黑体" panose="02010609060101010101" pitchFamily="49" charset="-122"/>
-                <a:cs typeface="Times New Roman" panose="02020603050405020304" pitchFamily="18" charset="0"/>
-              </a:rPr>
-              <a:t>更新某个对话的标题</a:t>
-            </a:r>
-            <a:endParaRPr lang="zh-CN" altLang="zh-CN" dirty="0">
-              <a:latin typeface="Times New Roman" panose="02020603050405020304" pitchFamily="18" charset="0"/>
-              <a:ea typeface="黑体" panose="02010609060101010101" pitchFamily="49" charset="-122"/>
-              <a:cs typeface="Times New Roman" panose="02020603050405020304" pitchFamily="18" charset="0"/>
-            </a:endParaRPr>
-          </a:p>
-          <a:p>
-            <a:pPr lvl="1"/>
-            <a:endParaRPr lang="zh-CN" altLang="en-US" dirty="0">
-              <a:latin typeface="黑体" panose="02010609060101010101" pitchFamily="49" charset="-122"/>
-              <a:ea typeface="黑体" panose="02010609060101010101" pitchFamily="49" charset="-122"/>
-            </a:endParaRPr>
-          </a:p>
-        </p:txBody>
-      </p:sp>
-    </p:spTree>
-    <p:extLst>
-      <p:ext uri="{BB962C8B-B14F-4D97-AF65-F5344CB8AC3E}">
-        <p14:creationId xmlns:p14="http://schemas.microsoft.com/office/powerpoint/2010/main" val="2116700909"/>
-      </p:ext>
-    </p:extLst>
-  </p:cSld>
-  <p:clrMapOvr>
-    <a:masterClrMapping/>
-  </p:clrMapOvr>
-</p:sld>
-</file>
-
-<file path=ppt/slides/slide19.xml><?xml version="1.0" encoding="utf-8"?>
-<p:sld xmlns:a="http://schemas.openxmlformats.org/drawingml/2006/main" xmlns:r="http://schemas.openxmlformats.org/officeDocument/2006/relationships" xmlns:p="http://schemas.openxmlformats.org/presentationml/2006/main">
-  <p:cSld>
-    <p:spTree>
-      <p:nvGrpSpPr>
-        <p:cNvPr id="1" name="">
-          <a:extLst>
-            <a:ext uri="{FF2B5EF4-FFF2-40B4-BE49-F238E27FC236}">
-              <a16:creationId xmlns:a16="http://schemas.microsoft.com/office/drawing/2014/main" id="{0FFA29C9-C610-8E1A-D0F0-BEC0D2FA437D}"/>
-            </a:ext>
-          </a:extLst>
-        </p:cNvPr>
-        <p:cNvGrpSpPr/>
-        <p:nvPr/>
-      </p:nvGrpSpPr>
-      <p:grpSpPr>
-        <a:xfrm>
-          <a:off x="0" y="0"/>
-          <a:ext cx="0" cy="0"/>
-          <a:chOff x="0" y="0"/>
-          <a:chExt cx="0" cy="0"/>
-        </a:xfrm>
-      </p:grpSpPr>
-      <p:sp>
-        <p:nvSpPr>
-          <p:cNvPr id="2" name="标题 1">
-            <a:extLst>
-              <a:ext uri="{FF2B5EF4-FFF2-40B4-BE49-F238E27FC236}">
-                <a16:creationId xmlns:a16="http://schemas.microsoft.com/office/drawing/2014/main" id="{5A429DED-6AAD-CADC-0407-D128C32B0626}"/>
-              </a:ext>
-            </a:extLst>
-          </p:cNvPr>
-          <p:cNvSpPr>
-            <a:spLocks noGrp="1"/>
-          </p:cNvSpPr>
-          <p:nvPr>
-            <p:ph type="title"/>
-          </p:nvPr>
-        </p:nvSpPr>
-        <p:spPr/>
-        <p:txBody>
-          <a:bodyPr/>
-          <a:lstStyle/>
-          <a:p>
-            <a:r>
-              <a:rPr lang="zh-CN" altLang="zh-CN" dirty="0">
-                <a:latin typeface="Times New Roman" panose="02020603050405020304" pitchFamily="18" charset="0"/>
-                <a:cs typeface="Times New Roman" panose="02020603050405020304" pitchFamily="18" charset="0"/>
-              </a:rPr>
-              <a:t>backend.api.server</a:t>
-            </a:r>
-            <a:r>
-              <a:rPr lang="en-US" altLang="zh-CN" dirty="0">
-                <a:latin typeface="Times New Roman" panose="02020603050405020304" pitchFamily="18" charset="0"/>
-                <a:cs typeface="Times New Roman" panose="02020603050405020304" pitchFamily="18" charset="0"/>
-              </a:rPr>
-              <a:t>.</a:t>
-            </a:r>
-            <a:r>
-              <a:rPr lang="en-US" altLang="zh-CN" dirty="0" err="1">
-                <a:latin typeface="Times New Roman" panose="02020603050405020304" pitchFamily="18" charset="0"/>
-                <a:cs typeface="Times New Roman" panose="02020603050405020304" pitchFamily="18" charset="0"/>
-              </a:rPr>
-              <a:t>py</a:t>
-            </a:r>
-            <a:endParaRPr lang="zh-CN" altLang="en-US" dirty="0">
-              <a:latin typeface="Times New Roman" panose="02020603050405020304" pitchFamily="18" charset="0"/>
-              <a:cs typeface="Times New Roman" panose="02020603050405020304" pitchFamily="18" charset="0"/>
-            </a:endParaRPr>
-          </a:p>
-        </p:txBody>
-      </p:sp>
-      <p:sp>
-        <p:nvSpPr>
-          <p:cNvPr id="3" name="内容占位符 2">
-            <a:extLst>
-              <a:ext uri="{FF2B5EF4-FFF2-40B4-BE49-F238E27FC236}">
-                <a16:creationId xmlns:a16="http://schemas.microsoft.com/office/drawing/2014/main" id="{49925045-9F15-8027-D3FE-F27C8E80E1B7}"/>
-              </a:ext>
-            </a:extLst>
-          </p:cNvPr>
-          <p:cNvSpPr>
-            <a:spLocks noGrp="1"/>
-          </p:cNvSpPr>
-          <p:nvPr>
-            <p:ph idx="1"/>
-          </p:nvPr>
-        </p:nvSpPr>
-        <p:spPr/>
-        <p:txBody>
-          <a:bodyPr/>
-          <a:lstStyle/>
-          <a:p>
-            <a:r>
-              <a:rPr lang="zh-CN" altLang="en-US" dirty="0">
-                <a:latin typeface="黑体" panose="02010609060101010101" pitchFamily="49" charset="-122"/>
-                <a:ea typeface="黑体" panose="02010609060101010101" pitchFamily="49" charset="-122"/>
-              </a:rPr>
-              <a:t>后端接口</a:t>
-            </a:r>
-            <a:endParaRPr lang="en-US" altLang="zh-CN" dirty="0">
-              <a:latin typeface="黑体" panose="02010609060101010101" pitchFamily="49" charset="-122"/>
-              <a:ea typeface="黑体" panose="02010609060101010101" pitchFamily="49" charset="-122"/>
-            </a:endParaRPr>
-          </a:p>
-          <a:p>
-            <a:pPr lvl="1"/>
-            <a:r>
-              <a:rPr lang="zh-CN" altLang="zh-CN" dirty="0">
-                <a:solidFill>
-                  <a:schemeClr val="accent6">
-                    <a:lumMod val="75000"/>
-                  </a:schemeClr>
-                </a:solidFill>
-                <a:latin typeface="Times New Roman" panose="02020603050405020304" pitchFamily="18" charset="0"/>
-                <a:cs typeface="Times New Roman" panose="02020603050405020304" pitchFamily="18" charset="0"/>
-              </a:rPr>
-              <a:t>"/api/conversations/{conv_id}/messages“</a:t>
-            </a:r>
-            <a:endParaRPr lang="en-US" altLang="zh-CN" dirty="0">
-              <a:solidFill>
-                <a:schemeClr val="accent6">
-                  <a:lumMod val="75000"/>
-                </a:schemeClr>
-              </a:solidFill>
-              <a:latin typeface="Times New Roman" panose="02020603050405020304" pitchFamily="18" charset="0"/>
-              <a:cs typeface="Times New Roman" panose="02020603050405020304" pitchFamily="18" charset="0"/>
-            </a:endParaRPr>
-          </a:p>
-          <a:p>
-            <a:pPr lvl="2"/>
-            <a:r>
-              <a:rPr lang="zh-CN" altLang="en-US" dirty="0">
-                <a:latin typeface="黑体" panose="02010609060101010101" pitchFamily="49" charset="-122"/>
-                <a:ea typeface="黑体" panose="02010609060101010101" pitchFamily="49" charset="-122"/>
-                <a:cs typeface="Times New Roman" panose="02020603050405020304" pitchFamily="18" charset="0"/>
-              </a:rPr>
-              <a:t>获取某个对话的所有信息</a:t>
-            </a:r>
-            <a:endParaRPr lang="zh-CN" altLang="zh-CN" dirty="0">
-              <a:latin typeface="黑体" panose="02010609060101010101" pitchFamily="49" charset="-122"/>
-              <a:ea typeface="黑体" panose="02010609060101010101" pitchFamily="49" charset="-122"/>
-              <a:cs typeface="Times New Roman" panose="02020603050405020304" pitchFamily="18" charset="0"/>
-            </a:endParaRPr>
-          </a:p>
-          <a:p>
-            <a:pPr lvl="1"/>
-            <a:endParaRPr lang="zh-CN" altLang="en-US" dirty="0">
-              <a:latin typeface="黑体" panose="02010609060101010101" pitchFamily="49" charset="-122"/>
-              <a:ea typeface="黑体" panose="02010609060101010101" pitchFamily="49" charset="-122"/>
-            </a:endParaRPr>
-          </a:p>
-        </p:txBody>
-      </p:sp>
-    </p:spTree>
-    <p:extLst>
-      <p:ext uri="{BB962C8B-B14F-4D97-AF65-F5344CB8AC3E}">
-        <p14:creationId xmlns:p14="http://schemas.microsoft.com/office/powerpoint/2010/main" val="3008543469"/>
       </p:ext>
     </p:extLst>
   </p:cSld>
@@ -5845,6 +6486,536 @@
 </file>
 
 <file path=ppt/slides/slide20.xml><?xml version="1.0" encoding="utf-8"?>
+<p:sld xmlns:a="http://schemas.openxmlformats.org/drawingml/2006/main" xmlns:r="http://schemas.openxmlformats.org/officeDocument/2006/relationships" xmlns:p="http://schemas.openxmlformats.org/presentationml/2006/main">
+  <p:cSld>
+    <p:spTree>
+      <p:nvGrpSpPr>
+        <p:cNvPr id="1" name="">
+          <a:extLst>
+            <a:ext uri="{FF2B5EF4-FFF2-40B4-BE49-F238E27FC236}">
+              <a16:creationId xmlns:a16="http://schemas.microsoft.com/office/drawing/2014/main" id="{A54C4B85-D55B-6E9D-431B-2AF5422F5C78}"/>
+            </a:ext>
+          </a:extLst>
+        </p:cNvPr>
+        <p:cNvGrpSpPr/>
+        <p:nvPr/>
+      </p:nvGrpSpPr>
+      <p:grpSpPr>
+        <a:xfrm>
+          <a:off x="0" y="0"/>
+          <a:ext cx="0" cy="0"/>
+          <a:chOff x="0" y="0"/>
+          <a:chExt cx="0" cy="0"/>
+        </a:xfrm>
+      </p:grpSpPr>
+      <p:sp>
+        <p:nvSpPr>
+          <p:cNvPr id="2" name="标题 1">
+            <a:extLst>
+              <a:ext uri="{FF2B5EF4-FFF2-40B4-BE49-F238E27FC236}">
+                <a16:creationId xmlns:a16="http://schemas.microsoft.com/office/drawing/2014/main" id="{AE71DA56-CF90-19F9-CFFD-C3A5B506EAEB}"/>
+              </a:ext>
+            </a:extLst>
+          </p:cNvPr>
+          <p:cNvSpPr>
+            <a:spLocks noGrp="1"/>
+          </p:cNvSpPr>
+          <p:nvPr>
+            <p:ph type="title"/>
+          </p:nvPr>
+        </p:nvSpPr>
+        <p:spPr/>
+        <p:txBody>
+          <a:bodyPr/>
+          <a:lstStyle/>
+          <a:p>
+            <a:r>
+              <a:rPr lang="zh-CN" altLang="zh-CN" dirty="0">
+                <a:latin typeface="Times New Roman" panose="02020603050405020304" pitchFamily="18" charset="0"/>
+                <a:cs typeface="Times New Roman" panose="02020603050405020304" pitchFamily="18" charset="0"/>
+              </a:rPr>
+              <a:t>backend.api.server</a:t>
+            </a:r>
+            <a:r>
+              <a:rPr lang="en-US" altLang="zh-CN" dirty="0">
+                <a:latin typeface="Times New Roman" panose="02020603050405020304" pitchFamily="18" charset="0"/>
+                <a:cs typeface="Times New Roman" panose="02020603050405020304" pitchFamily="18" charset="0"/>
+              </a:rPr>
+              <a:t>.</a:t>
+            </a:r>
+            <a:r>
+              <a:rPr lang="en-US" altLang="zh-CN" dirty="0" err="1">
+                <a:latin typeface="Times New Roman" panose="02020603050405020304" pitchFamily="18" charset="0"/>
+                <a:cs typeface="Times New Roman" panose="02020603050405020304" pitchFamily="18" charset="0"/>
+              </a:rPr>
+              <a:t>py</a:t>
+            </a:r>
+            <a:endParaRPr lang="zh-CN" altLang="en-US" dirty="0">
+              <a:latin typeface="Times New Roman" panose="02020603050405020304" pitchFamily="18" charset="0"/>
+              <a:cs typeface="Times New Roman" panose="02020603050405020304" pitchFamily="18" charset="0"/>
+            </a:endParaRPr>
+          </a:p>
+        </p:txBody>
+      </p:sp>
+      <p:sp>
+        <p:nvSpPr>
+          <p:cNvPr id="3" name="内容占位符 2">
+            <a:extLst>
+              <a:ext uri="{FF2B5EF4-FFF2-40B4-BE49-F238E27FC236}">
+                <a16:creationId xmlns:a16="http://schemas.microsoft.com/office/drawing/2014/main" id="{896AE129-E713-5C11-E02B-52FBC78ED2AF}"/>
+              </a:ext>
+            </a:extLst>
+          </p:cNvPr>
+          <p:cNvSpPr>
+            <a:spLocks noGrp="1"/>
+          </p:cNvSpPr>
+          <p:nvPr>
+            <p:ph idx="1"/>
+          </p:nvPr>
+        </p:nvSpPr>
+        <p:spPr/>
+        <p:txBody>
+          <a:bodyPr/>
+          <a:lstStyle/>
+          <a:p>
+            <a:r>
+              <a:rPr lang="zh-CN" altLang="en-US" dirty="0">
+                <a:latin typeface="黑体" panose="02010609060101010101" pitchFamily="49" charset="-122"/>
+                <a:ea typeface="黑体" panose="02010609060101010101" pitchFamily="49" charset="-122"/>
+              </a:rPr>
+              <a:t>后端接口</a:t>
+            </a:r>
+            <a:endParaRPr lang="en-US" altLang="zh-CN" dirty="0">
+              <a:latin typeface="黑体" panose="02010609060101010101" pitchFamily="49" charset="-122"/>
+              <a:ea typeface="黑体" panose="02010609060101010101" pitchFamily="49" charset="-122"/>
+            </a:endParaRPr>
+          </a:p>
+          <a:p>
+            <a:pPr lvl="1"/>
+            <a:r>
+              <a:rPr lang="zh-CN" altLang="zh-CN" dirty="0">
+                <a:solidFill>
+                  <a:schemeClr val="accent6">
+                    <a:lumMod val="75000"/>
+                  </a:schemeClr>
+                </a:solidFill>
+                <a:latin typeface="Times New Roman" panose="02020603050405020304" pitchFamily="18" charset="0"/>
+                <a:cs typeface="Times New Roman" panose="02020603050405020304" pitchFamily="18" charset="0"/>
+              </a:rPr>
+              <a:t>“/api/conversations/{conv_id}“</a:t>
+            </a:r>
+            <a:r>
+              <a:rPr lang="en-US" altLang="zh-CN" dirty="0">
+                <a:solidFill>
+                  <a:schemeClr val="accent6">
+                    <a:lumMod val="75000"/>
+                  </a:schemeClr>
+                </a:solidFill>
+                <a:latin typeface="Times New Roman" panose="02020603050405020304" pitchFamily="18" charset="0"/>
+                <a:cs typeface="Times New Roman" panose="02020603050405020304" pitchFamily="18" charset="0"/>
+              </a:rPr>
+              <a:t>(delete)</a:t>
+            </a:r>
+          </a:p>
+          <a:p>
+            <a:pPr lvl="2"/>
+            <a:r>
+              <a:rPr lang="zh-CN" altLang="en-US" dirty="0">
+                <a:latin typeface="黑体" panose="02010609060101010101" pitchFamily="49" charset="-122"/>
+                <a:ea typeface="黑体" panose="02010609060101010101" pitchFamily="49" charset="-122"/>
+                <a:cs typeface="Times New Roman" panose="02020603050405020304" pitchFamily="18" charset="0"/>
+              </a:rPr>
+              <a:t>删除整个对话</a:t>
+            </a:r>
+            <a:r>
+              <a:rPr lang="en-US" altLang="zh-CN" dirty="0">
+                <a:latin typeface="黑体" panose="02010609060101010101" pitchFamily="49" charset="-122"/>
+                <a:ea typeface="黑体" panose="02010609060101010101" pitchFamily="49" charset="-122"/>
+                <a:cs typeface="Times New Roman" panose="02020603050405020304" pitchFamily="18" charset="0"/>
+              </a:rPr>
+              <a:t>(</a:t>
+            </a:r>
+            <a:r>
+              <a:rPr lang="zh-CN" altLang="en-US" dirty="0">
+                <a:latin typeface="黑体" panose="02010609060101010101" pitchFamily="49" charset="-122"/>
+                <a:ea typeface="黑体" panose="02010609060101010101" pitchFamily="49" charset="-122"/>
+                <a:cs typeface="Times New Roman" panose="02020603050405020304" pitchFamily="18" charset="0"/>
+              </a:rPr>
+              <a:t>删除对话及其关联的表</a:t>
+            </a:r>
+            <a:r>
+              <a:rPr lang="en-US" altLang="zh-CN" dirty="0">
+                <a:latin typeface="黑体" panose="02010609060101010101" pitchFamily="49" charset="-122"/>
+                <a:ea typeface="黑体" panose="02010609060101010101" pitchFamily="49" charset="-122"/>
+                <a:cs typeface="Times New Roman" panose="02020603050405020304" pitchFamily="18" charset="0"/>
+              </a:rPr>
+              <a:t>)</a:t>
+            </a:r>
+            <a:endParaRPr lang="zh-CN" altLang="zh-CN" dirty="0">
+              <a:latin typeface="黑体" panose="02010609060101010101" pitchFamily="49" charset="-122"/>
+              <a:ea typeface="黑体" panose="02010609060101010101" pitchFamily="49" charset="-122"/>
+              <a:cs typeface="Times New Roman" panose="02020603050405020304" pitchFamily="18" charset="0"/>
+            </a:endParaRPr>
+          </a:p>
+          <a:p>
+            <a:pPr lvl="1"/>
+            <a:endParaRPr lang="zh-CN" altLang="en-US" dirty="0">
+              <a:latin typeface="黑体" panose="02010609060101010101" pitchFamily="49" charset="-122"/>
+              <a:ea typeface="黑体" panose="02010609060101010101" pitchFamily="49" charset="-122"/>
+            </a:endParaRPr>
+          </a:p>
+        </p:txBody>
+      </p:sp>
+    </p:spTree>
+    <p:extLst>
+      <p:ext uri="{BB962C8B-B14F-4D97-AF65-F5344CB8AC3E}">
+        <p14:creationId xmlns:p14="http://schemas.microsoft.com/office/powerpoint/2010/main" val="4157934588"/>
+      </p:ext>
+    </p:extLst>
+  </p:cSld>
+  <p:clrMapOvr>
+    <a:masterClrMapping/>
+  </p:clrMapOvr>
+</p:sld>
+</file>
+
+<file path=ppt/slides/slide21.xml><?xml version="1.0" encoding="utf-8"?>
+<p:sld xmlns:a="http://schemas.openxmlformats.org/drawingml/2006/main" xmlns:r="http://schemas.openxmlformats.org/officeDocument/2006/relationships" xmlns:p="http://schemas.openxmlformats.org/presentationml/2006/main">
+  <p:cSld>
+    <p:spTree>
+      <p:nvGrpSpPr>
+        <p:cNvPr id="1" name="">
+          <a:extLst>
+            <a:ext uri="{FF2B5EF4-FFF2-40B4-BE49-F238E27FC236}">
+              <a16:creationId xmlns:a16="http://schemas.microsoft.com/office/drawing/2014/main" id="{3B80467A-86C7-C20C-CC90-7DFF55F63ED2}"/>
+            </a:ext>
+          </a:extLst>
+        </p:cNvPr>
+        <p:cNvGrpSpPr/>
+        <p:nvPr/>
+      </p:nvGrpSpPr>
+      <p:grpSpPr>
+        <a:xfrm>
+          <a:off x="0" y="0"/>
+          <a:ext cx="0" cy="0"/>
+          <a:chOff x="0" y="0"/>
+          <a:chExt cx="0" cy="0"/>
+        </a:xfrm>
+      </p:grpSpPr>
+      <p:sp>
+        <p:nvSpPr>
+          <p:cNvPr id="2" name="标题 1">
+            <a:extLst>
+              <a:ext uri="{FF2B5EF4-FFF2-40B4-BE49-F238E27FC236}">
+                <a16:creationId xmlns:a16="http://schemas.microsoft.com/office/drawing/2014/main" id="{D2E58956-3D1C-36C8-AE68-D4B625528170}"/>
+              </a:ext>
+            </a:extLst>
+          </p:cNvPr>
+          <p:cNvSpPr>
+            <a:spLocks noGrp="1"/>
+          </p:cNvSpPr>
+          <p:nvPr>
+            <p:ph type="title"/>
+          </p:nvPr>
+        </p:nvSpPr>
+        <p:spPr/>
+        <p:txBody>
+          <a:bodyPr/>
+          <a:lstStyle/>
+          <a:p>
+            <a:r>
+              <a:rPr lang="zh-CN" altLang="zh-CN" dirty="0">
+                <a:latin typeface="Times New Roman" panose="02020603050405020304" pitchFamily="18" charset="0"/>
+                <a:cs typeface="Times New Roman" panose="02020603050405020304" pitchFamily="18" charset="0"/>
+              </a:rPr>
+              <a:t>backend.api.server</a:t>
+            </a:r>
+            <a:r>
+              <a:rPr lang="en-US" altLang="zh-CN" dirty="0">
+                <a:latin typeface="Times New Roman" panose="02020603050405020304" pitchFamily="18" charset="0"/>
+                <a:cs typeface="Times New Roman" panose="02020603050405020304" pitchFamily="18" charset="0"/>
+              </a:rPr>
+              <a:t>.</a:t>
+            </a:r>
+            <a:r>
+              <a:rPr lang="en-US" altLang="zh-CN" dirty="0" err="1">
+                <a:latin typeface="Times New Roman" panose="02020603050405020304" pitchFamily="18" charset="0"/>
+                <a:cs typeface="Times New Roman" panose="02020603050405020304" pitchFamily="18" charset="0"/>
+              </a:rPr>
+              <a:t>py</a:t>
+            </a:r>
+            <a:endParaRPr lang="zh-CN" altLang="en-US" dirty="0">
+              <a:latin typeface="Times New Roman" panose="02020603050405020304" pitchFamily="18" charset="0"/>
+              <a:cs typeface="Times New Roman" panose="02020603050405020304" pitchFamily="18" charset="0"/>
+            </a:endParaRPr>
+          </a:p>
+        </p:txBody>
+      </p:sp>
+      <p:sp>
+        <p:nvSpPr>
+          <p:cNvPr id="3" name="内容占位符 2">
+            <a:extLst>
+              <a:ext uri="{FF2B5EF4-FFF2-40B4-BE49-F238E27FC236}">
+                <a16:creationId xmlns:a16="http://schemas.microsoft.com/office/drawing/2014/main" id="{95A0AE0D-BC25-7073-23E1-702B42F63E19}"/>
+              </a:ext>
+            </a:extLst>
+          </p:cNvPr>
+          <p:cNvSpPr>
+            <a:spLocks noGrp="1"/>
+          </p:cNvSpPr>
+          <p:nvPr>
+            <p:ph idx="1"/>
+          </p:nvPr>
+        </p:nvSpPr>
+        <p:spPr/>
+        <p:txBody>
+          <a:bodyPr/>
+          <a:lstStyle/>
+          <a:p>
+            <a:r>
+              <a:rPr lang="zh-CN" altLang="en-US" dirty="0">
+                <a:latin typeface="黑体" panose="02010609060101010101" pitchFamily="49" charset="-122"/>
+                <a:ea typeface="黑体" panose="02010609060101010101" pitchFamily="49" charset="-122"/>
+              </a:rPr>
+              <a:t>后端接口</a:t>
+            </a:r>
+            <a:endParaRPr lang="en-US" altLang="zh-CN" dirty="0">
+              <a:latin typeface="黑体" panose="02010609060101010101" pitchFamily="49" charset="-122"/>
+              <a:ea typeface="黑体" panose="02010609060101010101" pitchFamily="49" charset="-122"/>
+            </a:endParaRPr>
+          </a:p>
+          <a:p>
+            <a:pPr lvl="1"/>
+            <a:r>
+              <a:rPr lang="zh-CN" altLang="zh-CN" dirty="0">
+                <a:solidFill>
+                  <a:schemeClr val="accent6">
+                    <a:lumMod val="75000"/>
+                  </a:schemeClr>
+                </a:solidFill>
+                <a:latin typeface="Times New Roman" panose="02020603050405020304" pitchFamily="18" charset="0"/>
+                <a:ea typeface="黑体" panose="02010609060101010101" pitchFamily="49" charset="-122"/>
+                <a:cs typeface="Times New Roman" panose="02020603050405020304" pitchFamily="18" charset="0"/>
+              </a:rPr>
+              <a:t>"/api/conversations/{conv_id}“</a:t>
+            </a:r>
+            <a:endParaRPr lang="en-US" altLang="zh-CN" dirty="0">
+              <a:solidFill>
+                <a:schemeClr val="accent6">
+                  <a:lumMod val="75000"/>
+                </a:schemeClr>
+              </a:solidFill>
+              <a:latin typeface="Times New Roman" panose="02020603050405020304" pitchFamily="18" charset="0"/>
+              <a:ea typeface="黑体" panose="02010609060101010101" pitchFamily="49" charset="-122"/>
+              <a:cs typeface="Times New Roman" panose="02020603050405020304" pitchFamily="18" charset="0"/>
+            </a:endParaRPr>
+          </a:p>
+          <a:p>
+            <a:pPr lvl="2"/>
+            <a:r>
+              <a:rPr lang="zh-CN" altLang="en-US" dirty="0">
+                <a:latin typeface="Times New Roman" panose="02020603050405020304" pitchFamily="18" charset="0"/>
+                <a:ea typeface="黑体" panose="02010609060101010101" pitchFamily="49" charset="-122"/>
+                <a:cs typeface="Times New Roman" panose="02020603050405020304" pitchFamily="18" charset="0"/>
+              </a:rPr>
+              <a:t>更新某个对话的标题</a:t>
+            </a:r>
+            <a:endParaRPr lang="zh-CN" altLang="zh-CN" dirty="0">
+              <a:latin typeface="Times New Roman" panose="02020603050405020304" pitchFamily="18" charset="0"/>
+              <a:ea typeface="黑体" panose="02010609060101010101" pitchFamily="49" charset="-122"/>
+              <a:cs typeface="Times New Roman" panose="02020603050405020304" pitchFamily="18" charset="0"/>
+            </a:endParaRPr>
+          </a:p>
+          <a:p>
+            <a:pPr lvl="1"/>
+            <a:endParaRPr lang="zh-CN" altLang="en-US" dirty="0">
+              <a:latin typeface="黑体" panose="02010609060101010101" pitchFamily="49" charset="-122"/>
+              <a:ea typeface="黑体" panose="02010609060101010101" pitchFamily="49" charset="-122"/>
+            </a:endParaRPr>
+          </a:p>
+        </p:txBody>
+      </p:sp>
+    </p:spTree>
+    <p:extLst>
+      <p:ext uri="{BB962C8B-B14F-4D97-AF65-F5344CB8AC3E}">
+        <p14:creationId xmlns:p14="http://schemas.microsoft.com/office/powerpoint/2010/main" val="2116700909"/>
+      </p:ext>
+    </p:extLst>
+  </p:cSld>
+  <p:clrMapOvr>
+    <a:masterClrMapping/>
+  </p:clrMapOvr>
+</p:sld>
+</file>
+
+<file path=ppt/slides/slide22.xml><?xml version="1.0" encoding="utf-8"?>
+<p:sld xmlns:a="http://schemas.openxmlformats.org/drawingml/2006/main" xmlns:r="http://schemas.openxmlformats.org/officeDocument/2006/relationships" xmlns:p="http://schemas.openxmlformats.org/presentationml/2006/main">
+  <p:cSld>
+    <p:spTree>
+      <p:nvGrpSpPr>
+        <p:cNvPr id="1" name="">
+          <a:extLst>
+            <a:ext uri="{FF2B5EF4-FFF2-40B4-BE49-F238E27FC236}">
+              <a16:creationId xmlns:a16="http://schemas.microsoft.com/office/drawing/2014/main" id="{0FFA29C9-C610-8E1A-D0F0-BEC0D2FA437D}"/>
+            </a:ext>
+          </a:extLst>
+        </p:cNvPr>
+        <p:cNvGrpSpPr/>
+        <p:nvPr/>
+      </p:nvGrpSpPr>
+      <p:grpSpPr>
+        <a:xfrm>
+          <a:off x="0" y="0"/>
+          <a:ext cx="0" cy="0"/>
+          <a:chOff x="0" y="0"/>
+          <a:chExt cx="0" cy="0"/>
+        </a:xfrm>
+      </p:grpSpPr>
+      <p:sp>
+        <p:nvSpPr>
+          <p:cNvPr id="2" name="标题 1">
+            <a:extLst>
+              <a:ext uri="{FF2B5EF4-FFF2-40B4-BE49-F238E27FC236}">
+                <a16:creationId xmlns:a16="http://schemas.microsoft.com/office/drawing/2014/main" id="{5A429DED-6AAD-CADC-0407-D128C32B0626}"/>
+              </a:ext>
+            </a:extLst>
+          </p:cNvPr>
+          <p:cNvSpPr>
+            <a:spLocks noGrp="1"/>
+          </p:cNvSpPr>
+          <p:nvPr>
+            <p:ph type="title"/>
+          </p:nvPr>
+        </p:nvSpPr>
+        <p:spPr/>
+        <p:txBody>
+          <a:bodyPr/>
+          <a:lstStyle/>
+          <a:p>
+            <a:r>
+              <a:rPr lang="zh-CN" altLang="zh-CN" dirty="0">
+                <a:latin typeface="Times New Roman" panose="02020603050405020304" pitchFamily="18" charset="0"/>
+                <a:cs typeface="Times New Roman" panose="02020603050405020304" pitchFamily="18" charset="0"/>
+              </a:rPr>
+              <a:t>backend.api.server</a:t>
+            </a:r>
+            <a:r>
+              <a:rPr lang="en-US" altLang="zh-CN" dirty="0">
+                <a:latin typeface="Times New Roman" panose="02020603050405020304" pitchFamily="18" charset="0"/>
+                <a:cs typeface="Times New Roman" panose="02020603050405020304" pitchFamily="18" charset="0"/>
+              </a:rPr>
+              <a:t>.</a:t>
+            </a:r>
+            <a:r>
+              <a:rPr lang="en-US" altLang="zh-CN" dirty="0" err="1">
+                <a:latin typeface="Times New Roman" panose="02020603050405020304" pitchFamily="18" charset="0"/>
+                <a:cs typeface="Times New Roman" panose="02020603050405020304" pitchFamily="18" charset="0"/>
+              </a:rPr>
+              <a:t>py</a:t>
+            </a:r>
+            <a:endParaRPr lang="zh-CN" altLang="en-US" dirty="0">
+              <a:latin typeface="Times New Roman" panose="02020603050405020304" pitchFamily="18" charset="0"/>
+              <a:cs typeface="Times New Roman" panose="02020603050405020304" pitchFamily="18" charset="0"/>
+            </a:endParaRPr>
+          </a:p>
+        </p:txBody>
+      </p:sp>
+      <p:sp>
+        <p:nvSpPr>
+          <p:cNvPr id="3" name="内容占位符 2">
+            <a:extLst>
+              <a:ext uri="{FF2B5EF4-FFF2-40B4-BE49-F238E27FC236}">
+                <a16:creationId xmlns:a16="http://schemas.microsoft.com/office/drawing/2014/main" id="{49925045-9F15-8027-D3FE-F27C8E80E1B7}"/>
+              </a:ext>
+            </a:extLst>
+          </p:cNvPr>
+          <p:cNvSpPr>
+            <a:spLocks noGrp="1"/>
+          </p:cNvSpPr>
+          <p:nvPr>
+            <p:ph idx="1"/>
+          </p:nvPr>
+        </p:nvSpPr>
+        <p:spPr/>
+        <p:txBody>
+          <a:bodyPr/>
+          <a:lstStyle/>
+          <a:p>
+            <a:r>
+              <a:rPr lang="zh-CN" altLang="en-US" dirty="0">
+                <a:latin typeface="黑体" panose="02010609060101010101" pitchFamily="49" charset="-122"/>
+                <a:ea typeface="黑体" panose="02010609060101010101" pitchFamily="49" charset="-122"/>
+              </a:rPr>
+              <a:t>后端接口</a:t>
+            </a:r>
+            <a:endParaRPr lang="en-US" altLang="zh-CN" dirty="0">
+              <a:latin typeface="黑体" panose="02010609060101010101" pitchFamily="49" charset="-122"/>
+              <a:ea typeface="黑体" panose="02010609060101010101" pitchFamily="49" charset="-122"/>
+            </a:endParaRPr>
+          </a:p>
+          <a:p>
+            <a:pPr lvl="1"/>
+            <a:r>
+              <a:rPr lang="zh-CN" altLang="zh-CN" dirty="0">
+                <a:solidFill>
+                  <a:schemeClr val="accent6">
+                    <a:lumMod val="75000"/>
+                  </a:schemeClr>
+                </a:solidFill>
+                <a:latin typeface="Times New Roman" panose="02020603050405020304" pitchFamily="18" charset="0"/>
+                <a:cs typeface="Times New Roman" panose="02020603050405020304" pitchFamily="18" charset="0"/>
+              </a:rPr>
+              <a:t>"/api/conversations/{conv_id}/messages“</a:t>
+            </a:r>
+            <a:endParaRPr lang="en-US" altLang="zh-CN" dirty="0">
+              <a:solidFill>
+                <a:schemeClr val="accent6">
+                  <a:lumMod val="75000"/>
+                </a:schemeClr>
+              </a:solidFill>
+              <a:latin typeface="Times New Roman" panose="02020603050405020304" pitchFamily="18" charset="0"/>
+              <a:cs typeface="Times New Roman" panose="02020603050405020304" pitchFamily="18" charset="0"/>
+            </a:endParaRPr>
+          </a:p>
+          <a:p>
+            <a:pPr lvl="2"/>
+            <a:r>
+              <a:rPr lang="zh-CN" altLang="en-US" dirty="0">
+                <a:latin typeface="黑体" panose="02010609060101010101" pitchFamily="49" charset="-122"/>
+                <a:ea typeface="黑体" panose="02010609060101010101" pitchFamily="49" charset="-122"/>
+                <a:cs typeface="Times New Roman" panose="02020603050405020304" pitchFamily="18" charset="0"/>
+              </a:rPr>
+              <a:t>获取某个对话的所有信息</a:t>
+            </a:r>
+            <a:endParaRPr lang="zh-CN" altLang="zh-CN" dirty="0">
+              <a:latin typeface="黑体" panose="02010609060101010101" pitchFamily="49" charset="-122"/>
+              <a:ea typeface="黑体" panose="02010609060101010101" pitchFamily="49" charset="-122"/>
+              <a:cs typeface="Times New Roman" panose="02020603050405020304" pitchFamily="18" charset="0"/>
+            </a:endParaRPr>
+          </a:p>
+          <a:p>
+            <a:pPr lvl="1"/>
+            <a:endParaRPr lang="zh-CN" altLang="en-US" dirty="0">
+              <a:latin typeface="黑体" panose="02010609060101010101" pitchFamily="49" charset="-122"/>
+              <a:ea typeface="黑体" panose="02010609060101010101" pitchFamily="49" charset="-122"/>
+            </a:endParaRPr>
+          </a:p>
+        </p:txBody>
+      </p:sp>
+    </p:spTree>
+    <p:extLst>
+      <p:ext uri="{BB962C8B-B14F-4D97-AF65-F5344CB8AC3E}">
+        <p14:creationId xmlns:p14="http://schemas.microsoft.com/office/powerpoint/2010/main" val="3008543469"/>
+      </p:ext>
+    </p:extLst>
+  </p:cSld>
+  <p:clrMapOvr>
+    <a:masterClrMapping/>
+  </p:clrMapOvr>
+</p:sld>
+</file>
+
+<file path=ppt/slides/slide23.xml><?xml version="1.0" encoding="utf-8"?>
 <p:sld xmlns:a="http://schemas.openxmlformats.org/drawingml/2006/main" xmlns:r="http://schemas.openxmlformats.org/officeDocument/2006/relationships" xmlns:p="http://schemas.openxmlformats.org/presentationml/2006/main">
   <p:cSld>
     <p:spTree>

--- a/PPT/Bioinformatics_Agent_Architecture.pptx
+++ b/PPT/Bioinformatics_Agent_Architecture.pptx
@@ -219,7 +219,7 @@
           <a:p>
             <a:fld id="{C3A3113A-A8F2-41E1-BE9A-B655091E6EC1}" type="datetimeFigureOut">
               <a:rPr lang="zh-CN" altLang="en-US" smtClean="0"/>
-              <a:t>2026/7/10</a:t>
+              <a:t>2026/7/13</a:t>
             </a:fld>
             <a:endParaRPr lang="zh-CN" altLang="en-US"/>
           </a:p>
@@ -691,6 +691,94 @@
   <p:cSld>
     <p:spTree>
       <p:nvGrpSpPr>
+        <p:cNvPr id="1" name=""/>
+        <p:cNvGrpSpPr/>
+        <p:nvPr/>
+      </p:nvGrpSpPr>
+      <p:grpSpPr>
+        <a:xfrm>
+          <a:off x="0" y="0"/>
+          <a:ext cx="0" cy="0"/>
+          <a:chOff x="0" y="0"/>
+          <a:chExt cx="0" cy="0"/>
+        </a:xfrm>
+      </p:grpSpPr>
+      <p:sp>
+        <p:nvSpPr>
+          <p:cNvPr id="2" name="幻灯片图像占位符 1"/>
+          <p:cNvSpPr>
+            <a:spLocks noGrp="1" noRot="1" noChangeAspect="1"/>
+          </p:cNvSpPr>
+          <p:nvPr>
+            <p:ph type="sldImg"/>
+          </p:nvPr>
+        </p:nvSpPr>
+        <p:spPr/>
+      </p:sp>
+      <p:sp>
+        <p:nvSpPr>
+          <p:cNvPr id="3" name="备注占位符 2"/>
+          <p:cNvSpPr>
+            <a:spLocks noGrp="1"/>
+          </p:cNvSpPr>
+          <p:nvPr>
+            <p:ph type="body" idx="1"/>
+          </p:nvPr>
+        </p:nvSpPr>
+        <p:spPr/>
+        <p:txBody>
+          <a:bodyPr/>
+          <a:lstStyle/>
+          <a:p>
+            <a:r>
+              <a:rPr lang="en-US" altLang="zh-CN" dirty="0"/>
+              <a:t>P:planner   S:search  R:review_search   A:parse  C:compare  T:report  E:review_results</a:t>
+            </a:r>
+            <a:endParaRPr lang="zh-CN" altLang="en-US" dirty="0"/>
+          </a:p>
+        </p:txBody>
+      </p:sp>
+      <p:sp>
+        <p:nvSpPr>
+          <p:cNvPr id="4" name="灯片编号占位符 3"/>
+          <p:cNvSpPr>
+            <a:spLocks noGrp="1"/>
+          </p:cNvSpPr>
+          <p:nvPr>
+            <p:ph type="sldNum" sz="quarter" idx="5"/>
+          </p:nvPr>
+        </p:nvSpPr>
+        <p:spPr/>
+        <p:txBody>
+          <a:bodyPr/>
+          <a:lstStyle/>
+          <a:p>
+            <a:fld id="{03498E8F-0E88-4000-8EEC-96D622E5BCA8}" type="slidenum">
+              <a:rPr lang="zh-CN" altLang="en-US" smtClean="0"/>
+              <a:t>12</a:t>
+            </a:fld>
+            <a:endParaRPr lang="zh-CN" altLang="en-US"/>
+          </a:p>
+        </p:txBody>
+      </p:sp>
+    </p:spTree>
+    <p:extLst>
+      <p:ext uri="{BB962C8B-B14F-4D97-AF65-F5344CB8AC3E}">
+        <p14:creationId xmlns:p14="http://schemas.microsoft.com/office/powerpoint/2010/main" val="1516324077"/>
+      </p:ext>
+    </p:extLst>
+  </p:cSld>
+  <p:clrMapOvr>
+    <a:masterClrMapping/>
+  </p:clrMapOvr>
+</p:notes>
+</file>
+
+<file path=ppt/notesSlides/notesSlide4.xml><?xml version="1.0" encoding="utf-8"?>
+<p:notes xmlns:a="http://schemas.openxmlformats.org/drawingml/2006/main" xmlns:r="http://schemas.openxmlformats.org/officeDocument/2006/relationships" xmlns:p="http://schemas.openxmlformats.org/presentationml/2006/main">
+  <p:cSld>
+    <p:spTree>
+      <p:nvGrpSpPr>
         <p:cNvPr id="1" name="">
           <a:extLst>
             <a:ext uri="{FF2B5EF4-FFF2-40B4-BE49-F238E27FC236}">
@@ -798,7 +886,7 @@
 </p:notes>
 </file>
 
-<file path=ppt/notesSlides/notesSlide4.xml><?xml version="1.0" encoding="utf-8"?>
+<file path=ppt/notesSlides/notesSlide5.xml><?xml version="1.0" encoding="utf-8"?>
 <p:notes xmlns:a="http://schemas.openxmlformats.org/drawingml/2006/main" xmlns:r="http://schemas.openxmlformats.org/officeDocument/2006/relationships" xmlns:p="http://schemas.openxmlformats.org/presentationml/2006/main">
   <p:cSld>
     <p:spTree>
@@ -1053,7 +1141,7 @@
           <a:p>
             <a:fld id="{91418217-8E16-49AE-98DB-91CE6F89811F}" type="datetimeFigureOut">
               <a:rPr lang="zh-CN" altLang="en-US" smtClean="0"/>
-              <a:t>2026/7/10</a:t>
+              <a:t>2026/7/13</a:t>
             </a:fld>
             <a:endParaRPr lang="zh-CN" altLang="en-US"/>
           </a:p>
@@ -1251,7 +1339,7 @@
           <a:p>
             <a:fld id="{91418217-8E16-49AE-98DB-91CE6F89811F}" type="datetimeFigureOut">
               <a:rPr lang="zh-CN" altLang="en-US" smtClean="0"/>
-              <a:t>2026/7/10</a:t>
+              <a:t>2026/7/13</a:t>
             </a:fld>
             <a:endParaRPr lang="zh-CN" altLang="en-US"/>
           </a:p>
@@ -1459,7 +1547,7 @@
           <a:p>
             <a:fld id="{91418217-8E16-49AE-98DB-91CE6F89811F}" type="datetimeFigureOut">
               <a:rPr lang="zh-CN" altLang="en-US" smtClean="0"/>
-              <a:t>2026/7/10</a:t>
+              <a:t>2026/7/13</a:t>
             </a:fld>
             <a:endParaRPr lang="zh-CN" altLang="en-US"/>
           </a:p>
@@ -1657,7 +1745,7 @@
           <a:p>
             <a:fld id="{91418217-8E16-49AE-98DB-91CE6F89811F}" type="datetimeFigureOut">
               <a:rPr lang="zh-CN" altLang="en-US" smtClean="0"/>
-              <a:t>2026/7/10</a:t>
+              <a:t>2026/7/13</a:t>
             </a:fld>
             <a:endParaRPr lang="zh-CN" altLang="en-US"/>
           </a:p>
@@ -1932,7 +2020,7 @@
           <a:p>
             <a:fld id="{91418217-8E16-49AE-98DB-91CE6F89811F}" type="datetimeFigureOut">
               <a:rPr lang="zh-CN" altLang="en-US" smtClean="0"/>
-              <a:t>2026/7/10</a:t>
+              <a:t>2026/7/13</a:t>
             </a:fld>
             <a:endParaRPr lang="zh-CN" altLang="en-US"/>
           </a:p>
@@ -2197,7 +2285,7 @@
           <a:p>
             <a:fld id="{91418217-8E16-49AE-98DB-91CE6F89811F}" type="datetimeFigureOut">
               <a:rPr lang="zh-CN" altLang="en-US" smtClean="0"/>
-              <a:t>2026/7/10</a:t>
+              <a:t>2026/7/13</a:t>
             </a:fld>
             <a:endParaRPr lang="zh-CN" altLang="en-US"/>
           </a:p>
@@ -2609,7 +2697,7 @@
           <a:p>
             <a:fld id="{91418217-8E16-49AE-98DB-91CE6F89811F}" type="datetimeFigureOut">
               <a:rPr lang="zh-CN" altLang="en-US" smtClean="0"/>
-              <a:t>2026/7/10</a:t>
+              <a:t>2026/7/13</a:t>
             </a:fld>
             <a:endParaRPr lang="zh-CN" altLang="en-US"/>
           </a:p>
@@ -2750,7 +2838,7 @@
           <a:p>
             <a:fld id="{91418217-8E16-49AE-98DB-91CE6F89811F}" type="datetimeFigureOut">
               <a:rPr lang="zh-CN" altLang="en-US" smtClean="0"/>
-              <a:t>2026/7/10</a:t>
+              <a:t>2026/7/13</a:t>
             </a:fld>
             <a:endParaRPr lang="zh-CN" altLang="en-US"/>
           </a:p>
@@ -2863,7 +2951,7 @@
           <a:p>
             <a:fld id="{91418217-8E16-49AE-98DB-91CE6F89811F}" type="datetimeFigureOut">
               <a:rPr lang="zh-CN" altLang="en-US" smtClean="0"/>
-              <a:t>2026/7/10</a:t>
+              <a:t>2026/7/13</a:t>
             </a:fld>
             <a:endParaRPr lang="zh-CN" altLang="en-US"/>
           </a:p>
@@ -3174,7 +3262,7 @@
           <a:p>
             <a:fld id="{91418217-8E16-49AE-98DB-91CE6F89811F}" type="datetimeFigureOut">
               <a:rPr lang="zh-CN" altLang="en-US" smtClean="0"/>
-              <a:t>2026/7/10</a:t>
+              <a:t>2026/7/13</a:t>
             </a:fld>
             <a:endParaRPr lang="zh-CN" altLang="en-US"/>
           </a:p>
@@ -3462,7 +3550,7 @@
           <a:p>
             <a:fld id="{91418217-8E16-49AE-98DB-91CE6F89811F}" type="datetimeFigureOut">
               <a:rPr lang="zh-CN" altLang="en-US" smtClean="0"/>
-              <a:t>2026/7/10</a:t>
+              <a:t>2026/7/13</a:t>
             </a:fld>
             <a:endParaRPr lang="zh-CN" altLang="en-US"/>
           </a:p>
@@ -3703,7 +3791,7 @@
           <a:p>
             <a:fld id="{91418217-8E16-49AE-98DB-91CE6F89811F}" type="datetimeFigureOut">
               <a:rPr lang="zh-CN" altLang="en-US" smtClean="0"/>
-              <a:t>2026/7/10</a:t>
+              <a:t>2026/7/13</a:t>
             </a:fld>
             <a:endParaRPr lang="zh-CN" altLang="en-US"/>
           </a:p>
@@ -4899,9 +4987,9 @@
           <p:nvPr/>
         </p:nvCxnSpPr>
         <p:spPr>
-          <a:xfrm>
-            <a:off x="702219" y="1449905"/>
-            <a:ext cx="3182718" cy="0"/>
+          <a:xfrm flipV="1">
+            <a:off x="702219" y="1439800"/>
+            <a:ext cx="2940222" cy="10105"/>
           </a:xfrm>
           <a:prstGeom prst="line">
             <a:avLst/>
@@ -5036,8 +5124,8 @@
         </p:nvSpPr>
         <p:spPr>
           <a:xfrm>
-            <a:off x="1591355" y="1641878"/>
-            <a:ext cx="1273087" cy="257649"/>
+            <a:off x="1434745" y="1641877"/>
+            <a:ext cx="1429697" cy="257649"/>
           </a:xfrm>
           <a:prstGeom prst="roundRect">
             <a:avLst/>
@@ -5062,26 +5150,58 @@
           <a:lstStyle/>
           <a:p>
             <a:r>
-              <a:rPr lang="en-US" altLang="zh-CN" sz="1200">
-                <a:latin typeface="Times New Roman" panose="02020603050405020304" pitchFamily="18" charset="0"/>
-                <a:cs typeface="Times New Roman" panose="02020603050405020304" pitchFamily="18" charset="0"/>
-              </a:rPr>
-              <a:t>    </a:t>
-            </a:r>
-            <a:r>
-              <a:rPr lang="zh-CN" altLang="zh-CN" sz="1200">
-                <a:latin typeface="Times New Roman" panose="02020603050405020304" pitchFamily="18" charset="0"/>
-                <a:cs typeface="Times New Roman" panose="02020603050405020304" pitchFamily="18" charset="0"/>
-              </a:rPr>
-              <a:t>initial</a:t>
-            </a:r>
-            <a:r>
-              <a:rPr lang="zh-CN" altLang="zh-CN" sz="1200" dirty="0">
-                <a:latin typeface="Times New Roman" panose="02020603050405020304" pitchFamily="18" charset="0"/>
-                <a:cs typeface="Times New Roman" panose="02020603050405020304" pitchFamily="18" charset="0"/>
-              </a:rPr>
-              <a:t>_state</a:t>
-            </a:r>
+              <a:rPr lang="en-US" altLang="zh-CN" sz="800" dirty="0">
+                <a:latin typeface="Times New Roman" panose="02020603050405020304" pitchFamily="18" charset="0"/>
+                <a:cs typeface="Times New Roman" panose="02020603050405020304" pitchFamily="18" charset="0"/>
+              </a:rPr>
+              <a:t> </a:t>
+            </a:r>
+            <a:r>
+              <a:rPr lang="zh-CN" altLang="zh-CN" sz="800" dirty="0">
+                <a:latin typeface="Times New Roman" panose="02020603050405020304" pitchFamily="18" charset="0"/>
+                <a:cs typeface="Times New Roman" panose="02020603050405020304" pitchFamily="18" charset="0"/>
+              </a:rPr>
+              <a:t>initial_state</a:t>
+            </a:r>
+            <a:r>
+              <a:rPr lang="en-US" altLang="zh-CN" sz="800" dirty="0">
+                <a:latin typeface="Times New Roman" panose="02020603050405020304" pitchFamily="18" charset="0"/>
+                <a:cs typeface="Times New Roman" panose="02020603050405020304" pitchFamily="18" charset="0"/>
+              </a:rPr>
+              <a:t>(</a:t>
+            </a:r>
+            <a:r>
+              <a:rPr lang="zh-CN" altLang="zh-CN" sz="800" dirty="0">
+                <a:latin typeface="Times New Roman" panose="02020603050405020304" pitchFamily="18" charset="0"/>
+                <a:cs typeface="Times New Roman" panose="02020603050405020304" pitchFamily="18" charset="0"/>
+              </a:rPr>
+              <a:t>ResearchStat</a:t>
+            </a:r>
+            <a:r>
+              <a:rPr lang="en-US" altLang="zh-CN" sz="800" dirty="0">
+                <a:latin typeface="Times New Roman" panose="02020603050405020304" pitchFamily="18" charset="0"/>
+                <a:cs typeface="Times New Roman" panose="02020603050405020304" pitchFamily="18" charset="0"/>
+              </a:rPr>
+              <a:t>e</a:t>
+            </a:r>
+            <a:r>
+              <a:rPr lang="zh-CN" altLang="en-US" sz="800" dirty="0">
+                <a:latin typeface="Times New Roman" panose="02020603050405020304" pitchFamily="18" charset="0"/>
+                <a:cs typeface="Times New Roman" panose="02020603050405020304" pitchFamily="18" charset="0"/>
+              </a:rPr>
+              <a:t>类</a:t>
+            </a:r>
+            <a:r>
+              <a:rPr lang="en-US" altLang="zh-CN" sz="800" dirty="0">
+                <a:latin typeface="Times New Roman" panose="02020603050405020304" pitchFamily="18" charset="0"/>
+                <a:cs typeface="Times New Roman" panose="02020603050405020304" pitchFamily="18" charset="0"/>
+              </a:rPr>
+              <a:t>)</a:t>
+            </a:r>
+            <a:endParaRPr lang="zh-CN" altLang="zh-CN" sz="800" dirty="0">
+              <a:latin typeface="Times New Roman" panose="02020603050405020304" pitchFamily="18" charset="0"/>
+              <a:cs typeface="Times New Roman" panose="02020603050405020304" pitchFamily="18" charset="0"/>
+            </a:endParaRPr>
           </a:p>
         </p:txBody>
       </p:sp>
@@ -5120,6 +5240,650 @@
           </a:fillRef>
           <a:effectRef idx="1">
             <a:schemeClr val="accent1"/>
+          </a:effectRef>
+          <a:fontRef idx="minor">
+            <a:schemeClr val="tx1"/>
+          </a:fontRef>
+        </p:style>
+      </p:cxnSp>
+      <p:sp>
+        <p:nvSpPr>
+          <p:cNvPr id="29" name="矩形: 圆角 28">
+            <a:extLst>
+              <a:ext uri="{FF2B5EF4-FFF2-40B4-BE49-F238E27FC236}">
+                <a16:creationId xmlns:a16="http://schemas.microsoft.com/office/drawing/2014/main" id="{78B01F21-B999-B67B-510B-CCF55C2F11C1}"/>
+              </a:ext>
+            </a:extLst>
+          </p:cNvPr>
+          <p:cNvSpPr/>
+          <p:nvPr/>
+        </p:nvSpPr>
+        <p:spPr>
+          <a:xfrm>
+            <a:off x="2950322" y="1641877"/>
+            <a:ext cx="1389290" cy="257649"/>
+          </a:xfrm>
+          <a:prstGeom prst="roundRect">
+            <a:avLst/>
+          </a:prstGeom>
+        </p:spPr>
+        <p:style>
+          <a:lnRef idx="2">
+            <a:schemeClr val="accent1"/>
+          </a:lnRef>
+          <a:fillRef idx="1">
+            <a:schemeClr val="lt1"/>
+          </a:fillRef>
+          <a:effectRef idx="0">
+            <a:schemeClr val="accent1"/>
+          </a:effectRef>
+          <a:fontRef idx="minor">
+            <a:schemeClr val="dk1"/>
+          </a:fontRef>
+        </p:style>
+        <p:txBody>
+          <a:bodyPr rtlCol="0" anchor="ctr"/>
+          <a:lstStyle/>
+          <a:p>
+            <a:r>
+              <a:rPr lang="zh-CN" altLang="zh-CN" sz="1200" dirty="0">
+                <a:latin typeface="Times New Roman" panose="02020603050405020304" pitchFamily="18" charset="0"/>
+                <a:cs typeface="Times New Roman" panose="02020603050405020304" pitchFamily="18" charset="0"/>
+              </a:rPr>
+              <a:t>graph = get_graph()</a:t>
+            </a:r>
+          </a:p>
+        </p:txBody>
+      </p:sp>
+      <p:cxnSp>
+        <p:nvCxnSpPr>
+          <p:cNvPr id="31" name="直接箭头连接符 30">
+            <a:extLst>
+              <a:ext uri="{FF2B5EF4-FFF2-40B4-BE49-F238E27FC236}">
+                <a16:creationId xmlns:a16="http://schemas.microsoft.com/office/drawing/2014/main" id="{38A57705-793A-F2FB-5759-DE2804489D20}"/>
+              </a:ext>
+            </a:extLst>
+          </p:cNvPr>
+          <p:cNvCxnSpPr/>
+          <p:nvPr/>
+        </p:nvCxnSpPr>
+        <p:spPr>
+          <a:xfrm>
+            <a:off x="3642441" y="1449905"/>
+            <a:ext cx="0" cy="181869"/>
+          </a:xfrm>
+          <a:prstGeom prst="straightConnector1">
+            <a:avLst/>
+          </a:prstGeom>
+          <a:ln>
+            <a:tailEnd type="triangle"/>
+          </a:ln>
+        </p:spPr>
+        <p:style>
+          <a:lnRef idx="2">
+            <a:schemeClr val="accent1"/>
+          </a:lnRef>
+          <a:fillRef idx="0">
+            <a:schemeClr val="accent1"/>
+          </a:fillRef>
+          <a:effectRef idx="1">
+            <a:schemeClr val="accent1"/>
+          </a:effectRef>
+          <a:fontRef idx="minor">
+            <a:schemeClr val="tx1"/>
+          </a:fontRef>
+        </p:style>
+      </p:cxnSp>
+      <p:cxnSp>
+        <p:nvCxnSpPr>
+          <p:cNvPr id="36" name="直接箭头连接符 35">
+            <a:extLst>
+              <a:ext uri="{FF2B5EF4-FFF2-40B4-BE49-F238E27FC236}">
+                <a16:creationId xmlns:a16="http://schemas.microsoft.com/office/drawing/2014/main" id="{D428C775-8C8F-13B8-A0F5-F9AFDED42134}"/>
+              </a:ext>
+            </a:extLst>
+          </p:cNvPr>
+          <p:cNvCxnSpPr>
+            <a:stCxn id="29" idx="2"/>
+          </p:cNvCxnSpPr>
+          <p:nvPr/>
+        </p:nvCxnSpPr>
+        <p:spPr>
+          <a:xfrm flipH="1">
+            <a:off x="3642441" y="1899526"/>
+            <a:ext cx="2526" cy="217234"/>
+          </a:xfrm>
+          <a:prstGeom prst="straightConnector1">
+            <a:avLst/>
+          </a:prstGeom>
+          <a:ln>
+            <a:tailEnd type="triangle"/>
+          </a:ln>
+        </p:spPr>
+        <p:style>
+          <a:lnRef idx="2">
+            <a:schemeClr val="accent1"/>
+          </a:lnRef>
+          <a:fillRef idx="0">
+            <a:schemeClr val="accent1"/>
+          </a:fillRef>
+          <a:effectRef idx="1">
+            <a:schemeClr val="accent1"/>
+          </a:effectRef>
+          <a:fontRef idx="minor">
+            <a:schemeClr val="tx1"/>
+          </a:fontRef>
+        </p:style>
+      </p:cxnSp>
+      <p:sp>
+        <p:nvSpPr>
+          <p:cNvPr id="38" name="矩形: 圆角 37">
+            <a:extLst>
+              <a:ext uri="{FF2B5EF4-FFF2-40B4-BE49-F238E27FC236}">
+                <a16:creationId xmlns:a16="http://schemas.microsoft.com/office/drawing/2014/main" id="{F944C5ED-3009-BBC3-2FC0-CF5E4B153147}"/>
+              </a:ext>
+            </a:extLst>
+          </p:cNvPr>
+          <p:cNvSpPr/>
+          <p:nvPr/>
+        </p:nvSpPr>
+        <p:spPr>
+          <a:xfrm>
+            <a:off x="2947796" y="2116760"/>
+            <a:ext cx="1389290" cy="257649"/>
+          </a:xfrm>
+          <a:prstGeom prst="roundRect">
+            <a:avLst/>
+          </a:prstGeom>
+        </p:spPr>
+        <p:style>
+          <a:lnRef idx="2">
+            <a:schemeClr val="accent1"/>
+          </a:lnRef>
+          <a:fillRef idx="1">
+            <a:schemeClr val="lt1"/>
+          </a:fillRef>
+          <a:effectRef idx="0">
+            <a:schemeClr val="accent1"/>
+          </a:effectRef>
+          <a:fontRef idx="minor">
+            <a:schemeClr val="dk1"/>
+          </a:fontRef>
+        </p:style>
+        <p:txBody>
+          <a:bodyPr rtlCol="0" anchor="ctr"/>
+          <a:lstStyle/>
+          <a:p>
+            <a:r>
+              <a:rPr lang="zh-CN" altLang="zh-CN" sz="1200" dirty="0">
+                <a:latin typeface="Times New Roman" panose="02020603050405020304" pitchFamily="18" charset="0"/>
+                <a:cs typeface="Times New Roman" panose="02020603050405020304" pitchFamily="18" charset="0"/>
+              </a:rPr>
+              <a:t> _compiled_graph</a:t>
+            </a:r>
+          </a:p>
+        </p:txBody>
+      </p:sp>
+      <p:sp>
+        <p:nvSpPr>
+          <p:cNvPr id="3" name="椭圆 2">
+            <a:extLst>
+              <a:ext uri="{FF2B5EF4-FFF2-40B4-BE49-F238E27FC236}">
+                <a16:creationId xmlns:a16="http://schemas.microsoft.com/office/drawing/2014/main" id="{1E098B21-72A6-546C-B931-6C0DF5E4FC66}"/>
+              </a:ext>
+            </a:extLst>
+          </p:cNvPr>
+          <p:cNvSpPr/>
+          <p:nvPr/>
+        </p:nvSpPr>
+        <p:spPr>
+          <a:xfrm>
+            <a:off x="5139497" y="3044631"/>
+            <a:ext cx="399098" cy="399098"/>
+          </a:xfrm>
+          <a:prstGeom prst="ellipse">
+            <a:avLst/>
+          </a:prstGeom>
+        </p:spPr>
+        <p:style>
+          <a:lnRef idx="2">
+            <a:schemeClr val="dk1"/>
+          </a:lnRef>
+          <a:fillRef idx="1">
+            <a:schemeClr val="lt1"/>
+          </a:fillRef>
+          <a:effectRef idx="0">
+            <a:schemeClr val="dk1"/>
+          </a:effectRef>
+          <a:fontRef idx="minor">
+            <a:schemeClr val="dk1"/>
+          </a:fontRef>
+        </p:style>
+        <p:txBody>
+          <a:bodyPr rtlCol="0" anchor="ctr"/>
+          <a:lstStyle/>
+          <a:p>
+            <a:pPr algn="ctr"/>
+            <a:r>
+              <a:rPr lang="en-US" altLang="zh-CN" dirty="0"/>
+              <a:t>P</a:t>
+            </a:r>
+            <a:endParaRPr lang="zh-CN" altLang="en-US" dirty="0"/>
+          </a:p>
+        </p:txBody>
+      </p:sp>
+      <p:sp>
+        <p:nvSpPr>
+          <p:cNvPr id="22" name="椭圆 21">
+            <a:extLst>
+              <a:ext uri="{FF2B5EF4-FFF2-40B4-BE49-F238E27FC236}">
+                <a16:creationId xmlns:a16="http://schemas.microsoft.com/office/drawing/2014/main" id="{064A423C-63F8-5FEF-6E57-8CA5FBB6AA69}"/>
+              </a:ext>
+            </a:extLst>
+          </p:cNvPr>
+          <p:cNvSpPr/>
+          <p:nvPr/>
+        </p:nvSpPr>
+        <p:spPr>
+          <a:xfrm>
+            <a:off x="6123781" y="3044631"/>
+            <a:ext cx="399098" cy="399098"/>
+          </a:xfrm>
+          <a:prstGeom prst="ellipse">
+            <a:avLst/>
+          </a:prstGeom>
+        </p:spPr>
+        <p:style>
+          <a:lnRef idx="2">
+            <a:schemeClr val="dk1"/>
+          </a:lnRef>
+          <a:fillRef idx="1">
+            <a:schemeClr val="lt1"/>
+          </a:fillRef>
+          <a:effectRef idx="0">
+            <a:schemeClr val="dk1"/>
+          </a:effectRef>
+          <a:fontRef idx="minor">
+            <a:schemeClr val="dk1"/>
+          </a:fontRef>
+        </p:style>
+        <p:txBody>
+          <a:bodyPr rtlCol="0" anchor="ctr"/>
+          <a:lstStyle/>
+          <a:p>
+            <a:pPr algn="ctr"/>
+            <a:r>
+              <a:rPr lang="en-US" altLang="zh-CN" dirty="0"/>
+              <a:t>S</a:t>
+            </a:r>
+            <a:endParaRPr lang="zh-CN" altLang="en-US" dirty="0"/>
+          </a:p>
+        </p:txBody>
+      </p:sp>
+      <p:sp>
+        <p:nvSpPr>
+          <p:cNvPr id="26" name="椭圆 25">
+            <a:extLst>
+              <a:ext uri="{FF2B5EF4-FFF2-40B4-BE49-F238E27FC236}">
+                <a16:creationId xmlns:a16="http://schemas.microsoft.com/office/drawing/2014/main" id="{D6F675BC-C572-ADA4-F9EB-AC6BFCDDA745}"/>
+              </a:ext>
+            </a:extLst>
+          </p:cNvPr>
+          <p:cNvSpPr/>
+          <p:nvPr/>
+        </p:nvSpPr>
+        <p:spPr>
+          <a:xfrm>
+            <a:off x="6458900" y="2174860"/>
+            <a:ext cx="399098" cy="399098"/>
+          </a:xfrm>
+          <a:prstGeom prst="ellipse">
+            <a:avLst/>
+          </a:prstGeom>
+        </p:spPr>
+        <p:style>
+          <a:lnRef idx="2">
+            <a:schemeClr val="dk1"/>
+          </a:lnRef>
+          <a:fillRef idx="1">
+            <a:schemeClr val="lt1"/>
+          </a:fillRef>
+          <a:effectRef idx="0">
+            <a:schemeClr val="dk1"/>
+          </a:effectRef>
+          <a:fontRef idx="minor">
+            <a:schemeClr val="dk1"/>
+          </a:fontRef>
+        </p:style>
+        <p:txBody>
+          <a:bodyPr rtlCol="0" anchor="ctr"/>
+          <a:lstStyle/>
+          <a:p>
+            <a:pPr algn="ctr"/>
+            <a:r>
+              <a:rPr lang="en-US" altLang="zh-CN" dirty="0"/>
+              <a:t>A</a:t>
+            </a:r>
+            <a:endParaRPr lang="zh-CN" altLang="en-US" dirty="0"/>
+          </a:p>
+        </p:txBody>
+      </p:sp>
+      <p:sp>
+        <p:nvSpPr>
+          <p:cNvPr id="28" name="椭圆 27">
+            <a:extLst>
+              <a:ext uri="{FF2B5EF4-FFF2-40B4-BE49-F238E27FC236}">
+                <a16:creationId xmlns:a16="http://schemas.microsoft.com/office/drawing/2014/main" id="{78991D6F-320E-CC61-8626-ECF5E9F9BFF1}"/>
+              </a:ext>
+            </a:extLst>
+          </p:cNvPr>
+          <p:cNvSpPr/>
+          <p:nvPr/>
+        </p:nvSpPr>
+        <p:spPr>
+          <a:xfrm>
+            <a:off x="6751907" y="2918333"/>
+            <a:ext cx="399098" cy="399098"/>
+          </a:xfrm>
+          <a:prstGeom prst="ellipse">
+            <a:avLst/>
+          </a:prstGeom>
+        </p:spPr>
+        <p:style>
+          <a:lnRef idx="2">
+            <a:schemeClr val="dk1"/>
+          </a:lnRef>
+          <a:fillRef idx="1">
+            <a:schemeClr val="lt1"/>
+          </a:fillRef>
+          <a:effectRef idx="0">
+            <a:schemeClr val="dk1"/>
+          </a:effectRef>
+          <a:fontRef idx="minor">
+            <a:schemeClr val="dk1"/>
+          </a:fontRef>
+        </p:style>
+        <p:txBody>
+          <a:bodyPr rtlCol="0" anchor="ctr"/>
+          <a:lstStyle/>
+          <a:p>
+            <a:pPr algn="ctr"/>
+            <a:r>
+              <a:rPr lang="en-US" altLang="zh-CN" dirty="0"/>
+              <a:t>C</a:t>
+            </a:r>
+            <a:endParaRPr lang="zh-CN" altLang="en-US" dirty="0"/>
+          </a:p>
+        </p:txBody>
+      </p:sp>
+      <p:sp>
+        <p:nvSpPr>
+          <p:cNvPr id="32" name="椭圆 31">
+            <a:extLst>
+              <a:ext uri="{FF2B5EF4-FFF2-40B4-BE49-F238E27FC236}">
+                <a16:creationId xmlns:a16="http://schemas.microsoft.com/office/drawing/2014/main" id="{8B93F770-5143-26E2-6C72-67D12AFB1112}"/>
+              </a:ext>
+            </a:extLst>
+          </p:cNvPr>
+          <p:cNvSpPr/>
+          <p:nvPr/>
+        </p:nvSpPr>
+        <p:spPr>
+          <a:xfrm>
+            <a:off x="8364317" y="2918333"/>
+            <a:ext cx="399098" cy="399098"/>
+          </a:xfrm>
+          <a:prstGeom prst="ellipse">
+            <a:avLst/>
+          </a:prstGeom>
+        </p:spPr>
+        <p:style>
+          <a:lnRef idx="2">
+            <a:schemeClr val="dk1"/>
+          </a:lnRef>
+          <a:fillRef idx="1">
+            <a:schemeClr val="lt1"/>
+          </a:fillRef>
+          <a:effectRef idx="0">
+            <a:schemeClr val="dk1"/>
+          </a:effectRef>
+          <a:fontRef idx="minor">
+            <a:schemeClr val="dk1"/>
+          </a:fontRef>
+        </p:style>
+        <p:txBody>
+          <a:bodyPr rtlCol="0" anchor="ctr"/>
+          <a:lstStyle/>
+          <a:p>
+            <a:pPr algn="ctr"/>
+            <a:r>
+              <a:rPr lang="en-US" altLang="zh-CN" dirty="0"/>
+              <a:t>T</a:t>
+            </a:r>
+            <a:endParaRPr lang="zh-CN" altLang="en-US" dirty="0"/>
+          </a:p>
+        </p:txBody>
+      </p:sp>
+      <p:sp>
+        <p:nvSpPr>
+          <p:cNvPr id="34" name="椭圆 33">
+            <a:extLst>
+              <a:ext uri="{FF2B5EF4-FFF2-40B4-BE49-F238E27FC236}">
+                <a16:creationId xmlns:a16="http://schemas.microsoft.com/office/drawing/2014/main" id="{59DD64CA-00CE-F260-ECFC-DF46A833F3F6}"/>
+              </a:ext>
+            </a:extLst>
+          </p:cNvPr>
+          <p:cNvSpPr/>
+          <p:nvPr/>
+        </p:nvSpPr>
+        <p:spPr>
+          <a:xfrm>
+            <a:off x="9042129" y="2245584"/>
+            <a:ext cx="399098" cy="399098"/>
+          </a:xfrm>
+          <a:prstGeom prst="ellipse">
+            <a:avLst/>
+          </a:prstGeom>
+        </p:spPr>
+        <p:style>
+          <a:lnRef idx="2">
+            <a:schemeClr val="dk1"/>
+          </a:lnRef>
+          <a:fillRef idx="1">
+            <a:schemeClr val="lt1"/>
+          </a:fillRef>
+          <a:effectRef idx="0">
+            <a:schemeClr val="dk1"/>
+          </a:effectRef>
+          <a:fontRef idx="minor">
+            <a:schemeClr val="dk1"/>
+          </a:fontRef>
+        </p:style>
+        <p:txBody>
+          <a:bodyPr rtlCol="0" anchor="ctr"/>
+          <a:lstStyle/>
+          <a:p>
+            <a:pPr algn="ctr"/>
+            <a:r>
+              <a:rPr lang="en-US" altLang="zh-CN" dirty="0"/>
+              <a:t>E</a:t>
+            </a:r>
+            <a:endParaRPr lang="zh-CN" altLang="en-US" dirty="0"/>
+          </a:p>
+        </p:txBody>
+      </p:sp>
+      <p:sp>
+        <p:nvSpPr>
+          <p:cNvPr id="37" name="椭圆 36">
+            <a:extLst>
+              <a:ext uri="{FF2B5EF4-FFF2-40B4-BE49-F238E27FC236}">
+                <a16:creationId xmlns:a16="http://schemas.microsoft.com/office/drawing/2014/main" id="{3B46563C-AC17-6171-A955-89A556325BE8}"/>
+              </a:ext>
+            </a:extLst>
+          </p:cNvPr>
+          <p:cNvSpPr/>
+          <p:nvPr/>
+        </p:nvSpPr>
+        <p:spPr>
+          <a:xfrm>
+            <a:off x="8842580" y="1268879"/>
+            <a:ext cx="399098" cy="399098"/>
+          </a:xfrm>
+          <a:prstGeom prst="ellipse">
+            <a:avLst/>
+          </a:prstGeom>
+        </p:spPr>
+        <p:style>
+          <a:lnRef idx="2">
+            <a:schemeClr val="dk1"/>
+          </a:lnRef>
+          <a:fillRef idx="1">
+            <a:schemeClr val="lt1"/>
+          </a:fillRef>
+          <a:effectRef idx="0">
+            <a:schemeClr val="dk1"/>
+          </a:effectRef>
+          <a:fontRef idx="minor">
+            <a:schemeClr val="dk1"/>
+          </a:fontRef>
+        </p:style>
+        <p:txBody>
+          <a:bodyPr rtlCol="0" anchor="ctr"/>
+          <a:lstStyle/>
+          <a:p>
+            <a:pPr algn="ctr"/>
+            <a:r>
+              <a:rPr lang="en-US" altLang="zh-CN" dirty="0"/>
+              <a:t>R</a:t>
+            </a:r>
+            <a:endParaRPr lang="zh-CN" altLang="en-US" dirty="0"/>
+          </a:p>
+        </p:txBody>
+      </p:sp>
+      <p:sp>
+        <p:nvSpPr>
+          <p:cNvPr id="39" name="椭圆 38">
+            <a:extLst>
+              <a:ext uri="{FF2B5EF4-FFF2-40B4-BE49-F238E27FC236}">
+                <a16:creationId xmlns:a16="http://schemas.microsoft.com/office/drawing/2014/main" id="{33405549-6A6C-4AFD-0FFE-F53320C65735}"/>
+              </a:ext>
+            </a:extLst>
+          </p:cNvPr>
+          <p:cNvSpPr/>
+          <p:nvPr/>
+        </p:nvSpPr>
+        <p:spPr>
+          <a:xfrm>
+            <a:off x="4440650" y="3117882"/>
+            <a:ext cx="252597" cy="252597"/>
+          </a:xfrm>
+          <a:prstGeom prst="ellipse">
+            <a:avLst/>
+          </a:prstGeom>
+        </p:spPr>
+        <p:style>
+          <a:lnRef idx="2">
+            <a:schemeClr val="dk1">
+              <a:shade val="15000"/>
+            </a:schemeClr>
+          </a:lnRef>
+          <a:fillRef idx="1">
+            <a:schemeClr val="dk1"/>
+          </a:fillRef>
+          <a:effectRef idx="0">
+            <a:schemeClr val="dk1"/>
+          </a:effectRef>
+          <a:fontRef idx="minor">
+            <a:schemeClr val="lt1"/>
+          </a:fontRef>
+        </p:style>
+        <p:txBody>
+          <a:bodyPr rtlCol="0" anchor="ctr"/>
+          <a:lstStyle/>
+          <a:p>
+            <a:pPr algn="ctr"/>
+            <a:endParaRPr lang="zh-CN" altLang="en-US"/>
+          </a:p>
+        </p:txBody>
+      </p:sp>
+      <p:cxnSp>
+        <p:nvCxnSpPr>
+          <p:cNvPr id="41" name="直接箭头连接符 40">
+            <a:extLst>
+              <a:ext uri="{FF2B5EF4-FFF2-40B4-BE49-F238E27FC236}">
+                <a16:creationId xmlns:a16="http://schemas.microsoft.com/office/drawing/2014/main" id="{05159BF7-466A-1F3F-DA33-D0775E5CBD69}"/>
+              </a:ext>
+            </a:extLst>
+          </p:cNvPr>
+          <p:cNvCxnSpPr>
+            <a:stCxn id="39" idx="6"/>
+            <a:endCxn id="3" idx="2"/>
+          </p:cNvCxnSpPr>
+          <p:nvPr/>
+        </p:nvCxnSpPr>
+        <p:spPr>
+          <a:xfrm flipV="1">
+            <a:off x="4693247" y="3244180"/>
+            <a:ext cx="446250" cy="1"/>
+          </a:xfrm>
+          <a:prstGeom prst="straightConnector1">
+            <a:avLst/>
+          </a:prstGeom>
+          <a:ln>
+            <a:tailEnd type="triangle"/>
+          </a:ln>
+        </p:spPr>
+        <p:style>
+          <a:lnRef idx="2">
+            <a:schemeClr val="dk1"/>
+          </a:lnRef>
+          <a:fillRef idx="0">
+            <a:schemeClr val="dk1"/>
+          </a:fillRef>
+          <a:effectRef idx="1">
+            <a:schemeClr val="dk1"/>
+          </a:effectRef>
+          <a:fontRef idx="minor">
+            <a:schemeClr val="tx1"/>
+          </a:fontRef>
+        </p:style>
+      </p:cxnSp>
+      <p:cxnSp>
+        <p:nvCxnSpPr>
+          <p:cNvPr id="43" name="直接箭头连接符 42">
+            <a:extLst>
+              <a:ext uri="{FF2B5EF4-FFF2-40B4-BE49-F238E27FC236}">
+                <a16:creationId xmlns:a16="http://schemas.microsoft.com/office/drawing/2014/main" id="{F89DA15A-ACDB-D1BF-295E-FF2CBDB2DA48}"/>
+              </a:ext>
+            </a:extLst>
+          </p:cNvPr>
+          <p:cNvCxnSpPr>
+            <a:stCxn id="3" idx="6"/>
+            <a:endCxn id="22" idx="2"/>
+          </p:cNvCxnSpPr>
+          <p:nvPr/>
+        </p:nvCxnSpPr>
+        <p:spPr>
+          <a:xfrm>
+            <a:off x="5538595" y="3244180"/>
+            <a:ext cx="585186" cy="0"/>
+          </a:xfrm>
+          <a:prstGeom prst="straightConnector1">
+            <a:avLst/>
+          </a:prstGeom>
+          <a:ln>
+            <a:tailEnd type="triangle"/>
+          </a:ln>
+        </p:spPr>
+        <p:style>
+          <a:lnRef idx="2">
+            <a:schemeClr val="dk1"/>
+          </a:lnRef>
+          <a:fillRef idx="0">
+            <a:schemeClr val="dk1"/>
+          </a:fillRef>
+          <a:effectRef idx="1">
+            <a:schemeClr val="dk1"/>
           </a:effectRef>
           <a:fontRef idx="minor">
             <a:schemeClr val="tx1"/>

--- a/PPT/Bioinformatics_Agent_Architecture.pptx
+++ b/PPT/Bioinformatics_Agent_Architecture.pptx
@@ -34,6 +34,9 @@
   </p:sldIdLst>
   <p:sldSz cx="12192000" cy="6858000"/>
   <p:notesSz cx="6858000" cy="9144000"/>
+  <p:custDataLst>
+    <p:tags r:id="rId26"/>
+  </p:custDataLst>
   <p:defaultTextStyle>
     <a:defPPr>
       <a:defRPr lang="zh-CN"/>
@@ -5438,7 +5441,7 @@
         </p:nvSpPr>
         <p:spPr>
           <a:xfrm>
-            <a:off x="5139497" y="3044631"/>
+            <a:off x="3356164" y="3150722"/>
             <a:ext cx="399098" cy="399098"/>
           </a:xfrm>
           <a:prstGeom prst="ellipse">
@@ -5465,10 +5468,16 @@
           <a:p>
             <a:pPr algn="ctr"/>
             <a:r>
-              <a:rPr lang="en-US" altLang="zh-CN" dirty="0"/>
+              <a:rPr lang="en-US" altLang="zh-CN" dirty="0">
+                <a:latin typeface="Times New Roman" panose="02020603050405020304" pitchFamily="18" charset="0"/>
+                <a:cs typeface="Times New Roman" panose="02020603050405020304" pitchFamily="18" charset="0"/>
+              </a:rPr>
               <a:t>P</a:t>
             </a:r>
-            <a:endParaRPr lang="zh-CN" altLang="en-US" dirty="0"/>
+            <a:endParaRPr lang="zh-CN" altLang="en-US" dirty="0">
+              <a:latin typeface="Times New Roman" panose="02020603050405020304" pitchFamily="18" charset="0"/>
+              <a:cs typeface="Times New Roman" panose="02020603050405020304" pitchFamily="18" charset="0"/>
+            </a:endParaRPr>
           </a:p>
         </p:txBody>
       </p:sp>
@@ -5486,7 +5495,7 @@
         </p:nvSpPr>
         <p:spPr>
           <a:xfrm>
-            <a:off x="6123781" y="3044631"/>
+            <a:off x="4340448" y="3150722"/>
             <a:ext cx="399098" cy="399098"/>
           </a:xfrm>
           <a:prstGeom prst="ellipse">
@@ -5513,10 +5522,16 @@
           <a:p>
             <a:pPr algn="ctr"/>
             <a:r>
-              <a:rPr lang="en-US" altLang="zh-CN" dirty="0"/>
+              <a:rPr lang="en-US" altLang="zh-CN" dirty="0">
+                <a:latin typeface="Times New Roman" panose="02020603050405020304" pitchFamily="18" charset="0"/>
+                <a:cs typeface="Times New Roman" panose="02020603050405020304" pitchFamily="18" charset="0"/>
+              </a:rPr>
               <a:t>S</a:t>
             </a:r>
-            <a:endParaRPr lang="zh-CN" altLang="en-US" dirty="0"/>
+            <a:endParaRPr lang="zh-CN" altLang="en-US" dirty="0">
+              <a:latin typeface="Times New Roman" panose="02020603050405020304" pitchFamily="18" charset="0"/>
+              <a:cs typeface="Times New Roman" panose="02020603050405020304" pitchFamily="18" charset="0"/>
+            </a:endParaRPr>
           </a:p>
         </p:txBody>
       </p:sp>
@@ -5534,7 +5549,7 @@
         </p:nvSpPr>
         <p:spPr>
           <a:xfrm>
-            <a:off x="6458900" y="2174860"/>
+            <a:off x="6306520" y="4042386"/>
             <a:ext cx="399098" cy="399098"/>
           </a:xfrm>
           <a:prstGeom prst="ellipse">
@@ -5561,10 +5576,16 @@
           <a:p>
             <a:pPr algn="ctr"/>
             <a:r>
-              <a:rPr lang="en-US" altLang="zh-CN" dirty="0"/>
+              <a:rPr lang="en-US" altLang="zh-CN" dirty="0">
+                <a:latin typeface="Times New Roman" panose="02020603050405020304" pitchFamily="18" charset="0"/>
+                <a:cs typeface="Times New Roman" panose="02020603050405020304" pitchFamily="18" charset="0"/>
+              </a:rPr>
               <a:t>A</a:t>
             </a:r>
-            <a:endParaRPr lang="zh-CN" altLang="en-US" dirty="0"/>
+            <a:endParaRPr lang="zh-CN" altLang="en-US" dirty="0">
+              <a:latin typeface="Times New Roman" panose="02020603050405020304" pitchFamily="18" charset="0"/>
+              <a:cs typeface="Times New Roman" panose="02020603050405020304" pitchFamily="18" charset="0"/>
+            </a:endParaRPr>
           </a:p>
         </p:txBody>
       </p:sp>
@@ -5582,7 +5603,7 @@
         </p:nvSpPr>
         <p:spPr>
           <a:xfrm>
-            <a:off x="6751907" y="2918333"/>
+            <a:off x="7268063" y="4441484"/>
             <a:ext cx="399098" cy="399098"/>
           </a:xfrm>
           <a:prstGeom prst="ellipse">
@@ -5609,10 +5630,16 @@
           <a:p>
             <a:pPr algn="ctr"/>
             <a:r>
-              <a:rPr lang="en-US" altLang="zh-CN" dirty="0"/>
+              <a:rPr lang="en-US" altLang="zh-CN" dirty="0">
+                <a:latin typeface="Times New Roman" panose="02020603050405020304" pitchFamily="18" charset="0"/>
+                <a:cs typeface="Times New Roman" panose="02020603050405020304" pitchFamily="18" charset="0"/>
+              </a:rPr>
               <a:t>C</a:t>
             </a:r>
-            <a:endParaRPr lang="zh-CN" altLang="en-US" dirty="0"/>
+            <a:endParaRPr lang="zh-CN" altLang="en-US" dirty="0">
+              <a:latin typeface="Times New Roman" panose="02020603050405020304" pitchFamily="18" charset="0"/>
+              <a:cs typeface="Times New Roman" panose="02020603050405020304" pitchFamily="18" charset="0"/>
+            </a:endParaRPr>
           </a:p>
         </p:txBody>
       </p:sp>
@@ -5630,7 +5657,7 @@
         </p:nvSpPr>
         <p:spPr>
           <a:xfrm>
-            <a:off x="8364317" y="2918333"/>
+            <a:off x="8359263" y="4441484"/>
             <a:ext cx="399098" cy="399098"/>
           </a:xfrm>
           <a:prstGeom prst="ellipse">
@@ -5657,10 +5684,16 @@
           <a:p>
             <a:pPr algn="ctr"/>
             <a:r>
-              <a:rPr lang="en-US" altLang="zh-CN" dirty="0"/>
-              <a:t>T</a:t>
-            </a:r>
-            <a:endParaRPr lang="zh-CN" altLang="en-US" dirty="0"/>
+              <a:rPr lang="en-US" altLang="zh-CN" dirty="0">
+                <a:latin typeface="Times New Roman" panose="02020603050405020304" pitchFamily="18" charset="0"/>
+                <a:cs typeface="Times New Roman" panose="02020603050405020304" pitchFamily="18" charset="0"/>
+              </a:rPr>
+              <a:t>E</a:t>
+            </a:r>
+            <a:endParaRPr lang="zh-CN" altLang="en-US" dirty="0">
+              <a:latin typeface="Times New Roman" panose="02020603050405020304" pitchFamily="18" charset="0"/>
+              <a:cs typeface="Times New Roman" panose="02020603050405020304" pitchFamily="18" charset="0"/>
+            </a:endParaRPr>
           </a:p>
         </p:txBody>
       </p:sp>
@@ -5678,7 +5711,7 @@
         </p:nvSpPr>
         <p:spPr>
           <a:xfrm>
-            <a:off x="9042129" y="2245584"/>
+            <a:off x="9335134" y="3196279"/>
             <a:ext cx="399098" cy="399098"/>
           </a:xfrm>
           <a:prstGeom prst="ellipse">
@@ -5705,10 +5738,16 @@
           <a:p>
             <a:pPr algn="ctr"/>
             <a:r>
-              <a:rPr lang="en-US" altLang="zh-CN" dirty="0"/>
-              <a:t>E</a:t>
-            </a:r>
-            <a:endParaRPr lang="zh-CN" altLang="en-US" dirty="0"/>
+              <a:rPr lang="en-US" altLang="zh-CN" dirty="0">
+                <a:latin typeface="Times New Roman" panose="02020603050405020304" pitchFamily="18" charset="0"/>
+                <a:cs typeface="Times New Roman" panose="02020603050405020304" pitchFamily="18" charset="0"/>
+              </a:rPr>
+              <a:t>T</a:t>
+            </a:r>
+            <a:endParaRPr lang="zh-CN" altLang="en-US" dirty="0">
+              <a:latin typeface="Times New Roman" panose="02020603050405020304" pitchFamily="18" charset="0"/>
+              <a:cs typeface="Times New Roman" panose="02020603050405020304" pitchFamily="18" charset="0"/>
+            </a:endParaRPr>
           </a:p>
         </p:txBody>
       </p:sp>
@@ -5726,7 +5765,7 @@
         </p:nvSpPr>
         <p:spPr>
           <a:xfrm>
-            <a:off x="8842580" y="1268879"/>
+            <a:off x="5299478" y="3643288"/>
             <a:ext cx="399098" cy="399098"/>
           </a:xfrm>
           <a:prstGeom prst="ellipse">
@@ -5753,56 +5792,16 @@
           <a:p>
             <a:pPr algn="ctr"/>
             <a:r>
-              <a:rPr lang="en-US" altLang="zh-CN" dirty="0"/>
+              <a:rPr lang="en-US" altLang="zh-CN" dirty="0">
+                <a:latin typeface="Times New Roman" panose="02020603050405020304" pitchFamily="18" charset="0"/>
+                <a:cs typeface="Times New Roman" panose="02020603050405020304" pitchFamily="18" charset="0"/>
+              </a:rPr>
               <a:t>R</a:t>
             </a:r>
-            <a:endParaRPr lang="zh-CN" altLang="en-US" dirty="0"/>
-          </a:p>
-        </p:txBody>
-      </p:sp>
-      <p:sp>
-        <p:nvSpPr>
-          <p:cNvPr id="39" name="椭圆 38">
-            <a:extLst>
-              <a:ext uri="{FF2B5EF4-FFF2-40B4-BE49-F238E27FC236}">
-                <a16:creationId xmlns:a16="http://schemas.microsoft.com/office/drawing/2014/main" id="{33405549-6A6C-4AFD-0FFE-F53320C65735}"/>
-              </a:ext>
-            </a:extLst>
-          </p:cNvPr>
-          <p:cNvSpPr/>
-          <p:nvPr/>
-        </p:nvSpPr>
-        <p:spPr>
-          <a:xfrm>
-            <a:off x="4440650" y="3117882"/>
-            <a:ext cx="252597" cy="252597"/>
-          </a:xfrm>
-          <a:prstGeom prst="ellipse">
-            <a:avLst/>
-          </a:prstGeom>
-        </p:spPr>
-        <p:style>
-          <a:lnRef idx="2">
-            <a:schemeClr val="dk1">
-              <a:shade val="15000"/>
-            </a:schemeClr>
-          </a:lnRef>
-          <a:fillRef idx="1">
-            <a:schemeClr val="dk1"/>
-          </a:fillRef>
-          <a:effectRef idx="0">
-            <a:schemeClr val="dk1"/>
-          </a:effectRef>
-          <a:fontRef idx="minor">
-            <a:schemeClr val="lt1"/>
-          </a:fontRef>
-        </p:style>
-        <p:txBody>
-          <a:bodyPr rtlCol="0" anchor="ctr"/>
-          <a:lstStyle/>
-          <a:p>
-            <a:pPr algn="ctr"/>
-            <a:endParaRPr lang="zh-CN" altLang="en-US"/>
+            <a:endParaRPr lang="zh-CN" altLang="en-US" dirty="0">
+              <a:latin typeface="Times New Roman" panose="02020603050405020304" pitchFamily="18" charset="0"/>
+              <a:cs typeface="Times New Roman" panose="02020603050405020304" pitchFamily="18" charset="0"/>
+            </a:endParaRPr>
           </a:p>
         </p:txBody>
       </p:sp>
@@ -5816,14 +5815,14 @@
             </a:extLst>
           </p:cNvPr>
           <p:cNvCxnSpPr>
-            <a:stCxn id="39" idx="6"/>
+            <a:cxnSpLocks/>
             <a:endCxn id="3" idx="2"/>
           </p:cNvCxnSpPr>
           <p:nvPr/>
         </p:nvCxnSpPr>
         <p:spPr>
           <a:xfrm flipV="1">
-            <a:off x="4693247" y="3244180"/>
+            <a:off x="2909914" y="3350271"/>
             <a:ext cx="446250" cy="1"/>
           </a:xfrm>
           <a:prstGeom prst="straightConnector1">
@@ -5865,8 +5864,744 @@
         </p:nvCxnSpPr>
         <p:spPr>
           <a:xfrm>
-            <a:off x="5538595" y="3244180"/>
+            <a:off x="3755262" y="3350271"/>
             <a:ext cx="585186" cy="0"/>
+          </a:xfrm>
+          <a:prstGeom prst="straightConnector1">
+            <a:avLst/>
+          </a:prstGeom>
+          <a:ln>
+            <a:tailEnd type="triangle"/>
+          </a:ln>
+        </p:spPr>
+        <p:style>
+          <a:lnRef idx="2">
+            <a:schemeClr val="dk1"/>
+          </a:lnRef>
+          <a:fillRef idx="0">
+            <a:schemeClr val="dk1"/>
+          </a:fillRef>
+          <a:effectRef idx="1">
+            <a:schemeClr val="dk1"/>
+          </a:effectRef>
+          <a:fontRef idx="minor">
+            <a:schemeClr val="tx1"/>
+          </a:fontRef>
+        </p:style>
+      </p:cxnSp>
+      <p:cxnSp>
+        <p:nvCxnSpPr>
+          <p:cNvPr id="45" name="直接箭头连接符 44">
+            <a:extLst>
+              <a:ext uri="{FF2B5EF4-FFF2-40B4-BE49-F238E27FC236}">
+                <a16:creationId xmlns:a16="http://schemas.microsoft.com/office/drawing/2014/main" id="{820B7AD2-78CC-53D3-B33B-FD1547DE37A0}"/>
+              </a:ext>
+            </a:extLst>
+          </p:cNvPr>
+          <p:cNvCxnSpPr>
+            <a:cxnSpLocks/>
+            <a:stCxn id="22" idx="6"/>
+            <a:endCxn id="34" idx="2"/>
+          </p:cNvCxnSpPr>
+          <p:nvPr/>
+        </p:nvCxnSpPr>
+        <p:spPr>
+          <a:xfrm>
+            <a:off x="4739546" y="3350271"/>
+            <a:ext cx="4595588" cy="45557"/>
+          </a:xfrm>
+          <a:prstGeom prst="straightConnector1">
+            <a:avLst/>
+          </a:prstGeom>
+          <a:ln>
+            <a:tailEnd type="triangle"/>
+          </a:ln>
+        </p:spPr>
+        <p:style>
+          <a:lnRef idx="2">
+            <a:schemeClr val="dk1"/>
+          </a:lnRef>
+          <a:fillRef idx="0">
+            <a:schemeClr val="dk1"/>
+          </a:fillRef>
+          <a:effectRef idx="1">
+            <a:schemeClr val="dk1"/>
+          </a:effectRef>
+          <a:fontRef idx="minor">
+            <a:schemeClr val="tx1"/>
+          </a:fontRef>
+        </p:style>
+      </p:cxnSp>
+      <p:sp>
+        <p:nvSpPr>
+          <p:cNvPr id="47" name="文本框 46">
+            <a:extLst>
+              <a:ext uri="{FF2B5EF4-FFF2-40B4-BE49-F238E27FC236}">
+                <a16:creationId xmlns:a16="http://schemas.microsoft.com/office/drawing/2014/main" id="{E4251425-22C8-E566-B32D-18CE09177DFF}"/>
+              </a:ext>
+            </a:extLst>
+          </p:cNvPr>
+          <p:cNvSpPr txBox="1"/>
+          <p:nvPr/>
+        </p:nvSpPr>
+        <p:spPr>
+          <a:xfrm>
+            <a:off x="6758615" y="3059668"/>
+            <a:ext cx="211349" cy="369332"/>
+          </a:xfrm>
+          <a:prstGeom prst="rect">
+            <a:avLst/>
+          </a:prstGeom>
+          <a:noFill/>
+        </p:spPr>
+        <p:txBody>
+          <a:bodyPr wrap="square" rtlCol="0">
+            <a:spAutoFit/>
+          </a:bodyPr>
+          <a:lstStyle/>
+          <a:p>
+            <a:r>
+              <a:rPr lang="en-US" altLang="zh-CN" dirty="0">
+                <a:latin typeface="Times New Roman" panose="02020603050405020304" pitchFamily="18" charset="0"/>
+                <a:cs typeface="Times New Roman" panose="02020603050405020304" pitchFamily="18" charset="0"/>
+              </a:rPr>
+              <a:t>N</a:t>
+            </a:r>
+            <a:endParaRPr lang="zh-CN" altLang="en-US" dirty="0">
+              <a:latin typeface="Times New Roman" panose="02020603050405020304" pitchFamily="18" charset="0"/>
+              <a:cs typeface="Times New Roman" panose="02020603050405020304" pitchFamily="18" charset="0"/>
+            </a:endParaRPr>
+          </a:p>
+        </p:txBody>
+      </p:sp>
+      <p:cxnSp>
+        <p:nvCxnSpPr>
+          <p:cNvPr id="49" name="直接箭头连接符 48">
+            <a:extLst>
+              <a:ext uri="{FF2B5EF4-FFF2-40B4-BE49-F238E27FC236}">
+                <a16:creationId xmlns:a16="http://schemas.microsoft.com/office/drawing/2014/main" id="{9C6E95B5-08AC-653C-952F-D148FB8C19DE}"/>
+              </a:ext>
+            </a:extLst>
+          </p:cNvPr>
+          <p:cNvCxnSpPr>
+            <a:stCxn id="22" idx="6"/>
+          </p:cNvCxnSpPr>
+          <p:nvPr/>
+        </p:nvCxnSpPr>
+        <p:spPr>
+          <a:xfrm>
+            <a:off x="4739546" y="3350271"/>
+            <a:ext cx="559932" cy="448784"/>
+          </a:xfrm>
+          <a:prstGeom prst="straightConnector1">
+            <a:avLst/>
+          </a:prstGeom>
+          <a:ln>
+            <a:tailEnd type="triangle"/>
+          </a:ln>
+        </p:spPr>
+        <p:style>
+          <a:lnRef idx="2">
+            <a:schemeClr val="dk1"/>
+          </a:lnRef>
+          <a:fillRef idx="0">
+            <a:schemeClr val="dk1"/>
+          </a:fillRef>
+          <a:effectRef idx="1">
+            <a:schemeClr val="dk1"/>
+          </a:effectRef>
+          <a:fontRef idx="minor">
+            <a:schemeClr val="tx1"/>
+          </a:fontRef>
+        </p:style>
+      </p:cxnSp>
+      <p:sp>
+        <p:nvSpPr>
+          <p:cNvPr id="50" name="文本框 49">
+            <a:extLst>
+              <a:ext uri="{FF2B5EF4-FFF2-40B4-BE49-F238E27FC236}">
+                <a16:creationId xmlns:a16="http://schemas.microsoft.com/office/drawing/2014/main" id="{AA6B8D3B-E44E-BEB7-04CD-96A2A164D858}"/>
+              </a:ext>
+            </a:extLst>
+          </p:cNvPr>
+          <p:cNvSpPr txBox="1"/>
+          <p:nvPr/>
+        </p:nvSpPr>
+        <p:spPr>
+          <a:xfrm>
+            <a:off x="4739546" y="3473505"/>
+            <a:ext cx="191974" cy="369332"/>
+          </a:xfrm>
+          <a:prstGeom prst="rect">
+            <a:avLst/>
+          </a:prstGeom>
+          <a:noFill/>
+        </p:spPr>
+        <p:txBody>
+          <a:bodyPr wrap="square" rtlCol="0">
+            <a:spAutoFit/>
+          </a:bodyPr>
+          <a:lstStyle/>
+          <a:p>
+            <a:r>
+              <a:rPr lang="en-US" altLang="zh-CN" dirty="0">
+                <a:latin typeface="Times New Roman" panose="02020603050405020304" pitchFamily="18" charset="0"/>
+                <a:cs typeface="Times New Roman" panose="02020603050405020304" pitchFamily="18" charset="0"/>
+              </a:rPr>
+              <a:t>Y</a:t>
+            </a:r>
+            <a:endParaRPr lang="zh-CN" altLang="en-US" dirty="0">
+              <a:latin typeface="Times New Roman" panose="02020603050405020304" pitchFamily="18" charset="0"/>
+              <a:cs typeface="Times New Roman" panose="02020603050405020304" pitchFamily="18" charset="0"/>
+            </a:endParaRPr>
+          </a:p>
+        </p:txBody>
+      </p:sp>
+      <p:cxnSp>
+        <p:nvCxnSpPr>
+          <p:cNvPr id="52" name="直接箭头连接符 51">
+            <a:extLst>
+              <a:ext uri="{FF2B5EF4-FFF2-40B4-BE49-F238E27FC236}">
+                <a16:creationId xmlns:a16="http://schemas.microsoft.com/office/drawing/2014/main" id="{E11E754C-B78B-78E9-B16F-AD9032D2BD2F}"/>
+              </a:ext>
+            </a:extLst>
+          </p:cNvPr>
+          <p:cNvCxnSpPr>
+            <a:stCxn id="37" idx="6"/>
+            <a:endCxn id="26" idx="2"/>
+          </p:cNvCxnSpPr>
+          <p:nvPr/>
+        </p:nvCxnSpPr>
+        <p:spPr>
+          <a:xfrm>
+            <a:off x="5698576" y="3842837"/>
+            <a:ext cx="607944" cy="399098"/>
+          </a:xfrm>
+          <a:prstGeom prst="straightConnector1">
+            <a:avLst/>
+          </a:prstGeom>
+          <a:ln>
+            <a:solidFill>
+              <a:schemeClr val="tx1"/>
+            </a:solidFill>
+            <a:tailEnd type="triangle"/>
+          </a:ln>
+        </p:spPr>
+        <p:style>
+          <a:lnRef idx="2">
+            <a:schemeClr val="accent1"/>
+          </a:lnRef>
+          <a:fillRef idx="0">
+            <a:schemeClr val="accent1"/>
+          </a:fillRef>
+          <a:effectRef idx="1">
+            <a:schemeClr val="accent1"/>
+          </a:effectRef>
+          <a:fontRef idx="minor">
+            <a:schemeClr val="tx1"/>
+          </a:fontRef>
+        </p:style>
+      </p:cxnSp>
+      <p:cxnSp>
+        <p:nvCxnSpPr>
+          <p:cNvPr id="56" name="连接符: 曲线 55">
+            <a:extLst>
+              <a:ext uri="{FF2B5EF4-FFF2-40B4-BE49-F238E27FC236}">
+                <a16:creationId xmlns:a16="http://schemas.microsoft.com/office/drawing/2014/main" id="{C4BB600F-7520-452D-2AB6-76DEA05CE728}"/>
+              </a:ext>
+            </a:extLst>
+          </p:cNvPr>
+          <p:cNvCxnSpPr>
+            <a:stCxn id="37" idx="3"/>
+            <a:endCxn id="22" idx="3"/>
+          </p:cNvCxnSpPr>
+          <p:nvPr/>
+        </p:nvCxnSpPr>
+        <p:spPr>
+          <a:xfrm rot="5400000" flipH="1">
+            <a:off x="4632127" y="3258141"/>
+            <a:ext cx="492566" cy="959030"/>
+          </a:xfrm>
+          <a:prstGeom prst="curvedConnector3">
+            <a:avLst>
+              <a:gd name="adj1" fmla="val -58276"/>
+            </a:avLst>
+          </a:prstGeom>
+          <a:ln>
+            <a:tailEnd type="triangle"/>
+          </a:ln>
+        </p:spPr>
+        <p:style>
+          <a:lnRef idx="2">
+            <a:schemeClr val="dk1"/>
+          </a:lnRef>
+          <a:fillRef idx="0">
+            <a:schemeClr val="dk1"/>
+          </a:fillRef>
+          <a:effectRef idx="1">
+            <a:schemeClr val="dk1"/>
+          </a:effectRef>
+          <a:fontRef idx="minor">
+            <a:schemeClr val="tx1"/>
+          </a:fontRef>
+        </p:style>
+      </p:cxnSp>
+      <p:sp>
+        <p:nvSpPr>
+          <p:cNvPr id="58" name="文本框 57">
+            <a:extLst>
+              <a:ext uri="{FF2B5EF4-FFF2-40B4-BE49-F238E27FC236}">
+                <a16:creationId xmlns:a16="http://schemas.microsoft.com/office/drawing/2014/main" id="{675E897A-3916-C2F7-ACD6-E9C1CF331BF0}"/>
+              </a:ext>
+            </a:extLst>
+          </p:cNvPr>
+          <p:cNvSpPr txBox="1"/>
+          <p:nvPr/>
+        </p:nvSpPr>
+        <p:spPr>
+          <a:xfrm>
+            <a:off x="4398895" y="4075940"/>
+            <a:ext cx="211349" cy="369332"/>
+          </a:xfrm>
+          <a:prstGeom prst="rect">
+            <a:avLst/>
+          </a:prstGeom>
+          <a:noFill/>
+        </p:spPr>
+        <p:txBody>
+          <a:bodyPr wrap="square" rtlCol="0">
+            <a:spAutoFit/>
+          </a:bodyPr>
+          <a:lstStyle/>
+          <a:p>
+            <a:r>
+              <a:rPr lang="en-US" altLang="zh-CN" dirty="0">
+                <a:latin typeface="Times New Roman" panose="02020603050405020304" pitchFamily="18" charset="0"/>
+                <a:cs typeface="Times New Roman" panose="02020603050405020304" pitchFamily="18" charset="0"/>
+              </a:rPr>
+              <a:t>N</a:t>
+            </a:r>
+            <a:endParaRPr lang="zh-CN" altLang="en-US" dirty="0">
+              <a:latin typeface="Times New Roman" panose="02020603050405020304" pitchFamily="18" charset="0"/>
+              <a:cs typeface="Times New Roman" panose="02020603050405020304" pitchFamily="18" charset="0"/>
+            </a:endParaRPr>
+          </a:p>
+        </p:txBody>
+      </p:sp>
+      <p:sp>
+        <p:nvSpPr>
+          <p:cNvPr id="60" name="文本框 59">
+            <a:extLst>
+              <a:ext uri="{FF2B5EF4-FFF2-40B4-BE49-F238E27FC236}">
+                <a16:creationId xmlns:a16="http://schemas.microsoft.com/office/drawing/2014/main" id="{789995C0-5B4F-F471-0E36-710A67DA6908}"/>
+              </a:ext>
+            </a:extLst>
+          </p:cNvPr>
+          <p:cNvSpPr txBox="1"/>
+          <p:nvPr/>
+        </p:nvSpPr>
+        <p:spPr>
+          <a:xfrm>
+            <a:off x="5735970" y="3972378"/>
+            <a:ext cx="191974" cy="369332"/>
+          </a:xfrm>
+          <a:prstGeom prst="rect">
+            <a:avLst/>
+          </a:prstGeom>
+          <a:noFill/>
+        </p:spPr>
+        <p:txBody>
+          <a:bodyPr wrap="square" rtlCol="0">
+            <a:spAutoFit/>
+          </a:bodyPr>
+          <a:lstStyle/>
+          <a:p>
+            <a:r>
+              <a:rPr lang="en-US" altLang="zh-CN" dirty="0">
+                <a:latin typeface="Times New Roman" panose="02020603050405020304" pitchFamily="18" charset="0"/>
+                <a:cs typeface="Times New Roman" panose="02020603050405020304" pitchFamily="18" charset="0"/>
+              </a:rPr>
+              <a:t>Y</a:t>
+            </a:r>
+            <a:endParaRPr lang="zh-CN" altLang="en-US" dirty="0">
+              <a:latin typeface="Times New Roman" panose="02020603050405020304" pitchFamily="18" charset="0"/>
+              <a:cs typeface="Times New Roman" panose="02020603050405020304" pitchFamily="18" charset="0"/>
+            </a:endParaRPr>
+          </a:p>
+        </p:txBody>
+      </p:sp>
+      <p:cxnSp>
+        <p:nvCxnSpPr>
+          <p:cNvPr id="62" name="直接箭头连接符 61">
+            <a:extLst>
+              <a:ext uri="{FF2B5EF4-FFF2-40B4-BE49-F238E27FC236}">
+                <a16:creationId xmlns:a16="http://schemas.microsoft.com/office/drawing/2014/main" id="{576C959E-C10A-0EA1-7013-D2AB3D19CF5F}"/>
+              </a:ext>
+            </a:extLst>
+          </p:cNvPr>
+          <p:cNvCxnSpPr>
+            <a:stCxn id="26" idx="6"/>
+            <a:endCxn id="28" idx="2"/>
+          </p:cNvCxnSpPr>
+          <p:nvPr/>
+        </p:nvCxnSpPr>
+        <p:spPr>
+          <a:xfrm>
+            <a:off x="6705618" y="4241935"/>
+            <a:ext cx="562445" cy="399098"/>
+          </a:xfrm>
+          <a:prstGeom prst="straightConnector1">
+            <a:avLst/>
+          </a:prstGeom>
+          <a:ln>
+            <a:tailEnd type="triangle"/>
+          </a:ln>
+        </p:spPr>
+        <p:style>
+          <a:lnRef idx="2">
+            <a:schemeClr val="dk1"/>
+          </a:lnRef>
+          <a:fillRef idx="0">
+            <a:schemeClr val="dk1"/>
+          </a:fillRef>
+          <a:effectRef idx="1">
+            <a:schemeClr val="dk1"/>
+          </a:effectRef>
+          <a:fontRef idx="minor">
+            <a:schemeClr val="tx1"/>
+          </a:fontRef>
+        </p:style>
+      </p:cxnSp>
+      <p:sp>
+        <p:nvSpPr>
+          <p:cNvPr id="65" name="文本框 64">
+            <a:extLst>
+              <a:ext uri="{FF2B5EF4-FFF2-40B4-BE49-F238E27FC236}">
+                <a16:creationId xmlns:a16="http://schemas.microsoft.com/office/drawing/2014/main" id="{8C8BB4DD-4A4E-17CB-D087-3DCB5B2D2EEE}"/>
+              </a:ext>
+            </a:extLst>
+          </p:cNvPr>
+          <p:cNvSpPr txBox="1"/>
+          <p:nvPr/>
+        </p:nvSpPr>
+        <p:spPr>
+          <a:xfrm>
+            <a:off x="6713193" y="4441484"/>
+            <a:ext cx="191974" cy="369332"/>
+          </a:xfrm>
+          <a:prstGeom prst="rect">
+            <a:avLst/>
+          </a:prstGeom>
+          <a:noFill/>
+        </p:spPr>
+        <p:txBody>
+          <a:bodyPr wrap="square" rtlCol="0">
+            <a:spAutoFit/>
+          </a:bodyPr>
+          <a:lstStyle/>
+          <a:p>
+            <a:r>
+              <a:rPr lang="en-US" altLang="zh-CN" dirty="0">
+                <a:latin typeface="Times New Roman" panose="02020603050405020304" pitchFamily="18" charset="0"/>
+                <a:cs typeface="Times New Roman" panose="02020603050405020304" pitchFamily="18" charset="0"/>
+              </a:rPr>
+              <a:t>Y</a:t>
+            </a:r>
+            <a:endParaRPr lang="zh-CN" altLang="en-US" dirty="0">
+              <a:latin typeface="Times New Roman" panose="02020603050405020304" pitchFamily="18" charset="0"/>
+              <a:cs typeface="Times New Roman" panose="02020603050405020304" pitchFamily="18" charset="0"/>
+            </a:endParaRPr>
+          </a:p>
+        </p:txBody>
+      </p:sp>
+      <p:cxnSp>
+        <p:nvCxnSpPr>
+          <p:cNvPr id="69" name="直接箭头连接符 68">
+            <a:extLst>
+              <a:ext uri="{FF2B5EF4-FFF2-40B4-BE49-F238E27FC236}">
+                <a16:creationId xmlns:a16="http://schemas.microsoft.com/office/drawing/2014/main" id="{CC3CC12C-4FDB-05AB-F91B-631BFC7233B0}"/>
+              </a:ext>
+            </a:extLst>
+          </p:cNvPr>
+          <p:cNvCxnSpPr>
+            <a:cxnSpLocks/>
+            <a:stCxn id="26" idx="6"/>
+            <a:endCxn id="34" idx="2"/>
+          </p:cNvCxnSpPr>
+          <p:nvPr/>
+        </p:nvCxnSpPr>
+        <p:spPr>
+          <a:xfrm flipV="1">
+            <a:off x="6705618" y="3395828"/>
+            <a:ext cx="2629516" cy="846107"/>
+          </a:xfrm>
+          <a:prstGeom prst="straightConnector1">
+            <a:avLst/>
+          </a:prstGeom>
+          <a:ln>
+            <a:tailEnd type="triangle"/>
+          </a:ln>
+        </p:spPr>
+        <p:style>
+          <a:lnRef idx="2">
+            <a:schemeClr val="dk1"/>
+          </a:lnRef>
+          <a:fillRef idx="0">
+            <a:schemeClr val="dk1"/>
+          </a:fillRef>
+          <a:effectRef idx="1">
+            <a:schemeClr val="dk1"/>
+          </a:effectRef>
+          <a:fontRef idx="minor">
+            <a:schemeClr val="tx1"/>
+          </a:fontRef>
+        </p:style>
+      </p:cxnSp>
+      <p:sp>
+        <p:nvSpPr>
+          <p:cNvPr id="71" name="文本框 70">
+            <a:extLst>
+              <a:ext uri="{FF2B5EF4-FFF2-40B4-BE49-F238E27FC236}">
+                <a16:creationId xmlns:a16="http://schemas.microsoft.com/office/drawing/2014/main" id="{96062B7C-DB01-F8B2-6032-8105DA0ED3BE}"/>
+              </a:ext>
+            </a:extLst>
+          </p:cNvPr>
+          <p:cNvSpPr txBox="1"/>
+          <p:nvPr/>
+        </p:nvSpPr>
+        <p:spPr>
+          <a:xfrm>
+            <a:off x="7467612" y="3634215"/>
+            <a:ext cx="211349" cy="369332"/>
+          </a:xfrm>
+          <a:prstGeom prst="rect">
+            <a:avLst/>
+          </a:prstGeom>
+          <a:noFill/>
+        </p:spPr>
+        <p:txBody>
+          <a:bodyPr wrap="square" rtlCol="0">
+            <a:spAutoFit/>
+          </a:bodyPr>
+          <a:lstStyle/>
+          <a:p>
+            <a:r>
+              <a:rPr lang="en-US" altLang="zh-CN" dirty="0">
+                <a:latin typeface="Times New Roman" panose="02020603050405020304" pitchFamily="18" charset="0"/>
+                <a:cs typeface="Times New Roman" panose="02020603050405020304" pitchFamily="18" charset="0"/>
+              </a:rPr>
+              <a:t>N</a:t>
+            </a:r>
+            <a:endParaRPr lang="zh-CN" altLang="en-US" dirty="0">
+              <a:latin typeface="Times New Roman" panose="02020603050405020304" pitchFamily="18" charset="0"/>
+              <a:cs typeface="Times New Roman" panose="02020603050405020304" pitchFamily="18" charset="0"/>
+            </a:endParaRPr>
+          </a:p>
+        </p:txBody>
+      </p:sp>
+      <p:cxnSp>
+        <p:nvCxnSpPr>
+          <p:cNvPr id="74" name="直接箭头连接符 73">
+            <a:extLst>
+              <a:ext uri="{FF2B5EF4-FFF2-40B4-BE49-F238E27FC236}">
+                <a16:creationId xmlns:a16="http://schemas.microsoft.com/office/drawing/2014/main" id="{7D9C37B9-5899-0BCD-36D5-932A86D8E820}"/>
+              </a:ext>
+            </a:extLst>
+          </p:cNvPr>
+          <p:cNvCxnSpPr>
+            <a:stCxn id="28" idx="6"/>
+            <a:endCxn id="32" idx="2"/>
+          </p:cNvCxnSpPr>
+          <p:nvPr/>
+        </p:nvCxnSpPr>
+        <p:spPr>
+          <a:xfrm>
+            <a:off x="7667161" y="4641033"/>
+            <a:ext cx="692102" cy="0"/>
+          </a:xfrm>
+          <a:prstGeom prst="straightConnector1">
+            <a:avLst/>
+          </a:prstGeom>
+          <a:ln>
+            <a:tailEnd type="triangle"/>
+          </a:ln>
+        </p:spPr>
+        <p:style>
+          <a:lnRef idx="2">
+            <a:schemeClr val="dk1"/>
+          </a:lnRef>
+          <a:fillRef idx="0">
+            <a:schemeClr val="dk1"/>
+          </a:fillRef>
+          <a:effectRef idx="1">
+            <a:schemeClr val="dk1"/>
+          </a:effectRef>
+          <a:fontRef idx="minor">
+            <a:schemeClr val="tx1"/>
+          </a:fontRef>
+        </p:style>
+      </p:cxnSp>
+      <p:cxnSp>
+        <p:nvCxnSpPr>
+          <p:cNvPr id="81" name="直接箭头连接符 80">
+            <a:extLst>
+              <a:ext uri="{FF2B5EF4-FFF2-40B4-BE49-F238E27FC236}">
+                <a16:creationId xmlns:a16="http://schemas.microsoft.com/office/drawing/2014/main" id="{75D3194D-1043-CA75-FBA5-AF8E4AFFF009}"/>
+              </a:ext>
+            </a:extLst>
+          </p:cNvPr>
+          <p:cNvCxnSpPr>
+            <a:stCxn id="32" idx="6"/>
+            <a:endCxn id="34" idx="2"/>
+          </p:cNvCxnSpPr>
+          <p:nvPr/>
+        </p:nvCxnSpPr>
+        <p:spPr>
+          <a:xfrm flipV="1">
+            <a:off x="8758361" y="3395828"/>
+            <a:ext cx="576773" cy="1245205"/>
+          </a:xfrm>
+          <a:prstGeom prst="straightConnector1">
+            <a:avLst/>
+          </a:prstGeom>
+          <a:ln>
+            <a:tailEnd type="triangle"/>
+          </a:ln>
+        </p:spPr>
+        <p:style>
+          <a:lnRef idx="2">
+            <a:schemeClr val="dk1"/>
+          </a:lnRef>
+          <a:fillRef idx="0">
+            <a:schemeClr val="dk1"/>
+          </a:fillRef>
+          <a:effectRef idx="1">
+            <a:schemeClr val="dk1"/>
+          </a:effectRef>
+          <a:fontRef idx="minor">
+            <a:schemeClr val="tx1"/>
+          </a:fontRef>
+        </p:style>
+      </p:cxnSp>
+      <p:sp>
+        <p:nvSpPr>
+          <p:cNvPr id="85" name="矩形: 圆角 84">
+            <a:extLst>
+              <a:ext uri="{FF2B5EF4-FFF2-40B4-BE49-F238E27FC236}">
+                <a16:creationId xmlns:a16="http://schemas.microsoft.com/office/drawing/2014/main" id="{1FE42D17-B325-FF81-400D-5B58C4DB6276}"/>
+              </a:ext>
+            </a:extLst>
+          </p:cNvPr>
+          <p:cNvSpPr/>
+          <p:nvPr/>
+        </p:nvSpPr>
+        <p:spPr>
+          <a:xfrm>
+            <a:off x="2149593" y="3215856"/>
+            <a:ext cx="757790" cy="257649"/>
+          </a:xfrm>
+          <a:prstGeom prst="roundRect">
+            <a:avLst/>
+          </a:prstGeom>
+        </p:spPr>
+        <p:style>
+          <a:lnRef idx="2">
+            <a:schemeClr val="dk1"/>
+          </a:lnRef>
+          <a:fillRef idx="1">
+            <a:schemeClr val="lt1"/>
+          </a:fillRef>
+          <a:effectRef idx="0">
+            <a:schemeClr val="dk1"/>
+          </a:effectRef>
+          <a:fontRef idx="minor">
+            <a:schemeClr val="dk1"/>
+          </a:fontRef>
+        </p:style>
+        <p:txBody>
+          <a:bodyPr rtlCol="0" anchor="ctr"/>
+          <a:lstStyle/>
+          <a:p>
+            <a:pPr algn="ctr"/>
+            <a:r>
+              <a:rPr lang="zh-CN" altLang="en-US" dirty="0">
+                <a:latin typeface="黑体" panose="02010609060101010101" pitchFamily="49" charset="-122"/>
+                <a:ea typeface="黑体" panose="02010609060101010101" pitchFamily="49" charset="-122"/>
+              </a:rPr>
+              <a:t>开始</a:t>
+            </a:r>
+          </a:p>
+        </p:txBody>
+      </p:sp>
+      <p:sp>
+        <p:nvSpPr>
+          <p:cNvPr id="87" name="矩形: 圆角 86">
+            <a:extLst>
+              <a:ext uri="{FF2B5EF4-FFF2-40B4-BE49-F238E27FC236}">
+                <a16:creationId xmlns:a16="http://schemas.microsoft.com/office/drawing/2014/main" id="{61407099-3BC1-2125-8933-33B28FBC4155}"/>
+              </a:ext>
+            </a:extLst>
+          </p:cNvPr>
+          <p:cNvSpPr/>
+          <p:nvPr/>
+        </p:nvSpPr>
+        <p:spPr>
+          <a:xfrm>
+            <a:off x="10446537" y="3298151"/>
+            <a:ext cx="757790" cy="257649"/>
+          </a:xfrm>
+          <a:prstGeom prst="roundRect">
+            <a:avLst/>
+          </a:prstGeom>
+        </p:spPr>
+        <p:style>
+          <a:lnRef idx="2">
+            <a:schemeClr val="dk1"/>
+          </a:lnRef>
+          <a:fillRef idx="1">
+            <a:schemeClr val="lt1"/>
+          </a:fillRef>
+          <a:effectRef idx="0">
+            <a:schemeClr val="dk1"/>
+          </a:effectRef>
+          <a:fontRef idx="minor">
+            <a:schemeClr val="dk1"/>
+          </a:fontRef>
+        </p:style>
+        <p:txBody>
+          <a:bodyPr rtlCol="0" anchor="ctr"/>
+          <a:lstStyle/>
+          <a:p>
+            <a:pPr algn="ctr"/>
+            <a:r>
+              <a:rPr lang="zh-CN" altLang="en-US" dirty="0">
+                <a:latin typeface="黑体" panose="02010609060101010101" pitchFamily="49" charset="-122"/>
+                <a:ea typeface="黑体" panose="02010609060101010101" pitchFamily="49" charset="-122"/>
+              </a:rPr>
+              <a:t>结束</a:t>
+            </a:r>
+          </a:p>
+        </p:txBody>
+      </p:sp>
+      <p:cxnSp>
+        <p:nvCxnSpPr>
+          <p:cNvPr id="89" name="直接箭头连接符 88">
+            <a:extLst>
+              <a:ext uri="{FF2B5EF4-FFF2-40B4-BE49-F238E27FC236}">
+                <a16:creationId xmlns:a16="http://schemas.microsoft.com/office/drawing/2014/main" id="{0F4C6B29-4021-2FF0-8374-EF62DA79A24F}"/>
+              </a:ext>
+            </a:extLst>
+          </p:cNvPr>
+          <p:cNvCxnSpPr>
+            <a:stCxn id="34" idx="6"/>
+            <a:endCxn id="87" idx="1"/>
+          </p:cNvCxnSpPr>
+          <p:nvPr/>
+        </p:nvCxnSpPr>
+        <p:spPr>
+          <a:xfrm>
+            <a:off x="9734232" y="3395828"/>
+            <a:ext cx="712305" cy="31148"/>
           </a:xfrm>
           <a:prstGeom prst="straightConnector1">
             <a:avLst/>
@@ -9905,6 +10640,12 @@
     <a:masterClrMapping/>
   </p:clrMapOvr>
 </p:sld>
+</file>
+
+<file path=ppt/tags/tag1.xml><?xml version="1.0" encoding="utf-8"?>
+<p:tagLst xmlns:a="http://schemas.openxmlformats.org/drawingml/2006/main" xmlns:r="http://schemas.openxmlformats.org/officeDocument/2006/relationships" xmlns:p="http://schemas.openxmlformats.org/presentationml/2006/main">
+  <p:tag name="OPCH-20A5DFBBC4291D0CC51BB8AEAA48E23F255EA2D6D7707BF17C24A6EDAA20D94E" val="[{&quot;GradientColorId&quot;:&quot;&quot;,&quot;IsFree&quot;:true,&quot;IsGradient&quot;:false,&quot;ImagePath&quot;:&quot;&quot;,&quot;GradientColor&quot;:null,&quot;SimpleColor&quot;:&quot;#000000&quot;}]"/>
+</p:tagLst>
 </file>
 
 <file path=ppt/theme/theme1.xml><?xml version="1.0" encoding="utf-8"?>

--- a/PPT/Bioinformatics_Agent_Architecture.pptx
+++ b/PPT/Bioinformatics_Agent_Architecture.pptx
@@ -5,7 +5,7 @@
     <p:sldMasterId id="2147483648" r:id="rId1"/>
   </p:sldMasterIdLst>
   <p:notesMasterIdLst>
-    <p:notesMasterId r:id="rId25"/>
+    <p:notesMasterId r:id="rId24"/>
   </p:notesMasterIdLst>
   <p:sldIdLst>
     <p:sldId id="256" r:id="rId2"/>
@@ -30,12 +30,11 @@
     <p:sldId id="274" r:id="rId21"/>
     <p:sldId id="272" r:id="rId22"/>
     <p:sldId id="275" r:id="rId23"/>
-    <p:sldId id="273" r:id="rId24"/>
   </p:sldIdLst>
   <p:sldSz cx="12192000" cy="6858000"/>
   <p:notesSz cx="6858000" cy="9144000"/>
   <p:custDataLst>
-    <p:tags r:id="rId26"/>
+    <p:tags r:id="rId25"/>
   </p:custDataLst>
   <p:defaultTextStyle>
     <a:defPPr>
@@ -7921,53 +7920,756 @@
           <a:chExt cx="0" cy="0"/>
         </a:xfrm>
       </p:grpSpPr>
-      <p:sp>
-        <p:nvSpPr>
-          <p:cNvPr id="2" name="标题 1">
-            <a:extLst>
-              <a:ext uri="{FF2B5EF4-FFF2-40B4-BE49-F238E27FC236}">
-                <a16:creationId xmlns:a16="http://schemas.microsoft.com/office/drawing/2014/main" id="{AF2BEA59-B55D-0541-2614-A47DFDADA499}"/>
-              </a:ext>
-            </a:extLst>
-          </p:cNvPr>
-          <p:cNvSpPr>
-            <a:spLocks noGrp="1"/>
-          </p:cNvSpPr>
-          <p:nvPr>
-            <p:ph type="title"/>
-          </p:nvPr>
-        </p:nvSpPr>
-        <p:spPr/>
-        <p:txBody>
-          <a:bodyPr/>
-          <a:lstStyle/>
-          <a:p>
-            <a:endParaRPr lang="zh-CN" altLang="en-US"/>
-          </a:p>
-        </p:txBody>
-      </p:sp>
-      <p:sp>
-        <p:nvSpPr>
-          <p:cNvPr id="3" name="内容占位符 2">
-            <a:extLst>
-              <a:ext uri="{FF2B5EF4-FFF2-40B4-BE49-F238E27FC236}">
-                <a16:creationId xmlns:a16="http://schemas.microsoft.com/office/drawing/2014/main" id="{27DCC4AF-4979-ECBC-37AF-AC44E934A525}"/>
-              </a:ext>
-            </a:extLst>
-          </p:cNvPr>
-          <p:cNvSpPr>
-            <a:spLocks noGrp="1"/>
-          </p:cNvSpPr>
-          <p:nvPr>
-            <p:ph idx="1"/>
-          </p:nvPr>
-        </p:nvSpPr>
-        <p:spPr/>
-        <p:txBody>
-          <a:bodyPr/>
-          <a:lstStyle/>
-          <a:p>
-            <a:endParaRPr lang="zh-CN" altLang="en-US"/>
+      <p:pic>
+        <p:nvPicPr>
+          <p:cNvPr id="5" name="图形 4" descr="用户 纯色填充">
+            <a:extLst>
+              <a:ext uri="{FF2B5EF4-FFF2-40B4-BE49-F238E27FC236}">
+                <a16:creationId xmlns:a16="http://schemas.microsoft.com/office/drawing/2014/main" id="{8EB400D1-7A9C-F5A0-C004-AFD2A89F9B71}"/>
+              </a:ext>
+            </a:extLst>
+          </p:cNvPr>
+          <p:cNvPicPr>
+            <a:picLocks noChangeAspect="1"/>
+          </p:cNvPicPr>
+          <p:nvPr/>
+        </p:nvPicPr>
+        <p:blipFill>
+          <a:blip>
+            <a:extLst>
+              <a:ext uri="{96DAC541-7B7A-43D3-8B79-37D633B846F1}">
+                <asvg:svgBlip xmlns:asvg="http://schemas.microsoft.com/office/drawing/2016/SVG/main" r:embed="rId2"/>
+              </a:ext>
+            </a:extLst>
+          </a:blip>
+          <a:stretch>
+            <a:fillRect/>
+          </a:stretch>
+        </p:blipFill>
+        <p:spPr>
+          <a:xfrm>
+            <a:off x="420152" y="2638372"/>
+            <a:ext cx="914400" cy="914400"/>
+          </a:xfrm>
+          <a:prstGeom prst="rect">
+            <a:avLst/>
+          </a:prstGeom>
+        </p:spPr>
+      </p:pic>
+      <p:cxnSp>
+        <p:nvCxnSpPr>
+          <p:cNvPr id="7" name="直接箭头连接符 6">
+            <a:extLst>
+              <a:ext uri="{FF2B5EF4-FFF2-40B4-BE49-F238E27FC236}">
+                <a16:creationId xmlns:a16="http://schemas.microsoft.com/office/drawing/2014/main" id="{E2221E59-FCF5-FEC7-6336-C4F96CE4B084}"/>
+              </a:ext>
+            </a:extLst>
+          </p:cNvPr>
+          <p:cNvCxnSpPr/>
+          <p:nvPr/>
+        </p:nvCxnSpPr>
+        <p:spPr>
+          <a:xfrm>
+            <a:off x="1288243" y="3095572"/>
+            <a:ext cx="1217516" cy="0"/>
+          </a:xfrm>
+          <a:prstGeom prst="straightConnector1">
+            <a:avLst/>
+          </a:prstGeom>
+          <a:ln>
+            <a:tailEnd type="triangle"/>
+          </a:ln>
+        </p:spPr>
+        <p:style>
+          <a:lnRef idx="2">
+            <a:schemeClr val="dk1"/>
+          </a:lnRef>
+          <a:fillRef idx="0">
+            <a:schemeClr val="dk1"/>
+          </a:fillRef>
+          <a:effectRef idx="1">
+            <a:schemeClr val="dk1"/>
+          </a:effectRef>
+          <a:fontRef idx="minor">
+            <a:schemeClr val="tx1"/>
+          </a:fontRef>
+        </p:style>
+      </p:cxnSp>
+      <p:sp>
+        <p:nvSpPr>
+          <p:cNvPr id="8" name="文本框 7">
+            <a:extLst>
+              <a:ext uri="{FF2B5EF4-FFF2-40B4-BE49-F238E27FC236}">
+                <a16:creationId xmlns:a16="http://schemas.microsoft.com/office/drawing/2014/main" id="{B447B6FC-1FA2-E928-39D8-1EF63DE04037}"/>
+              </a:ext>
+            </a:extLst>
+          </p:cNvPr>
+          <p:cNvSpPr txBox="1"/>
+          <p:nvPr/>
+        </p:nvSpPr>
+        <p:spPr>
+          <a:xfrm>
+            <a:off x="1664612" y="2726240"/>
+            <a:ext cx="464778" cy="369332"/>
+          </a:xfrm>
+          <a:prstGeom prst="rect">
+            <a:avLst/>
+          </a:prstGeom>
+          <a:noFill/>
+        </p:spPr>
+        <p:txBody>
+          <a:bodyPr wrap="square" rtlCol="0">
+            <a:spAutoFit/>
+          </a:bodyPr>
+          <a:lstStyle/>
+          <a:p>
+            <a:r>
+              <a:rPr lang="en-US" altLang="zh-CN" b="1" dirty="0">
+                <a:latin typeface="Times New Roman" panose="02020603050405020304" pitchFamily="18" charset="0"/>
+                <a:cs typeface="Times New Roman" panose="02020603050405020304" pitchFamily="18" charset="0"/>
+              </a:rPr>
+              <a:t>Q</a:t>
+            </a:r>
+            <a:endParaRPr lang="zh-CN" altLang="en-US" b="1" dirty="0">
+              <a:latin typeface="Times New Roman" panose="02020603050405020304" pitchFamily="18" charset="0"/>
+              <a:cs typeface="Times New Roman" panose="02020603050405020304" pitchFamily="18" charset="0"/>
+            </a:endParaRPr>
+          </a:p>
+        </p:txBody>
+      </p:sp>
+      <p:pic>
+        <p:nvPicPr>
+          <p:cNvPr id="10" name="图形 9" descr="机器人 纯色填充">
+            <a:extLst>
+              <a:ext uri="{FF2B5EF4-FFF2-40B4-BE49-F238E27FC236}">
+                <a16:creationId xmlns:a16="http://schemas.microsoft.com/office/drawing/2014/main" id="{37EC01A9-137A-C0FB-7AA3-EC896217B92E}"/>
+              </a:ext>
+            </a:extLst>
+          </p:cNvPr>
+          <p:cNvPicPr>
+            <a:picLocks noChangeAspect="1"/>
+          </p:cNvPicPr>
+          <p:nvPr/>
+        </p:nvPicPr>
+        <p:blipFill>
+          <a:blip>
+            <a:extLst>
+              <a:ext uri="{96DAC541-7B7A-43D3-8B79-37D633B846F1}">
+                <asvg:svgBlip xmlns:asvg="http://schemas.microsoft.com/office/drawing/2016/SVG/main" r:embed="rId3"/>
+              </a:ext>
+            </a:extLst>
+          </a:blip>
+          <a:stretch>
+            <a:fillRect/>
+          </a:stretch>
+        </p:blipFill>
+        <p:spPr>
+          <a:xfrm>
+            <a:off x="2505759" y="2638372"/>
+            <a:ext cx="914400" cy="914400"/>
+          </a:xfrm>
+          <a:prstGeom prst="rect">
+            <a:avLst/>
+          </a:prstGeom>
+        </p:spPr>
+      </p:pic>
+      <p:cxnSp>
+        <p:nvCxnSpPr>
+          <p:cNvPr id="12" name="连接符: 肘形 11">
+            <a:extLst>
+              <a:ext uri="{FF2B5EF4-FFF2-40B4-BE49-F238E27FC236}">
+                <a16:creationId xmlns:a16="http://schemas.microsoft.com/office/drawing/2014/main" id="{2799C205-9243-AD31-5985-9670D9C4B5DE}"/>
+              </a:ext>
+            </a:extLst>
+          </p:cNvPr>
+          <p:cNvCxnSpPr>
+            <a:cxnSpLocks/>
+          </p:cNvCxnSpPr>
+          <p:nvPr/>
+        </p:nvCxnSpPr>
+        <p:spPr>
+          <a:xfrm rot="5400000" flipH="1" flipV="1">
+            <a:off x="2674999" y="1874268"/>
+            <a:ext cx="1667138" cy="565816"/>
+          </a:xfrm>
+          <a:prstGeom prst="bentConnector3">
+            <a:avLst>
+              <a:gd name="adj1" fmla="val 100606"/>
+            </a:avLst>
+          </a:prstGeom>
+          <a:ln>
+            <a:tailEnd type="triangle"/>
+          </a:ln>
+        </p:spPr>
+        <p:style>
+          <a:lnRef idx="2">
+            <a:schemeClr val="dk1"/>
+          </a:lnRef>
+          <a:fillRef idx="0">
+            <a:schemeClr val="dk1"/>
+          </a:fillRef>
+          <a:effectRef idx="1">
+            <a:schemeClr val="dk1"/>
+          </a:effectRef>
+          <a:fontRef idx="minor">
+            <a:schemeClr val="tx1"/>
+          </a:fontRef>
+        </p:style>
+      </p:cxnSp>
+      <p:pic>
+        <p:nvPicPr>
+          <p:cNvPr id="18" name="图形 17" descr="数据库 纯色填充">
+            <a:extLst>
+              <a:ext uri="{FF2B5EF4-FFF2-40B4-BE49-F238E27FC236}">
+                <a16:creationId xmlns:a16="http://schemas.microsoft.com/office/drawing/2014/main" id="{0DE137B8-A098-155F-38E9-981C26D4B4D7}"/>
+              </a:ext>
+            </a:extLst>
+          </p:cNvPr>
+          <p:cNvPicPr>
+            <a:picLocks noChangeAspect="1"/>
+          </p:cNvPicPr>
+          <p:nvPr/>
+        </p:nvPicPr>
+        <p:blipFill>
+          <a:blip>
+            <a:extLst>
+              <a:ext uri="{96DAC541-7B7A-43D3-8B79-37D633B846F1}">
+                <asvg:svgBlip xmlns:asvg="http://schemas.microsoft.com/office/drawing/2016/SVG/main" r:embed="rId4"/>
+              </a:ext>
+            </a:extLst>
+          </a:blip>
+          <a:stretch>
+            <a:fillRect/>
+          </a:stretch>
+        </p:blipFill>
+        <p:spPr>
+          <a:xfrm>
+            <a:off x="3791476" y="866407"/>
+            <a:ext cx="914400" cy="914400"/>
+          </a:xfrm>
+          <a:prstGeom prst="rect">
+            <a:avLst/>
+          </a:prstGeom>
+        </p:spPr>
+      </p:pic>
+      <p:sp>
+        <p:nvSpPr>
+          <p:cNvPr id="19" name="文本框 18">
+            <a:extLst>
+              <a:ext uri="{FF2B5EF4-FFF2-40B4-BE49-F238E27FC236}">
+                <a16:creationId xmlns:a16="http://schemas.microsoft.com/office/drawing/2014/main" id="{34A2CD19-93A7-D356-8403-82BF1CDC6F3A}"/>
+              </a:ext>
+            </a:extLst>
+          </p:cNvPr>
+          <p:cNvSpPr txBox="1"/>
+          <p:nvPr/>
+        </p:nvSpPr>
+        <p:spPr>
+          <a:xfrm>
+            <a:off x="3917774" y="641595"/>
+            <a:ext cx="788102" cy="369332"/>
+          </a:xfrm>
+          <a:prstGeom prst="rect">
+            <a:avLst/>
+          </a:prstGeom>
+          <a:noFill/>
+        </p:spPr>
+        <p:txBody>
+          <a:bodyPr wrap="square" rtlCol="0">
+            <a:spAutoFit/>
+          </a:bodyPr>
+          <a:lstStyle/>
+          <a:p>
+            <a:r>
+              <a:rPr lang="zh-CN" altLang="en-US" b="1" dirty="0">
+                <a:latin typeface="黑体" panose="02010609060101010101" pitchFamily="49" charset="-122"/>
+                <a:ea typeface="黑体" panose="02010609060101010101" pitchFamily="49" charset="-122"/>
+              </a:rPr>
+              <a:t>先验</a:t>
+            </a:r>
+          </a:p>
+        </p:txBody>
+      </p:sp>
+      <p:cxnSp>
+        <p:nvCxnSpPr>
+          <p:cNvPr id="21" name="连接符: 肘形 20">
+            <a:extLst>
+              <a:ext uri="{FF2B5EF4-FFF2-40B4-BE49-F238E27FC236}">
+                <a16:creationId xmlns:a16="http://schemas.microsoft.com/office/drawing/2014/main" id="{E52A9C7C-2FAF-FD44-6527-705A3A182191}"/>
+              </a:ext>
+            </a:extLst>
+          </p:cNvPr>
+          <p:cNvCxnSpPr>
+            <a:cxnSpLocks/>
+          </p:cNvCxnSpPr>
+          <p:nvPr/>
+        </p:nvCxnSpPr>
+        <p:spPr>
+          <a:xfrm rot="5400000">
+            <a:off x="3152618" y="1928786"/>
+            <a:ext cx="1314767" cy="1018808"/>
+          </a:xfrm>
+          <a:prstGeom prst="bentConnector3">
+            <a:avLst>
+              <a:gd name="adj1" fmla="val 99952"/>
+            </a:avLst>
+          </a:prstGeom>
+          <a:ln>
+            <a:tailEnd type="triangle"/>
+          </a:ln>
+        </p:spPr>
+        <p:style>
+          <a:lnRef idx="2">
+            <a:schemeClr val="dk1"/>
+          </a:lnRef>
+          <a:fillRef idx="0">
+            <a:schemeClr val="dk1"/>
+          </a:fillRef>
+          <a:effectRef idx="1">
+            <a:schemeClr val="dk1"/>
+          </a:effectRef>
+          <a:fontRef idx="minor">
+            <a:schemeClr val="tx1"/>
+          </a:fontRef>
+        </p:style>
+      </p:cxnSp>
+      <p:sp>
+        <p:nvSpPr>
+          <p:cNvPr id="25" name="文本框 24">
+            <a:extLst>
+              <a:ext uri="{FF2B5EF4-FFF2-40B4-BE49-F238E27FC236}">
+                <a16:creationId xmlns:a16="http://schemas.microsoft.com/office/drawing/2014/main" id="{11B693ED-050A-71EF-F08C-5559B158E3F1}"/>
+              </a:ext>
+            </a:extLst>
+          </p:cNvPr>
+          <p:cNvSpPr txBox="1"/>
+          <p:nvPr/>
+        </p:nvSpPr>
+        <p:spPr>
+          <a:xfrm>
+            <a:off x="4329506" y="2253524"/>
+            <a:ext cx="513615" cy="369332"/>
+          </a:xfrm>
+          <a:prstGeom prst="rect">
+            <a:avLst/>
+          </a:prstGeom>
+          <a:noFill/>
+        </p:spPr>
+        <p:txBody>
+          <a:bodyPr wrap="square" rtlCol="0">
+            <a:spAutoFit/>
+          </a:bodyPr>
+          <a:lstStyle/>
+          <a:p>
+            <a:r>
+              <a:rPr lang="en-US" altLang="zh-CN" b="1" dirty="0">
+                <a:latin typeface="Times New Roman" panose="02020603050405020304" pitchFamily="18" charset="0"/>
+                <a:cs typeface="Times New Roman" panose="02020603050405020304" pitchFamily="18" charset="0"/>
+              </a:rPr>
+              <a:t>Q+</a:t>
+            </a:r>
+            <a:endParaRPr lang="zh-CN" altLang="en-US" b="1" dirty="0">
+              <a:latin typeface="Times New Roman" panose="02020603050405020304" pitchFamily="18" charset="0"/>
+              <a:cs typeface="Times New Roman" panose="02020603050405020304" pitchFamily="18" charset="0"/>
+            </a:endParaRPr>
+          </a:p>
+        </p:txBody>
+      </p:sp>
+      <p:cxnSp>
+        <p:nvCxnSpPr>
+          <p:cNvPr id="30" name="直接箭头连接符 29">
+            <a:extLst>
+              <a:ext uri="{FF2B5EF4-FFF2-40B4-BE49-F238E27FC236}">
+                <a16:creationId xmlns:a16="http://schemas.microsoft.com/office/drawing/2014/main" id="{14C27359-162A-B8A8-C56A-A5D4704D2E3D}"/>
+              </a:ext>
+            </a:extLst>
+          </p:cNvPr>
+          <p:cNvCxnSpPr/>
+          <p:nvPr/>
+        </p:nvCxnSpPr>
+        <p:spPr>
+          <a:xfrm>
+            <a:off x="3300597" y="3192822"/>
+            <a:ext cx="2595010" cy="0"/>
+          </a:xfrm>
+          <a:prstGeom prst="straightConnector1">
+            <a:avLst/>
+          </a:prstGeom>
+          <a:ln>
+            <a:tailEnd type="triangle"/>
+          </a:ln>
+        </p:spPr>
+        <p:style>
+          <a:lnRef idx="2">
+            <a:schemeClr val="dk1"/>
+          </a:lnRef>
+          <a:fillRef idx="0">
+            <a:schemeClr val="dk1"/>
+          </a:fillRef>
+          <a:effectRef idx="1">
+            <a:schemeClr val="dk1"/>
+          </a:effectRef>
+          <a:fontRef idx="minor">
+            <a:schemeClr val="tx1"/>
+          </a:fontRef>
+        </p:style>
+      </p:cxnSp>
+      <p:sp>
+        <p:nvSpPr>
+          <p:cNvPr id="31" name="矩形: 圆角 30">
+            <a:extLst>
+              <a:ext uri="{FF2B5EF4-FFF2-40B4-BE49-F238E27FC236}">
+                <a16:creationId xmlns:a16="http://schemas.microsoft.com/office/drawing/2014/main" id="{1DE6B068-7A2C-397F-D2E5-70A600F84941}"/>
+              </a:ext>
+            </a:extLst>
+          </p:cNvPr>
+          <p:cNvSpPr/>
+          <p:nvPr/>
+        </p:nvSpPr>
+        <p:spPr>
+          <a:xfrm>
+            <a:off x="5905707" y="2357449"/>
+            <a:ext cx="308168" cy="1547696"/>
+          </a:xfrm>
+          <a:prstGeom prst="roundRect">
+            <a:avLst/>
+          </a:prstGeom>
+        </p:spPr>
+        <p:style>
+          <a:lnRef idx="2">
+            <a:schemeClr val="dk1"/>
+          </a:lnRef>
+          <a:fillRef idx="1">
+            <a:schemeClr val="lt1"/>
+          </a:fillRef>
+          <a:effectRef idx="0">
+            <a:schemeClr val="dk1"/>
+          </a:effectRef>
+          <a:fontRef idx="minor">
+            <a:schemeClr val="dk1"/>
+          </a:fontRef>
+        </p:style>
+        <p:txBody>
+          <a:bodyPr rtlCol="0" anchor="ctr"/>
+          <a:lstStyle/>
+          <a:p>
+            <a:pPr algn="ctr"/>
+            <a:r>
+              <a:rPr lang="zh-CN" altLang="en-US" b="1" dirty="0">
+                <a:latin typeface="黑体" panose="02010609060101010101" pitchFamily="49" charset="-122"/>
+                <a:ea typeface="黑体" panose="02010609060101010101" pitchFamily="49" charset="-122"/>
+              </a:rPr>
+              <a:t>规划</a:t>
+            </a:r>
+          </a:p>
+        </p:txBody>
+      </p:sp>
+      <p:sp>
+        <p:nvSpPr>
+          <p:cNvPr id="33" name="矩形: 圆角 32">
+            <a:extLst>
+              <a:ext uri="{FF2B5EF4-FFF2-40B4-BE49-F238E27FC236}">
+                <a16:creationId xmlns:a16="http://schemas.microsoft.com/office/drawing/2014/main" id="{717F8497-5D74-CD4F-A33A-7EF3E2CA1D7F}"/>
+              </a:ext>
+            </a:extLst>
+          </p:cNvPr>
+          <p:cNvSpPr/>
+          <p:nvPr/>
+        </p:nvSpPr>
+        <p:spPr>
+          <a:xfrm>
+            <a:off x="6272816" y="2357449"/>
+            <a:ext cx="308168" cy="1547696"/>
+          </a:xfrm>
+          <a:prstGeom prst="roundRect">
+            <a:avLst/>
+          </a:prstGeom>
+        </p:spPr>
+        <p:style>
+          <a:lnRef idx="2">
+            <a:schemeClr val="dk1"/>
+          </a:lnRef>
+          <a:fillRef idx="1">
+            <a:schemeClr val="lt1"/>
+          </a:fillRef>
+          <a:effectRef idx="0">
+            <a:schemeClr val="dk1"/>
+          </a:effectRef>
+          <a:fontRef idx="minor">
+            <a:schemeClr val="dk1"/>
+          </a:fontRef>
+        </p:style>
+        <p:txBody>
+          <a:bodyPr rtlCol="0" anchor="ctr"/>
+          <a:lstStyle/>
+          <a:p>
+            <a:pPr algn="ctr"/>
+            <a:r>
+              <a:rPr lang="zh-CN" altLang="en-US" b="1" dirty="0">
+                <a:latin typeface="黑体" panose="02010609060101010101" pitchFamily="49" charset="-122"/>
+                <a:ea typeface="黑体" panose="02010609060101010101" pitchFamily="49" charset="-122"/>
+              </a:rPr>
+              <a:t>调度</a:t>
+            </a:r>
+          </a:p>
+        </p:txBody>
+      </p:sp>
+      <p:sp>
+        <p:nvSpPr>
+          <p:cNvPr id="35" name="矩形: 圆角 34">
+            <a:extLst>
+              <a:ext uri="{FF2B5EF4-FFF2-40B4-BE49-F238E27FC236}">
+                <a16:creationId xmlns:a16="http://schemas.microsoft.com/office/drawing/2014/main" id="{A48533B8-D231-2C82-BE05-B218A9208743}"/>
+              </a:ext>
+            </a:extLst>
+          </p:cNvPr>
+          <p:cNvSpPr/>
+          <p:nvPr/>
+        </p:nvSpPr>
+        <p:spPr>
+          <a:xfrm>
+            <a:off x="6639925" y="2357449"/>
+            <a:ext cx="308168" cy="1547696"/>
+          </a:xfrm>
+          <a:prstGeom prst="roundRect">
+            <a:avLst/>
+          </a:prstGeom>
+        </p:spPr>
+        <p:style>
+          <a:lnRef idx="2">
+            <a:schemeClr val="dk1"/>
+          </a:lnRef>
+          <a:fillRef idx="1">
+            <a:schemeClr val="lt1"/>
+          </a:fillRef>
+          <a:effectRef idx="0">
+            <a:schemeClr val="dk1"/>
+          </a:effectRef>
+          <a:fontRef idx="minor">
+            <a:schemeClr val="dk1"/>
+          </a:fontRef>
+        </p:style>
+        <p:txBody>
+          <a:bodyPr rtlCol="0" anchor="ctr"/>
+          <a:lstStyle/>
+          <a:p>
+            <a:pPr algn="ctr"/>
+            <a:r>
+              <a:rPr lang="zh-CN" altLang="en-US" b="1" dirty="0">
+                <a:latin typeface="黑体" panose="02010609060101010101" pitchFamily="49" charset="-122"/>
+                <a:ea typeface="黑体" panose="02010609060101010101" pitchFamily="49" charset="-122"/>
+              </a:rPr>
+              <a:t>执行</a:t>
+            </a:r>
+          </a:p>
+        </p:txBody>
+      </p:sp>
+      <p:sp>
+        <p:nvSpPr>
+          <p:cNvPr id="37" name="矩形: 圆角 36">
+            <a:extLst>
+              <a:ext uri="{FF2B5EF4-FFF2-40B4-BE49-F238E27FC236}">
+                <a16:creationId xmlns:a16="http://schemas.microsoft.com/office/drawing/2014/main" id="{A303BD4C-86F0-5704-BBE0-2693D25D61AD}"/>
+              </a:ext>
+            </a:extLst>
+          </p:cNvPr>
+          <p:cNvSpPr/>
+          <p:nvPr/>
+        </p:nvSpPr>
+        <p:spPr>
+          <a:xfrm>
+            <a:off x="7007034" y="2357449"/>
+            <a:ext cx="308168" cy="1547696"/>
+          </a:xfrm>
+          <a:prstGeom prst="roundRect">
+            <a:avLst/>
+          </a:prstGeom>
+        </p:spPr>
+        <p:style>
+          <a:lnRef idx="2">
+            <a:schemeClr val="dk1"/>
+          </a:lnRef>
+          <a:fillRef idx="1">
+            <a:schemeClr val="lt1"/>
+          </a:fillRef>
+          <a:effectRef idx="0">
+            <a:schemeClr val="dk1"/>
+          </a:effectRef>
+          <a:fontRef idx="minor">
+            <a:schemeClr val="dk1"/>
+          </a:fontRef>
+        </p:style>
+        <p:txBody>
+          <a:bodyPr rtlCol="0" anchor="ctr"/>
+          <a:lstStyle/>
+          <a:p>
+            <a:pPr algn="ctr"/>
+            <a:r>
+              <a:rPr lang="zh-CN" altLang="en-US" b="1" dirty="0">
+                <a:latin typeface="黑体" panose="02010609060101010101" pitchFamily="49" charset="-122"/>
+                <a:ea typeface="黑体" panose="02010609060101010101" pitchFamily="49" charset="-122"/>
+              </a:rPr>
+              <a:t>反馈</a:t>
+            </a:r>
+          </a:p>
+        </p:txBody>
+      </p:sp>
+      <p:pic>
+        <p:nvPicPr>
+          <p:cNvPr id="39" name="图形 38" descr="箭头循环 纯色填充">
+            <a:extLst>
+              <a:ext uri="{FF2B5EF4-FFF2-40B4-BE49-F238E27FC236}">
+                <a16:creationId xmlns:a16="http://schemas.microsoft.com/office/drawing/2014/main" id="{D3D8CF79-B41A-699F-56E1-509DC04105B3}"/>
+              </a:ext>
+            </a:extLst>
+          </p:cNvPr>
+          <p:cNvPicPr>
+            <a:picLocks noChangeAspect="1"/>
+          </p:cNvPicPr>
+          <p:nvPr/>
+        </p:nvPicPr>
+        <p:blipFill>
+          <a:blip>
+            <a:extLst>
+              <a:ext uri="{96DAC541-7B7A-43D3-8B79-37D633B846F1}">
+                <asvg:svgBlip xmlns:asvg="http://schemas.microsoft.com/office/drawing/2016/SVG/main" r:embed="rId5"/>
+              </a:ext>
+            </a:extLst>
+          </a:blip>
+          <a:stretch>
+            <a:fillRect/>
+          </a:stretch>
+        </p:blipFill>
+        <p:spPr>
+          <a:xfrm>
+            <a:off x="6123784" y="1554102"/>
+            <a:ext cx="914400" cy="914400"/>
+          </a:xfrm>
+          <a:prstGeom prst="rect">
+            <a:avLst/>
+          </a:prstGeom>
+        </p:spPr>
+      </p:pic>
+      <p:cxnSp>
+        <p:nvCxnSpPr>
+          <p:cNvPr id="49" name="连接符: 肘形 48">
+            <a:extLst>
+              <a:ext uri="{FF2B5EF4-FFF2-40B4-BE49-F238E27FC236}">
+                <a16:creationId xmlns:a16="http://schemas.microsoft.com/office/drawing/2014/main" id="{05188DC3-5B02-9705-3610-6E2D4AFE3695}"/>
+              </a:ext>
+            </a:extLst>
+          </p:cNvPr>
+          <p:cNvCxnSpPr>
+            <a:cxnSpLocks/>
+          </p:cNvCxnSpPr>
+          <p:nvPr/>
+        </p:nvCxnSpPr>
+        <p:spPr>
+          <a:xfrm rot="10800000" flipV="1">
+            <a:off x="777999" y="4031440"/>
+            <a:ext cx="5861929" cy="1136687"/>
+          </a:xfrm>
+          <a:prstGeom prst="bentConnector3">
+            <a:avLst>
+              <a:gd name="adj1" fmla="val 15"/>
+            </a:avLst>
+          </a:prstGeom>
+        </p:spPr>
+        <p:style>
+          <a:lnRef idx="2">
+            <a:schemeClr val="dk1"/>
+          </a:lnRef>
+          <a:fillRef idx="0">
+            <a:schemeClr val="dk1"/>
+          </a:fillRef>
+          <a:effectRef idx="1">
+            <a:schemeClr val="dk1"/>
+          </a:effectRef>
+          <a:fontRef idx="minor">
+            <a:schemeClr val="tx1"/>
+          </a:fontRef>
+        </p:style>
+      </p:cxnSp>
+      <p:cxnSp>
+        <p:nvCxnSpPr>
+          <p:cNvPr id="55" name="直接箭头连接符 54">
+            <a:extLst>
+              <a:ext uri="{FF2B5EF4-FFF2-40B4-BE49-F238E27FC236}">
+                <a16:creationId xmlns:a16="http://schemas.microsoft.com/office/drawing/2014/main" id="{FAD21537-E99D-35B9-9C1F-FD7ECFE4B000}"/>
+              </a:ext>
+            </a:extLst>
+          </p:cNvPr>
+          <p:cNvCxnSpPr>
+            <a:cxnSpLocks/>
+          </p:cNvCxnSpPr>
+          <p:nvPr/>
+        </p:nvCxnSpPr>
+        <p:spPr>
+          <a:xfrm flipV="1">
+            <a:off x="777998" y="3627288"/>
+            <a:ext cx="0" cy="1540840"/>
+          </a:xfrm>
+          <a:prstGeom prst="straightConnector1">
+            <a:avLst/>
+          </a:prstGeom>
+          <a:ln>
+            <a:tailEnd type="triangle"/>
+          </a:ln>
+        </p:spPr>
+        <p:style>
+          <a:lnRef idx="2">
+            <a:schemeClr val="dk1"/>
+          </a:lnRef>
+          <a:fillRef idx="0">
+            <a:schemeClr val="dk1"/>
+          </a:fillRef>
+          <a:effectRef idx="1">
+            <a:schemeClr val="dk1"/>
+          </a:effectRef>
+          <a:fontRef idx="minor">
+            <a:schemeClr val="tx1"/>
+          </a:fontRef>
+        </p:style>
+      </p:cxnSp>
+      <p:sp>
+        <p:nvSpPr>
+          <p:cNvPr id="56" name="文本框 55">
+            <a:extLst>
+              <a:ext uri="{FF2B5EF4-FFF2-40B4-BE49-F238E27FC236}">
+                <a16:creationId xmlns:a16="http://schemas.microsoft.com/office/drawing/2014/main" id="{019CEED7-8029-3DF9-C541-F054581D15C2}"/>
+              </a:ext>
+            </a:extLst>
+          </p:cNvPr>
+          <p:cNvSpPr txBox="1"/>
+          <p:nvPr/>
+        </p:nvSpPr>
+        <p:spPr>
+          <a:xfrm>
+            <a:off x="3300597" y="5187791"/>
+            <a:ext cx="1126581" cy="369332"/>
+          </a:xfrm>
+          <a:prstGeom prst="rect">
+            <a:avLst/>
+          </a:prstGeom>
+          <a:noFill/>
+        </p:spPr>
+        <p:txBody>
+          <a:bodyPr wrap="square" rtlCol="0">
+            <a:spAutoFit/>
+          </a:bodyPr>
+          <a:lstStyle/>
+          <a:p>
+            <a:r>
+              <a:rPr lang="en-US" altLang="zh-CN" b="1" dirty="0">
+                <a:latin typeface="Times New Roman" panose="02020603050405020304" pitchFamily="18" charset="0"/>
+                <a:cs typeface="Times New Roman" panose="02020603050405020304" pitchFamily="18" charset="0"/>
+              </a:rPr>
+              <a:t>Results</a:t>
+            </a:r>
+            <a:endParaRPr lang="zh-CN" altLang="en-US" b="1" dirty="0">
+              <a:latin typeface="Times New Roman" panose="02020603050405020304" pitchFamily="18" charset="0"/>
+              <a:cs typeface="Times New Roman" panose="02020603050405020304" pitchFamily="18" charset="0"/>
+            </a:endParaRPr>
           </a:p>
         </p:txBody>
       </p:sp>
@@ -8296,18 +8998,34 @@
                 <a:ea typeface="黑体" panose="02010609060101010101" pitchFamily="49" charset="-122"/>
                 <a:cs typeface="Times New Roman" panose="02020603050405020304" pitchFamily="18" charset="0"/>
               </a:rPr>
-              <a:t>"/api/conversations/{conv_id}“</a:t>
-            </a:r>
-            <a:endParaRPr lang="en-US" altLang="zh-CN" dirty="0">
-              <a:solidFill>
-                <a:schemeClr val="accent6">
-                  <a:lumMod val="75000"/>
-                </a:schemeClr>
-              </a:solidFill>
-              <a:latin typeface="Times New Roman" panose="02020603050405020304" pitchFamily="18" charset="0"/>
-              <a:ea typeface="黑体" panose="02010609060101010101" pitchFamily="49" charset="-122"/>
-              <a:cs typeface="Times New Roman" panose="02020603050405020304" pitchFamily="18" charset="0"/>
-            </a:endParaRPr>
+              <a:t>“/api/conversations/{conv_id}</a:t>
+            </a:r>
+            <a:r>
+              <a:rPr lang="zh-CN" altLang="en-US" dirty="0">
+                <a:solidFill>
+                  <a:schemeClr val="accent6">
+                    <a:lumMod val="75000"/>
+                  </a:schemeClr>
+                </a:solidFill>
+                <a:latin typeface="Times New Roman" panose="02020603050405020304" pitchFamily="18" charset="0"/>
+                <a:ea typeface="黑体" panose="02010609060101010101" pitchFamily="49" charset="-122"/>
+                <a:cs typeface="Times New Roman" panose="02020603050405020304" pitchFamily="18" charset="0"/>
+              </a:rPr>
+              <a:t>”</a:t>
+            </a:r>
+            <a:r>
+              <a:rPr lang="en-US" altLang="zh-CN" dirty="0">
+                <a:solidFill>
+                  <a:schemeClr val="accent6">
+                    <a:lumMod val="75000"/>
+                  </a:schemeClr>
+                </a:solidFill>
+                <a:latin typeface="Times New Roman" panose="02020603050405020304" pitchFamily="18" charset="0"/>
+                <a:ea typeface="黑体" panose="02010609060101010101" pitchFamily="49" charset="-122"/>
+                <a:cs typeface="Times New Roman" panose="02020603050405020304" pitchFamily="18" charset="0"/>
+              </a:rPr>
+              <a:t>(patch)</a:t>
+            </a:r>
           </a:p>
           <a:p>
             <a:pPr lvl="2"/>
@@ -8505,122 +9223,6 @@
     <p:extLst>
       <p:ext uri="{BB962C8B-B14F-4D97-AF65-F5344CB8AC3E}">
         <p14:creationId xmlns:p14="http://schemas.microsoft.com/office/powerpoint/2010/main" val="3008543469"/>
-      </p:ext>
-    </p:extLst>
-  </p:cSld>
-  <p:clrMapOvr>
-    <a:masterClrMapping/>
-  </p:clrMapOvr>
-</p:sld>
-</file>
-
-<file path=ppt/slides/slide23.xml><?xml version="1.0" encoding="utf-8"?>
-<p:sld xmlns:a="http://schemas.openxmlformats.org/drawingml/2006/main" xmlns:r="http://schemas.openxmlformats.org/officeDocument/2006/relationships" xmlns:p="http://schemas.openxmlformats.org/presentationml/2006/main">
-  <p:cSld>
-    <p:spTree>
-      <p:nvGrpSpPr>
-        <p:cNvPr id="1" name="">
-          <a:extLst>
-            <a:ext uri="{FF2B5EF4-FFF2-40B4-BE49-F238E27FC236}">
-              <a16:creationId xmlns:a16="http://schemas.microsoft.com/office/drawing/2014/main" id="{52285615-8FAA-9544-7011-4E103E26787C}"/>
-            </a:ext>
-          </a:extLst>
-        </p:cNvPr>
-        <p:cNvGrpSpPr/>
-        <p:nvPr/>
-      </p:nvGrpSpPr>
-      <p:grpSpPr>
-        <a:xfrm>
-          <a:off x="0" y="0"/>
-          <a:ext cx="0" cy="0"/>
-          <a:chOff x="0" y="0"/>
-          <a:chExt cx="0" cy="0"/>
-        </a:xfrm>
-      </p:grpSpPr>
-      <p:sp>
-        <p:nvSpPr>
-          <p:cNvPr id="2" name="标题 1">
-            <a:extLst>
-              <a:ext uri="{FF2B5EF4-FFF2-40B4-BE49-F238E27FC236}">
-                <a16:creationId xmlns:a16="http://schemas.microsoft.com/office/drawing/2014/main" id="{8D1E07A9-6100-C79B-E208-1BC48612662A}"/>
-              </a:ext>
-            </a:extLst>
-          </p:cNvPr>
-          <p:cNvSpPr>
-            <a:spLocks noGrp="1"/>
-          </p:cNvSpPr>
-          <p:nvPr>
-            <p:ph type="title"/>
-          </p:nvPr>
-        </p:nvSpPr>
-        <p:spPr/>
-        <p:txBody>
-          <a:bodyPr/>
-          <a:lstStyle/>
-          <a:p>
-            <a:r>
-              <a:rPr lang="zh-CN" altLang="zh-CN" dirty="0">
-                <a:latin typeface="Times New Roman" panose="02020603050405020304" pitchFamily="18" charset="0"/>
-                <a:cs typeface="Times New Roman" panose="02020603050405020304" pitchFamily="18" charset="0"/>
-              </a:rPr>
-              <a:t>backend.api.server</a:t>
-            </a:r>
-            <a:r>
-              <a:rPr lang="en-US" altLang="zh-CN" dirty="0">
-                <a:latin typeface="Times New Roman" panose="02020603050405020304" pitchFamily="18" charset="0"/>
-                <a:cs typeface="Times New Roman" panose="02020603050405020304" pitchFamily="18" charset="0"/>
-              </a:rPr>
-              <a:t>.</a:t>
-            </a:r>
-            <a:r>
-              <a:rPr lang="en-US" altLang="zh-CN" dirty="0" err="1">
-                <a:latin typeface="Times New Roman" panose="02020603050405020304" pitchFamily="18" charset="0"/>
-                <a:cs typeface="Times New Roman" panose="02020603050405020304" pitchFamily="18" charset="0"/>
-              </a:rPr>
-              <a:t>py</a:t>
-            </a:r>
-            <a:endParaRPr lang="zh-CN" altLang="en-US" dirty="0">
-              <a:latin typeface="Times New Roman" panose="02020603050405020304" pitchFamily="18" charset="0"/>
-              <a:cs typeface="Times New Roman" panose="02020603050405020304" pitchFamily="18" charset="0"/>
-            </a:endParaRPr>
-          </a:p>
-        </p:txBody>
-      </p:sp>
-      <p:sp>
-        <p:nvSpPr>
-          <p:cNvPr id="3" name="内容占位符 2">
-            <a:extLst>
-              <a:ext uri="{FF2B5EF4-FFF2-40B4-BE49-F238E27FC236}">
-                <a16:creationId xmlns:a16="http://schemas.microsoft.com/office/drawing/2014/main" id="{D8BA4DF5-E6C3-6493-E3CD-C62449995812}"/>
-              </a:ext>
-            </a:extLst>
-          </p:cNvPr>
-          <p:cNvSpPr>
-            <a:spLocks noGrp="1"/>
-          </p:cNvSpPr>
-          <p:nvPr>
-            <p:ph idx="1"/>
-          </p:nvPr>
-        </p:nvSpPr>
-        <p:spPr/>
-        <p:txBody>
-          <a:bodyPr/>
-          <a:lstStyle/>
-          <a:p>
-            <a:r>
-              <a:rPr lang="zh-CN" altLang="en-US" dirty="0">
-                <a:latin typeface="黑体" panose="02010609060101010101" pitchFamily="49" charset="-122"/>
-                <a:ea typeface="黑体" panose="02010609060101010101" pitchFamily="49" charset="-122"/>
-              </a:rPr>
-              <a:t>后端接口</a:t>
-            </a:r>
-          </a:p>
-        </p:txBody>
-      </p:sp>
-    </p:spTree>
-    <p:extLst>
-      <p:ext uri="{BB962C8B-B14F-4D97-AF65-F5344CB8AC3E}">
-        <p14:creationId xmlns:p14="http://schemas.microsoft.com/office/powerpoint/2010/main" val="3112401604"/>
       </p:ext>
     </p:extLst>
   </p:cSld>

--- a/PPT/Bioinformatics_Agent_Architecture.pptx
+++ b/PPT/Bioinformatics_Agent_Architecture.pptx
@@ -5,7 +5,7 @@
     <p:sldMasterId id="2147483648" r:id="rId1"/>
   </p:sldMasterIdLst>
   <p:notesMasterIdLst>
-    <p:notesMasterId r:id="rId24"/>
+    <p:notesMasterId r:id="rId21"/>
   </p:notesMasterIdLst>
   <p:sldIdLst>
     <p:sldId id="256" r:id="rId2"/>
@@ -17,24 +17,21 @@
     <p:sldId id="262" r:id="rId8"/>
     <p:sldId id="263" r:id="rId9"/>
     <p:sldId id="264" r:id="rId10"/>
-    <p:sldId id="270" r:id="rId11"/>
-    <p:sldId id="277" r:id="rId12"/>
-    <p:sldId id="278" r:id="rId13"/>
-    <p:sldId id="276" r:id="rId14"/>
-    <p:sldId id="265" r:id="rId15"/>
-    <p:sldId id="266" r:id="rId16"/>
-    <p:sldId id="267" r:id="rId17"/>
-    <p:sldId id="268" r:id="rId18"/>
-    <p:sldId id="271" r:id="rId19"/>
-    <p:sldId id="269" r:id="rId20"/>
-    <p:sldId id="274" r:id="rId21"/>
-    <p:sldId id="272" r:id="rId22"/>
-    <p:sldId id="275" r:id="rId23"/>
+    <p:sldId id="278" r:id="rId11"/>
+    <p:sldId id="265" r:id="rId12"/>
+    <p:sldId id="266" r:id="rId13"/>
+    <p:sldId id="267" r:id="rId14"/>
+    <p:sldId id="268" r:id="rId15"/>
+    <p:sldId id="271" r:id="rId16"/>
+    <p:sldId id="269" r:id="rId17"/>
+    <p:sldId id="274" r:id="rId18"/>
+    <p:sldId id="272" r:id="rId19"/>
+    <p:sldId id="275" r:id="rId20"/>
   </p:sldIdLst>
   <p:sldSz cx="12192000" cy="6858000"/>
   <p:notesSz cx="6858000" cy="9144000"/>
   <p:custDataLst>
-    <p:tags r:id="rId25"/>
+    <p:tags r:id="rId22"/>
   </p:custDataLst>
   <p:defaultTextStyle>
     <a:defPPr>
@@ -221,7 +218,7 @@
           <a:p>
             <a:fld id="{C3A3113A-A8F2-41E1-BE9A-B655091E6EC1}" type="datetimeFigureOut">
               <a:rPr lang="zh-CN" altLang="en-US" smtClean="0"/>
-              <a:t>2026/7/13</a:t>
+              <a:t>2026/7/15</a:t>
             </a:fld>
             <a:endParaRPr lang="zh-CN" altLang="en-US"/>
           </a:p>
@@ -533,8 +530,8 @@
           <a:lstStyle/>
           <a:p>
             <a:r>
-              <a:rPr lang="en-US" altLang="zh-CN" dirty="0" err="1"/>
-              <a:t>ToDo</a:t>
+              <a:rPr lang="en-US" altLang="zh-CN" dirty="0"/>
+              <a:t>P:planner   S:search  R:review_search   A:parse  C:compare  T:report  E:review_results</a:t>
             </a:r>
             <a:endParaRPr lang="zh-CN" altLang="en-US" dirty="0"/>
           </a:p>
@@ -566,7 +563,7 @@
     </p:spTree>
     <p:extLst>
       <p:ext uri="{BB962C8B-B14F-4D97-AF65-F5344CB8AC3E}">
-        <p14:creationId xmlns:p14="http://schemas.microsoft.com/office/powerpoint/2010/main" val="149715509"/>
+        <p14:creationId xmlns:p14="http://schemas.microsoft.com/office/powerpoint/2010/main" val="1516324077"/>
       </p:ext>
     </p:extLst>
   </p:cSld>
@@ -581,13 +578,7 @@
   <p:cSld>
     <p:spTree>
       <p:nvGrpSpPr>
-        <p:cNvPr id="1" name="">
-          <a:extLst>
-            <a:ext uri="{FF2B5EF4-FFF2-40B4-BE49-F238E27FC236}">
-              <a16:creationId xmlns:a16="http://schemas.microsoft.com/office/drawing/2014/main" id="{82E645CD-5A42-B747-BFAE-8BE3C81C3F3B}"/>
-            </a:ext>
-          </a:extLst>
-        </p:cNvPr>
+        <p:cNvPr id="1" name=""/>
         <p:cNvGrpSpPr/>
         <p:nvPr/>
       </p:nvGrpSpPr>
@@ -601,13 +592,7 @@
       </p:grpSpPr>
       <p:sp>
         <p:nvSpPr>
-          <p:cNvPr id="2" name="幻灯片图像占位符 1">
-            <a:extLst>
-              <a:ext uri="{FF2B5EF4-FFF2-40B4-BE49-F238E27FC236}">
-                <a16:creationId xmlns:a16="http://schemas.microsoft.com/office/drawing/2014/main" id="{67E840B9-39AA-D0F1-885D-257D85AA55B6}"/>
-              </a:ext>
-            </a:extLst>
-          </p:cNvPr>
+          <p:cNvPr id="2" name="幻灯片图像占位符 1"/>
           <p:cNvSpPr>
             <a:spLocks noGrp="1" noRot="1" noChangeAspect="1"/>
           </p:cNvSpPr>
@@ -619,13 +604,7 @@
       </p:sp>
       <p:sp>
         <p:nvSpPr>
-          <p:cNvPr id="3" name="备注占位符 2">
-            <a:extLst>
-              <a:ext uri="{FF2B5EF4-FFF2-40B4-BE49-F238E27FC236}">
-                <a16:creationId xmlns:a16="http://schemas.microsoft.com/office/drawing/2014/main" id="{109C1A1A-3C84-7B4C-A17D-17AA222272E7}"/>
-              </a:ext>
-            </a:extLst>
-          </p:cNvPr>
+          <p:cNvPr id="3" name="备注占位符 2"/>
           <p:cNvSpPr>
             <a:spLocks noGrp="1"/>
           </p:cNvSpPr>
@@ -638,23 +617,37 @@
           <a:bodyPr/>
           <a:lstStyle/>
           <a:p>
+            <a:pPr marL="0" marR="0" lvl="0" indent="0" algn="l" defTabSz="914400" rtl="0" eaLnBrk="1" fontAlgn="auto" latinLnBrk="0" hangingPunct="1">
+              <a:lnSpc>
+                <a:spcPct val="100000"/>
+              </a:lnSpc>
+              <a:spcBef>
+                <a:spcPts val="0"/>
+              </a:spcBef>
+              <a:spcAft>
+                <a:spcPts val="0"/>
+              </a:spcAft>
+              <a:buClrTx/>
+              <a:buSzTx/>
+              <a:buFontTx/>
+              <a:buNone/>
+              <a:tabLst/>
+              <a:defRPr/>
+            </a:pPr>
             <a:r>
               <a:rPr lang="en-US" altLang="zh-CN" dirty="0" err="1"/>
               <a:t>ToDo</a:t>
             </a:r>
             <a:endParaRPr lang="zh-CN" altLang="en-US" dirty="0"/>
           </a:p>
-        </p:txBody>
-      </p:sp>
-      <p:sp>
-        <p:nvSpPr>
-          <p:cNvPr id="4" name="灯片编号占位符 3">
-            <a:extLst>
-              <a:ext uri="{FF2B5EF4-FFF2-40B4-BE49-F238E27FC236}">
-                <a16:creationId xmlns:a16="http://schemas.microsoft.com/office/drawing/2014/main" id="{D7B78025-965E-3DF8-910E-452F52919D67}"/>
-              </a:ext>
-            </a:extLst>
-          </p:cNvPr>
+          <a:p>
+            <a:endParaRPr lang="zh-CN" altLang="en-US" dirty="0"/>
+          </a:p>
+        </p:txBody>
+      </p:sp>
+      <p:sp>
+        <p:nvSpPr>
+          <p:cNvPr id="4" name="灯片编号占位符 3"/>
           <p:cNvSpPr>
             <a:spLocks noGrp="1"/>
           </p:cNvSpPr>
@@ -678,7 +671,7 @@
     </p:spTree>
     <p:extLst>
       <p:ext uri="{BB962C8B-B14F-4D97-AF65-F5344CB8AC3E}">
-        <p14:creationId xmlns:p14="http://schemas.microsoft.com/office/powerpoint/2010/main" val="2532790042"/>
+        <p14:creationId xmlns:p14="http://schemas.microsoft.com/office/powerpoint/2010/main" val="1114663592"/>
       </p:ext>
     </p:extLst>
   </p:cSld>
@@ -732,10 +725,6 @@
           <a:bodyPr/>
           <a:lstStyle/>
           <a:p>
-            <a:r>
-              <a:rPr lang="en-US" altLang="zh-CN" dirty="0"/>
-              <a:t>P:planner   S:search  R:review_search   A:parse  C:compare  T:report  E:review_results</a:t>
-            </a:r>
             <a:endParaRPr lang="zh-CN" altLang="en-US" dirty="0"/>
           </a:p>
         </p:txBody>
@@ -757,7 +746,7 @@
           <a:p>
             <a:fld id="{03498E8F-0E88-4000-8EEC-96D622E5BCA8}" type="slidenum">
               <a:rPr lang="zh-CN" altLang="en-US" smtClean="0"/>
-              <a:t>12</a:t>
+              <a:t>18</a:t>
             </a:fld>
             <a:endParaRPr lang="zh-CN" altLang="en-US"/>
           </a:p>
@@ -766,227 +755,7 @@
     </p:spTree>
     <p:extLst>
       <p:ext uri="{BB962C8B-B14F-4D97-AF65-F5344CB8AC3E}">
-        <p14:creationId xmlns:p14="http://schemas.microsoft.com/office/powerpoint/2010/main" val="1516324077"/>
-      </p:ext>
-    </p:extLst>
-  </p:cSld>
-  <p:clrMapOvr>
-    <a:masterClrMapping/>
-  </p:clrMapOvr>
-</p:notes>
-</file>
-
-<file path=ppt/notesSlides/notesSlide4.xml><?xml version="1.0" encoding="utf-8"?>
-<p:notes xmlns:a="http://schemas.openxmlformats.org/drawingml/2006/main" xmlns:r="http://schemas.openxmlformats.org/officeDocument/2006/relationships" xmlns:p="http://schemas.openxmlformats.org/presentationml/2006/main">
-  <p:cSld>
-    <p:spTree>
-      <p:nvGrpSpPr>
-        <p:cNvPr id="1" name="">
-          <a:extLst>
-            <a:ext uri="{FF2B5EF4-FFF2-40B4-BE49-F238E27FC236}">
-              <a16:creationId xmlns:a16="http://schemas.microsoft.com/office/drawing/2014/main" id="{1DBA6054-3D95-33A9-6F9D-A0E57CFC7208}"/>
-            </a:ext>
-          </a:extLst>
-        </p:cNvPr>
-        <p:cNvGrpSpPr/>
-        <p:nvPr/>
-      </p:nvGrpSpPr>
-      <p:grpSpPr>
-        <a:xfrm>
-          <a:off x="0" y="0"/>
-          <a:ext cx="0" cy="0"/>
-          <a:chOff x="0" y="0"/>
-          <a:chExt cx="0" cy="0"/>
-        </a:xfrm>
-      </p:grpSpPr>
-      <p:sp>
-        <p:nvSpPr>
-          <p:cNvPr id="2" name="幻灯片图像占位符 1">
-            <a:extLst>
-              <a:ext uri="{FF2B5EF4-FFF2-40B4-BE49-F238E27FC236}">
-                <a16:creationId xmlns:a16="http://schemas.microsoft.com/office/drawing/2014/main" id="{99C9EBF2-56BF-106F-A3DD-E81B03649AEC}"/>
-              </a:ext>
-            </a:extLst>
-          </p:cNvPr>
-          <p:cNvSpPr>
-            <a:spLocks noGrp="1" noRot="1" noChangeAspect="1"/>
-          </p:cNvSpPr>
-          <p:nvPr>
-            <p:ph type="sldImg"/>
-          </p:nvPr>
-        </p:nvSpPr>
-        <p:spPr/>
-      </p:sp>
-      <p:sp>
-        <p:nvSpPr>
-          <p:cNvPr id="3" name="备注占位符 2">
-            <a:extLst>
-              <a:ext uri="{FF2B5EF4-FFF2-40B4-BE49-F238E27FC236}">
-                <a16:creationId xmlns:a16="http://schemas.microsoft.com/office/drawing/2014/main" id="{AD35145B-6B5E-ADCB-370A-B903B869B003}"/>
-              </a:ext>
-            </a:extLst>
-          </p:cNvPr>
-          <p:cNvSpPr>
-            <a:spLocks noGrp="1"/>
-          </p:cNvSpPr>
-          <p:nvPr>
-            <p:ph type="body" idx="1"/>
-          </p:nvPr>
-        </p:nvSpPr>
-        <p:spPr/>
-        <p:txBody>
-          <a:bodyPr/>
-          <a:lstStyle/>
-          <a:p>
-            <a:r>
-              <a:rPr lang="en-US" altLang="zh-CN" dirty="0" err="1"/>
-              <a:t>ToDo</a:t>
-            </a:r>
-            <a:endParaRPr lang="zh-CN" altLang="en-US" dirty="0"/>
-          </a:p>
-        </p:txBody>
-      </p:sp>
-      <p:sp>
-        <p:nvSpPr>
-          <p:cNvPr id="4" name="灯片编号占位符 3">
-            <a:extLst>
-              <a:ext uri="{FF2B5EF4-FFF2-40B4-BE49-F238E27FC236}">
-                <a16:creationId xmlns:a16="http://schemas.microsoft.com/office/drawing/2014/main" id="{0690CC78-620E-E69E-A29A-0BAAD31BEDBC}"/>
-              </a:ext>
-            </a:extLst>
-          </p:cNvPr>
-          <p:cNvSpPr>
-            <a:spLocks noGrp="1"/>
-          </p:cNvSpPr>
-          <p:nvPr>
-            <p:ph type="sldNum" sz="quarter" idx="5"/>
-          </p:nvPr>
-        </p:nvSpPr>
-        <p:spPr/>
-        <p:txBody>
-          <a:bodyPr/>
-          <a:lstStyle/>
-          <a:p>
-            <a:fld id="{03498E8F-0E88-4000-8EEC-96D622E5BCA8}" type="slidenum">
-              <a:rPr lang="zh-CN" altLang="en-US" smtClean="0"/>
-              <a:t>13</a:t>
-            </a:fld>
-            <a:endParaRPr lang="zh-CN" altLang="en-US"/>
-          </a:p>
-        </p:txBody>
-      </p:sp>
-    </p:spTree>
-    <p:extLst>
-      <p:ext uri="{BB962C8B-B14F-4D97-AF65-F5344CB8AC3E}">
-        <p14:creationId xmlns:p14="http://schemas.microsoft.com/office/powerpoint/2010/main" val="3300291206"/>
-      </p:ext>
-    </p:extLst>
-  </p:cSld>
-  <p:clrMapOvr>
-    <a:masterClrMapping/>
-  </p:clrMapOvr>
-</p:notes>
-</file>
-
-<file path=ppt/notesSlides/notesSlide5.xml><?xml version="1.0" encoding="utf-8"?>
-<p:notes xmlns:a="http://schemas.openxmlformats.org/drawingml/2006/main" xmlns:r="http://schemas.openxmlformats.org/officeDocument/2006/relationships" xmlns:p="http://schemas.openxmlformats.org/presentationml/2006/main">
-  <p:cSld>
-    <p:spTree>
-      <p:nvGrpSpPr>
-        <p:cNvPr id="1" name=""/>
-        <p:cNvGrpSpPr/>
-        <p:nvPr/>
-      </p:nvGrpSpPr>
-      <p:grpSpPr>
-        <a:xfrm>
-          <a:off x="0" y="0"/>
-          <a:ext cx="0" cy="0"/>
-          <a:chOff x="0" y="0"/>
-          <a:chExt cx="0" cy="0"/>
-        </a:xfrm>
-      </p:grpSpPr>
-      <p:sp>
-        <p:nvSpPr>
-          <p:cNvPr id="2" name="幻灯片图像占位符 1"/>
-          <p:cNvSpPr>
-            <a:spLocks noGrp="1" noRot="1" noChangeAspect="1"/>
-          </p:cNvSpPr>
-          <p:nvPr>
-            <p:ph type="sldImg"/>
-          </p:nvPr>
-        </p:nvSpPr>
-        <p:spPr/>
-      </p:sp>
-      <p:sp>
-        <p:nvSpPr>
-          <p:cNvPr id="3" name="备注占位符 2"/>
-          <p:cNvSpPr>
-            <a:spLocks noGrp="1"/>
-          </p:cNvSpPr>
-          <p:nvPr>
-            <p:ph type="body" idx="1"/>
-          </p:nvPr>
-        </p:nvSpPr>
-        <p:spPr/>
-        <p:txBody>
-          <a:bodyPr/>
-          <a:lstStyle/>
-          <a:p>
-            <a:pPr marL="0" marR="0" lvl="0" indent="0" algn="l" defTabSz="914400" rtl="0" eaLnBrk="1" fontAlgn="auto" latinLnBrk="0" hangingPunct="1">
-              <a:lnSpc>
-                <a:spcPct val="100000"/>
-              </a:lnSpc>
-              <a:spcBef>
-                <a:spcPts val="0"/>
-              </a:spcBef>
-              <a:spcAft>
-                <a:spcPts val="0"/>
-              </a:spcAft>
-              <a:buClrTx/>
-              <a:buSzTx/>
-              <a:buFontTx/>
-              <a:buNone/>
-              <a:tabLst/>
-              <a:defRPr/>
-            </a:pPr>
-            <a:r>
-              <a:rPr lang="en-US" altLang="zh-CN" dirty="0" err="1"/>
-              <a:t>ToDo</a:t>
-            </a:r>
-            <a:endParaRPr lang="zh-CN" altLang="en-US" dirty="0"/>
-          </a:p>
-          <a:p>
-            <a:endParaRPr lang="zh-CN" altLang="en-US" dirty="0"/>
-          </a:p>
-        </p:txBody>
-      </p:sp>
-      <p:sp>
-        <p:nvSpPr>
-          <p:cNvPr id="4" name="灯片编号占位符 3"/>
-          <p:cNvSpPr>
-            <a:spLocks noGrp="1"/>
-          </p:cNvSpPr>
-          <p:nvPr>
-            <p:ph type="sldNum" sz="quarter" idx="5"/>
-          </p:nvPr>
-        </p:nvSpPr>
-        <p:spPr/>
-        <p:txBody>
-          <a:bodyPr/>
-          <a:lstStyle/>
-          <a:p>
-            <a:fld id="{03498E8F-0E88-4000-8EEC-96D622E5BCA8}" type="slidenum">
-              <a:rPr lang="zh-CN" altLang="en-US" smtClean="0"/>
-              <a:t>14</a:t>
-            </a:fld>
-            <a:endParaRPr lang="zh-CN" altLang="en-US"/>
-          </a:p>
-        </p:txBody>
-      </p:sp>
-    </p:spTree>
-    <p:extLst>
-      <p:ext uri="{BB962C8B-B14F-4D97-AF65-F5344CB8AC3E}">
-        <p14:creationId xmlns:p14="http://schemas.microsoft.com/office/powerpoint/2010/main" val="1114663592"/>
+        <p14:creationId xmlns:p14="http://schemas.microsoft.com/office/powerpoint/2010/main" val="1161655232"/>
       </p:ext>
     </p:extLst>
   </p:cSld>
@@ -1143,7 +912,7 @@
           <a:p>
             <a:fld id="{91418217-8E16-49AE-98DB-91CE6F89811F}" type="datetimeFigureOut">
               <a:rPr lang="zh-CN" altLang="en-US" smtClean="0"/>
-              <a:t>2026/7/13</a:t>
+              <a:t>2026/7/15</a:t>
             </a:fld>
             <a:endParaRPr lang="zh-CN" altLang="en-US"/>
           </a:p>
@@ -1341,7 +1110,7 @@
           <a:p>
             <a:fld id="{91418217-8E16-49AE-98DB-91CE6F89811F}" type="datetimeFigureOut">
               <a:rPr lang="zh-CN" altLang="en-US" smtClean="0"/>
-              <a:t>2026/7/13</a:t>
+              <a:t>2026/7/15</a:t>
             </a:fld>
             <a:endParaRPr lang="zh-CN" altLang="en-US"/>
           </a:p>
@@ -1549,7 +1318,7 @@
           <a:p>
             <a:fld id="{91418217-8E16-49AE-98DB-91CE6F89811F}" type="datetimeFigureOut">
               <a:rPr lang="zh-CN" altLang="en-US" smtClean="0"/>
-              <a:t>2026/7/13</a:t>
+              <a:t>2026/7/15</a:t>
             </a:fld>
             <a:endParaRPr lang="zh-CN" altLang="en-US"/>
           </a:p>
@@ -1747,7 +1516,7 @@
           <a:p>
             <a:fld id="{91418217-8E16-49AE-98DB-91CE6F89811F}" type="datetimeFigureOut">
               <a:rPr lang="zh-CN" altLang="en-US" smtClean="0"/>
-              <a:t>2026/7/13</a:t>
+              <a:t>2026/7/15</a:t>
             </a:fld>
             <a:endParaRPr lang="zh-CN" altLang="en-US"/>
           </a:p>
@@ -2022,7 +1791,7 @@
           <a:p>
             <a:fld id="{91418217-8E16-49AE-98DB-91CE6F89811F}" type="datetimeFigureOut">
               <a:rPr lang="zh-CN" altLang="en-US" smtClean="0"/>
-              <a:t>2026/7/13</a:t>
+              <a:t>2026/7/15</a:t>
             </a:fld>
             <a:endParaRPr lang="zh-CN" altLang="en-US"/>
           </a:p>
@@ -2287,7 +2056,7 @@
           <a:p>
             <a:fld id="{91418217-8E16-49AE-98DB-91CE6F89811F}" type="datetimeFigureOut">
               <a:rPr lang="zh-CN" altLang="en-US" smtClean="0"/>
-              <a:t>2026/7/13</a:t>
+              <a:t>2026/7/15</a:t>
             </a:fld>
             <a:endParaRPr lang="zh-CN" altLang="en-US"/>
           </a:p>
@@ -2699,7 +2468,7 @@
           <a:p>
             <a:fld id="{91418217-8E16-49AE-98DB-91CE6F89811F}" type="datetimeFigureOut">
               <a:rPr lang="zh-CN" altLang="en-US" smtClean="0"/>
-              <a:t>2026/7/13</a:t>
+              <a:t>2026/7/15</a:t>
             </a:fld>
             <a:endParaRPr lang="zh-CN" altLang="en-US"/>
           </a:p>
@@ -2840,7 +2609,7 @@
           <a:p>
             <a:fld id="{91418217-8E16-49AE-98DB-91CE6F89811F}" type="datetimeFigureOut">
               <a:rPr lang="zh-CN" altLang="en-US" smtClean="0"/>
-              <a:t>2026/7/13</a:t>
+              <a:t>2026/7/15</a:t>
             </a:fld>
             <a:endParaRPr lang="zh-CN" altLang="en-US"/>
           </a:p>
@@ -2953,7 +2722,7 @@
           <a:p>
             <a:fld id="{91418217-8E16-49AE-98DB-91CE6F89811F}" type="datetimeFigureOut">
               <a:rPr lang="zh-CN" altLang="en-US" smtClean="0"/>
-              <a:t>2026/7/13</a:t>
+              <a:t>2026/7/15</a:t>
             </a:fld>
             <a:endParaRPr lang="zh-CN" altLang="en-US"/>
           </a:p>
@@ -3264,7 +3033,7 @@
           <a:p>
             <a:fld id="{91418217-8E16-49AE-98DB-91CE6F89811F}" type="datetimeFigureOut">
               <a:rPr lang="zh-CN" altLang="en-US" smtClean="0"/>
-              <a:t>2026/7/13</a:t>
+              <a:t>2026/7/15</a:t>
             </a:fld>
             <a:endParaRPr lang="zh-CN" altLang="en-US"/>
           </a:p>
@@ -3552,7 +3321,7 @@
           <a:p>
             <a:fld id="{91418217-8E16-49AE-98DB-91CE6F89811F}" type="datetimeFigureOut">
               <a:rPr lang="zh-CN" altLang="en-US" smtClean="0"/>
-              <a:t>2026/7/13</a:t>
+              <a:t>2026/7/15</a:t>
             </a:fld>
             <a:endParaRPr lang="zh-CN" altLang="en-US"/>
           </a:p>
@@ -3793,7 +3562,7 @@
           <a:p>
             <a:fld id="{91418217-8E16-49AE-98DB-91CE6F89811F}" type="datetimeFigureOut">
               <a:rPr lang="zh-CN" altLang="en-US" smtClean="0"/>
-              <a:t>2026/7/13</a:t>
+              <a:t>2026/7/15</a:t>
             </a:fld>
             <a:endParaRPr lang="zh-CN" altLang="en-US"/>
           </a:p>
@@ -4290,486 +4059,6 @@
   <p:cSld>
     <p:spTree>
       <p:nvGrpSpPr>
-        <p:cNvPr id="1" name="">
-          <a:extLst>
-            <a:ext uri="{FF2B5EF4-FFF2-40B4-BE49-F238E27FC236}">
-              <a16:creationId xmlns:a16="http://schemas.microsoft.com/office/drawing/2014/main" id="{2FE30D8A-F40A-9238-C4B5-F3B0EC85C537}"/>
-            </a:ext>
-          </a:extLst>
-        </p:cNvPr>
-        <p:cNvGrpSpPr/>
-        <p:nvPr/>
-      </p:nvGrpSpPr>
-      <p:grpSpPr>
-        <a:xfrm>
-          <a:off x="0" y="0"/>
-          <a:ext cx="0" cy="0"/>
-          <a:chOff x="0" y="0"/>
-          <a:chExt cx="0" cy="0"/>
-        </a:xfrm>
-      </p:grpSpPr>
-      <p:sp>
-        <p:nvSpPr>
-          <p:cNvPr id="2" name="标题 1">
-            <a:extLst>
-              <a:ext uri="{FF2B5EF4-FFF2-40B4-BE49-F238E27FC236}">
-                <a16:creationId xmlns:a16="http://schemas.microsoft.com/office/drawing/2014/main" id="{B0D37A57-6D1C-E215-3347-CFCB062F40E8}"/>
-              </a:ext>
-            </a:extLst>
-          </p:cNvPr>
-          <p:cNvSpPr>
-            <a:spLocks noGrp="1"/>
-          </p:cNvSpPr>
-          <p:nvPr>
-            <p:ph type="title"/>
-          </p:nvPr>
-        </p:nvSpPr>
-        <p:spPr/>
-        <p:txBody>
-          <a:bodyPr/>
-          <a:lstStyle/>
-          <a:p>
-            <a:r>
-              <a:rPr lang="zh-CN" altLang="zh-CN" dirty="0">
-                <a:latin typeface="Times New Roman" panose="02020603050405020304" pitchFamily="18" charset="0"/>
-                <a:cs typeface="Times New Roman" panose="02020603050405020304" pitchFamily="18" charset="0"/>
-              </a:rPr>
-              <a:t>backend.api.server</a:t>
-            </a:r>
-            <a:r>
-              <a:rPr lang="en-US" altLang="zh-CN" dirty="0">
-                <a:latin typeface="Times New Roman" panose="02020603050405020304" pitchFamily="18" charset="0"/>
-                <a:cs typeface="Times New Roman" panose="02020603050405020304" pitchFamily="18" charset="0"/>
-              </a:rPr>
-              <a:t>.</a:t>
-            </a:r>
-            <a:r>
-              <a:rPr lang="en-US" altLang="zh-CN" dirty="0" err="1">
-                <a:latin typeface="Times New Roman" panose="02020603050405020304" pitchFamily="18" charset="0"/>
-                <a:cs typeface="Times New Roman" panose="02020603050405020304" pitchFamily="18" charset="0"/>
-              </a:rPr>
-              <a:t>py</a:t>
-            </a:r>
-            <a:endParaRPr lang="zh-CN" altLang="en-US" dirty="0">
-              <a:latin typeface="Times New Roman" panose="02020603050405020304" pitchFamily="18" charset="0"/>
-              <a:cs typeface="Times New Roman" panose="02020603050405020304" pitchFamily="18" charset="0"/>
-            </a:endParaRPr>
-          </a:p>
-        </p:txBody>
-      </p:sp>
-      <p:sp>
-        <p:nvSpPr>
-          <p:cNvPr id="3" name="内容占位符 2">
-            <a:extLst>
-              <a:ext uri="{FF2B5EF4-FFF2-40B4-BE49-F238E27FC236}">
-                <a16:creationId xmlns:a16="http://schemas.microsoft.com/office/drawing/2014/main" id="{A143E09C-5503-B600-8537-2B2C72F235F1}"/>
-              </a:ext>
-            </a:extLst>
-          </p:cNvPr>
-          <p:cNvSpPr>
-            <a:spLocks noGrp="1"/>
-          </p:cNvSpPr>
-          <p:nvPr>
-            <p:ph idx="1"/>
-          </p:nvPr>
-        </p:nvSpPr>
-        <p:spPr/>
-        <p:txBody>
-          <a:bodyPr/>
-          <a:lstStyle/>
-          <a:p>
-            <a:r>
-              <a:rPr lang="zh-CN" altLang="en-US" dirty="0">
-                <a:latin typeface="黑体" panose="02010609060101010101" pitchFamily="49" charset="-122"/>
-                <a:ea typeface="黑体" panose="02010609060101010101" pitchFamily="49" charset="-122"/>
-              </a:rPr>
-              <a:t>后端接口</a:t>
-            </a:r>
-            <a:endParaRPr lang="en-US" altLang="zh-CN" dirty="0">
-              <a:latin typeface="黑体" panose="02010609060101010101" pitchFamily="49" charset="-122"/>
-              <a:ea typeface="黑体" panose="02010609060101010101" pitchFamily="49" charset="-122"/>
-            </a:endParaRPr>
-          </a:p>
-          <a:p>
-            <a:pPr lvl="1"/>
-            <a:r>
-              <a:rPr lang="zh-CN" altLang="zh-CN" dirty="0">
-                <a:solidFill>
-                  <a:schemeClr val="accent6">
-                    <a:lumMod val="75000"/>
-                  </a:schemeClr>
-                </a:solidFill>
-                <a:latin typeface="Times New Roman" panose="02020603050405020304" pitchFamily="18" charset="0"/>
-                <a:cs typeface="Times New Roman" panose="02020603050405020304" pitchFamily="18" charset="0"/>
-              </a:rPr>
-              <a:t>"</a:t>
-            </a:r>
-            <a:r>
-              <a:rPr lang="zh-CN" altLang="zh-CN" dirty="0">
-                <a:solidFill>
-                  <a:schemeClr val="accent6">
-                    <a:lumMod val="75000"/>
-                  </a:schemeClr>
-                </a:solidFill>
-                <a:latin typeface="Times New Roman" panose="02020603050405020304" pitchFamily="18" charset="0"/>
-                <a:ea typeface="黑体" panose="02010609060101010101" pitchFamily="49" charset="-122"/>
-                <a:cs typeface="Times New Roman" panose="02020603050405020304" pitchFamily="18" charset="0"/>
-              </a:rPr>
-              <a:t>/api/</a:t>
-            </a:r>
-            <a:r>
-              <a:rPr lang="en-US" altLang="zh-CN" dirty="0">
-                <a:solidFill>
-                  <a:schemeClr val="accent6">
-                    <a:lumMod val="75000"/>
-                  </a:schemeClr>
-                </a:solidFill>
-                <a:latin typeface="Times New Roman" panose="02020603050405020304" pitchFamily="18" charset="0"/>
-                <a:ea typeface="黑体" panose="02010609060101010101" pitchFamily="49" charset="-122"/>
-                <a:cs typeface="Times New Roman" panose="02020603050405020304" pitchFamily="18" charset="0"/>
-              </a:rPr>
-              <a:t>research</a:t>
-            </a:r>
-            <a:r>
-              <a:rPr lang="zh-CN" altLang="zh-CN" dirty="0">
-                <a:solidFill>
-                  <a:schemeClr val="accent6">
-                    <a:lumMod val="75000"/>
-                  </a:schemeClr>
-                </a:solidFill>
-                <a:latin typeface="Times New Roman" panose="02020603050405020304" pitchFamily="18" charset="0"/>
-                <a:cs typeface="Times New Roman" panose="02020603050405020304" pitchFamily="18" charset="0"/>
-              </a:rPr>
-              <a:t>"</a:t>
-            </a:r>
-            <a:endParaRPr lang="en-US" altLang="zh-CN" dirty="0">
-              <a:solidFill>
-                <a:schemeClr val="accent6">
-                  <a:lumMod val="75000"/>
-                </a:schemeClr>
-              </a:solidFill>
-              <a:latin typeface="Times New Roman" panose="02020603050405020304" pitchFamily="18" charset="0"/>
-              <a:ea typeface="黑体" panose="02010609060101010101" pitchFamily="49" charset="-122"/>
-              <a:cs typeface="Times New Roman" panose="02020603050405020304" pitchFamily="18" charset="0"/>
-            </a:endParaRPr>
-          </a:p>
-          <a:p>
-            <a:pPr lvl="2"/>
-            <a:r>
-              <a:rPr lang="en-US" altLang="zh-CN" dirty="0" err="1">
-                <a:solidFill>
-                  <a:schemeClr val="accent6">
-                    <a:lumMod val="75000"/>
-                  </a:schemeClr>
-                </a:solidFill>
-                <a:latin typeface="Times New Roman" panose="02020603050405020304" pitchFamily="18" charset="0"/>
-                <a:ea typeface="黑体" panose="02010609060101010101" pitchFamily="49" charset="-122"/>
-                <a:cs typeface="Times New Roman" panose="02020603050405020304" pitchFamily="18" charset="0"/>
-              </a:rPr>
-              <a:t>event_stream</a:t>
-            </a:r>
-            <a:r>
-              <a:rPr lang="en-US" altLang="zh-CN" dirty="0">
-                <a:solidFill>
-                  <a:schemeClr val="accent6">
-                    <a:lumMod val="75000"/>
-                  </a:schemeClr>
-                </a:solidFill>
-                <a:latin typeface="Times New Roman" panose="02020603050405020304" pitchFamily="18" charset="0"/>
-                <a:ea typeface="黑体" panose="02010609060101010101" pitchFamily="49" charset="-122"/>
-                <a:cs typeface="Times New Roman" panose="02020603050405020304" pitchFamily="18" charset="0"/>
-              </a:rPr>
-              <a:t>()</a:t>
-            </a:r>
-            <a:endParaRPr lang="zh-CN" altLang="zh-CN" dirty="0">
-              <a:solidFill>
-                <a:schemeClr val="accent6">
-                  <a:lumMod val="75000"/>
-                </a:schemeClr>
-              </a:solidFill>
-              <a:latin typeface="Times New Roman" panose="02020603050405020304" pitchFamily="18" charset="0"/>
-              <a:ea typeface="黑体" panose="02010609060101010101" pitchFamily="49" charset="-122"/>
-              <a:cs typeface="Times New Roman" panose="02020603050405020304" pitchFamily="18" charset="0"/>
-            </a:endParaRPr>
-          </a:p>
-          <a:p>
-            <a:pPr lvl="1"/>
-            <a:endParaRPr lang="zh-CN" altLang="en-US" dirty="0">
-              <a:latin typeface="黑体" panose="02010609060101010101" pitchFamily="49" charset="-122"/>
-              <a:ea typeface="黑体" panose="02010609060101010101" pitchFamily="49" charset="-122"/>
-            </a:endParaRPr>
-          </a:p>
-        </p:txBody>
-      </p:sp>
-      <p:pic>
-        <p:nvPicPr>
-          <p:cNvPr id="5" name="图片 4">
-            <a:extLst>
-              <a:ext uri="{FF2B5EF4-FFF2-40B4-BE49-F238E27FC236}">
-                <a16:creationId xmlns:a16="http://schemas.microsoft.com/office/drawing/2014/main" id="{7D263750-67CB-FEDD-5552-BC62AC020224}"/>
-              </a:ext>
-            </a:extLst>
-          </p:cNvPr>
-          <p:cNvPicPr>
-            <a:picLocks noChangeAspect="1"/>
-          </p:cNvPicPr>
-          <p:nvPr/>
-        </p:nvPicPr>
-        <p:blipFill>
-          <a:blip r:embed="rId3"/>
-          <a:stretch>
-            <a:fillRect/>
-          </a:stretch>
-        </p:blipFill>
-        <p:spPr>
-          <a:xfrm>
-            <a:off x="838200" y="3273312"/>
-            <a:ext cx="3892750" cy="1016052"/>
-          </a:xfrm>
-          <a:prstGeom prst="rect">
-            <a:avLst/>
-          </a:prstGeom>
-        </p:spPr>
-      </p:pic>
-      <p:pic>
-        <p:nvPicPr>
-          <p:cNvPr id="7" name="图片 6">
-            <a:extLst>
-              <a:ext uri="{FF2B5EF4-FFF2-40B4-BE49-F238E27FC236}">
-                <a16:creationId xmlns:a16="http://schemas.microsoft.com/office/drawing/2014/main" id="{7D7FC8E4-D0E5-AE75-52B3-B08F75FF63EA}"/>
-              </a:ext>
-            </a:extLst>
-          </p:cNvPr>
-          <p:cNvPicPr>
-            <a:picLocks noChangeAspect="1"/>
-          </p:cNvPicPr>
-          <p:nvPr/>
-        </p:nvPicPr>
-        <p:blipFill>
-          <a:blip r:embed="rId4"/>
-          <a:stretch>
-            <a:fillRect/>
-          </a:stretch>
-        </p:blipFill>
-        <p:spPr>
-          <a:xfrm>
-            <a:off x="838200" y="4717623"/>
-            <a:ext cx="5372376" cy="711237"/>
-          </a:xfrm>
-          <a:prstGeom prst="rect">
-            <a:avLst/>
-          </a:prstGeom>
-        </p:spPr>
-      </p:pic>
-    </p:spTree>
-    <p:extLst>
-      <p:ext uri="{BB962C8B-B14F-4D97-AF65-F5344CB8AC3E}">
-        <p14:creationId xmlns:p14="http://schemas.microsoft.com/office/powerpoint/2010/main" val="3277735067"/>
-      </p:ext>
-    </p:extLst>
-  </p:cSld>
-  <p:clrMapOvr>
-    <a:masterClrMapping/>
-  </p:clrMapOvr>
-</p:sld>
-</file>
-
-<file path=ppt/slides/slide11.xml><?xml version="1.0" encoding="utf-8"?>
-<p:sld xmlns:a="http://schemas.openxmlformats.org/drawingml/2006/main" xmlns:r="http://schemas.openxmlformats.org/officeDocument/2006/relationships" xmlns:p="http://schemas.openxmlformats.org/presentationml/2006/main">
-  <p:cSld>
-    <p:spTree>
-      <p:nvGrpSpPr>
-        <p:cNvPr id="1" name="">
-          <a:extLst>
-            <a:ext uri="{FF2B5EF4-FFF2-40B4-BE49-F238E27FC236}">
-              <a16:creationId xmlns:a16="http://schemas.microsoft.com/office/drawing/2014/main" id="{BC6CB686-6F39-1387-CF62-F5196FA06B10}"/>
-            </a:ext>
-          </a:extLst>
-        </p:cNvPr>
-        <p:cNvGrpSpPr/>
-        <p:nvPr/>
-      </p:nvGrpSpPr>
-      <p:grpSpPr>
-        <a:xfrm>
-          <a:off x="0" y="0"/>
-          <a:ext cx="0" cy="0"/>
-          <a:chOff x="0" y="0"/>
-          <a:chExt cx="0" cy="0"/>
-        </a:xfrm>
-      </p:grpSpPr>
-      <p:sp>
-        <p:nvSpPr>
-          <p:cNvPr id="2" name="标题 1">
-            <a:extLst>
-              <a:ext uri="{FF2B5EF4-FFF2-40B4-BE49-F238E27FC236}">
-                <a16:creationId xmlns:a16="http://schemas.microsoft.com/office/drawing/2014/main" id="{C64A497A-2890-7B15-B23B-49F33ACD26A0}"/>
-              </a:ext>
-            </a:extLst>
-          </p:cNvPr>
-          <p:cNvSpPr>
-            <a:spLocks noGrp="1"/>
-          </p:cNvSpPr>
-          <p:nvPr>
-            <p:ph type="title"/>
-          </p:nvPr>
-        </p:nvSpPr>
-        <p:spPr/>
-        <p:txBody>
-          <a:bodyPr/>
-          <a:lstStyle/>
-          <a:p>
-            <a:r>
-              <a:rPr lang="zh-CN" altLang="zh-CN" dirty="0">
-                <a:latin typeface="Times New Roman" panose="02020603050405020304" pitchFamily="18" charset="0"/>
-                <a:cs typeface="Times New Roman" panose="02020603050405020304" pitchFamily="18" charset="0"/>
-              </a:rPr>
-              <a:t>backend.api.server</a:t>
-            </a:r>
-            <a:r>
-              <a:rPr lang="en-US" altLang="zh-CN" dirty="0">
-                <a:latin typeface="Times New Roman" panose="02020603050405020304" pitchFamily="18" charset="0"/>
-                <a:cs typeface="Times New Roman" panose="02020603050405020304" pitchFamily="18" charset="0"/>
-              </a:rPr>
-              <a:t>.</a:t>
-            </a:r>
-            <a:r>
-              <a:rPr lang="en-US" altLang="zh-CN" dirty="0" err="1">
-                <a:latin typeface="Times New Roman" panose="02020603050405020304" pitchFamily="18" charset="0"/>
-                <a:cs typeface="Times New Roman" panose="02020603050405020304" pitchFamily="18" charset="0"/>
-              </a:rPr>
-              <a:t>py</a:t>
-            </a:r>
-            <a:endParaRPr lang="zh-CN" altLang="en-US" dirty="0">
-              <a:latin typeface="Times New Roman" panose="02020603050405020304" pitchFamily="18" charset="0"/>
-              <a:cs typeface="Times New Roman" panose="02020603050405020304" pitchFamily="18" charset="0"/>
-            </a:endParaRPr>
-          </a:p>
-        </p:txBody>
-      </p:sp>
-      <p:sp>
-        <p:nvSpPr>
-          <p:cNvPr id="3" name="内容占位符 2">
-            <a:extLst>
-              <a:ext uri="{FF2B5EF4-FFF2-40B4-BE49-F238E27FC236}">
-                <a16:creationId xmlns:a16="http://schemas.microsoft.com/office/drawing/2014/main" id="{D3BD08C5-9BA2-1B50-27C8-2EE0F93CDD49}"/>
-              </a:ext>
-            </a:extLst>
-          </p:cNvPr>
-          <p:cNvSpPr>
-            <a:spLocks noGrp="1"/>
-          </p:cNvSpPr>
-          <p:nvPr>
-            <p:ph idx="1"/>
-          </p:nvPr>
-        </p:nvSpPr>
-        <p:spPr/>
-        <p:txBody>
-          <a:bodyPr/>
-          <a:lstStyle/>
-          <a:p>
-            <a:r>
-              <a:rPr lang="zh-CN" altLang="en-US" dirty="0">
-                <a:latin typeface="黑体" panose="02010609060101010101" pitchFamily="49" charset="-122"/>
-                <a:ea typeface="黑体" panose="02010609060101010101" pitchFamily="49" charset="-122"/>
-              </a:rPr>
-              <a:t>后端接口</a:t>
-            </a:r>
-            <a:endParaRPr lang="en-US" altLang="zh-CN" dirty="0">
-              <a:latin typeface="黑体" panose="02010609060101010101" pitchFamily="49" charset="-122"/>
-              <a:ea typeface="黑体" panose="02010609060101010101" pitchFamily="49" charset="-122"/>
-            </a:endParaRPr>
-          </a:p>
-          <a:p>
-            <a:pPr lvl="1"/>
-            <a:r>
-              <a:rPr lang="zh-CN" altLang="zh-CN" dirty="0">
-                <a:solidFill>
-                  <a:schemeClr val="accent6">
-                    <a:lumMod val="75000"/>
-                  </a:schemeClr>
-                </a:solidFill>
-                <a:latin typeface="Times New Roman" panose="02020603050405020304" pitchFamily="18" charset="0"/>
-                <a:cs typeface="Times New Roman" panose="02020603050405020304" pitchFamily="18" charset="0"/>
-              </a:rPr>
-              <a:t>"</a:t>
-            </a:r>
-            <a:r>
-              <a:rPr lang="zh-CN" altLang="zh-CN" dirty="0">
-                <a:solidFill>
-                  <a:schemeClr val="accent6">
-                    <a:lumMod val="75000"/>
-                  </a:schemeClr>
-                </a:solidFill>
-                <a:latin typeface="Times New Roman" panose="02020603050405020304" pitchFamily="18" charset="0"/>
-                <a:ea typeface="黑体" panose="02010609060101010101" pitchFamily="49" charset="-122"/>
-                <a:cs typeface="Times New Roman" panose="02020603050405020304" pitchFamily="18" charset="0"/>
-              </a:rPr>
-              <a:t>/api/</a:t>
-            </a:r>
-            <a:r>
-              <a:rPr lang="en-US" altLang="zh-CN" dirty="0">
-                <a:solidFill>
-                  <a:schemeClr val="accent6">
-                    <a:lumMod val="75000"/>
-                  </a:schemeClr>
-                </a:solidFill>
-                <a:latin typeface="Times New Roman" panose="02020603050405020304" pitchFamily="18" charset="0"/>
-                <a:ea typeface="黑体" panose="02010609060101010101" pitchFamily="49" charset="-122"/>
-                <a:cs typeface="Times New Roman" panose="02020603050405020304" pitchFamily="18" charset="0"/>
-              </a:rPr>
-              <a:t>research</a:t>
-            </a:r>
-            <a:r>
-              <a:rPr lang="zh-CN" altLang="zh-CN" dirty="0">
-                <a:solidFill>
-                  <a:schemeClr val="accent6">
-                    <a:lumMod val="75000"/>
-                  </a:schemeClr>
-                </a:solidFill>
-                <a:latin typeface="Times New Roman" panose="02020603050405020304" pitchFamily="18" charset="0"/>
-                <a:cs typeface="Times New Roman" panose="02020603050405020304" pitchFamily="18" charset="0"/>
-              </a:rPr>
-              <a:t>"</a:t>
-            </a:r>
-            <a:endParaRPr lang="en-US" altLang="zh-CN" dirty="0">
-              <a:solidFill>
-                <a:schemeClr val="accent6">
-                  <a:lumMod val="75000"/>
-                </a:schemeClr>
-              </a:solidFill>
-              <a:latin typeface="Times New Roman" panose="02020603050405020304" pitchFamily="18" charset="0"/>
-              <a:ea typeface="黑体" panose="02010609060101010101" pitchFamily="49" charset="-122"/>
-              <a:cs typeface="Times New Roman" panose="02020603050405020304" pitchFamily="18" charset="0"/>
-            </a:endParaRPr>
-          </a:p>
-          <a:p>
-            <a:pPr lvl="2"/>
-            <a:endParaRPr lang="zh-CN" altLang="en-US" dirty="0">
-              <a:latin typeface="Times New Roman" panose="02020603050405020304" pitchFamily="18" charset="0"/>
-              <a:ea typeface="黑体" panose="02010609060101010101" pitchFamily="49" charset="-122"/>
-              <a:cs typeface="Times New Roman" panose="02020603050405020304" pitchFamily="18" charset="0"/>
-            </a:endParaRPr>
-          </a:p>
-        </p:txBody>
-      </p:sp>
-    </p:spTree>
-    <p:extLst>
-      <p:ext uri="{BB962C8B-B14F-4D97-AF65-F5344CB8AC3E}">
-        <p14:creationId xmlns:p14="http://schemas.microsoft.com/office/powerpoint/2010/main" val="934878214"/>
-      </p:ext>
-    </p:extLst>
-  </p:cSld>
-  <p:clrMapOvr>
-    <a:masterClrMapping/>
-  </p:clrMapOvr>
-</p:sld>
-</file>
-
-<file path=ppt/slides/slide12.xml><?xml version="1.0" encoding="utf-8"?>
-<p:sld xmlns:a="http://schemas.openxmlformats.org/drawingml/2006/main" xmlns:r="http://schemas.openxmlformats.org/officeDocument/2006/relationships" xmlns:p="http://schemas.openxmlformats.org/presentationml/2006/main">
-  <p:cSld>
-    <p:spTree>
-      <p:nvGrpSpPr>
         <p:cNvPr id="1" name=""/>
         <p:cNvGrpSpPr/>
         <p:nvPr/>
@@ -4784,10 +4073,10 @@
       </p:grpSpPr>
       <p:sp>
         <p:nvSpPr>
-          <p:cNvPr id="6" name="矩形: 圆角 5">
-            <a:extLst>
-              <a:ext uri="{FF2B5EF4-FFF2-40B4-BE49-F238E27FC236}">
-                <a16:creationId xmlns:a16="http://schemas.microsoft.com/office/drawing/2014/main" id="{1EF4B5A0-0E5A-6276-7ECD-522302DFE36C}"/>
+          <p:cNvPr id="3" name="椭圆 2">
+            <a:extLst>
+              <a:ext uri="{FF2B5EF4-FFF2-40B4-BE49-F238E27FC236}">
+                <a16:creationId xmlns:a16="http://schemas.microsoft.com/office/drawing/2014/main" id="{1E098B21-72A6-546C-B931-6C0DF5E4FC66}"/>
               </a:ext>
             </a:extLst>
           </p:cNvPr>
@@ -4796,651 +4085,7 @@
         </p:nvSpPr>
         <p:spPr>
           <a:xfrm>
-            <a:off x="1591357" y="166713"/>
-            <a:ext cx="1273087" cy="257649"/>
-          </a:xfrm>
-          <a:prstGeom prst="roundRect">
-            <a:avLst/>
-          </a:prstGeom>
-        </p:spPr>
-        <p:style>
-          <a:lnRef idx="2">
-            <a:schemeClr val="accent1"/>
-          </a:lnRef>
-          <a:fillRef idx="1">
-            <a:schemeClr val="lt1"/>
-          </a:fillRef>
-          <a:effectRef idx="0">
-            <a:schemeClr val="accent1"/>
-          </a:effectRef>
-          <a:fontRef idx="minor">
-            <a:schemeClr val="dk1"/>
-          </a:fontRef>
-        </p:style>
-        <p:txBody>
-          <a:bodyPr rtlCol="0" anchor="ctr"/>
-          <a:lstStyle/>
-          <a:p>
-            <a:pPr algn="ctr"/>
-            <a:r>
-              <a:rPr lang="zh-CN" altLang="zh-CN" sz="1200" dirty="0">
-                <a:latin typeface="Times New Roman" panose="02020603050405020304" pitchFamily="18" charset="0"/>
-                <a:cs typeface="Times New Roman" panose="02020603050405020304" pitchFamily="18" charset="0"/>
-              </a:rPr>
-              <a:t>execute_research</a:t>
-            </a:r>
-          </a:p>
-        </p:txBody>
-      </p:sp>
-      <p:cxnSp>
-        <p:nvCxnSpPr>
-          <p:cNvPr id="8" name="直接箭头连接符 7">
-            <a:extLst>
-              <a:ext uri="{FF2B5EF4-FFF2-40B4-BE49-F238E27FC236}">
-                <a16:creationId xmlns:a16="http://schemas.microsoft.com/office/drawing/2014/main" id="{8708A6F2-CFC8-6F83-5152-55DECE4EA9F7}"/>
-              </a:ext>
-            </a:extLst>
-          </p:cNvPr>
-          <p:cNvCxnSpPr>
-            <a:cxnSpLocks/>
-          </p:cNvCxnSpPr>
-          <p:nvPr/>
-        </p:nvCxnSpPr>
-        <p:spPr>
-          <a:xfrm>
-            <a:off x="2227900" y="424362"/>
-            <a:ext cx="0" cy="525402"/>
-          </a:xfrm>
-          <a:prstGeom prst="straightConnector1">
-            <a:avLst/>
-          </a:prstGeom>
-          <a:ln>
-            <a:tailEnd type="triangle"/>
-          </a:ln>
-        </p:spPr>
-        <p:style>
-          <a:lnRef idx="2">
-            <a:schemeClr val="accent1"/>
-          </a:lnRef>
-          <a:fillRef idx="0">
-            <a:schemeClr val="accent1"/>
-          </a:fillRef>
-          <a:effectRef idx="1">
-            <a:schemeClr val="accent1"/>
-          </a:effectRef>
-          <a:fontRef idx="minor">
-            <a:schemeClr val="tx1"/>
-          </a:fontRef>
-        </p:style>
-      </p:cxnSp>
-      <p:sp>
-        <p:nvSpPr>
-          <p:cNvPr id="11" name="矩形: 圆角 10">
-            <a:extLst>
-              <a:ext uri="{FF2B5EF4-FFF2-40B4-BE49-F238E27FC236}">
-                <a16:creationId xmlns:a16="http://schemas.microsoft.com/office/drawing/2014/main" id="{3E73FC4D-BA49-7337-74FF-3E8BAFAAB0D0}"/>
-              </a:ext>
-            </a:extLst>
-          </p:cNvPr>
-          <p:cNvSpPr/>
-          <p:nvPr/>
-        </p:nvSpPr>
-        <p:spPr>
-          <a:xfrm>
-            <a:off x="1591357" y="949764"/>
-            <a:ext cx="1273085" cy="257649"/>
-          </a:xfrm>
-          <a:prstGeom prst="roundRect">
-            <a:avLst/>
-          </a:prstGeom>
-        </p:spPr>
-        <p:style>
-          <a:lnRef idx="2">
-            <a:schemeClr val="accent1"/>
-          </a:lnRef>
-          <a:fillRef idx="1">
-            <a:schemeClr val="lt1"/>
-          </a:fillRef>
-          <a:effectRef idx="0">
-            <a:schemeClr val="accent1"/>
-          </a:effectRef>
-          <a:fontRef idx="minor">
-            <a:schemeClr val="dk1"/>
-          </a:fontRef>
-        </p:style>
-        <p:txBody>
-          <a:bodyPr rtlCol="0" anchor="ctr"/>
-          <a:lstStyle/>
-          <a:p>
-            <a:r>
-              <a:rPr lang="zh-CN" altLang="zh-CN" sz="800" dirty="0">
-                <a:latin typeface="Times New Roman" panose="02020603050405020304" pitchFamily="18" charset="0"/>
-                <a:cs typeface="Times New Roman" panose="02020603050405020304" pitchFamily="18" charset="0"/>
-              </a:rPr>
-              <a:t>_graph_run</a:t>
-            </a:r>
-            <a:r>
-              <a:rPr lang="en-US" altLang="zh-CN" sz="800" dirty="0">
-                <a:latin typeface="Times New Roman" panose="02020603050405020304" pitchFamily="18" charset="0"/>
-                <a:cs typeface="Times New Roman" panose="02020603050405020304" pitchFamily="18" charset="0"/>
-              </a:rPr>
-              <a:t>/</a:t>
-            </a:r>
-            <a:r>
-              <a:rPr lang="zh-CN" altLang="zh-CN" sz="800" dirty="0">
-                <a:latin typeface="Times New Roman" panose="02020603050405020304" pitchFamily="18" charset="0"/>
-                <a:cs typeface="Times New Roman" panose="02020603050405020304" pitchFamily="18" charset="0"/>
-              </a:rPr>
-              <a:t>run_research</a:t>
-            </a:r>
-          </a:p>
-        </p:txBody>
-      </p:sp>
-      <p:cxnSp>
-        <p:nvCxnSpPr>
-          <p:cNvPr id="13" name="直接连接符 12">
-            <a:extLst>
-              <a:ext uri="{FF2B5EF4-FFF2-40B4-BE49-F238E27FC236}">
-                <a16:creationId xmlns:a16="http://schemas.microsoft.com/office/drawing/2014/main" id="{D6787EA8-AFD5-F02D-9A73-8281DDD53EC6}"/>
-              </a:ext>
-            </a:extLst>
-          </p:cNvPr>
-          <p:cNvCxnSpPr>
-            <a:stCxn id="11" idx="2"/>
-          </p:cNvCxnSpPr>
-          <p:nvPr/>
-        </p:nvCxnSpPr>
-        <p:spPr>
-          <a:xfrm>
-            <a:off x="2227900" y="1207413"/>
-            <a:ext cx="0" cy="242492"/>
-          </a:xfrm>
-          <a:prstGeom prst="line">
-            <a:avLst/>
-          </a:prstGeom>
-        </p:spPr>
-        <p:style>
-          <a:lnRef idx="2">
-            <a:schemeClr val="accent1"/>
-          </a:lnRef>
-          <a:fillRef idx="0">
-            <a:schemeClr val="accent1"/>
-          </a:fillRef>
-          <a:effectRef idx="1">
-            <a:schemeClr val="accent1"/>
-          </a:effectRef>
-          <a:fontRef idx="minor">
-            <a:schemeClr val="tx1"/>
-          </a:fontRef>
-        </p:style>
-      </p:cxnSp>
-      <p:cxnSp>
-        <p:nvCxnSpPr>
-          <p:cNvPr id="15" name="直接连接符 14">
-            <a:extLst>
-              <a:ext uri="{FF2B5EF4-FFF2-40B4-BE49-F238E27FC236}">
-                <a16:creationId xmlns:a16="http://schemas.microsoft.com/office/drawing/2014/main" id="{DFCB6BA8-6407-639A-FFF6-EF3C06789D14}"/>
-              </a:ext>
-            </a:extLst>
-          </p:cNvPr>
-          <p:cNvCxnSpPr>
-            <a:cxnSpLocks/>
-          </p:cNvCxnSpPr>
-          <p:nvPr/>
-        </p:nvCxnSpPr>
-        <p:spPr>
-          <a:xfrm flipV="1">
-            <a:off x="702219" y="1439800"/>
-            <a:ext cx="2940222" cy="10105"/>
-          </a:xfrm>
-          <a:prstGeom prst="line">
-            <a:avLst/>
-          </a:prstGeom>
-        </p:spPr>
-        <p:style>
-          <a:lnRef idx="2">
-            <a:schemeClr val="accent1"/>
-          </a:lnRef>
-          <a:fillRef idx="0">
-            <a:schemeClr val="accent1"/>
-          </a:fillRef>
-          <a:effectRef idx="1">
-            <a:schemeClr val="accent1"/>
-          </a:effectRef>
-          <a:fontRef idx="minor">
-            <a:schemeClr val="tx1"/>
-          </a:fontRef>
-        </p:style>
-      </p:cxnSp>
-      <p:cxnSp>
-        <p:nvCxnSpPr>
-          <p:cNvPr id="19" name="直接箭头连接符 18">
-            <a:extLst>
-              <a:ext uri="{FF2B5EF4-FFF2-40B4-BE49-F238E27FC236}">
-                <a16:creationId xmlns:a16="http://schemas.microsoft.com/office/drawing/2014/main" id="{1422D711-1B0F-F82E-AC05-7F02DC1ACC12}"/>
-              </a:ext>
-            </a:extLst>
-          </p:cNvPr>
-          <p:cNvCxnSpPr/>
-          <p:nvPr/>
-        </p:nvCxnSpPr>
-        <p:spPr>
-          <a:xfrm>
-            <a:off x="712323" y="1439801"/>
-            <a:ext cx="0" cy="191973"/>
-          </a:xfrm>
-          <a:prstGeom prst="straightConnector1">
-            <a:avLst/>
-          </a:prstGeom>
-          <a:ln>
-            <a:tailEnd type="triangle"/>
-          </a:ln>
-        </p:spPr>
-        <p:style>
-          <a:lnRef idx="2">
-            <a:schemeClr val="accent1"/>
-          </a:lnRef>
-          <a:fillRef idx="0">
-            <a:schemeClr val="accent1"/>
-          </a:fillRef>
-          <a:effectRef idx="1">
-            <a:schemeClr val="accent1"/>
-          </a:effectRef>
-          <a:fontRef idx="minor">
-            <a:schemeClr val="tx1"/>
-          </a:fontRef>
-        </p:style>
-      </p:cxnSp>
-      <p:sp>
-        <p:nvSpPr>
-          <p:cNvPr id="21" name="矩形: 圆角 20">
-            <a:extLst>
-              <a:ext uri="{FF2B5EF4-FFF2-40B4-BE49-F238E27FC236}">
-                <a16:creationId xmlns:a16="http://schemas.microsoft.com/office/drawing/2014/main" id="{C04B8FFB-7B41-F212-6E87-C5A8B7018C2D}"/>
-              </a:ext>
-            </a:extLst>
-          </p:cNvPr>
-          <p:cNvSpPr/>
-          <p:nvPr/>
-        </p:nvSpPr>
-        <p:spPr>
-          <a:xfrm>
-            <a:off x="75779" y="1641878"/>
-            <a:ext cx="1273087" cy="257649"/>
-          </a:xfrm>
-          <a:prstGeom prst="roundRect">
-            <a:avLst/>
-          </a:prstGeom>
-        </p:spPr>
-        <p:style>
-          <a:lnRef idx="2">
-            <a:schemeClr val="accent1"/>
-          </a:lnRef>
-          <a:fillRef idx="1">
-            <a:schemeClr val="lt1"/>
-          </a:fillRef>
-          <a:effectRef idx="0">
-            <a:schemeClr val="accent1"/>
-          </a:effectRef>
-          <a:fontRef idx="minor">
-            <a:schemeClr val="dk1"/>
-          </a:fontRef>
-        </p:style>
-        <p:txBody>
-          <a:bodyPr rtlCol="0" anchor="ctr"/>
-          <a:lstStyle/>
-          <a:p>
-            <a:pPr algn="ctr"/>
-            <a:r>
-              <a:rPr lang="en-US" altLang="zh-CN" sz="1200" dirty="0" err="1">
-                <a:latin typeface="Times New Roman" panose="02020603050405020304" pitchFamily="18" charset="0"/>
-                <a:cs typeface="Times New Roman" panose="02020603050405020304" pitchFamily="18" charset="0"/>
-              </a:rPr>
-              <a:t>tid</a:t>
-            </a:r>
-            <a:r>
-              <a:rPr lang="en-US" altLang="zh-CN" sz="1200" dirty="0">
-                <a:latin typeface="Times New Roman" panose="02020603050405020304" pitchFamily="18" charset="0"/>
-                <a:cs typeface="Times New Roman" panose="02020603050405020304" pitchFamily="18" charset="0"/>
-              </a:rPr>
-              <a:t>(str)</a:t>
-            </a:r>
-            <a:endParaRPr lang="zh-CN" altLang="zh-CN" sz="1200" dirty="0">
-              <a:latin typeface="Times New Roman" panose="02020603050405020304" pitchFamily="18" charset="0"/>
-              <a:cs typeface="Times New Roman" panose="02020603050405020304" pitchFamily="18" charset="0"/>
-            </a:endParaRPr>
-          </a:p>
-        </p:txBody>
-      </p:sp>
-      <p:sp>
-        <p:nvSpPr>
-          <p:cNvPr id="23" name="矩形: 圆角 22">
-            <a:extLst>
-              <a:ext uri="{FF2B5EF4-FFF2-40B4-BE49-F238E27FC236}">
-                <a16:creationId xmlns:a16="http://schemas.microsoft.com/office/drawing/2014/main" id="{B19E3993-E39E-0334-53D6-F937DDF88701}"/>
-              </a:ext>
-            </a:extLst>
-          </p:cNvPr>
-          <p:cNvSpPr/>
-          <p:nvPr/>
-        </p:nvSpPr>
-        <p:spPr>
-          <a:xfrm>
-            <a:off x="1434745" y="1641877"/>
-            <a:ext cx="1429697" cy="257649"/>
-          </a:xfrm>
-          <a:prstGeom prst="roundRect">
-            <a:avLst/>
-          </a:prstGeom>
-        </p:spPr>
-        <p:style>
-          <a:lnRef idx="2">
-            <a:schemeClr val="accent1"/>
-          </a:lnRef>
-          <a:fillRef idx="1">
-            <a:schemeClr val="lt1"/>
-          </a:fillRef>
-          <a:effectRef idx="0">
-            <a:schemeClr val="accent1"/>
-          </a:effectRef>
-          <a:fontRef idx="minor">
-            <a:schemeClr val="dk1"/>
-          </a:fontRef>
-        </p:style>
-        <p:txBody>
-          <a:bodyPr rtlCol="0" anchor="ctr"/>
-          <a:lstStyle/>
-          <a:p>
-            <a:r>
-              <a:rPr lang="en-US" altLang="zh-CN" sz="800" dirty="0">
-                <a:latin typeface="Times New Roman" panose="02020603050405020304" pitchFamily="18" charset="0"/>
-                <a:cs typeface="Times New Roman" panose="02020603050405020304" pitchFamily="18" charset="0"/>
-              </a:rPr>
-              <a:t> </a:t>
-            </a:r>
-            <a:r>
-              <a:rPr lang="zh-CN" altLang="zh-CN" sz="800" dirty="0">
-                <a:latin typeface="Times New Roman" panose="02020603050405020304" pitchFamily="18" charset="0"/>
-                <a:cs typeface="Times New Roman" panose="02020603050405020304" pitchFamily="18" charset="0"/>
-              </a:rPr>
-              <a:t>initial_state</a:t>
-            </a:r>
-            <a:r>
-              <a:rPr lang="en-US" altLang="zh-CN" sz="800" dirty="0">
-                <a:latin typeface="Times New Roman" panose="02020603050405020304" pitchFamily="18" charset="0"/>
-                <a:cs typeface="Times New Roman" panose="02020603050405020304" pitchFamily="18" charset="0"/>
-              </a:rPr>
-              <a:t>(</a:t>
-            </a:r>
-            <a:r>
-              <a:rPr lang="zh-CN" altLang="zh-CN" sz="800" dirty="0">
-                <a:latin typeface="Times New Roman" panose="02020603050405020304" pitchFamily="18" charset="0"/>
-                <a:cs typeface="Times New Roman" panose="02020603050405020304" pitchFamily="18" charset="0"/>
-              </a:rPr>
-              <a:t>ResearchStat</a:t>
-            </a:r>
-            <a:r>
-              <a:rPr lang="en-US" altLang="zh-CN" sz="800" dirty="0">
-                <a:latin typeface="Times New Roman" panose="02020603050405020304" pitchFamily="18" charset="0"/>
-                <a:cs typeface="Times New Roman" panose="02020603050405020304" pitchFamily="18" charset="0"/>
-              </a:rPr>
-              <a:t>e</a:t>
-            </a:r>
-            <a:r>
-              <a:rPr lang="zh-CN" altLang="en-US" sz="800" dirty="0">
-                <a:latin typeface="Times New Roman" panose="02020603050405020304" pitchFamily="18" charset="0"/>
-                <a:cs typeface="Times New Roman" panose="02020603050405020304" pitchFamily="18" charset="0"/>
-              </a:rPr>
-              <a:t>类</a:t>
-            </a:r>
-            <a:r>
-              <a:rPr lang="en-US" altLang="zh-CN" sz="800" dirty="0">
-                <a:latin typeface="Times New Roman" panose="02020603050405020304" pitchFamily="18" charset="0"/>
-                <a:cs typeface="Times New Roman" panose="02020603050405020304" pitchFamily="18" charset="0"/>
-              </a:rPr>
-              <a:t>)</a:t>
-            </a:r>
-            <a:endParaRPr lang="zh-CN" altLang="zh-CN" sz="800" dirty="0">
-              <a:latin typeface="Times New Roman" panose="02020603050405020304" pitchFamily="18" charset="0"/>
-              <a:cs typeface="Times New Roman" panose="02020603050405020304" pitchFamily="18" charset="0"/>
-            </a:endParaRPr>
-          </a:p>
-        </p:txBody>
-      </p:sp>
-      <p:cxnSp>
-        <p:nvCxnSpPr>
-          <p:cNvPr id="25" name="直接箭头连接符 24">
-            <a:extLst>
-              <a:ext uri="{FF2B5EF4-FFF2-40B4-BE49-F238E27FC236}">
-                <a16:creationId xmlns:a16="http://schemas.microsoft.com/office/drawing/2014/main" id="{A834767E-E8C5-2A53-8230-40E6949B27D9}"/>
-              </a:ext>
-            </a:extLst>
-          </p:cNvPr>
-          <p:cNvCxnSpPr>
-            <a:cxnSpLocks/>
-          </p:cNvCxnSpPr>
-          <p:nvPr/>
-        </p:nvCxnSpPr>
-        <p:spPr>
-          <a:xfrm>
-            <a:off x="2227899" y="1449905"/>
-            <a:ext cx="0" cy="191973"/>
-          </a:xfrm>
-          <a:prstGeom prst="straightConnector1">
-            <a:avLst/>
-          </a:prstGeom>
-          <a:ln>
-            <a:tailEnd type="triangle"/>
-          </a:ln>
-        </p:spPr>
-        <p:style>
-          <a:lnRef idx="2">
-            <a:schemeClr val="accent1"/>
-          </a:lnRef>
-          <a:fillRef idx="0">
-            <a:schemeClr val="accent1"/>
-          </a:fillRef>
-          <a:effectRef idx="1">
-            <a:schemeClr val="accent1"/>
-          </a:effectRef>
-          <a:fontRef idx="minor">
-            <a:schemeClr val="tx1"/>
-          </a:fontRef>
-        </p:style>
-      </p:cxnSp>
-      <p:sp>
-        <p:nvSpPr>
-          <p:cNvPr id="29" name="矩形: 圆角 28">
-            <a:extLst>
-              <a:ext uri="{FF2B5EF4-FFF2-40B4-BE49-F238E27FC236}">
-                <a16:creationId xmlns:a16="http://schemas.microsoft.com/office/drawing/2014/main" id="{78B01F21-B999-B67B-510B-CCF55C2F11C1}"/>
-              </a:ext>
-            </a:extLst>
-          </p:cNvPr>
-          <p:cNvSpPr/>
-          <p:nvPr/>
-        </p:nvSpPr>
-        <p:spPr>
-          <a:xfrm>
-            <a:off x="2950322" y="1641877"/>
-            <a:ext cx="1389290" cy="257649"/>
-          </a:xfrm>
-          <a:prstGeom prst="roundRect">
-            <a:avLst/>
-          </a:prstGeom>
-        </p:spPr>
-        <p:style>
-          <a:lnRef idx="2">
-            <a:schemeClr val="accent1"/>
-          </a:lnRef>
-          <a:fillRef idx="1">
-            <a:schemeClr val="lt1"/>
-          </a:fillRef>
-          <a:effectRef idx="0">
-            <a:schemeClr val="accent1"/>
-          </a:effectRef>
-          <a:fontRef idx="minor">
-            <a:schemeClr val="dk1"/>
-          </a:fontRef>
-        </p:style>
-        <p:txBody>
-          <a:bodyPr rtlCol="0" anchor="ctr"/>
-          <a:lstStyle/>
-          <a:p>
-            <a:r>
-              <a:rPr lang="zh-CN" altLang="zh-CN" sz="1200" dirty="0">
-                <a:latin typeface="Times New Roman" panose="02020603050405020304" pitchFamily="18" charset="0"/>
-                <a:cs typeface="Times New Roman" panose="02020603050405020304" pitchFamily="18" charset="0"/>
-              </a:rPr>
-              <a:t>graph = get_graph()</a:t>
-            </a:r>
-          </a:p>
-        </p:txBody>
-      </p:sp>
-      <p:cxnSp>
-        <p:nvCxnSpPr>
-          <p:cNvPr id="31" name="直接箭头连接符 30">
-            <a:extLst>
-              <a:ext uri="{FF2B5EF4-FFF2-40B4-BE49-F238E27FC236}">
-                <a16:creationId xmlns:a16="http://schemas.microsoft.com/office/drawing/2014/main" id="{38A57705-793A-F2FB-5759-DE2804489D20}"/>
-              </a:ext>
-            </a:extLst>
-          </p:cNvPr>
-          <p:cNvCxnSpPr/>
-          <p:nvPr/>
-        </p:nvCxnSpPr>
-        <p:spPr>
-          <a:xfrm>
-            <a:off x="3642441" y="1449905"/>
-            <a:ext cx="0" cy="181869"/>
-          </a:xfrm>
-          <a:prstGeom prst="straightConnector1">
-            <a:avLst/>
-          </a:prstGeom>
-          <a:ln>
-            <a:tailEnd type="triangle"/>
-          </a:ln>
-        </p:spPr>
-        <p:style>
-          <a:lnRef idx="2">
-            <a:schemeClr val="accent1"/>
-          </a:lnRef>
-          <a:fillRef idx="0">
-            <a:schemeClr val="accent1"/>
-          </a:fillRef>
-          <a:effectRef idx="1">
-            <a:schemeClr val="accent1"/>
-          </a:effectRef>
-          <a:fontRef idx="minor">
-            <a:schemeClr val="tx1"/>
-          </a:fontRef>
-        </p:style>
-      </p:cxnSp>
-      <p:cxnSp>
-        <p:nvCxnSpPr>
-          <p:cNvPr id="36" name="直接箭头连接符 35">
-            <a:extLst>
-              <a:ext uri="{FF2B5EF4-FFF2-40B4-BE49-F238E27FC236}">
-                <a16:creationId xmlns:a16="http://schemas.microsoft.com/office/drawing/2014/main" id="{D428C775-8C8F-13B8-A0F5-F9AFDED42134}"/>
-              </a:ext>
-            </a:extLst>
-          </p:cNvPr>
-          <p:cNvCxnSpPr>
-            <a:stCxn id="29" idx="2"/>
-          </p:cNvCxnSpPr>
-          <p:nvPr/>
-        </p:nvCxnSpPr>
-        <p:spPr>
-          <a:xfrm flipH="1">
-            <a:off x="3642441" y="1899526"/>
-            <a:ext cx="2526" cy="217234"/>
-          </a:xfrm>
-          <a:prstGeom prst="straightConnector1">
-            <a:avLst/>
-          </a:prstGeom>
-          <a:ln>
-            <a:tailEnd type="triangle"/>
-          </a:ln>
-        </p:spPr>
-        <p:style>
-          <a:lnRef idx="2">
-            <a:schemeClr val="accent1"/>
-          </a:lnRef>
-          <a:fillRef idx="0">
-            <a:schemeClr val="accent1"/>
-          </a:fillRef>
-          <a:effectRef idx="1">
-            <a:schemeClr val="accent1"/>
-          </a:effectRef>
-          <a:fontRef idx="minor">
-            <a:schemeClr val="tx1"/>
-          </a:fontRef>
-        </p:style>
-      </p:cxnSp>
-      <p:sp>
-        <p:nvSpPr>
-          <p:cNvPr id="38" name="矩形: 圆角 37">
-            <a:extLst>
-              <a:ext uri="{FF2B5EF4-FFF2-40B4-BE49-F238E27FC236}">
-                <a16:creationId xmlns:a16="http://schemas.microsoft.com/office/drawing/2014/main" id="{F944C5ED-3009-BBC3-2FC0-CF5E4B153147}"/>
-              </a:ext>
-            </a:extLst>
-          </p:cNvPr>
-          <p:cNvSpPr/>
-          <p:nvPr/>
-        </p:nvSpPr>
-        <p:spPr>
-          <a:xfrm>
-            <a:off x="2947796" y="2116760"/>
-            <a:ext cx="1389290" cy="257649"/>
-          </a:xfrm>
-          <a:prstGeom prst="roundRect">
-            <a:avLst/>
-          </a:prstGeom>
-        </p:spPr>
-        <p:style>
-          <a:lnRef idx="2">
-            <a:schemeClr val="accent1"/>
-          </a:lnRef>
-          <a:fillRef idx="1">
-            <a:schemeClr val="lt1"/>
-          </a:fillRef>
-          <a:effectRef idx="0">
-            <a:schemeClr val="accent1"/>
-          </a:effectRef>
-          <a:fontRef idx="minor">
-            <a:schemeClr val="dk1"/>
-          </a:fontRef>
-        </p:style>
-        <p:txBody>
-          <a:bodyPr rtlCol="0" anchor="ctr"/>
-          <a:lstStyle/>
-          <a:p>
-            <a:r>
-              <a:rPr lang="zh-CN" altLang="zh-CN" sz="1200" dirty="0">
-                <a:latin typeface="Times New Roman" panose="02020603050405020304" pitchFamily="18" charset="0"/>
-                <a:cs typeface="Times New Roman" panose="02020603050405020304" pitchFamily="18" charset="0"/>
-              </a:rPr>
-              <a:t> _compiled_graph</a:t>
-            </a:r>
-          </a:p>
-        </p:txBody>
-      </p:sp>
-      <p:sp>
-        <p:nvSpPr>
-          <p:cNvPr id="3" name="椭圆 2">
-            <a:extLst>
-              <a:ext uri="{FF2B5EF4-FFF2-40B4-BE49-F238E27FC236}">
-                <a16:creationId xmlns:a16="http://schemas.microsoft.com/office/drawing/2014/main" id="{1E098B21-72A6-546C-B931-6C0DF5E4FC66}"/>
-              </a:ext>
-            </a:extLst>
-          </p:cNvPr>
-          <p:cNvSpPr/>
-          <p:nvPr/>
-        </p:nvSpPr>
-        <p:spPr>
-          <a:xfrm>
-            <a:off x="3356164" y="3150722"/>
+            <a:off x="3406683" y="4115642"/>
             <a:ext cx="399098" cy="399098"/>
           </a:xfrm>
           <a:prstGeom prst="ellipse">
@@ -5494,7 +4139,7 @@
         </p:nvSpPr>
         <p:spPr>
           <a:xfrm>
-            <a:off x="4340448" y="3150722"/>
+            <a:off x="4390967" y="4115642"/>
             <a:ext cx="399098" cy="399098"/>
           </a:xfrm>
           <a:prstGeom prst="ellipse">
@@ -5548,7 +4193,7 @@
         </p:nvSpPr>
         <p:spPr>
           <a:xfrm>
-            <a:off x="6306520" y="4042386"/>
+            <a:off x="6357039" y="5007306"/>
             <a:ext cx="399098" cy="399098"/>
           </a:xfrm>
           <a:prstGeom prst="ellipse">
@@ -5602,7 +4247,7 @@
         </p:nvSpPr>
         <p:spPr>
           <a:xfrm>
-            <a:off x="7268063" y="4441484"/>
+            <a:off x="7318582" y="5406404"/>
             <a:ext cx="399098" cy="399098"/>
           </a:xfrm>
           <a:prstGeom prst="ellipse">
@@ -5656,7 +4301,7 @@
         </p:nvSpPr>
         <p:spPr>
           <a:xfrm>
-            <a:off x="8359263" y="4441484"/>
+            <a:off x="8409782" y="5406404"/>
             <a:ext cx="399098" cy="399098"/>
           </a:xfrm>
           <a:prstGeom prst="ellipse">
@@ -5710,7 +4355,7 @@
         </p:nvSpPr>
         <p:spPr>
           <a:xfrm>
-            <a:off x="9335134" y="3196279"/>
+            <a:off x="9385653" y="4161199"/>
             <a:ext cx="399098" cy="399098"/>
           </a:xfrm>
           <a:prstGeom prst="ellipse">
@@ -5764,7 +4409,7 @@
         </p:nvSpPr>
         <p:spPr>
           <a:xfrm>
-            <a:off x="5299478" y="3643288"/>
+            <a:off x="5349997" y="4608208"/>
             <a:ext cx="399098" cy="399098"/>
           </a:xfrm>
           <a:prstGeom prst="ellipse">
@@ -5821,7 +4466,7 @@
         </p:nvCxnSpPr>
         <p:spPr>
           <a:xfrm flipV="1">
-            <a:off x="2909914" y="3350271"/>
+            <a:off x="2960433" y="4315191"/>
             <a:ext cx="446250" cy="1"/>
           </a:xfrm>
           <a:prstGeom prst="straightConnector1">
@@ -5863,7 +4508,7 @@
         </p:nvCxnSpPr>
         <p:spPr>
           <a:xfrm>
-            <a:off x="3755262" y="3350271"/>
+            <a:off x="3805781" y="4315191"/>
             <a:ext cx="585186" cy="0"/>
           </a:xfrm>
           <a:prstGeom prst="straightConnector1">
@@ -5906,7 +4551,7 @@
         </p:nvCxnSpPr>
         <p:spPr>
           <a:xfrm>
-            <a:off x="4739546" y="3350271"/>
+            <a:off x="4790065" y="4315191"/>
             <a:ext cx="4595588" cy="45557"/>
           </a:xfrm>
           <a:prstGeom prst="straightConnector1">
@@ -5945,7 +4590,7 @@
         </p:nvSpPr>
         <p:spPr>
           <a:xfrm>
-            <a:off x="6758615" y="3059668"/>
+            <a:off x="6809134" y="4024588"/>
             <a:ext cx="211349" cy="369332"/>
           </a:xfrm>
           <a:prstGeom prst="rect">
@@ -5989,7 +4634,7 @@
         </p:nvCxnSpPr>
         <p:spPr>
           <a:xfrm>
-            <a:off x="4739546" y="3350271"/>
+            <a:off x="4790065" y="4315191"/>
             <a:ext cx="559932" cy="448784"/>
           </a:xfrm>
           <a:prstGeom prst="straightConnector1">
@@ -6028,7 +4673,7 @@
         </p:nvSpPr>
         <p:spPr>
           <a:xfrm>
-            <a:off x="4739546" y="3473505"/>
+            <a:off x="4790065" y="4438425"/>
             <a:ext cx="191974" cy="369332"/>
           </a:xfrm>
           <a:prstGeom prst="rect">
@@ -6073,7 +4718,7 @@
         </p:nvCxnSpPr>
         <p:spPr>
           <a:xfrm>
-            <a:off x="5698576" y="3842837"/>
+            <a:off x="5749095" y="4807757"/>
             <a:ext cx="607944" cy="399098"/>
           </a:xfrm>
           <a:prstGeom prst="straightConnector1">
@@ -6118,7 +4763,7 @@
         </p:nvCxnSpPr>
         <p:spPr>
           <a:xfrm rot="5400000" flipH="1">
-            <a:off x="4632127" y="3258141"/>
+            <a:off x="4682646" y="4223061"/>
             <a:ext cx="492566" cy="959030"/>
           </a:xfrm>
           <a:prstGeom prst="curvedConnector3">
@@ -6159,7 +4804,7 @@
         </p:nvSpPr>
         <p:spPr>
           <a:xfrm>
-            <a:off x="4398895" y="4075940"/>
+            <a:off x="4449414" y="5040860"/>
             <a:ext cx="211349" cy="369332"/>
           </a:xfrm>
           <a:prstGeom prst="rect">
@@ -6201,7 +4846,7 @@
         </p:nvSpPr>
         <p:spPr>
           <a:xfrm>
-            <a:off x="5735970" y="3972378"/>
+            <a:off x="5786489" y="4937298"/>
             <a:ext cx="191974" cy="369332"/>
           </a:xfrm>
           <a:prstGeom prst="rect">
@@ -6246,7 +4891,7 @@
         </p:nvCxnSpPr>
         <p:spPr>
           <a:xfrm>
-            <a:off x="6705618" y="4241935"/>
+            <a:off x="6756137" y="5206855"/>
             <a:ext cx="562445" cy="399098"/>
           </a:xfrm>
           <a:prstGeom prst="straightConnector1">
@@ -6285,7 +4930,7 @@
         </p:nvSpPr>
         <p:spPr>
           <a:xfrm>
-            <a:off x="6713193" y="4441484"/>
+            <a:off x="6763712" y="5406404"/>
             <a:ext cx="191974" cy="369332"/>
           </a:xfrm>
           <a:prstGeom prst="rect">
@@ -6331,7 +4976,7 @@
         </p:nvCxnSpPr>
         <p:spPr>
           <a:xfrm flipV="1">
-            <a:off x="6705618" y="3395828"/>
+            <a:off x="6756137" y="4360748"/>
             <a:ext cx="2629516" cy="846107"/>
           </a:xfrm>
           <a:prstGeom prst="straightConnector1">
@@ -6370,7 +5015,7 @@
         </p:nvSpPr>
         <p:spPr>
           <a:xfrm>
-            <a:off x="7467612" y="3634215"/>
+            <a:off x="7518131" y="4599135"/>
             <a:ext cx="211349" cy="369332"/>
           </a:xfrm>
           <a:prstGeom prst="rect">
@@ -6415,7 +5060,7 @@
         </p:nvCxnSpPr>
         <p:spPr>
           <a:xfrm>
-            <a:off x="7667161" y="4641033"/>
+            <a:off x="7717680" y="5605953"/>
             <a:ext cx="692102" cy="0"/>
           </a:xfrm>
           <a:prstGeom prst="straightConnector1">
@@ -6457,7 +5102,7 @@
         </p:nvCxnSpPr>
         <p:spPr>
           <a:xfrm flipV="1">
-            <a:off x="8758361" y="3395828"/>
+            <a:off x="8808880" y="4360748"/>
             <a:ext cx="576773" cy="1245205"/>
           </a:xfrm>
           <a:prstGeom prst="straightConnector1">
@@ -6496,7 +5141,7 @@
         </p:nvSpPr>
         <p:spPr>
           <a:xfrm>
-            <a:off x="2149593" y="3215856"/>
+            <a:off x="2200112" y="4180776"/>
             <a:ext cx="757790" cy="257649"/>
           </a:xfrm>
           <a:prstGeom prst="roundRect">
@@ -6546,7 +5191,7 @@
         </p:nvSpPr>
         <p:spPr>
           <a:xfrm>
-            <a:off x="10446537" y="3298151"/>
+            <a:off x="10497056" y="4263071"/>
             <a:ext cx="757790" cy="257649"/>
           </a:xfrm>
           <a:prstGeom prst="roundRect">
@@ -6599,8 +5244,507 @@
         </p:nvCxnSpPr>
         <p:spPr>
           <a:xfrm>
-            <a:off x="9734232" y="3395828"/>
+            <a:off x="9784751" y="4360748"/>
             <a:ext cx="712305" cy="31148"/>
+          </a:xfrm>
+          <a:prstGeom prst="straightConnector1">
+            <a:avLst/>
+          </a:prstGeom>
+          <a:ln>
+            <a:tailEnd type="triangle"/>
+          </a:ln>
+        </p:spPr>
+        <p:style>
+          <a:lnRef idx="2">
+            <a:schemeClr val="dk1"/>
+          </a:lnRef>
+          <a:fillRef idx="0">
+            <a:schemeClr val="dk1"/>
+          </a:fillRef>
+          <a:effectRef idx="1">
+            <a:schemeClr val="dk1"/>
+          </a:effectRef>
+          <a:fontRef idx="minor">
+            <a:schemeClr val="tx1"/>
+          </a:fontRef>
+        </p:style>
+      </p:cxnSp>
+      <p:sp>
+        <p:nvSpPr>
+          <p:cNvPr id="2" name="文本框 1">
+            <a:extLst>
+              <a:ext uri="{FF2B5EF4-FFF2-40B4-BE49-F238E27FC236}">
+                <a16:creationId xmlns:a16="http://schemas.microsoft.com/office/drawing/2014/main" id="{A898AF71-C2C1-4091-A6C1-FC80F3E1074A}"/>
+              </a:ext>
+            </a:extLst>
+          </p:cNvPr>
+          <p:cNvSpPr txBox="1"/>
+          <p:nvPr/>
+        </p:nvSpPr>
+        <p:spPr>
+          <a:xfrm>
+            <a:off x="171761" y="189066"/>
+            <a:ext cx="2106657" cy="461665"/>
+          </a:xfrm>
+          <a:prstGeom prst="rect">
+            <a:avLst/>
+          </a:prstGeom>
+          <a:noFill/>
+        </p:spPr>
+        <p:txBody>
+          <a:bodyPr wrap="square" rtlCol="0">
+            <a:spAutoFit/>
+          </a:bodyPr>
+          <a:lstStyle/>
+          <a:p>
+            <a:pPr algn="ctr"/>
+            <a:r>
+              <a:rPr lang="zh-CN" altLang="zh-CN" sz="2400" dirty="0">
+                <a:latin typeface="Times New Roman" panose="02020603050405020304" pitchFamily="18" charset="0"/>
+                <a:cs typeface="Times New Roman" panose="02020603050405020304" pitchFamily="18" charset="0"/>
+              </a:rPr>
+              <a:t>event_stream()</a:t>
+            </a:r>
+          </a:p>
+        </p:txBody>
+      </p:sp>
+      <p:sp>
+        <p:nvSpPr>
+          <p:cNvPr id="4" name="矩形 3">
+            <a:extLst>
+              <a:ext uri="{FF2B5EF4-FFF2-40B4-BE49-F238E27FC236}">
+                <a16:creationId xmlns:a16="http://schemas.microsoft.com/office/drawing/2014/main" id="{D00F54C1-AE43-7D3B-6CCF-122CEF4B745A}"/>
+              </a:ext>
+            </a:extLst>
+          </p:cNvPr>
+          <p:cNvSpPr/>
+          <p:nvPr/>
+        </p:nvSpPr>
+        <p:spPr>
+          <a:xfrm>
+            <a:off x="1041896" y="1497634"/>
+            <a:ext cx="1125726" cy="305907"/>
+          </a:xfrm>
+          <a:prstGeom prst="rect">
+            <a:avLst/>
+          </a:prstGeom>
+        </p:spPr>
+        <p:style>
+          <a:lnRef idx="2">
+            <a:schemeClr val="dk1"/>
+          </a:lnRef>
+          <a:fillRef idx="1">
+            <a:schemeClr val="lt1"/>
+          </a:fillRef>
+          <a:effectRef idx="0">
+            <a:schemeClr val="dk1"/>
+          </a:effectRef>
+          <a:fontRef idx="minor">
+            <a:schemeClr val="dk1"/>
+          </a:fontRef>
+        </p:style>
+        <p:txBody>
+          <a:bodyPr rtlCol="0" anchor="ctr"/>
+          <a:lstStyle/>
+          <a:p>
+            <a:pPr algn="ctr"/>
+            <a:r>
+              <a:rPr lang="en-US" altLang="zh-CN" sz="1200" dirty="0" err="1">
+                <a:latin typeface="Times New Roman" panose="02020603050405020304" pitchFamily="18" charset="0"/>
+                <a:cs typeface="Times New Roman" panose="02020603050405020304" pitchFamily="18" charset="0"/>
+              </a:rPr>
+              <a:t>event_stream</a:t>
+            </a:r>
+            <a:r>
+              <a:rPr lang="en-US" altLang="zh-CN" sz="1200" dirty="0">
+                <a:latin typeface="Times New Roman" panose="02020603050405020304" pitchFamily="18" charset="0"/>
+                <a:cs typeface="Times New Roman" panose="02020603050405020304" pitchFamily="18" charset="0"/>
+              </a:rPr>
+              <a:t>()</a:t>
+            </a:r>
+            <a:endParaRPr lang="zh-CN" altLang="en-US" sz="1200" dirty="0">
+              <a:latin typeface="Times New Roman" panose="02020603050405020304" pitchFamily="18" charset="0"/>
+              <a:cs typeface="Times New Roman" panose="02020603050405020304" pitchFamily="18" charset="0"/>
+            </a:endParaRPr>
+          </a:p>
+        </p:txBody>
+      </p:sp>
+      <p:sp>
+        <p:nvSpPr>
+          <p:cNvPr id="5" name="矩形: 圆角 4">
+            <a:extLst>
+              <a:ext uri="{FF2B5EF4-FFF2-40B4-BE49-F238E27FC236}">
+                <a16:creationId xmlns:a16="http://schemas.microsoft.com/office/drawing/2014/main" id="{5C6495D9-CCE9-97DC-1AD6-6DF45F998F4D}"/>
+              </a:ext>
+            </a:extLst>
+          </p:cNvPr>
+          <p:cNvSpPr/>
+          <p:nvPr/>
+        </p:nvSpPr>
+        <p:spPr>
+          <a:xfrm>
+            <a:off x="1041897" y="860974"/>
+            <a:ext cx="1125726" cy="305907"/>
+          </a:xfrm>
+          <a:prstGeom prst="roundRect">
+            <a:avLst/>
+          </a:prstGeom>
+          <a:noFill/>
+        </p:spPr>
+        <p:style>
+          <a:lnRef idx="2">
+            <a:schemeClr val="accent1">
+              <a:shade val="15000"/>
+            </a:schemeClr>
+          </a:lnRef>
+          <a:fillRef idx="1">
+            <a:schemeClr val="accent1"/>
+          </a:fillRef>
+          <a:effectRef idx="0">
+            <a:schemeClr val="accent1"/>
+          </a:effectRef>
+          <a:fontRef idx="minor">
+            <a:schemeClr val="lt1"/>
+          </a:fontRef>
+        </p:style>
+        <p:txBody>
+          <a:bodyPr rtlCol="0" anchor="ctr"/>
+          <a:lstStyle/>
+          <a:p>
+            <a:pPr algn="ctr"/>
+            <a:r>
+              <a:rPr lang="zh-CN" altLang="en-US" sz="1400" dirty="0">
+                <a:solidFill>
+                  <a:schemeClr val="tx1"/>
+                </a:solidFill>
+                <a:latin typeface="黑体" panose="02010609060101010101" pitchFamily="49" charset="-122"/>
+                <a:ea typeface="黑体" panose="02010609060101010101" pitchFamily="49" charset="-122"/>
+              </a:rPr>
+              <a:t>开始</a:t>
+            </a:r>
+          </a:p>
+        </p:txBody>
+      </p:sp>
+      <p:cxnSp>
+        <p:nvCxnSpPr>
+          <p:cNvPr id="9" name="直接箭头连接符 8">
+            <a:extLst>
+              <a:ext uri="{FF2B5EF4-FFF2-40B4-BE49-F238E27FC236}">
+                <a16:creationId xmlns:a16="http://schemas.microsoft.com/office/drawing/2014/main" id="{17CAEE98-50D5-DEFB-781A-2B8FECB1538E}"/>
+              </a:ext>
+            </a:extLst>
+          </p:cNvPr>
+          <p:cNvCxnSpPr>
+            <a:stCxn id="5" idx="2"/>
+            <a:endCxn id="4" idx="0"/>
+          </p:cNvCxnSpPr>
+          <p:nvPr/>
+        </p:nvCxnSpPr>
+        <p:spPr>
+          <a:xfrm flipH="1">
+            <a:off x="1604759" y="1166881"/>
+            <a:ext cx="1" cy="330753"/>
+          </a:xfrm>
+          <a:prstGeom prst="straightConnector1">
+            <a:avLst/>
+          </a:prstGeom>
+          <a:ln>
+            <a:tailEnd type="triangle"/>
+          </a:ln>
+        </p:spPr>
+        <p:style>
+          <a:lnRef idx="2">
+            <a:schemeClr val="dk1"/>
+          </a:lnRef>
+          <a:fillRef idx="0">
+            <a:schemeClr val="dk1"/>
+          </a:fillRef>
+          <a:effectRef idx="1">
+            <a:schemeClr val="dk1"/>
+          </a:effectRef>
+          <a:fontRef idx="minor">
+            <a:schemeClr val="tx1"/>
+          </a:fontRef>
+        </p:style>
+      </p:cxnSp>
+      <p:sp>
+        <p:nvSpPr>
+          <p:cNvPr id="10" name="矩形 9">
+            <a:extLst>
+              <a:ext uri="{FF2B5EF4-FFF2-40B4-BE49-F238E27FC236}">
+                <a16:creationId xmlns:a16="http://schemas.microsoft.com/office/drawing/2014/main" id="{116714A3-BA81-C487-9CBD-D3103A0F9349}"/>
+              </a:ext>
+            </a:extLst>
+          </p:cNvPr>
+          <p:cNvSpPr/>
+          <p:nvPr/>
+        </p:nvSpPr>
+        <p:spPr>
+          <a:xfrm>
+            <a:off x="1041896" y="2109612"/>
+            <a:ext cx="1125726" cy="305907"/>
+          </a:xfrm>
+          <a:prstGeom prst="rect">
+            <a:avLst/>
+          </a:prstGeom>
+        </p:spPr>
+        <p:style>
+          <a:lnRef idx="2">
+            <a:schemeClr val="dk1"/>
+          </a:lnRef>
+          <a:fillRef idx="1">
+            <a:schemeClr val="lt1"/>
+          </a:fillRef>
+          <a:effectRef idx="0">
+            <a:schemeClr val="dk1"/>
+          </a:effectRef>
+          <a:fontRef idx="minor">
+            <a:schemeClr val="dk1"/>
+          </a:fontRef>
+        </p:style>
+        <p:txBody>
+          <a:bodyPr rtlCol="0" anchor="ctr"/>
+          <a:lstStyle/>
+          <a:p>
+            <a:pPr algn="ctr"/>
+            <a:r>
+              <a:rPr lang="zh-CN" altLang="zh-CN" sz="1050" dirty="0">
+                <a:latin typeface="Times New Roman" panose="02020603050405020304" pitchFamily="18" charset="0"/>
+                <a:cs typeface="Times New Roman" panose="02020603050405020304" pitchFamily="18" charset="0"/>
+              </a:rPr>
+              <a:t>execute_research</a:t>
+            </a:r>
+          </a:p>
+        </p:txBody>
+      </p:sp>
+      <p:cxnSp>
+        <p:nvCxnSpPr>
+          <p:cNvPr id="14" name="直接箭头连接符 13">
+            <a:extLst>
+              <a:ext uri="{FF2B5EF4-FFF2-40B4-BE49-F238E27FC236}">
+                <a16:creationId xmlns:a16="http://schemas.microsoft.com/office/drawing/2014/main" id="{39DB46BD-9972-F867-7A1B-6A5A6DC1E701}"/>
+              </a:ext>
+            </a:extLst>
+          </p:cNvPr>
+          <p:cNvCxnSpPr>
+            <a:stCxn id="4" idx="2"/>
+            <a:endCxn id="10" idx="0"/>
+          </p:cNvCxnSpPr>
+          <p:nvPr/>
+        </p:nvCxnSpPr>
+        <p:spPr>
+          <a:xfrm>
+            <a:off x="1604759" y="1803541"/>
+            <a:ext cx="0" cy="306071"/>
+          </a:xfrm>
+          <a:prstGeom prst="straightConnector1">
+            <a:avLst/>
+          </a:prstGeom>
+          <a:ln>
+            <a:tailEnd type="triangle"/>
+          </a:ln>
+        </p:spPr>
+        <p:style>
+          <a:lnRef idx="2">
+            <a:schemeClr val="dk1"/>
+          </a:lnRef>
+          <a:fillRef idx="0">
+            <a:schemeClr val="dk1"/>
+          </a:fillRef>
+          <a:effectRef idx="1">
+            <a:schemeClr val="dk1"/>
+          </a:effectRef>
+          <a:fontRef idx="minor">
+            <a:schemeClr val="tx1"/>
+          </a:fontRef>
+        </p:style>
+      </p:cxnSp>
+      <p:sp>
+        <p:nvSpPr>
+          <p:cNvPr id="16" name="矩形 15">
+            <a:extLst>
+              <a:ext uri="{FF2B5EF4-FFF2-40B4-BE49-F238E27FC236}">
+                <a16:creationId xmlns:a16="http://schemas.microsoft.com/office/drawing/2014/main" id="{4E49145F-76FB-B803-08E2-D9BAC54E3FA1}"/>
+              </a:ext>
+            </a:extLst>
+          </p:cNvPr>
+          <p:cNvSpPr/>
+          <p:nvPr/>
+        </p:nvSpPr>
+        <p:spPr>
+          <a:xfrm>
+            <a:off x="1041896" y="2706122"/>
+            <a:ext cx="1125726" cy="305907"/>
+          </a:xfrm>
+          <a:prstGeom prst="rect">
+            <a:avLst/>
+          </a:prstGeom>
+        </p:spPr>
+        <p:style>
+          <a:lnRef idx="2">
+            <a:schemeClr val="dk1"/>
+          </a:lnRef>
+          <a:fillRef idx="1">
+            <a:schemeClr val="lt1"/>
+          </a:fillRef>
+          <a:effectRef idx="0">
+            <a:schemeClr val="dk1"/>
+          </a:effectRef>
+          <a:fontRef idx="minor">
+            <a:schemeClr val="dk1"/>
+          </a:fontRef>
+        </p:style>
+        <p:txBody>
+          <a:bodyPr rtlCol="0" anchor="ctr"/>
+          <a:lstStyle/>
+          <a:p>
+            <a:pPr algn="ctr"/>
+            <a:r>
+              <a:rPr lang="zh-CN" altLang="zh-CN" sz="700" dirty="0">
+                <a:latin typeface="Times New Roman" panose="02020603050405020304" pitchFamily="18" charset="0"/>
+                <a:cs typeface="Times New Roman" panose="02020603050405020304" pitchFamily="18" charset="0"/>
+              </a:rPr>
+              <a:t>_graph_run</a:t>
+            </a:r>
+            <a:r>
+              <a:rPr lang="en-US" altLang="zh-CN" sz="700" dirty="0">
+                <a:latin typeface="Times New Roman" panose="02020603050405020304" pitchFamily="18" charset="0"/>
+                <a:cs typeface="Times New Roman" panose="02020603050405020304" pitchFamily="18" charset="0"/>
+              </a:rPr>
+              <a:t>/</a:t>
+            </a:r>
+            <a:r>
+              <a:rPr lang="zh-CN" altLang="zh-CN" sz="700" dirty="0">
+                <a:latin typeface="Times New Roman" panose="02020603050405020304" pitchFamily="18" charset="0"/>
+                <a:cs typeface="Times New Roman" panose="02020603050405020304" pitchFamily="18" charset="0"/>
+              </a:rPr>
+              <a:t>run_research</a:t>
+            </a:r>
+          </a:p>
+        </p:txBody>
+      </p:sp>
+      <p:cxnSp>
+        <p:nvCxnSpPr>
+          <p:cNvPr id="18" name="直接箭头连接符 17">
+            <a:extLst>
+              <a:ext uri="{FF2B5EF4-FFF2-40B4-BE49-F238E27FC236}">
+                <a16:creationId xmlns:a16="http://schemas.microsoft.com/office/drawing/2014/main" id="{330EA279-888A-6297-D587-C1D4DBAC0744}"/>
+              </a:ext>
+            </a:extLst>
+          </p:cNvPr>
+          <p:cNvCxnSpPr>
+            <a:stCxn id="10" idx="2"/>
+            <a:endCxn id="16" idx="0"/>
+          </p:cNvCxnSpPr>
+          <p:nvPr/>
+        </p:nvCxnSpPr>
+        <p:spPr>
+          <a:xfrm>
+            <a:off x="1604759" y="2415519"/>
+            <a:ext cx="0" cy="290603"/>
+          </a:xfrm>
+          <a:prstGeom prst="straightConnector1">
+            <a:avLst/>
+          </a:prstGeom>
+          <a:ln>
+            <a:tailEnd type="triangle"/>
+          </a:ln>
+        </p:spPr>
+        <p:style>
+          <a:lnRef idx="2">
+            <a:schemeClr val="dk1"/>
+          </a:lnRef>
+          <a:fillRef idx="0">
+            <a:schemeClr val="dk1"/>
+          </a:fillRef>
+          <a:effectRef idx="1">
+            <a:schemeClr val="dk1"/>
+          </a:effectRef>
+          <a:fontRef idx="minor">
+            <a:schemeClr val="tx1"/>
+          </a:fontRef>
+        </p:style>
+      </p:cxnSp>
+      <p:sp>
+        <p:nvSpPr>
+          <p:cNvPr id="20" name="矩形 19">
+            <a:extLst>
+              <a:ext uri="{FF2B5EF4-FFF2-40B4-BE49-F238E27FC236}">
+                <a16:creationId xmlns:a16="http://schemas.microsoft.com/office/drawing/2014/main" id="{96DDE5D8-6A16-A2DF-3219-2FF5061EB15E}"/>
+              </a:ext>
+            </a:extLst>
+          </p:cNvPr>
+          <p:cNvSpPr/>
+          <p:nvPr/>
+        </p:nvSpPr>
+        <p:spPr>
+          <a:xfrm>
+            <a:off x="1041896" y="3334276"/>
+            <a:ext cx="1125726" cy="305907"/>
+          </a:xfrm>
+          <a:prstGeom prst="rect">
+            <a:avLst/>
+          </a:prstGeom>
+        </p:spPr>
+        <p:style>
+          <a:lnRef idx="2">
+            <a:schemeClr val="dk1"/>
+          </a:lnRef>
+          <a:fillRef idx="1">
+            <a:schemeClr val="lt1"/>
+          </a:fillRef>
+          <a:effectRef idx="0">
+            <a:schemeClr val="dk1"/>
+          </a:effectRef>
+          <a:fontRef idx="minor">
+            <a:schemeClr val="dk1"/>
+          </a:fontRef>
+        </p:style>
+        <p:txBody>
+          <a:bodyPr rtlCol="0" anchor="ctr"/>
+          <a:lstStyle/>
+          <a:p>
+            <a:pPr algn="ctr"/>
+            <a:r>
+              <a:rPr lang="zh-CN" altLang="zh-CN" sz="1200" dirty="0">
+                <a:latin typeface="Times New Roman" panose="02020603050405020304" pitchFamily="18" charset="0"/>
+                <a:cs typeface="Times New Roman" panose="02020603050405020304" pitchFamily="18" charset="0"/>
+              </a:rPr>
+              <a:t>graph.stream</a:t>
+            </a:r>
+            <a:r>
+              <a:rPr lang="en-US" altLang="zh-CN" sz="1200" dirty="0">
+                <a:latin typeface="Times New Roman" panose="02020603050405020304" pitchFamily="18" charset="0"/>
+                <a:cs typeface="Times New Roman" panose="02020603050405020304" pitchFamily="18" charset="0"/>
+              </a:rPr>
+              <a:t>()</a:t>
+            </a:r>
+            <a:endParaRPr lang="zh-CN" altLang="zh-CN" sz="1200" dirty="0">
+              <a:latin typeface="Times New Roman" panose="02020603050405020304" pitchFamily="18" charset="0"/>
+              <a:cs typeface="Times New Roman" panose="02020603050405020304" pitchFamily="18" charset="0"/>
+            </a:endParaRPr>
+          </a:p>
+        </p:txBody>
+      </p:sp>
+      <p:cxnSp>
+        <p:nvCxnSpPr>
+          <p:cNvPr id="27" name="直接箭头连接符 26">
+            <a:extLst>
+              <a:ext uri="{FF2B5EF4-FFF2-40B4-BE49-F238E27FC236}">
+                <a16:creationId xmlns:a16="http://schemas.microsoft.com/office/drawing/2014/main" id="{84A6DB6F-6BA9-73D6-D3F2-C460FB6AB2B6}"/>
+              </a:ext>
+            </a:extLst>
+          </p:cNvPr>
+          <p:cNvCxnSpPr>
+            <a:stCxn id="16" idx="2"/>
+            <a:endCxn id="20" idx="0"/>
+          </p:cNvCxnSpPr>
+          <p:nvPr/>
+        </p:nvCxnSpPr>
+        <p:spPr>
+          <a:xfrm>
+            <a:off x="1604759" y="3012029"/>
+            <a:ext cx="0" cy="322247"/>
           </a:xfrm>
           <a:prstGeom prst="straightConnector1">
             <a:avLst/>
@@ -6637,296 +5781,7 @@
 </p:sld>
 </file>
 
-<file path=ppt/slides/slide13.xml><?xml version="1.0" encoding="utf-8"?>
-<p:sld xmlns:a="http://schemas.openxmlformats.org/drawingml/2006/main" xmlns:r="http://schemas.openxmlformats.org/officeDocument/2006/relationships" xmlns:p="http://schemas.openxmlformats.org/presentationml/2006/main">
-  <p:cSld>
-    <p:spTree>
-      <p:nvGrpSpPr>
-        <p:cNvPr id="1" name="">
-          <a:extLst>
-            <a:ext uri="{FF2B5EF4-FFF2-40B4-BE49-F238E27FC236}">
-              <a16:creationId xmlns:a16="http://schemas.microsoft.com/office/drawing/2014/main" id="{69F6EA63-E602-EF7A-0164-385D46A5EB8B}"/>
-            </a:ext>
-          </a:extLst>
-        </p:cNvPr>
-        <p:cNvGrpSpPr/>
-        <p:nvPr/>
-      </p:nvGrpSpPr>
-      <p:grpSpPr>
-        <a:xfrm>
-          <a:off x="0" y="0"/>
-          <a:ext cx="0" cy="0"/>
-          <a:chOff x="0" y="0"/>
-          <a:chExt cx="0" cy="0"/>
-        </a:xfrm>
-      </p:grpSpPr>
-      <p:sp>
-        <p:nvSpPr>
-          <p:cNvPr id="2" name="标题 1">
-            <a:extLst>
-              <a:ext uri="{FF2B5EF4-FFF2-40B4-BE49-F238E27FC236}">
-                <a16:creationId xmlns:a16="http://schemas.microsoft.com/office/drawing/2014/main" id="{3B968D58-4269-DB19-3B47-F1F73E4D9B5F}"/>
-              </a:ext>
-            </a:extLst>
-          </p:cNvPr>
-          <p:cNvSpPr>
-            <a:spLocks noGrp="1"/>
-          </p:cNvSpPr>
-          <p:nvPr>
-            <p:ph type="title"/>
-          </p:nvPr>
-        </p:nvSpPr>
-        <p:spPr/>
-        <p:txBody>
-          <a:bodyPr/>
-          <a:lstStyle/>
-          <a:p>
-            <a:r>
-              <a:rPr lang="zh-CN" altLang="zh-CN" dirty="0">
-                <a:latin typeface="Times New Roman" panose="02020603050405020304" pitchFamily="18" charset="0"/>
-                <a:cs typeface="Times New Roman" panose="02020603050405020304" pitchFamily="18" charset="0"/>
-              </a:rPr>
-              <a:t>backend.api.server</a:t>
-            </a:r>
-            <a:r>
-              <a:rPr lang="en-US" altLang="zh-CN" dirty="0">
-                <a:latin typeface="Times New Roman" panose="02020603050405020304" pitchFamily="18" charset="0"/>
-                <a:cs typeface="Times New Roman" panose="02020603050405020304" pitchFamily="18" charset="0"/>
-              </a:rPr>
-              <a:t>.</a:t>
-            </a:r>
-            <a:r>
-              <a:rPr lang="en-US" altLang="zh-CN" dirty="0" err="1">
-                <a:latin typeface="Times New Roman" panose="02020603050405020304" pitchFamily="18" charset="0"/>
-                <a:cs typeface="Times New Roman" panose="02020603050405020304" pitchFamily="18" charset="0"/>
-              </a:rPr>
-              <a:t>py</a:t>
-            </a:r>
-            <a:endParaRPr lang="zh-CN" altLang="en-US" dirty="0">
-              <a:latin typeface="Times New Roman" panose="02020603050405020304" pitchFamily="18" charset="0"/>
-              <a:cs typeface="Times New Roman" panose="02020603050405020304" pitchFamily="18" charset="0"/>
-            </a:endParaRPr>
-          </a:p>
-        </p:txBody>
-      </p:sp>
-      <p:sp>
-        <p:nvSpPr>
-          <p:cNvPr id="3" name="内容占位符 2">
-            <a:extLst>
-              <a:ext uri="{FF2B5EF4-FFF2-40B4-BE49-F238E27FC236}">
-                <a16:creationId xmlns:a16="http://schemas.microsoft.com/office/drawing/2014/main" id="{E9BD0207-87D7-B5BF-0CF5-ADD5C81A28A1}"/>
-              </a:ext>
-            </a:extLst>
-          </p:cNvPr>
-          <p:cNvSpPr>
-            <a:spLocks noGrp="1"/>
-          </p:cNvSpPr>
-          <p:nvPr>
-            <p:ph idx="1"/>
-          </p:nvPr>
-        </p:nvSpPr>
-        <p:spPr/>
-        <p:txBody>
-          <a:bodyPr/>
-          <a:lstStyle/>
-          <a:p>
-            <a:r>
-              <a:rPr lang="zh-CN" altLang="en-US" dirty="0">
-                <a:latin typeface="黑体" panose="02010609060101010101" pitchFamily="49" charset="-122"/>
-                <a:ea typeface="黑体" panose="02010609060101010101" pitchFamily="49" charset="-122"/>
-              </a:rPr>
-              <a:t>后端接口</a:t>
-            </a:r>
-            <a:endParaRPr lang="en-US" altLang="zh-CN" dirty="0">
-              <a:latin typeface="黑体" panose="02010609060101010101" pitchFamily="49" charset="-122"/>
-              <a:ea typeface="黑体" panose="02010609060101010101" pitchFamily="49" charset="-122"/>
-            </a:endParaRPr>
-          </a:p>
-          <a:p>
-            <a:pPr lvl="1"/>
-            <a:r>
-              <a:rPr lang="zh-CN" altLang="zh-CN" dirty="0">
-                <a:solidFill>
-                  <a:schemeClr val="accent6">
-                    <a:lumMod val="75000"/>
-                  </a:schemeClr>
-                </a:solidFill>
-                <a:latin typeface="Times New Roman" panose="02020603050405020304" pitchFamily="18" charset="0"/>
-                <a:cs typeface="Times New Roman" panose="02020603050405020304" pitchFamily="18" charset="0"/>
-              </a:rPr>
-              <a:t>"</a:t>
-            </a:r>
-            <a:r>
-              <a:rPr lang="zh-CN" altLang="zh-CN" dirty="0">
-                <a:solidFill>
-                  <a:schemeClr val="accent6">
-                    <a:lumMod val="75000"/>
-                  </a:schemeClr>
-                </a:solidFill>
-                <a:latin typeface="Times New Roman" panose="02020603050405020304" pitchFamily="18" charset="0"/>
-                <a:ea typeface="黑体" panose="02010609060101010101" pitchFamily="49" charset="-122"/>
-                <a:cs typeface="Times New Roman" panose="02020603050405020304" pitchFamily="18" charset="0"/>
-              </a:rPr>
-              <a:t>/api/</a:t>
-            </a:r>
-            <a:r>
-              <a:rPr lang="en-US" altLang="zh-CN" dirty="0">
-                <a:solidFill>
-                  <a:schemeClr val="accent6">
-                    <a:lumMod val="75000"/>
-                  </a:schemeClr>
-                </a:solidFill>
-                <a:latin typeface="Times New Roman" panose="02020603050405020304" pitchFamily="18" charset="0"/>
-                <a:ea typeface="黑体" panose="02010609060101010101" pitchFamily="49" charset="-122"/>
-                <a:cs typeface="Times New Roman" panose="02020603050405020304" pitchFamily="18" charset="0"/>
-              </a:rPr>
-              <a:t>research</a:t>
-            </a:r>
-            <a:r>
-              <a:rPr lang="zh-CN" altLang="zh-CN" dirty="0">
-                <a:solidFill>
-                  <a:schemeClr val="accent6">
-                    <a:lumMod val="75000"/>
-                  </a:schemeClr>
-                </a:solidFill>
-                <a:latin typeface="Times New Roman" panose="02020603050405020304" pitchFamily="18" charset="0"/>
-                <a:cs typeface="Times New Roman" panose="02020603050405020304" pitchFamily="18" charset="0"/>
-              </a:rPr>
-              <a:t>"</a:t>
-            </a:r>
-            <a:endParaRPr lang="en-US" altLang="zh-CN" dirty="0">
-              <a:solidFill>
-                <a:schemeClr val="accent6">
-                  <a:lumMod val="75000"/>
-                </a:schemeClr>
-              </a:solidFill>
-              <a:latin typeface="Times New Roman" panose="02020603050405020304" pitchFamily="18" charset="0"/>
-              <a:ea typeface="黑体" panose="02010609060101010101" pitchFamily="49" charset="-122"/>
-              <a:cs typeface="Times New Roman" panose="02020603050405020304" pitchFamily="18" charset="0"/>
-            </a:endParaRPr>
-          </a:p>
-          <a:p>
-            <a:pPr lvl="2"/>
-            <a:r>
-              <a:rPr lang="en-US" altLang="zh-CN" dirty="0" err="1">
-                <a:solidFill>
-                  <a:schemeClr val="accent6">
-                    <a:lumMod val="75000"/>
-                  </a:schemeClr>
-                </a:solidFill>
-                <a:latin typeface="Times New Roman" panose="02020603050405020304" pitchFamily="18" charset="0"/>
-                <a:ea typeface="黑体" panose="02010609060101010101" pitchFamily="49" charset="-122"/>
-                <a:cs typeface="Times New Roman" panose="02020603050405020304" pitchFamily="18" charset="0"/>
-              </a:rPr>
-              <a:t>event_stream</a:t>
-            </a:r>
-            <a:r>
-              <a:rPr lang="en-US" altLang="zh-CN" dirty="0">
-                <a:solidFill>
-                  <a:schemeClr val="accent6">
-                    <a:lumMod val="75000"/>
-                  </a:schemeClr>
-                </a:solidFill>
-                <a:latin typeface="Times New Roman" panose="02020603050405020304" pitchFamily="18" charset="0"/>
-                <a:ea typeface="黑体" panose="02010609060101010101" pitchFamily="49" charset="-122"/>
-                <a:cs typeface="Times New Roman" panose="02020603050405020304" pitchFamily="18" charset="0"/>
-              </a:rPr>
-              <a:t>()</a:t>
-            </a:r>
-            <a:endParaRPr lang="zh-CN" altLang="zh-CN" dirty="0">
-              <a:solidFill>
-                <a:schemeClr val="accent6">
-                  <a:lumMod val="75000"/>
-                </a:schemeClr>
-              </a:solidFill>
-              <a:latin typeface="Times New Roman" panose="02020603050405020304" pitchFamily="18" charset="0"/>
-              <a:ea typeface="黑体" panose="02010609060101010101" pitchFamily="49" charset="-122"/>
-              <a:cs typeface="Times New Roman" panose="02020603050405020304" pitchFamily="18" charset="0"/>
-            </a:endParaRPr>
-          </a:p>
-          <a:p>
-            <a:pPr lvl="1"/>
-            <a:endParaRPr lang="zh-CN" altLang="en-US" dirty="0">
-              <a:latin typeface="黑体" panose="02010609060101010101" pitchFamily="49" charset="-122"/>
-              <a:ea typeface="黑体" panose="02010609060101010101" pitchFamily="49" charset="-122"/>
-            </a:endParaRPr>
-          </a:p>
-        </p:txBody>
-      </p:sp>
-      <p:pic>
-        <p:nvPicPr>
-          <p:cNvPr id="5" name="图片 4">
-            <a:extLst>
-              <a:ext uri="{FF2B5EF4-FFF2-40B4-BE49-F238E27FC236}">
-                <a16:creationId xmlns:a16="http://schemas.microsoft.com/office/drawing/2014/main" id="{0598E31A-14A2-8C67-4E3C-55E2049ECAEB}"/>
-              </a:ext>
-            </a:extLst>
-          </p:cNvPr>
-          <p:cNvPicPr>
-            <a:picLocks noChangeAspect="1"/>
-          </p:cNvPicPr>
-          <p:nvPr/>
-        </p:nvPicPr>
-        <p:blipFill>
-          <a:blip r:embed="rId3"/>
-          <a:stretch>
-            <a:fillRect/>
-          </a:stretch>
-        </p:blipFill>
-        <p:spPr>
-          <a:xfrm>
-            <a:off x="838200" y="3273312"/>
-            <a:ext cx="3892750" cy="1016052"/>
-          </a:xfrm>
-          <a:prstGeom prst="rect">
-            <a:avLst/>
-          </a:prstGeom>
-        </p:spPr>
-      </p:pic>
-      <p:pic>
-        <p:nvPicPr>
-          <p:cNvPr id="7" name="图片 6">
-            <a:extLst>
-              <a:ext uri="{FF2B5EF4-FFF2-40B4-BE49-F238E27FC236}">
-                <a16:creationId xmlns:a16="http://schemas.microsoft.com/office/drawing/2014/main" id="{2636C9C9-720C-A1EF-AB88-E387F3972596}"/>
-              </a:ext>
-            </a:extLst>
-          </p:cNvPr>
-          <p:cNvPicPr>
-            <a:picLocks noChangeAspect="1"/>
-          </p:cNvPicPr>
-          <p:nvPr/>
-        </p:nvPicPr>
-        <p:blipFill>
-          <a:blip r:embed="rId4"/>
-          <a:stretch>
-            <a:fillRect/>
-          </a:stretch>
-        </p:blipFill>
-        <p:spPr>
-          <a:xfrm>
-            <a:off x="838200" y="4717623"/>
-            <a:ext cx="5372376" cy="711237"/>
-          </a:xfrm>
-          <a:prstGeom prst="rect">
-            <a:avLst/>
-          </a:prstGeom>
-        </p:spPr>
-      </p:pic>
-    </p:spTree>
-    <p:extLst>
-      <p:ext uri="{BB962C8B-B14F-4D97-AF65-F5344CB8AC3E}">
-        <p14:creationId xmlns:p14="http://schemas.microsoft.com/office/powerpoint/2010/main" val="2152931203"/>
-      </p:ext>
-    </p:extLst>
-  </p:cSld>
-  <p:clrMapOvr>
-    <a:masterClrMapping/>
-  </p:clrMapOvr>
-</p:sld>
-</file>
-
-<file path=ppt/slides/slide14.xml><?xml version="1.0" encoding="utf-8"?>
+<file path=ppt/slides/slide11.xml><?xml version="1.0" encoding="utf-8"?>
 <p:sld xmlns:a="http://schemas.openxmlformats.org/drawingml/2006/main" xmlns:r="http://schemas.openxmlformats.org/officeDocument/2006/relationships" xmlns:p="http://schemas.openxmlformats.org/presentationml/2006/main">
   <p:cSld>
     <p:spTree>
@@ -7068,7 +5923,7 @@
 </p:sld>
 </file>
 
-<file path=ppt/slides/slide15.xml><?xml version="1.0" encoding="utf-8"?>
+<file path=ppt/slides/slide12.xml><?xml version="1.0" encoding="utf-8"?>
 <p:sld xmlns:a="http://schemas.openxmlformats.org/drawingml/2006/main" xmlns:r="http://schemas.openxmlformats.org/officeDocument/2006/relationships" xmlns:p="http://schemas.openxmlformats.org/presentationml/2006/main">
   <p:cSld>
     <p:spTree>
@@ -7213,7 +6068,7 @@
 </p:sld>
 </file>
 
-<file path=ppt/slides/slide16.xml><?xml version="1.0" encoding="utf-8"?>
+<file path=ppt/slides/slide13.xml><?xml version="1.0" encoding="utf-8"?>
 <p:sld xmlns:a="http://schemas.openxmlformats.org/drawingml/2006/main" xmlns:r="http://schemas.openxmlformats.org/officeDocument/2006/relationships" xmlns:p="http://schemas.openxmlformats.org/presentationml/2006/main">
   <p:cSld>
     <p:spTree>
@@ -7383,7 +6238,7 @@
 </p:sld>
 </file>
 
-<file path=ppt/slides/slide17.xml><?xml version="1.0" encoding="utf-8"?>
+<file path=ppt/slides/slide14.xml><?xml version="1.0" encoding="utf-8"?>
 <p:sld xmlns:a="http://schemas.openxmlformats.org/drawingml/2006/main" xmlns:r="http://schemas.openxmlformats.org/officeDocument/2006/relationships" xmlns:p="http://schemas.openxmlformats.org/presentationml/2006/main">
   <p:cSld>
     <p:spTree>
@@ -7546,7 +6401,7 @@
 </p:sld>
 </file>
 
-<file path=ppt/slides/slide18.xml><?xml version="1.0" encoding="utf-8"?>
+<file path=ppt/slides/slide15.xml><?xml version="1.0" encoding="utf-8"?>
 <p:sld xmlns:a="http://schemas.openxmlformats.org/drawingml/2006/main" xmlns:r="http://schemas.openxmlformats.org/officeDocument/2006/relationships" xmlns:p="http://schemas.openxmlformats.org/presentationml/2006/main">
   <p:cSld>
     <p:spTree>
@@ -7709,7 +6564,7 @@
 </p:sld>
 </file>
 
-<file path=ppt/slides/slide19.xml><?xml version="1.0" encoding="utf-8"?>
+<file path=ppt/slides/slide16.xml><?xml version="1.0" encoding="utf-8"?>
 <p:sld xmlns:a="http://schemas.openxmlformats.org/drawingml/2006/main" xmlns:r="http://schemas.openxmlformats.org/officeDocument/2006/relationships" xmlns:p="http://schemas.openxmlformats.org/presentationml/2006/main">
   <p:cSld>
     <p:spTree>
@@ -7894,6 +6749,552 @@
     <p:extLst>
       <p:ext uri="{BB962C8B-B14F-4D97-AF65-F5344CB8AC3E}">
         <p14:creationId xmlns:p14="http://schemas.microsoft.com/office/powerpoint/2010/main" val="30248799"/>
+      </p:ext>
+    </p:extLst>
+  </p:cSld>
+  <p:clrMapOvr>
+    <a:masterClrMapping/>
+  </p:clrMapOvr>
+</p:sld>
+</file>
+
+<file path=ppt/slides/slide17.xml><?xml version="1.0" encoding="utf-8"?>
+<p:sld xmlns:a="http://schemas.openxmlformats.org/drawingml/2006/main" xmlns:r="http://schemas.openxmlformats.org/officeDocument/2006/relationships" xmlns:p="http://schemas.openxmlformats.org/presentationml/2006/main">
+  <p:cSld>
+    <p:spTree>
+      <p:nvGrpSpPr>
+        <p:cNvPr id="1" name="">
+          <a:extLst>
+            <a:ext uri="{FF2B5EF4-FFF2-40B4-BE49-F238E27FC236}">
+              <a16:creationId xmlns:a16="http://schemas.microsoft.com/office/drawing/2014/main" id="{A54C4B85-D55B-6E9D-431B-2AF5422F5C78}"/>
+            </a:ext>
+          </a:extLst>
+        </p:cNvPr>
+        <p:cNvGrpSpPr/>
+        <p:nvPr/>
+      </p:nvGrpSpPr>
+      <p:grpSpPr>
+        <a:xfrm>
+          <a:off x="0" y="0"/>
+          <a:ext cx="0" cy="0"/>
+          <a:chOff x="0" y="0"/>
+          <a:chExt cx="0" cy="0"/>
+        </a:xfrm>
+      </p:grpSpPr>
+      <p:sp>
+        <p:nvSpPr>
+          <p:cNvPr id="2" name="标题 1">
+            <a:extLst>
+              <a:ext uri="{FF2B5EF4-FFF2-40B4-BE49-F238E27FC236}">
+                <a16:creationId xmlns:a16="http://schemas.microsoft.com/office/drawing/2014/main" id="{AE71DA56-CF90-19F9-CFFD-C3A5B506EAEB}"/>
+              </a:ext>
+            </a:extLst>
+          </p:cNvPr>
+          <p:cNvSpPr>
+            <a:spLocks noGrp="1"/>
+          </p:cNvSpPr>
+          <p:nvPr>
+            <p:ph type="title"/>
+          </p:nvPr>
+        </p:nvSpPr>
+        <p:spPr/>
+        <p:txBody>
+          <a:bodyPr/>
+          <a:lstStyle/>
+          <a:p>
+            <a:r>
+              <a:rPr lang="zh-CN" altLang="zh-CN" dirty="0">
+                <a:latin typeface="Times New Roman" panose="02020603050405020304" pitchFamily="18" charset="0"/>
+                <a:cs typeface="Times New Roman" panose="02020603050405020304" pitchFamily="18" charset="0"/>
+              </a:rPr>
+              <a:t>backend.api.server</a:t>
+            </a:r>
+            <a:r>
+              <a:rPr lang="en-US" altLang="zh-CN" dirty="0">
+                <a:latin typeface="Times New Roman" panose="02020603050405020304" pitchFamily="18" charset="0"/>
+                <a:cs typeface="Times New Roman" panose="02020603050405020304" pitchFamily="18" charset="0"/>
+              </a:rPr>
+              <a:t>.</a:t>
+            </a:r>
+            <a:r>
+              <a:rPr lang="en-US" altLang="zh-CN" dirty="0" err="1">
+                <a:latin typeface="Times New Roman" panose="02020603050405020304" pitchFamily="18" charset="0"/>
+                <a:cs typeface="Times New Roman" panose="02020603050405020304" pitchFamily="18" charset="0"/>
+              </a:rPr>
+              <a:t>py</a:t>
+            </a:r>
+            <a:endParaRPr lang="zh-CN" altLang="en-US" dirty="0">
+              <a:latin typeface="Times New Roman" panose="02020603050405020304" pitchFamily="18" charset="0"/>
+              <a:cs typeface="Times New Roman" panose="02020603050405020304" pitchFamily="18" charset="0"/>
+            </a:endParaRPr>
+          </a:p>
+        </p:txBody>
+      </p:sp>
+      <p:sp>
+        <p:nvSpPr>
+          <p:cNvPr id="3" name="内容占位符 2">
+            <a:extLst>
+              <a:ext uri="{FF2B5EF4-FFF2-40B4-BE49-F238E27FC236}">
+                <a16:creationId xmlns:a16="http://schemas.microsoft.com/office/drawing/2014/main" id="{896AE129-E713-5C11-E02B-52FBC78ED2AF}"/>
+              </a:ext>
+            </a:extLst>
+          </p:cNvPr>
+          <p:cNvSpPr>
+            <a:spLocks noGrp="1"/>
+          </p:cNvSpPr>
+          <p:nvPr>
+            <p:ph idx="1"/>
+          </p:nvPr>
+        </p:nvSpPr>
+        <p:spPr/>
+        <p:txBody>
+          <a:bodyPr/>
+          <a:lstStyle/>
+          <a:p>
+            <a:r>
+              <a:rPr lang="zh-CN" altLang="en-US" dirty="0">
+                <a:latin typeface="黑体" panose="02010609060101010101" pitchFamily="49" charset="-122"/>
+                <a:ea typeface="黑体" panose="02010609060101010101" pitchFamily="49" charset="-122"/>
+              </a:rPr>
+              <a:t>后端接口</a:t>
+            </a:r>
+            <a:endParaRPr lang="en-US" altLang="zh-CN" dirty="0">
+              <a:latin typeface="黑体" panose="02010609060101010101" pitchFamily="49" charset="-122"/>
+              <a:ea typeface="黑体" panose="02010609060101010101" pitchFamily="49" charset="-122"/>
+            </a:endParaRPr>
+          </a:p>
+          <a:p>
+            <a:pPr lvl="1"/>
+            <a:r>
+              <a:rPr lang="zh-CN" altLang="zh-CN" dirty="0">
+                <a:solidFill>
+                  <a:schemeClr val="accent6">
+                    <a:lumMod val="75000"/>
+                  </a:schemeClr>
+                </a:solidFill>
+                <a:latin typeface="Times New Roman" panose="02020603050405020304" pitchFamily="18" charset="0"/>
+                <a:cs typeface="Times New Roman" panose="02020603050405020304" pitchFamily="18" charset="0"/>
+              </a:rPr>
+              <a:t>“/api/conversations/{conv_id}“</a:t>
+            </a:r>
+            <a:r>
+              <a:rPr lang="en-US" altLang="zh-CN" dirty="0">
+                <a:solidFill>
+                  <a:schemeClr val="accent6">
+                    <a:lumMod val="75000"/>
+                  </a:schemeClr>
+                </a:solidFill>
+                <a:latin typeface="Times New Roman" panose="02020603050405020304" pitchFamily="18" charset="0"/>
+                <a:cs typeface="Times New Roman" panose="02020603050405020304" pitchFamily="18" charset="0"/>
+              </a:rPr>
+              <a:t>(delete)</a:t>
+            </a:r>
+          </a:p>
+          <a:p>
+            <a:pPr lvl="2"/>
+            <a:r>
+              <a:rPr lang="zh-CN" altLang="en-US" dirty="0">
+                <a:latin typeface="黑体" panose="02010609060101010101" pitchFamily="49" charset="-122"/>
+                <a:ea typeface="黑体" panose="02010609060101010101" pitchFamily="49" charset="-122"/>
+                <a:cs typeface="Times New Roman" panose="02020603050405020304" pitchFamily="18" charset="0"/>
+              </a:rPr>
+              <a:t>删除整个对话</a:t>
+            </a:r>
+            <a:r>
+              <a:rPr lang="en-US" altLang="zh-CN" dirty="0">
+                <a:latin typeface="黑体" panose="02010609060101010101" pitchFamily="49" charset="-122"/>
+                <a:ea typeface="黑体" panose="02010609060101010101" pitchFamily="49" charset="-122"/>
+                <a:cs typeface="Times New Roman" panose="02020603050405020304" pitchFamily="18" charset="0"/>
+              </a:rPr>
+              <a:t>(</a:t>
+            </a:r>
+            <a:r>
+              <a:rPr lang="zh-CN" altLang="en-US" dirty="0">
+                <a:latin typeface="黑体" panose="02010609060101010101" pitchFamily="49" charset="-122"/>
+                <a:ea typeface="黑体" panose="02010609060101010101" pitchFamily="49" charset="-122"/>
+                <a:cs typeface="Times New Roman" panose="02020603050405020304" pitchFamily="18" charset="0"/>
+              </a:rPr>
+              <a:t>删除对话及其关联的表</a:t>
+            </a:r>
+            <a:r>
+              <a:rPr lang="en-US" altLang="zh-CN" dirty="0">
+                <a:latin typeface="黑体" panose="02010609060101010101" pitchFamily="49" charset="-122"/>
+                <a:ea typeface="黑体" panose="02010609060101010101" pitchFamily="49" charset="-122"/>
+                <a:cs typeface="Times New Roman" panose="02020603050405020304" pitchFamily="18" charset="0"/>
+              </a:rPr>
+              <a:t>)</a:t>
+            </a:r>
+            <a:endParaRPr lang="zh-CN" altLang="zh-CN" dirty="0">
+              <a:latin typeface="黑体" panose="02010609060101010101" pitchFamily="49" charset="-122"/>
+              <a:ea typeface="黑体" panose="02010609060101010101" pitchFamily="49" charset="-122"/>
+              <a:cs typeface="Times New Roman" panose="02020603050405020304" pitchFamily="18" charset="0"/>
+            </a:endParaRPr>
+          </a:p>
+          <a:p>
+            <a:pPr lvl="1"/>
+            <a:endParaRPr lang="zh-CN" altLang="en-US" dirty="0">
+              <a:latin typeface="黑体" panose="02010609060101010101" pitchFamily="49" charset="-122"/>
+              <a:ea typeface="黑体" panose="02010609060101010101" pitchFamily="49" charset="-122"/>
+            </a:endParaRPr>
+          </a:p>
+        </p:txBody>
+      </p:sp>
+    </p:spTree>
+    <p:extLst>
+      <p:ext uri="{BB962C8B-B14F-4D97-AF65-F5344CB8AC3E}">
+        <p14:creationId xmlns:p14="http://schemas.microsoft.com/office/powerpoint/2010/main" val="4157934588"/>
+      </p:ext>
+    </p:extLst>
+  </p:cSld>
+  <p:clrMapOvr>
+    <a:masterClrMapping/>
+  </p:clrMapOvr>
+</p:sld>
+</file>
+
+<file path=ppt/slides/slide18.xml><?xml version="1.0" encoding="utf-8"?>
+<p:sld xmlns:a="http://schemas.openxmlformats.org/drawingml/2006/main" xmlns:r="http://schemas.openxmlformats.org/officeDocument/2006/relationships" xmlns:p="http://schemas.openxmlformats.org/presentationml/2006/main">
+  <p:cSld>
+    <p:spTree>
+      <p:nvGrpSpPr>
+        <p:cNvPr id="1" name="">
+          <a:extLst>
+            <a:ext uri="{FF2B5EF4-FFF2-40B4-BE49-F238E27FC236}">
+              <a16:creationId xmlns:a16="http://schemas.microsoft.com/office/drawing/2014/main" id="{3B80467A-86C7-C20C-CC90-7DFF55F63ED2}"/>
+            </a:ext>
+          </a:extLst>
+        </p:cNvPr>
+        <p:cNvGrpSpPr/>
+        <p:nvPr/>
+      </p:nvGrpSpPr>
+      <p:grpSpPr>
+        <a:xfrm>
+          <a:off x="0" y="0"/>
+          <a:ext cx="0" cy="0"/>
+          <a:chOff x="0" y="0"/>
+          <a:chExt cx="0" cy="0"/>
+        </a:xfrm>
+      </p:grpSpPr>
+      <p:sp>
+        <p:nvSpPr>
+          <p:cNvPr id="2" name="标题 1">
+            <a:extLst>
+              <a:ext uri="{FF2B5EF4-FFF2-40B4-BE49-F238E27FC236}">
+                <a16:creationId xmlns:a16="http://schemas.microsoft.com/office/drawing/2014/main" id="{D2E58956-3D1C-36C8-AE68-D4B625528170}"/>
+              </a:ext>
+            </a:extLst>
+          </p:cNvPr>
+          <p:cNvSpPr>
+            <a:spLocks noGrp="1"/>
+          </p:cNvSpPr>
+          <p:nvPr>
+            <p:ph type="title"/>
+          </p:nvPr>
+        </p:nvSpPr>
+        <p:spPr/>
+        <p:txBody>
+          <a:bodyPr/>
+          <a:lstStyle/>
+          <a:p>
+            <a:r>
+              <a:rPr lang="zh-CN" altLang="zh-CN" dirty="0">
+                <a:latin typeface="Times New Roman" panose="02020603050405020304" pitchFamily="18" charset="0"/>
+                <a:cs typeface="Times New Roman" panose="02020603050405020304" pitchFamily="18" charset="0"/>
+              </a:rPr>
+              <a:t>backend.api.server</a:t>
+            </a:r>
+            <a:r>
+              <a:rPr lang="en-US" altLang="zh-CN" dirty="0">
+                <a:latin typeface="Times New Roman" panose="02020603050405020304" pitchFamily="18" charset="0"/>
+                <a:cs typeface="Times New Roman" panose="02020603050405020304" pitchFamily="18" charset="0"/>
+              </a:rPr>
+              <a:t>.</a:t>
+            </a:r>
+            <a:r>
+              <a:rPr lang="en-US" altLang="zh-CN" dirty="0" err="1">
+                <a:latin typeface="Times New Roman" panose="02020603050405020304" pitchFamily="18" charset="0"/>
+                <a:cs typeface="Times New Roman" panose="02020603050405020304" pitchFamily="18" charset="0"/>
+              </a:rPr>
+              <a:t>py</a:t>
+            </a:r>
+            <a:endParaRPr lang="zh-CN" altLang="en-US" dirty="0">
+              <a:latin typeface="Times New Roman" panose="02020603050405020304" pitchFamily="18" charset="0"/>
+              <a:cs typeface="Times New Roman" panose="02020603050405020304" pitchFamily="18" charset="0"/>
+            </a:endParaRPr>
+          </a:p>
+        </p:txBody>
+      </p:sp>
+      <p:sp>
+        <p:nvSpPr>
+          <p:cNvPr id="3" name="内容占位符 2">
+            <a:extLst>
+              <a:ext uri="{FF2B5EF4-FFF2-40B4-BE49-F238E27FC236}">
+                <a16:creationId xmlns:a16="http://schemas.microsoft.com/office/drawing/2014/main" id="{95A0AE0D-BC25-7073-23E1-702B42F63E19}"/>
+              </a:ext>
+            </a:extLst>
+          </p:cNvPr>
+          <p:cNvSpPr>
+            <a:spLocks noGrp="1"/>
+          </p:cNvSpPr>
+          <p:nvPr>
+            <p:ph idx="1"/>
+          </p:nvPr>
+        </p:nvSpPr>
+        <p:spPr/>
+        <p:txBody>
+          <a:bodyPr/>
+          <a:lstStyle/>
+          <a:p>
+            <a:r>
+              <a:rPr lang="zh-CN" altLang="en-US" dirty="0">
+                <a:latin typeface="黑体" panose="02010609060101010101" pitchFamily="49" charset="-122"/>
+                <a:ea typeface="黑体" panose="02010609060101010101" pitchFamily="49" charset="-122"/>
+              </a:rPr>
+              <a:t>后端接口</a:t>
+            </a:r>
+            <a:endParaRPr lang="en-US" altLang="zh-CN" dirty="0">
+              <a:latin typeface="黑体" panose="02010609060101010101" pitchFamily="49" charset="-122"/>
+              <a:ea typeface="黑体" panose="02010609060101010101" pitchFamily="49" charset="-122"/>
+            </a:endParaRPr>
+          </a:p>
+          <a:p>
+            <a:pPr lvl="1"/>
+            <a:r>
+              <a:rPr lang="zh-CN" altLang="zh-CN" dirty="0">
+                <a:solidFill>
+                  <a:schemeClr val="accent6">
+                    <a:lumMod val="75000"/>
+                  </a:schemeClr>
+                </a:solidFill>
+                <a:latin typeface="Times New Roman" panose="02020603050405020304" pitchFamily="18" charset="0"/>
+                <a:ea typeface="黑体" panose="02010609060101010101" pitchFamily="49" charset="-122"/>
+                <a:cs typeface="Times New Roman" panose="02020603050405020304" pitchFamily="18" charset="0"/>
+              </a:rPr>
+              <a:t>“/api/conversations/{conv_id}</a:t>
+            </a:r>
+            <a:r>
+              <a:rPr lang="zh-CN" altLang="en-US" dirty="0">
+                <a:solidFill>
+                  <a:schemeClr val="accent6">
+                    <a:lumMod val="75000"/>
+                  </a:schemeClr>
+                </a:solidFill>
+                <a:latin typeface="Times New Roman" panose="02020603050405020304" pitchFamily="18" charset="0"/>
+                <a:ea typeface="黑体" panose="02010609060101010101" pitchFamily="49" charset="-122"/>
+                <a:cs typeface="Times New Roman" panose="02020603050405020304" pitchFamily="18" charset="0"/>
+              </a:rPr>
+              <a:t>”</a:t>
+            </a:r>
+            <a:r>
+              <a:rPr lang="en-US" altLang="zh-CN" dirty="0">
+                <a:solidFill>
+                  <a:schemeClr val="accent6">
+                    <a:lumMod val="75000"/>
+                  </a:schemeClr>
+                </a:solidFill>
+                <a:latin typeface="Times New Roman" panose="02020603050405020304" pitchFamily="18" charset="0"/>
+                <a:ea typeface="黑体" panose="02010609060101010101" pitchFamily="49" charset="-122"/>
+                <a:cs typeface="Times New Roman" panose="02020603050405020304" pitchFamily="18" charset="0"/>
+              </a:rPr>
+              <a:t>(patch)</a:t>
+            </a:r>
+          </a:p>
+          <a:p>
+            <a:pPr lvl="2"/>
+            <a:r>
+              <a:rPr lang="zh-CN" altLang="en-US" dirty="0">
+                <a:latin typeface="Times New Roman" panose="02020603050405020304" pitchFamily="18" charset="0"/>
+                <a:ea typeface="黑体" panose="02010609060101010101" pitchFamily="49" charset="-122"/>
+                <a:cs typeface="Times New Roman" panose="02020603050405020304" pitchFamily="18" charset="0"/>
+              </a:rPr>
+              <a:t>更新某个对话的标题</a:t>
+            </a:r>
+            <a:endParaRPr lang="zh-CN" altLang="zh-CN" dirty="0">
+              <a:latin typeface="Times New Roman" panose="02020603050405020304" pitchFamily="18" charset="0"/>
+              <a:ea typeface="黑体" panose="02010609060101010101" pitchFamily="49" charset="-122"/>
+              <a:cs typeface="Times New Roman" panose="02020603050405020304" pitchFamily="18" charset="0"/>
+            </a:endParaRPr>
+          </a:p>
+          <a:p>
+            <a:pPr lvl="1"/>
+            <a:endParaRPr lang="zh-CN" altLang="en-US" dirty="0">
+              <a:latin typeface="黑体" panose="02010609060101010101" pitchFamily="49" charset="-122"/>
+              <a:ea typeface="黑体" panose="02010609060101010101" pitchFamily="49" charset="-122"/>
+            </a:endParaRPr>
+          </a:p>
+        </p:txBody>
+      </p:sp>
+    </p:spTree>
+    <p:extLst>
+      <p:ext uri="{BB962C8B-B14F-4D97-AF65-F5344CB8AC3E}">
+        <p14:creationId xmlns:p14="http://schemas.microsoft.com/office/powerpoint/2010/main" val="2116700909"/>
+      </p:ext>
+    </p:extLst>
+  </p:cSld>
+  <p:clrMapOvr>
+    <a:masterClrMapping/>
+  </p:clrMapOvr>
+</p:sld>
+</file>
+
+<file path=ppt/slides/slide19.xml><?xml version="1.0" encoding="utf-8"?>
+<p:sld xmlns:a="http://schemas.openxmlformats.org/drawingml/2006/main" xmlns:r="http://schemas.openxmlformats.org/officeDocument/2006/relationships" xmlns:p="http://schemas.openxmlformats.org/presentationml/2006/main">
+  <p:cSld>
+    <p:spTree>
+      <p:nvGrpSpPr>
+        <p:cNvPr id="1" name="">
+          <a:extLst>
+            <a:ext uri="{FF2B5EF4-FFF2-40B4-BE49-F238E27FC236}">
+              <a16:creationId xmlns:a16="http://schemas.microsoft.com/office/drawing/2014/main" id="{0FFA29C9-C610-8E1A-D0F0-BEC0D2FA437D}"/>
+            </a:ext>
+          </a:extLst>
+        </p:cNvPr>
+        <p:cNvGrpSpPr/>
+        <p:nvPr/>
+      </p:nvGrpSpPr>
+      <p:grpSpPr>
+        <a:xfrm>
+          <a:off x="0" y="0"/>
+          <a:ext cx="0" cy="0"/>
+          <a:chOff x="0" y="0"/>
+          <a:chExt cx="0" cy="0"/>
+        </a:xfrm>
+      </p:grpSpPr>
+      <p:sp>
+        <p:nvSpPr>
+          <p:cNvPr id="2" name="标题 1">
+            <a:extLst>
+              <a:ext uri="{FF2B5EF4-FFF2-40B4-BE49-F238E27FC236}">
+                <a16:creationId xmlns:a16="http://schemas.microsoft.com/office/drawing/2014/main" id="{5A429DED-6AAD-CADC-0407-D128C32B0626}"/>
+              </a:ext>
+            </a:extLst>
+          </p:cNvPr>
+          <p:cNvSpPr>
+            <a:spLocks noGrp="1"/>
+          </p:cNvSpPr>
+          <p:nvPr>
+            <p:ph type="title"/>
+          </p:nvPr>
+        </p:nvSpPr>
+        <p:spPr/>
+        <p:txBody>
+          <a:bodyPr/>
+          <a:lstStyle/>
+          <a:p>
+            <a:r>
+              <a:rPr lang="zh-CN" altLang="zh-CN" dirty="0">
+                <a:latin typeface="Times New Roman" panose="02020603050405020304" pitchFamily="18" charset="0"/>
+                <a:cs typeface="Times New Roman" panose="02020603050405020304" pitchFamily="18" charset="0"/>
+              </a:rPr>
+              <a:t>backend.api.server</a:t>
+            </a:r>
+            <a:r>
+              <a:rPr lang="en-US" altLang="zh-CN" dirty="0">
+                <a:latin typeface="Times New Roman" panose="02020603050405020304" pitchFamily="18" charset="0"/>
+                <a:cs typeface="Times New Roman" panose="02020603050405020304" pitchFamily="18" charset="0"/>
+              </a:rPr>
+              <a:t>.</a:t>
+            </a:r>
+            <a:r>
+              <a:rPr lang="en-US" altLang="zh-CN" dirty="0" err="1">
+                <a:latin typeface="Times New Roman" panose="02020603050405020304" pitchFamily="18" charset="0"/>
+                <a:cs typeface="Times New Roman" panose="02020603050405020304" pitchFamily="18" charset="0"/>
+              </a:rPr>
+              <a:t>py</a:t>
+            </a:r>
+            <a:endParaRPr lang="zh-CN" altLang="en-US" dirty="0">
+              <a:latin typeface="Times New Roman" panose="02020603050405020304" pitchFamily="18" charset="0"/>
+              <a:cs typeface="Times New Roman" panose="02020603050405020304" pitchFamily="18" charset="0"/>
+            </a:endParaRPr>
+          </a:p>
+        </p:txBody>
+      </p:sp>
+      <p:sp>
+        <p:nvSpPr>
+          <p:cNvPr id="3" name="内容占位符 2">
+            <a:extLst>
+              <a:ext uri="{FF2B5EF4-FFF2-40B4-BE49-F238E27FC236}">
+                <a16:creationId xmlns:a16="http://schemas.microsoft.com/office/drawing/2014/main" id="{49925045-9F15-8027-D3FE-F27C8E80E1B7}"/>
+              </a:ext>
+            </a:extLst>
+          </p:cNvPr>
+          <p:cNvSpPr>
+            <a:spLocks noGrp="1"/>
+          </p:cNvSpPr>
+          <p:nvPr>
+            <p:ph idx="1"/>
+          </p:nvPr>
+        </p:nvSpPr>
+        <p:spPr/>
+        <p:txBody>
+          <a:bodyPr/>
+          <a:lstStyle/>
+          <a:p>
+            <a:r>
+              <a:rPr lang="zh-CN" altLang="en-US" dirty="0">
+                <a:latin typeface="黑体" panose="02010609060101010101" pitchFamily="49" charset="-122"/>
+                <a:ea typeface="黑体" panose="02010609060101010101" pitchFamily="49" charset="-122"/>
+              </a:rPr>
+              <a:t>后端接口</a:t>
+            </a:r>
+            <a:endParaRPr lang="en-US" altLang="zh-CN" dirty="0">
+              <a:latin typeface="黑体" panose="02010609060101010101" pitchFamily="49" charset="-122"/>
+              <a:ea typeface="黑体" panose="02010609060101010101" pitchFamily="49" charset="-122"/>
+            </a:endParaRPr>
+          </a:p>
+          <a:p>
+            <a:pPr lvl="1"/>
+            <a:r>
+              <a:rPr lang="zh-CN" altLang="zh-CN" dirty="0">
+                <a:solidFill>
+                  <a:schemeClr val="accent6">
+                    <a:lumMod val="75000"/>
+                  </a:schemeClr>
+                </a:solidFill>
+                <a:latin typeface="Times New Roman" panose="02020603050405020304" pitchFamily="18" charset="0"/>
+                <a:cs typeface="Times New Roman" panose="02020603050405020304" pitchFamily="18" charset="0"/>
+              </a:rPr>
+              <a:t>"/api/conversations/{conv_id}/messages“</a:t>
+            </a:r>
+            <a:endParaRPr lang="en-US" altLang="zh-CN" dirty="0">
+              <a:solidFill>
+                <a:schemeClr val="accent6">
+                  <a:lumMod val="75000"/>
+                </a:schemeClr>
+              </a:solidFill>
+              <a:latin typeface="Times New Roman" panose="02020603050405020304" pitchFamily="18" charset="0"/>
+              <a:cs typeface="Times New Roman" panose="02020603050405020304" pitchFamily="18" charset="0"/>
+            </a:endParaRPr>
+          </a:p>
+          <a:p>
+            <a:pPr lvl="2"/>
+            <a:r>
+              <a:rPr lang="zh-CN" altLang="en-US" dirty="0">
+                <a:latin typeface="黑体" panose="02010609060101010101" pitchFamily="49" charset="-122"/>
+                <a:ea typeface="黑体" panose="02010609060101010101" pitchFamily="49" charset="-122"/>
+                <a:cs typeface="Times New Roman" panose="02020603050405020304" pitchFamily="18" charset="0"/>
+              </a:rPr>
+              <a:t>获取某个对话的所有信息</a:t>
+            </a:r>
+            <a:endParaRPr lang="zh-CN" altLang="zh-CN" dirty="0">
+              <a:latin typeface="黑体" panose="02010609060101010101" pitchFamily="49" charset="-122"/>
+              <a:ea typeface="黑体" panose="02010609060101010101" pitchFamily="49" charset="-122"/>
+              <a:cs typeface="Times New Roman" panose="02020603050405020304" pitchFamily="18" charset="0"/>
+            </a:endParaRPr>
+          </a:p>
+          <a:p>
+            <a:pPr lvl="1"/>
+            <a:endParaRPr lang="zh-CN" altLang="en-US" dirty="0">
+              <a:latin typeface="黑体" panose="02010609060101010101" pitchFamily="49" charset="-122"/>
+              <a:ea typeface="黑体" panose="02010609060101010101" pitchFamily="49" charset="-122"/>
+            </a:endParaRPr>
+          </a:p>
+        </p:txBody>
+      </p:sp>
+    </p:spTree>
+    <p:extLst>
+      <p:ext uri="{BB962C8B-B14F-4D97-AF65-F5344CB8AC3E}">
+        <p14:creationId xmlns:p14="http://schemas.microsoft.com/office/powerpoint/2010/main" val="3008543469"/>
       </p:ext>
     </p:extLst>
   </p:cSld>
@@ -8686,552 +8087,6 @@
 </p:sld>
 </file>
 
-<file path=ppt/slides/slide20.xml><?xml version="1.0" encoding="utf-8"?>
-<p:sld xmlns:a="http://schemas.openxmlformats.org/drawingml/2006/main" xmlns:r="http://schemas.openxmlformats.org/officeDocument/2006/relationships" xmlns:p="http://schemas.openxmlformats.org/presentationml/2006/main">
-  <p:cSld>
-    <p:spTree>
-      <p:nvGrpSpPr>
-        <p:cNvPr id="1" name="">
-          <a:extLst>
-            <a:ext uri="{FF2B5EF4-FFF2-40B4-BE49-F238E27FC236}">
-              <a16:creationId xmlns:a16="http://schemas.microsoft.com/office/drawing/2014/main" id="{A54C4B85-D55B-6E9D-431B-2AF5422F5C78}"/>
-            </a:ext>
-          </a:extLst>
-        </p:cNvPr>
-        <p:cNvGrpSpPr/>
-        <p:nvPr/>
-      </p:nvGrpSpPr>
-      <p:grpSpPr>
-        <a:xfrm>
-          <a:off x="0" y="0"/>
-          <a:ext cx="0" cy="0"/>
-          <a:chOff x="0" y="0"/>
-          <a:chExt cx="0" cy="0"/>
-        </a:xfrm>
-      </p:grpSpPr>
-      <p:sp>
-        <p:nvSpPr>
-          <p:cNvPr id="2" name="标题 1">
-            <a:extLst>
-              <a:ext uri="{FF2B5EF4-FFF2-40B4-BE49-F238E27FC236}">
-                <a16:creationId xmlns:a16="http://schemas.microsoft.com/office/drawing/2014/main" id="{AE71DA56-CF90-19F9-CFFD-C3A5B506EAEB}"/>
-              </a:ext>
-            </a:extLst>
-          </p:cNvPr>
-          <p:cNvSpPr>
-            <a:spLocks noGrp="1"/>
-          </p:cNvSpPr>
-          <p:nvPr>
-            <p:ph type="title"/>
-          </p:nvPr>
-        </p:nvSpPr>
-        <p:spPr/>
-        <p:txBody>
-          <a:bodyPr/>
-          <a:lstStyle/>
-          <a:p>
-            <a:r>
-              <a:rPr lang="zh-CN" altLang="zh-CN" dirty="0">
-                <a:latin typeface="Times New Roman" panose="02020603050405020304" pitchFamily="18" charset="0"/>
-                <a:cs typeface="Times New Roman" panose="02020603050405020304" pitchFamily="18" charset="0"/>
-              </a:rPr>
-              <a:t>backend.api.server</a:t>
-            </a:r>
-            <a:r>
-              <a:rPr lang="en-US" altLang="zh-CN" dirty="0">
-                <a:latin typeface="Times New Roman" panose="02020603050405020304" pitchFamily="18" charset="0"/>
-                <a:cs typeface="Times New Roman" panose="02020603050405020304" pitchFamily="18" charset="0"/>
-              </a:rPr>
-              <a:t>.</a:t>
-            </a:r>
-            <a:r>
-              <a:rPr lang="en-US" altLang="zh-CN" dirty="0" err="1">
-                <a:latin typeface="Times New Roman" panose="02020603050405020304" pitchFamily="18" charset="0"/>
-                <a:cs typeface="Times New Roman" panose="02020603050405020304" pitchFamily="18" charset="0"/>
-              </a:rPr>
-              <a:t>py</a:t>
-            </a:r>
-            <a:endParaRPr lang="zh-CN" altLang="en-US" dirty="0">
-              <a:latin typeface="Times New Roman" panose="02020603050405020304" pitchFamily="18" charset="0"/>
-              <a:cs typeface="Times New Roman" panose="02020603050405020304" pitchFamily="18" charset="0"/>
-            </a:endParaRPr>
-          </a:p>
-        </p:txBody>
-      </p:sp>
-      <p:sp>
-        <p:nvSpPr>
-          <p:cNvPr id="3" name="内容占位符 2">
-            <a:extLst>
-              <a:ext uri="{FF2B5EF4-FFF2-40B4-BE49-F238E27FC236}">
-                <a16:creationId xmlns:a16="http://schemas.microsoft.com/office/drawing/2014/main" id="{896AE129-E713-5C11-E02B-52FBC78ED2AF}"/>
-              </a:ext>
-            </a:extLst>
-          </p:cNvPr>
-          <p:cNvSpPr>
-            <a:spLocks noGrp="1"/>
-          </p:cNvSpPr>
-          <p:nvPr>
-            <p:ph idx="1"/>
-          </p:nvPr>
-        </p:nvSpPr>
-        <p:spPr/>
-        <p:txBody>
-          <a:bodyPr/>
-          <a:lstStyle/>
-          <a:p>
-            <a:r>
-              <a:rPr lang="zh-CN" altLang="en-US" dirty="0">
-                <a:latin typeface="黑体" panose="02010609060101010101" pitchFamily="49" charset="-122"/>
-                <a:ea typeface="黑体" panose="02010609060101010101" pitchFamily="49" charset="-122"/>
-              </a:rPr>
-              <a:t>后端接口</a:t>
-            </a:r>
-            <a:endParaRPr lang="en-US" altLang="zh-CN" dirty="0">
-              <a:latin typeface="黑体" panose="02010609060101010101" pitchFamily="49" charset="-122"/>
-              <a:ea typeface="黑体" panose="02010609060101010101" pitchFamily="49" charset="-122"/>
-            </a:endParaRPr>
-          </a:p>
-          <a:p>
-            <a:pPr lvl="1"/>
-            <a:r>
-              <a:rPr lang="zh-CN" altLang="zh-CN" dirty="0">
-                <a:solidFill>
-                  <a:schemeClr val="accent6">
-                    <a:lumMod val="75000"/>
-                  </a:schemeClr>
-                </a:solidFill>
-                <a:latin typeface="Times New Roman" panose="02020603050405020304" pitchFamily="18" charset="0"/>
-                <a:cs typeface="Times New Roman" panose="02020603050405020304" pitchFamily="18" charset="0"/>
-              </a:rPr>
-              <a:t>“/api/conversations/{conv_id}“</a:t>
-            </a:r>
-            <a:r>
-              <a:rPr lang="en-US" altLang="zh-CN" dirty="0">
-                <a:solidFill>
-                  <a:schemeClr val="accent6">
-                    <a:lumMod val="75000"/>
-                  </a:schemeClr>
-                </a:solidFill>
-                <a:latin typeface="Times New Roman" panose="02020603050405020304" pitchFamily="18" charset="0"/>
-                <a:cs typeface="Times New Roman" panose="02020603050405020304" pitchFamily="18" charset="0"/>
-              </a:rPr>
-              <a:t>(delete)</a:t>
-            </a:r>
-          </a:p>
-          <a:p>
-            <a:pPr lvl="2"/>
-            <a:r>
-              <a:rPr lang="zh-CN" altLang="en-US" dirty="0">
-                <a:latin typeface="黑体" panose="02010609060101010101" pitchFamily="49" charset="-122"/>
-                <a:ea typeface="黑体" panose="02010609060101010101" pitchFamily="49" charset="-122"/>
-                <a:cs typeface="Times New Roman" panose="02020603050405020304" pitchFamily="18" charset="0"/>
-              </a:rPr>
-              <a:t>删除整个对话</a:t>
-            </a:r>
-            <a:r>
-              <a:rPr lang="en-US" altLang="zh-CN" dirty="0">
-                <a:latin typeface="黑体" panose="02010609060101010101" pitchFamily="49" charset="-122"/>
-                <a:ea typeface="黑体" panose="02010609060101010101" pitchFamily="49" charset="-122"/>
-                <a:cs typeface="Times New Roman" panose="02020603050405020304" pitchFamily="18" charset="0"/>
-              </a:rPr>
-              <a:t>(</a:t>
-            </a:r>
-            <a:r>
-              <a:rPr lang="zh-CN" altLang="en-US" dirty="0">
-                <a:latin typeface="黑体" panose="02010609060101010101" pitchFamily="49" charset="-122"/>
-                <a:ea typeface="黑体" panose="02010609060101010101" pitchFamily="49" charset="-122"/>
-                <a:cs typeface="Times New Roman" panose="02020603050405020304" pitchFamily="18" charset="0"/>
-              </a:rPr>
-              <a:t>删除对话及其关联的表</a:t>
-            </a:r>
-            <a:r>
-              <a:rPr lang="en-US" altLang="zh-CN" dirty="0">
-                <a:latin typeface="黑体" panose="02010609060101010101" pitchFamily="49" charset="-122"/>
-                <a:ea typeface="黑体" panose="02010609060101010101" pitchFamily="49" charset="-122"/>
-                <a:cs typeface="Times New Roman" panose="02020603050405020304" pitchFamily="18" charset="0"/>
-              </a:rPr>
-              <a:t>)</a:t>
-            </a:r>
-            <a:endParaRPr lang="zh-CN" altLang="zh-CN" dirty="0">
-              <a:latin typeface="黑体" panose="02010609060101010101" pitchFamily="49" charset="-122"/>
-              <a:ea typeface="黑体" panose="02010609060101010101" pitchFamily="49" charset="-122"/>
-              <a:cs typeface="Times New Roman" panose="02020603050405020304" pitchFamily="18" charset="0"/>
-            </a:endParaRPr>
-          </a:p>
-          <a:p>
-            <a:pPr lvl="1"/>
-            <a:endParaRPr lang="zh-CN" altLang="en-US" dirty="0">
-              <a:latin typeface="黑体" panose="02010609060101010101" pitchFamily="49" charset="-122"/>
-              <a:ea typeface="黑体" panose="02010609060101010101" pitchFamily="49" charset="-122"/>
-            </a:endParaRPr>
-          </a:p>
-        </p:txBody>
-      </p:sp>
-    </p:spTree>
-    <p:extLst>
-      <p:ext uri="{BB962C8B-B14F-4D97-AF65-F5344CB8AC3E}">
-        <p14:creationId xmlns:p14="http://schemas.microsoft.com/office/powerpoint/2010/main" val="4157934588"/>
-      </p:ext>
-    </p:extLst>
-  </p:cSld>
-  <p:clrMapOvr>
-    <a:masterClrMapping/>
-  </p:clrMapOvr>
-</p:sld>
-</file>
-
-<file path=ppt/slides/slide21.xml><?xml version="1.0" encoding="utf-8"?>
-<p:sld xmlns:a="http://schemas.openxmlformats.org/drawingml/2006/main" xmlns:r="http://schemas.openxmlformats.org/officeDocument/2006/relationships" xmlns:p="http://schemas.openxmlformats.org/presentationml/2006/main">
-  <p:cSld>
-    <p:spTree>
-      <p:nvGrpSpPr>
-        <p:cNvPr id="1" name="">
-          <a:extLst>
-            <a:ext uri="{FF2B5EF4-FFF2-40B4-BE49-F238E27FC236}">
-              <a16:creationId xmlns:a16="http://schemas.microsoft.com/office/drawing/2014/main" id="{3B80467A-86C7-C20C-CC90-7DFF55F63ED2}"/>
-            </a:ext>
-          </a:extLst>
-        </p:cNvPr>
-        <p:cNvGrpSpPr/>
-        <p:nvPr/>
-      </p:nvGrpSpPr>
-      <p:grpSpPr>
-        <a:xfrm>
-          <a:off x="0" y="0"/>
-          <a:ext cx="0" cy="0"/>
-          <a:chOff x="0" y="0"/>
-          <a:chExt cx="0" cy="0"/>
-        </a:xfrm>
-      </p:grpSpPr>
-      <p:sp>
-        <p:nvSpPr>
-          <p:cNvPr id="2" name="标题 1">
-            <a:extLst>
-              <a:ext uri="{FF2B5EF4-FFF2-40B4-BE49-F238E27FC236}">
-                <a16:creationId xmlns:a16="http://schemas.microsoft.com/office/drawing/2014/main" id="{D2E58956-3D1C-36C8-AE68-D4B625528170}"/>
-              </a:ext>
-            </a:extLst>
-          </p:cNvPr>
-          <p:cNvSpPr>
-            <a:spLocks noGrp="1"/>
-          </p:cNvSpPr>
-          <p:nvPr>
-            <p:ph type="title"/>
-          </p:nvPr>
-        </p:nvSpPr>
-        <p:spPr/>
-        <p:txBody>
-          <a:bodyPr/>
-          <a:lstStyle/>
-          <a:p>
-            <a:r>
-              <a:rPr lang="zh-CN" altLang="zh-CN" dirty="0">
-                <a:latin typeface="Times New Roman" panose="02020603050405020304" pitchFamily="18" charset="0"/>
-                <a:cs typeface="Times New Roman" panose="02020603050405020304" pitchFamily="18" charset="0"/>
-              </a:rPr>
-              <a:t>backend.api.server</a:t>
-            </a:r>
-            <a:r>
-              <a:rPr lang="en-US" altLang="zh-CN" dirty="0">
-                <a:latin typeface="Times New Roman" panose="02020603050405020304" pitchFamily="18" charset="0"/>
-                <a:cs typeface="Times New Roman" panose="02020603050405020304" pitchFamily="18" charset="0"/>
-              </a:rPr>
-              <a:t>.</a:t>
-            </a:r>
-            <a:r>
-              <a:rPr lang="en-US" altLang="zh-CN" dirty="0" err="1">
-                <a:latin typeface="Times New Roman" panose="02020603050405020304" pitchFamily="18" charset="0"/>
-                <a:cs typeface="Times New Roman" panose="02020603050405020304" pitchFamily="18" charset="0"/>
-              </a:rPr>
-              <a:t>py</a:t>
-            </a:r>
-            <a:endParaRPr lang="zh-CN" altLang="en-US" dirty="0">
-              <a:latin typeface="Times New Roman" panose="02020603050405020304" pitchFamily="18" charset="0"/>
-              <a:cs typeface="Times New Roman" panose="02020603050405020304" pitchFamily="18" charset="0"/>
-            </a:endParaRPr>
-          </a:p>
-        </p:txBody>
-      </p:sp>
-      <p:sp>
-        <p:nvSpPr>
-          <p:cNvPr id="3" name="内容占位符 2">
-            <a:extLst>
-              <a:ext uri="{FF2B5EF4-FFF2-40B4-BE49-F238E27FC236}">
-                <a16:creationId xmlns:a16="http://schemas.microsoft.com/office/drawing/2014/main" id="{95A0AE0D-BC25-7073-23E1-702B42F63E19}"/>
-              </a:ext>
-            </a:extLst>
-          </p:cNvPr>
-          <p:cNvSpPr>
-            <a:spLocks noGrp="1"/>
-          </p:cNvSpPr>
-          <p:nvPr>
-            <p:ph idx="1"/>
-          </p:nvPr>
-        </p:nvSpPr>
-        <p:spPr/>
-        <p:txBody>
-          <a:bodyPr/>
-          <a:lstStyle/>
-          <a:p>
-            <a:r>
-              <a:rPr lang="zh-CN" altLang="en-US" dirty="0">
-                <a:latin typeface="黑体" panose="02010609060101010101" pitchFamily="49" charset="-122"/>
-                <a:ea typeface="黑体" panose="02010609060101010101" pitchFamily="49" charset="-122"/>
-              </a:rPr>
-              <a:t>后端接口</a:t>
-            </a:r>
-            <a:endParaRPr lang="en-US" altLang="zh-CN" dirty="0">
-              <a:latin typeface="黑体" panose="02010609060101010101" pitchFamily="49" charset="-122"/>
-              <a:ea typeface="黑体" panose="02010609060101010101" pitchFamily="49" charset="-122"/>
-            </a:endParaRPr>
-          </a:p>
-          <a:p>
-            <a:pPr lvl="1"/>
-            <a:r>
-              <a:rPr lang="zh-CN" altLang="zh-CN" dirty="0">
-                <a:solidFill>
-                  <a:schemeClr val="accent6">
-                    <a:lumMod val="75000"/>
-                  </a:schemeClr>
-                </a:solidFill>
-                <a:latin typeface="Times New Roman" panose="02020603050405020304" pitchFamily="18" charset="0"/>
-                <a:ea typeface="黑体" panose="02010609060101010101" pitchFamily="49" charset="-122"/>
-                <a:cs typeface="Times New Roman" panose="02020603050405020304" pitchFamily="18" charset="0"/>
-              </a:rPr>
-              <a:t>“/api/conversations/{conv_id}</a:t>
-            </a:r>
-            <a:r>
-              <a:rPr lang="zh-CN" altLang="en-US" dirty="0">
-                <a:solidFill>
-                  <a:schemeClr val="accent6">
-                    <a:lumMod val="75000"/>
-                  </a:schemeClr>
-                </a:solidFill>
-                <a:latin typeface="Times New Roman" panose="02020603050405020304" pitchFamily="18" charset="0"/>
-                <a:ea typeface="黑体" panose="02010609060101010101" pitchFamily="49" charset="-122"/>
-                <a:cs typeface="Times New Roman" panose="02020603050405020304" pitchFamily="18" charset="0"/>
-              </a:rPr>
-              <a:t>”</a:t>
-            </a:r>
-            <a:r>
-              <a:rPr lang="en-US" altLang="zh-CN" dirty="0">
-                <a:solidFill>
-                  <a:schemeClr val="accent6">
-                    <a:lumMod val="75000"/>
-                  </a:schemeClr>
-                </a:solidFill>
-                <a:latin typeface="Times New Roman" panose="02020603050405020304" pitchFamily="18" charset="0"/>
-                <a:ea typeface="黑体" panose="02010609060101010101" pitchFamily="49" charset="-122"/>
-                <a:cs typeface="Times New Roman" panose="02020603050405020304" pitchFamily="18" charset="0"/>
-              </a:rPr>
-              <a:t>(patch)</a:t>
-            </a:r>
-          </a:p>
-          <a:p>
-            <a:pPr lvl="2"/>
-            <a:r>
-              <a:rPr lang="zh-CN" altLang="en-US" dirty="0">
-                <a:latin typeface="Times New Roman" panose="02020603050405020304" pitchFamily="18" charset="0"/>
-                <a:ea typeface="黑体" panose="02010609060101010101" pitchFamily="49" charset="-122"/>
-                <a:cs typeface="Times New Roman" panose="02020603050405020304" pitchFamily="18" charset="0"/>
-              </a:rPr>
-              <a:t>更新某个对话的标题</a:t>
-            </a:r>
-            <a:endParaRPr lang="zh-CN" altLang="zh-CN" dirty="0">
-              <a:latin typeface="Times New Roman" panose="02020603050405020304" pitchFamily="18" charset="0"/>
-              <a:ea typeface="黑体" panose="02010609060101010101" pitchFamily="49" charset="-122"/>
-              <a:cs typeface="Times New Roman" panose="02020603050405020304" pitchFamily="18" charset="0"/>
-            </a:endParaRPr>
-          </a:p>
-          <a:p>
-            <a:pPr lvl="1"/>
-            <a:endParaRPr lang="zh-CN" altLang="en-US" dirty="0">
-              <a:latin typeface="黑体" panose="02010609060101010101" pitchFamily="49" charset="-122"/>
-              <a:ea typeface="黑体" panose="02010609060101010101" pitchFamily="49" charset="-122"/>
-            </a:endParaRPr>
-          </a:p>
-        </p:txBody>
-      </p:sp>
-    </p:spTree>
-    <p:extLst>
-      <p:ext uri="{BB962C8B-B14F-4D97-AF65-F5344CB8AC3E}">
-        <p14:creationId xmlns:p14="http://schemas.microsoft.com/office/powerpoint/2010/main" val="2116700909"/>
-      </p:ext>
-    </p:extLst>
-  </p:cSld>
-  <p:clrMapOvr>
-    <a:masterClrMapping/>
-  </p:clrMapOvr>
-</p:sld>
-</file>
-
-<file path=ppt/slides/slide22.xml><?xml version="1.0" encoding="utf-8"?>
-<p:sld xmlns:a="http://schemas.openxmlformats.org/drawingml/2006/main" xmlns:r="http://schemas.openxmlformats.org/officeDocument/2006/relationships" xmlns:p="http://schemas.openxmlformats.org/presentationml/2006/main">
-  <p:cSld>
-    <p:spTree>
-      <p:nvGrpSpPr>
-        <p:cNvPr id="1" name="">
-          <a:extLst>
-            <a:ext uri="{FF2B5EF4-FFF2-40B4-BE49-F238E27FC236}">
-              <a16:creationId xmlns:a16="http://schemas.microsoft.com/office/drawing/2014/main" id="{0FFA29C9-C610-8E1A-D0F0-BEC0D2FA437D}"/>
-            </a:ext>
-          </a:extLst>
-        </p:cNvPr>
-        <p:cNvGrpSpPr/>
-        <p:nvPr/>
-      </p:nvGrpSpPr>
-      <p:grpSpPr>
-        <a:xfrm>
-          <a:off x="0" y="0"/>
-          <a:ext cx="0" cy="0"/>
-          <a:chOff x="0" y="0"/>
-          <a:chExt cx="0" cy="0"/>
-        </a:xfrm>
-      </p:grpSpPr>
-      <p:sp>
-        <p:nvSpPr>
-          <p:cNvPr id="2" name="标题 1">
-            <a:extLst>
-              <a:ext uri="{FF2B5EF4-FFF2-40B4-BE49-F238E27FC236}">
-                <a16:creationId xmlns:a16="http://schemas.microsoft.com/office/drawing/2014/main" id="{5A429DED-6AAD-CADC-0407-D128C32B0626}"/>
-              </a:ext>
-            </a:extLst>
-          </p:cNvPr>
-          <p:cNvSpPr>
-            <a:spLocks noGrp="1"/>
-          </p:cNvSpPr>
-          <p:nvPr>
-            <p:ph type="title"/>
-          </p:nvPr>
-        </p:nvSpPr>
-        <p:spPr/>
-        <p:txBody>
-          <a:bodyPr/>
-          <a:lstStyle/>
-          <a:p>
-            <a:r>
-              <a:rPr lang="zh-CN" altLang="zh-CN" dirty="0">
-                <a:latin typeface="Times New Roman" panose="02020603050405020304" pitchFamily="18" charset="0"/>
-                <a:cs typeface="Times New Roman" panose="02020603050405020304" pitchFamily="18" charset="0"/>
-              </a:rPr>
-              <a:t>backend.api.server</a:t>
-            </a:r>
-            <a:r>
-              <a:rPr lang="en-US" altLang="zh-CN" dirty="0">
-                <a:latin typeface="Times New Roman" panose="02020603050405020304" pitchFamily="18" charset="0"/>
-                <a:cs typeface="Times New Roman" panose="02020603050405020304" pitchFamily="18" charset="0"/>
-              </a:rPr>
-              <a:t>.</a:t>
-            </a:r>
-            <a:r>
-              <a:rPr lang="en-US" altLang="zh-CN" dirty="0" err="1">
-                <a:latin typeface="Times New Roman" panose="02020603050405020304" pitchFamily="18" charset="0"/>
-                <a:cs typeface="Times New Roman" panose="02020603050405020304" pitchFamily="18" charset="0"/>
-              </a:rPr>
-              <a:t>py</a:t>
-            </a:r>
-            <a:endParaRPr lang="zh-CN" altLang="en-US" dirty="0">
-              <a:latin typeface="Times New Roman" panose="02020603050405020304" pitchFamily="18" charset="0"/>
-              <a:cs typeface="Times New Roman" panose="02020603050405020304" pitchFamily="18" charset="0"/>
-            </a:endParaRPr>
-          </a:p>
-        </p:txBody>
-      </p:sp>
-      <p:sp>
-        <p:nvSpPr>
-          <p:cNvPr id="3" name="内容占位符 2">
-            <a:extLst>
-              <a:ext uri="{FF2B5EF4-FFF2-40B4-BE49-F238E27FC236}">
-                <a16:creationId xmlns:a16="http://schemas.microsoft.com/office/drawing/2014/main" id="{49925045-9F15-8027-D3FE-F27C8E80E1B7}"/>
-              </a:ext>
-            </a:extLst>
-          </p:cNvPr>
-          <p:cNvSpPr>
-            <a:spLocks noGrp="1"/>
-          </p:cNvSpPr>
-          <p:nvPr>
-            <p:ph idx="1"/>
-          </p:nvPr>
-        </p:nvSpPr>
-        <p:spPr/>
-        <p:txBody>
-          <a:bodyPr/>
-          <a:lstStyle/>
-          <a:p>
-            <a:r>
-              <a:rPr lang="zh-CN" altLang="en-US" dirty="0">
-                <a:latin typeface="黑体" panose="02010609060101010101" pitchFamily="49" charset="-122"/>
-                <a:ea typeface="黑体" panose="02010609060101010101" pitchFamily="49" charset="-122"/>
-              </a:rPr>
-              <a:t>后端接口</a:t>
-            </a:r>
-            <a:endParaRPr lang="en-US" altLang="zh-CN" dirty="0">
-              <a:latin typeface="黑体" panose="02010609060101010101" pitchFamily="49" charset="-122"/>
-              <a:ea typeface="黑体" panose="02010609060101010101" pitchFamily="49" charset="-122"/>
-            </a:endParaRPr>
-          </a:p>
-          <a:p>
-            <a:pPr lvl="1"/>
-            <a:r>
-              <a:rPr lang="zh-CN" altLang="zh-CN" dirty="0">
-                <a:solidFill>
-                  <a:schemeClr val="accent6">
-                    <a:lumMod val="75000"/>
-                  </a:schemeClr>
-                </a:solidFill>
-                <a:latin typeface="Times New Roman" panose="02020603050405020304" pitchFamily="18" charset="0"/>
-                <a:cs typeface="Times New Roman" panose="02020603050405020304" pitchFamily="18" charset="0"/>
-              </a:rPr>
-              <a:t>"/api/conversations/{conv_id}/messages“</a:t>
-            </a:r>
-            <a:endParaRPr lang="en-US" altLang="zh-CN" dirty="0">
-              <a:solidFill>
-                <a:schemeClr val="accent6">
-                  <a:lumMod val="75000"/>
-                </a:schemeClr>
-              </a:solidFill>
-              <a:latin typeface="Times New Roman" panose="02020603050405020304" pitchFamily="18" charset="0"/>
-              <a:cs typeface="Times New Roman" panose="02020603050405020304" pitchFamily="18" charset="0"/>
-            </a:endParaRPr>
-          </a:p>
-          <a:p>
-            <a:pPr lvl="2"/>
-            <a:r>
-              <a:rPr lang="zh-CN" altLang="en-US" dirty="0">
-                <a:latin typeface="黑体" panose="02010609060101010101" pitchFamily="49" charset="-122"/>
-                <a:ea typeface="黑体" panose="02010609060101010101" pitchFamily="49" charset="-122"/>
-                <a:cs typeface="Times New Roman" panose="02020603050405020304" pitchFamily="18" charset="0"/>
-              </a:rPr>
-              <a:t>获取某个对话的所有信息</a:t>
-            </a:r>
-            <a:endParaRPr lang="zh-CN" altLang="zh-CN" dirty="0">
-              <a:latin typeface="黑体" panose="02010609060101010101" pitchFamily="49" charset="-122"/>
-              <a:ea typeface="黑体" panose="02010609060101010101" pitchFamily="49" charset="-122"/>
-              <a:cs typeface="Times New Roman" panose="02020603050405020304" pitchFamily="18" charset="0"/>
-            </a:endParaRPr>
-          </a:p>
-          <a:p>
-            <a:pPr lvl="1"/>
-            <a:endParaRPr lang="zh-CN" altLang="en-US" dirty="0">
-              <a:latin typeface="黑体" panose="02010609060101010101" pitchFamily="49" charset="-122"/>
-              <a:ea typeface="黑体" panose="02010609060101010101" pitchFamily="49" charset="-122"/>
-            </a:endParaRPr>
-          </a:p>
-        </p:txBody>
-      </p:sp>
-    </p:spTree>
-    <p:extLst>
-      <p:ext uri="{BB962C8B-B14F-4D97-AF65-F5344CB8AC3E}">
-        <p14:creationId xmlns:p14="http://schemas.microsoft.com/office/powerpoint/2010/main" val="3008543469"/>
-      </p:ext>
-    </p:extLst>
-  </p:cSld>
-  <p:clrMapOvr>
-    <a:masterClrMapping/>
-  </p:clrMapOvr>
-</p:sld>
-</file>
-
 <file path=ppt/slides/slide3.xml><?xml version="1.0" encoding="utf-8"?>
 <p:sld xmlns:a="http://schemas.openxmlformats.org/drawingml/2006/main" xmlns:r="http://schemas.openxmlformats.org/officeDocument/2006/relationships" xmlns:p="http://schemas.openxmlformats.org/presentationml/2006/main">
   <p:cSld>
@@ -9378,7 +8233,7 @@
                 <a:ea typeface="黑体" panose="02010609060101010101" pitchFamily="49" charset="-122"/>
                 <a:cs typeface="Times New Roman" panose="02020603050405020304" pitchFamily="18" charset="0"/>
               </a:rPr>
-              <a:t>port,log_level</a:t>
+              <a:t>host,port,log_level</a:t>
             </a:r>
             <a:r>
               <a:rPr lang="en-US" altLang="zh-CN" sz="1600" dirty="0">
@@ -9746,36 +8601,6 @@
           </a:p>
         </p:txBody>
       </p:sp>
-      <p:pic>
-        <p:nvPicPr>
-          <p:cNvPr id="7" name="图片 6">
-            <a:extLst>
-              <a:ext uri="{FF2B5EF4-FFF2-40B4-BE49-F238E27FC236}">
-                <a16:creationId xmlns:a16="http://schemas.microsoft.com/office/drawing/2014/main" id="{C7DA6C48-948E-549A-1A23-805D9760417A}"/>
-              </a:ext>
-            </a:extLst>
-          </p:cNvPr>
-          <p:cNvPicPr>
-            <a:picLocks noChangeAspect="1"/>
-          </p:cNvPicPr>
-          <p:nvPr/>
-        </p:nvPicPr>
-        <p:blipFill>
-          <a:blip r:embed="rId2"/>
-          <a:stretch>
-            <a:fillRect/>
-          </a:stretch>
-        </p:blipFill>
-        <p:spPr>
-          <a:xfrm>
-            <a:off x="1336337" y="2809843"/>
-            <a:ext cx="4083260" cy="1238314"/>
-          </a:xfrm>
-          <a:prstGeom prst="rect">
-            <a:avLst/>
-          </a:prstGeom>
-        </p:spPr>
-      </p:pic>
     </p:spTree>
     <p:extLst>
       <p:ext uri="{BB962C8B-B14F-4D97-AF65-F5344CB8AC3E}">
@@ -10407,10 +9232,349 @@
       </p:sp>
       <p:sp>
         <p:nvSpPr>
-          <p:cNvPr id="4" name="文本框 3">
-            <a:extLst>
-              <a:ext uri="{FF2B5EF4-FFF2-40B4-BE49-F238E27FC236}">
-                <a16:creationId xmlns:a16="http://schemas.microsoft.com/office/drawing/2014/main" id="{E04EFDA3-01BB-0F86-08CB-FB6EE34AEB2C}"/>
+          <p:cNvPr id="5" name="矩形: 圆角 4">
+            <a:extLst>
+              <a:ext uri="{FF2B5EF4-FFF2-40B4-BE49-F238E27FC236}">
+                <a16:creationId xmlns:a16="http://schemas.microsoft.com/office/drawing/2014/main" id="{26CCAB72-DFAC-B648-77CC-B19C997ECF7B}"/>
+              </a:ext>
+            </a:extLst>
+          </p:cNvPr>
+          <p:cNvSpPr/>
+          <p:nvPr/>
+        </p:nvSpPr>
+        <p:spPr>
+          <a:xfrm>
+            <a:off x="7845654" y="230188"/>
+            <a:ext cx="873984" cy="293012"/>
+          </a:xfrm>
+          <a:prstGeom prst="roundRect">
+            <a:avLst/>
+          </a:prstGeom>
+        </p:spPr>
+        <p:style>
+          <a:lnRef idx="2">
+            <a:schemeClr val="dk1"/>
+          </a:lnRef>
+          <a:fillRef idx="1">
+            <a:schemeClr val="lt1"/>
+          </a:fillRef>
+          <a:effectRef idx="0">
+            <a:schemeClr val="dk1"/>
+          </a:effectRef>
+          <a:fontRef idx="minor">
+            <a:schemeClr val="dk1"/>
+          </a:fontRef>
+        </p:style>
+        <p:txBody>
+          <a:bodyPr rtlCol="0" anchor="ctr"/>
+          <a:lstStyle/>
+          <a:p>
+            <a:pPr algn="ctr"/>
+            <a:r>
+              <a:rPr lang="zh-CN" altLang="en-US" dirty="0">
+                <a:latin typeface="Times New Roman" panose="02020603050405020304" pitchFamily="18" charset="0"/>
+                <a:cs typeface="Times New Roman" panose="02020603050405020304" pitchFamily="18" charset="0"/>
+              </a:rPr>
+              <a:t>开始</a:t>
+            </a:r>
+          </a:p>
+        </p:txBody>
+      </p:sp>
+      <p:sp>
+        <p:nvSpPr>
+          <p:cNvPr id="11" name="矩形 10">
+            <a:extLst>
+              <a:ext uri="{FF2B5EF4-FFF2-40B4-BE49-F238E27FC236}">
+                <a16:creationId xmlns:a16="http://schemas.microsoft.com/office/drawing/2014/main" id="{7962826C-584F-EAEC-062B-607E7C7B6A50}"/>
+              </a:ext>
+            </a:extLst>
+          </p:cNvPr>
+          <p:cNvSpPr/>
+          <p:nvPr/>
+        </p:nvSpPr>
+        <p:spPr>
+          <a:xfrm>
+            <a:off x="7848179" y="796574"/>
+            <a:ext cx="871459" cy="310369"/>
+          </a:xfrm>
+          <a:prstGeom prst="rect">
+            <a:avLst/>
+          </a:prstGeom>
+        </p:spPr>
+        <p:style>
+          <a:lnRef idx="2">
+            <a:schemeClr val="dk1"/>
+          </a:lnRef>
+          <a:fillRef idx="1">
+            <a:schemeClr val="lt1"/>
+          </a:fillRef>
+          <a:effectRef idx="0">
+            <a:schemeClr val="dk1"/>
+          </a:effectRef>
+          <a:fontRef idx="minor">
+            <a:schemeClr val="dk1"/>
+          </a:fontRef>
+        </p:style>
+        <p:txBody>
+          <a:bodyPr rtlCol="0" anchor="ctr"/>
+          <a:lstStyle/>
+          <a:p>
+            <a:pPr algn="ctr"/>
+            <a:r>
+              <a:rPr lang="en-US" altLang="zh-CN" dirty="0">
+                <a:latin typeface="Times New Roman" panose="02020603050405020304" pitchFamily="18" charset="0"/>
+                <a:cs typeface="Times New Roman" panose="02020603050405020304" pitchFamily="18" charset="0"/>
+              </a:rPr>
+              <a:t>request</a:t>
+            </a:r>
+            <a:endParaRPr lang="zh-CN" altLang="en-US" dirty="0">
+              <a:latin typeface="Times New Roman" panose="02020603050405020304" pitchFamily="18" charset="0"/>
+              <a:cs typeface="Times New Roman" panose="02020603050405020304" pitchFamily="18" charset="0"/>
+            </a:endParaRPr>
+          </a:p>
+        </p:txBody>
+      </p:sp>
+      <p:cxnSp>
+        <p:nvCxnSpPr>
+          <p:cNvPr id="18" name="直接箭头连接符 17">
+            <a:extLst>
+              <a:ext uri="{FF2B5EF4-FFF2-40B4-BE49-F238E27FC236}">
+                <a16:creationId xmlns:a16="http://schemas.microsoft.com/office/drawing/2014/main" id="{D7EC8361-1AB2-71BE-7162-B86CA8960EB4}"/>
+              </a:ext>
+            </a:extLst>
+          </p:cNvPr>
+          <p:cNvCxnSpPr>
+            <a:stCxn id="5" idx="2"/>
+            <a:endCxn id="11" idx="0"/>
+          </p:cNvCxnSpPr>
+          <p:nvPr/>
+        </p:nvCxnSpPr>
+        <p:spPr>
+          <a:xfrm>
+            <a:off x="8282646" y="523200"/>
+            <a:ext cx="1263" cy="273374"/>
+          </a:xfrm>
+          <a:prstGeom prst="straightConnector1">
+            <a:avLst/>
+          </a:prstGeom>
+          <a:ln>
+            <a:tailEnd type="triangle"/>
+          </a:ln>
+        </p:spPr>
+        <p:style>
+          <a:lnRef idx="2">
+            <a:schemeClr val="dk1"/>
+          </a:lnRef>
+          <a:fillRef idx="0">
+            <a:schemeClr val="dk1"/>
+          </a:fillRef>
+          <a:effectRef idx="1">
+            <a:schemeClr val="dk1"/>
+          </a:effectRef>
+          <a:fontRef idx="minor">
+            <a:schemeClr val="tx1"/>
+          </a:fontRef>
+        </p:style>
+      </p:cxnSp>
+      <p:sp>
+        <p:nvSpPr>
+          <p:cNvPr id="20" name="流程图: 决策 19">
+            <a:extLst>
+              <a:ext uri="{FF2B5EF4-FFF2-40B4-BE49-F238E27FC236}">
+                <a16:creationId xmlns:a16="http://schemas.microsoft.com/office/drawing/2014/main" id="{FE1D065E-13DD-1C7D-CF69-05441202D0CB}"/>
+              </a:ext>
+            </a:extLst>
+          </p:cNvPr>
+          <p:cNvSpPr/>
+          <p:nvPr/>
+        </p:nvSpPr>
+        <p:spPr>
+          <a:xfrm>
+            <a:off x="7615317" y="1395473"/>
+            <a:ext cx="1334658" cy="489412"/>
+          </a:xfrm>
+          <a:prstGeom prst="flowChartDecision">
+            <a:avLst/>
+          </a:prstGeom>
+        </p:spPr>
+        <p:style>
+          <a:lnRef idx="2">
+            <a:schemeClr val="dk1"/>
+          </a:lnRef>
+          <a:fillRef idx="1">
+            <a:schemeClr val="lt1"/>
+          </a:fillRef>
+          <a:effectRef idx="0">
+            <a:schemeClr val="dk1"/>
+          </a:effectRef>
+          <a:fontRef idx="minor">
+            <a:schemeClr val="dk1"/>
+          </a:fontRef>
+        </p:style>
+        <p:txBody>
+          <a:bodyPr rtlCol="0" anchor="ctr"/>
+          <a:lstStyle/>
+          <a:p>
+            <a:pPr algn="ctr"/>
+            <a:r>
+              <a:rPr lang="en-US" altLang="zh-CN" sz="1050" dirty="0" err="1">
+                <a:latin typeface="Times New Roman" panose="02020603050405020304" pitchFamily="18" charset="0"/>
+                <a:cs typeface="Times New Roman" panose="02020603050405020304" pitchFamily="18" charset="0"/>
+              </a:rPr>
+              <a:t>conv_id</a:t>
+            </a:r>
+            <a:endParaRPr lang="zh-CN" altLang="en-US" sz="1050" dirty="0">
+              <a:latin typeface="Times New Roman" panose="02020603050405020304" pitchFamily="18" charset="0"/>
+              <a:cs typeface="Times New Roman" panose="02020603050405020304" pitchFamily="18" charset="0"/>
+            </a:endParaRPr>
+          </a:p>
+        </p:txBody>
+      </p:sp>
+      <p:cxnSp>
+        <p:nvCxnSpPr>
+          <p:cNvPr id="25" name="直接箭头连接符 24">
+            <a:extLst>
+              <a:ext uri="{FF2B5EF4-FFF2-40B4-BE49-F238E27FC236}">
+                <a16:creationId xmlns:a16="http://schemas.microsoft.com/office/drawing/2014/main" id="{F2CE90F7-6C09-E9C4-9F5A-53CA17ED5446}"/>
+              </a:ext>
+            </a:extLst>
+          </p:cNvPr>
+          <p:cNvCxnSpPr>
+            <a:stCxn id="11" idx="2"/>
+            <a:endCxn id="20" idx="0"/>
+          </p:cNvCxnSpPr>
+          <p:nvPr/>
+        </p:nvCxnSpPr>
+        <p:spPr>
+          <a:xfrm flipH="1">
+            <a:off x="8282646" y="1106943"/>
+            <a:ext cx="1263" cy="288530"/>
+          </a:xfrm>
+          <a:prstGeom prst="straightConnector1">
+            <a:avLst/>
+          </a:prstGeom>
+          <a:ln>
+            <a:tailEnd type="triangle"/>
+          </a:ln>
+        </p:spPr>
+        <p:style>
+          <a:lnRef idx="2">
+            <a:schemeClr val="dk1"/>
+          </a:lnRef>
+          <a:fillRef idx="0">
+            <a:schemeClr val="dk1"/>
+          </a:fillRef>
+          <a:effectRef idx="1">
+            <a:schemeClr val="dk1"/>
+          </a:effectRef>
+          <a:fontRef idx="minor">
+            <a:schemeClr val="tx1"/>
+          </a:fontRef>
+        </p:style>
+      </p:cxnSp>
+      <p:cxnSp>
+        <p:nvCxnSpPr>
+          <p:cNvPr id="27" name="直接箭头连接符 26">
+            <a:extLst>
+              <a:ext uri="{FF2B5EF4-FFF2-40B4-BE49-F238E27FC236}">
+                <a16:creationId xmlns:a16="http://schemas.microsoft.com/office/drawing/2014/main" id="{9F3BBF55-61AB-35D9-9727-B68817CF5DF8}"/>
+              </a:ext>
+            </a:extLst>
+          </p:cNvPr>
+          <p:cNvCxnSpPr>
+            <a:cxnSpLocks/>
+            <a:stCxn id="20" idx="2"/>
+            <a:endCxn id="31" idx="0"/>
+          </p:cNvCxnSpPr>
+          <p:nvPr/>
+        </p:nvCxnSpPr>
+        <p:spPr>
+          <a:xfrm>
+            <a:off x="8282646" y="1884885"/>
+            <a:ext cx="1263" cy="354180"/>
+          </a:xfrm>
+          <a:prstGeom prst="straightConnector1">
+            <a:avLst/>
+          </a:prstGeom>
+          <a:ln>
+            <a:tailEnd type="triangle"/>
+          </a:ln>
+        </p:spPr>
+        <p:style>
+          <a:lnRef idx="2">
+            <a:schemeClr val="dk1"/>
+          </a:lnRef>
+          <a:fillRef idx="0">
+            <a:schemeClr val="dk1"/>
+          </a:fillRef>
+          <a:effectRef idx="1">
+            <a:schemeClr val="dk1"/>
+          </a:effectRef>
+          <a:fontRef idx="minor">
+            <a:schemeClr val="tx1"/>
+          </a:fontRef>
+        </p:style>
+      </p:cxnSp>
+      <p:sp>
+        <p:nvSpPr>
+          <p:cNvPr id="31" name="矩形 30">
+            <a:extLst>
+              <a:ext uri="{FF2B5EF4-FFF2-40B4-BE49-F238E27FC236}">
+                <a16:creationId xmlns:a16="http://schemas.microsoft.com/office/drawing/2014/main" id="{ACC61437-38AD-D389-87A9-E7CDCD75E73D}"/>
+              </a:ext>
+            </a:extLst>
+          </p:cNvPr>
+          <p:cNvSpPr/>
+          <p:nvPr/>
+        </p:nvSpPr>
+        <p:spPr>
+          <a:xfrm>
+            <a:off x="7848179" y="2239065"/>
+            <a:ext cx="871459" cy="310369"/>
+          </a:xfrm>
+          <a:prstGeom prst="rect">
+            <a:avLst/>
+          </a:prstGeom>
+        </p:spPr>
+        <p:style>
+          <a:lnRef idx="2">
+            <a:schemeClr val="dk1"/>
+          </a:lnRef>
+          <a:fillRef idx="1">
+            <a:schemeClr val="lt1"/>
+          </a:fillRef>
+          <a:effectRef idx="0">
+            <a:schemeClr val="dk1"/>
+          </a:effectRef>
+          <a:fontRef idx="minor">
+            <a:schemeClr val="dk1"/>
+          </a:fontRef>
+        </p:style>
+        <p:txBody>
+          <a:bodyPr rtlCol="0" anchor="ctr"/>
+          <a:lstStyle/>
+          <a:p>
+            <a:pPr algn="ctr"/>
+            <a:r>
+              <a:rPr lang="en-US" altLang="zh-CN" dirty="0">
+                <a:latin typeface="Times New Roman" panose="02020603050405020304" pitchFamily="18" charset="0"/>
+                <a:cs typeface="Times New Roman" panose="02020603050405020304" pitchFamily="18" charset="0"/>
+              </a:rPr>
+              <a:t>new</a:t>
+            </a:r>
+            <a:endParaRPr lang="zh-CN" altLang="en-US" dirty="0">
+              <a:latin typeface="Times New Roman" panose="02020603050405020304" pitchFamily="18" charset="0"/>
+              <a:cs typeface="Times New Roman" panose="02020603050405020304" pitchFamily="18" charset="0"/>
+            </a:endParaRPr>
+          </a:p>
+        </p:txBody>
+      </p:sp>
+      <p:sp>
+        <p:nvSpPr>
+          <p:cNvPr id="37" name="文本框 36">
+            <a:extLst>
+              <a:ext uri="{FF2B5EF4-FFF2-40B4-BE49-F238E27FC236}">
+                <a16:creationId xmlns:a16="http://schemas.microsoft.com/office/drawing/2014/main" id="{6EFAAA41-5F40-8983-D8D6-0B17D62F03EE}"/>
               </a:ext>
             </a:extLst>
           </p:cNvPr>
@@ -10419,8 +9583,8 @@
         </p:nvSpPr>
         <p:spPr>
           <a:xfrm>
-            <a:off x="158691" y="3825379"/>
-            <a:ext cx="2047613" cy="307777"/>
+            <a:off x="8282646" y="1888605"/>
+            <a:ext cx="330903" cy="338554"/>
           </a:xfrm>
           <a:prstGeom prst="rect">
             <a:avLst/>
@@ -10434,37 +9598,43 @@
           <a:lstStyle/>
           <a:p>
             <a:r>
-              <a:rPr lang="zh-CN" altLang="zh-CN" sz="1400" dirty="0">
-                <a:latin typeface="Times New Roman" panose="02020603050405020304" pitchFamily="18" charset="0"/>
+              <a:rPr lang="zh-CN" altLang="en-US" sz="1600" dirty="0">
+                <a:latin typeface="黑体" panose="02010609060101010101" pitchFamily="49" charset="-122"/>
                 <a:ea typeface="黑体" panose="02010609060101010101" pitchFamily="49" charset="-122"/>
-                <a:cs typeface="Times New Roman" panose="02020603050405020304" pitchFamily="18" charset="0"/>
-              </a:rPr>
-              <a:t>request: ResearchRequest</a:t>
+              </a:rPr>
+              <a:t>否</a:t>
             </a:r>
           </a:p>
         </p:txBody>
       </p:sp>
       <p:cxnSp>
         <p:nvCxnSpPr>
-          <p:cNvPr id="6" name="直接箭头连接符 5">
-            <a:extLst>
-              <a:ext uri="{FF2B5EF4-FFF2-40B4-BE49-F238E27FC236}">
-                <a16:creationId xmlns:a16="http://schemas.microsoft.com/office/drawing/2014/main" id="{2E3AB65D-0FB3-2588-98DA-96CC672655BC}"/>
-              </a:ext>
-            </a:extLst>
-          </p:cNvPr>
-          <p:cNvCxnSpPr/>
+          <p:cNvPr id="39" name="连接符: 肘形 38">
+            <a:extLst>
+              <a:ext uri="{FF2B5EF4-FFF2-40B4-BE49-F238E27FC236}">
+                <a16:creationId xmlns:a16="http://schemas.microsoft.com/office/drawing/2014/main" id="{AB0E3122-F4BD-F45C-0E8B-DB8DD758588D}"/>
+              </a:ext>
+            </a:extLst>
+          </p:cNvPr>
+          <p:cNvCxnSpPr>
+            <a:stCxn id="20" idx="3"/>
+          </p:cNvCxnSpPr>
           <p:nvPr/>
         </p:nvCxnSpPr>
         <p:spPr>
           <a:xfrm>
-            <a:off x="2130805" y="3988965"/>
-            <a:ext cx="289420" cy="0"/>
+            <a:off x="8949975" y="1640179"/>
+            <a:ext cx="1113477" cy="637942"/>
           </a:xfrm>
-          <a:prstGeom prst="straightConnector1">
-            <a:avLst/>
+          <a:prstGeom prst="bentConnector3">
+            <a:avLst>
+              <a:gd name="adj1" fmla="val 99454"/>
+            </a:avLst>
           </a:prstGeom>
           <a:ln>
+            <a:solidFill>
+              <a:schemeClr val="tx1"/>
+            </a:solidFill>
             <a:tailEnd type="triangle"/>
           </a:ln>
         </p:spPr>
@@ -10485,10 +9655,10 @@
       </p:cxnSp>
       <p:sp>
         <p:nvSpPr>
-          <p:cNvPr id="7" name="文本框 6">
-            <a:extLst>
-              <a:ext uri="{FF2B5EF4-FFF2-40B4-BE49-F238E27FC236}">
-                <a16:creationId xmlns:a16="http://schemas.microsoft.com/office/drawing/2014/main" id="{1F017413-DEB2-CA58-7FAC-28648533A2CB}"/>
+          <p:cNvPr id="43" name="文本框 42">
+            <a:extLst>
+              <a:ext uri="{FF2B5EF4-FFF2-40B4-BE49-F238E27FC236}">
+                <a16:creationId xmlns:a16="http://schemas.microsoft.com/office/drawing/2014/main" id="{92526802-DFD4-4500-6708-0A976A734947}"/>
               </a:ext>
             </a:extLst>
           </p:cNvPr>
@@ -10497,8 +9667,8 @@
         </p:nvSpPr>
         <p:spPr>
           <a:xfrm>
-            <a:off x="1510020" y="4266999"/>
-            <a:ext cx="381696" cy="307777"/>
+            <a:off x="9653403" y="1301625"/>
+            <a:ext cx="330903" cy="338554"/>
           </a:xfrm>
           <a:prstGeom prst="rect">
             <a:avLst/>
@@ -10512,85 +9682,45 @@
           <a:lstStyle/>
           <a:p>
             <a:r>
-              <a:rPr lang="en-US" altLang="zh-CN" sz="1400" dirty="0" err="1">
-                <a:latin typeface="Times New Roman" panose="02020603050405020304" pitchFamily="18" charset="0"/>
-                <a:cs typeface="Times New Roman" panose="02020603050405020304" pitchFamily="18" charset="0"/>
-              </a:rPr>
-              <a:t>db</a:t>
-            </a:r>
-            <a:endParaRPr lang="zh-CN" altLang="en-US" sz="1400" dirty="0">
-              <a:latin typeface="Times New Roman" panose="02020603050405020304" pitchFamily="18" charset="0"/>
-              <a:cs typeface="Times New Roman" panose="02020603050405020304" pitchFamily="18" charset="0"/>
-            </a:endParaRPr>
-          </a:p>
-        </p:txBody>
-      </p:sp>
-      <p:cxnSp>
-        <p:nvCxnSpPr>
-          <p:cNvPr id="12" name="直接连接符 11">
-            <a:extLst>
-              <a:ext uri="{FF2B5EF4-FFF2-40B4-BE49-F238E27FC236}">
-                <a16:creationId xmlns:a16="http://schemas.microsoft.com/office/drawing/2014/main" id="{1974C387-B992-139F-EBFA-1174B77154DD}"/>
-              </a:ext>
-            </a:extLst>
-          </p:cNvPr>
-          <p:cNvCxnSpPr/>
+              <a:rPr lang="zh-CN" altLang="en-US" sz="1600" dirty="0">
+                <a:latin typeface="黑体" panose="02010609060101010101" pitchFamily="49" charset="-122"/>
+                <a:ea typeface="黑体" panose="02010609060101010101" pitchFamily="49" charset="-122"/>
+              </a:rPr>
+              <a:t>是</a:t>
+            </a:r>
+          </a:p>
+        </p:txBody>
+      </p:sp>
+      <p:sp>
+        <p:nvSpPr>
+          <p:cNvPr id="47" name="矩形 46">
+            <a:extLst>
+              <a:ext uri="{FF2B5EF4-FFF2-40B4-BE49-F238E27FC236}">
+                <a16:creationId xmlns:a16="http://schemas.microsoft.com/office/drawing/2014/main" id="{15A66AC4-F71F-8B17-5C39-A27F52DC9B71}"/>
+              </a:ext>
+            </a:extLst>
+          </p:cNvPr>
+          <p:cNvSpPr/>
           <p:nvPr/>
-        </p:nvCxnSpPr>
+        </p:nvSpPr>
         <p:spPr>
-          <a:xfrm flipV="1">
-            <a:off x="2235666" y="3988965"/>
-            <a:ext cx="0" cy="431923"/>
+          <a:xfrm>
+            <a:off x="9627722" y="2290849"/>
+            <a:ext cx="871459" cy="310369"/>
           </a:xfrm>
-          <a:prstGeom prst="line">
+          <a:prstGeom prst="rect">
             <a:avLst/>
           </a:prstGeom>
         </p:spPr>
         <p:style>
           <a:lnRef idx="2">
-            <a:schemeClr val="accent1"/>
-          </a:lnRef>
-          <a:fillRef idx="0">
-            <a:schemeClr val="accent1"/>
-          </a:fillRef>
-          <a:effectRef idx="1">
-            <a:schemeClr val="accent1"/>
-          </a:effectRef>
-          <a:fontRef idx="minor">
-            <a:schemeClr val="tx1"/>
-          </a:fontRef>
-        </p:style>
-      </p:cxnSp>
-      <p:sp>
-        <p:nvSpPr>
-          <p:cNvPr id="15" name="流程图: 决策 14">
-            <a:extLst>
-              <a:ext uri="{FF2B5EF4-FFF2-40B4-BE49-F238E27FC236}">
-                <a16:creationId xmlns:a16="http://schemas.microsoft.com/office/drawing/2014/main" id="{C7942E4B-344A-8772-16B9-77DD74D6FC4C}"/>
-              </a:ext>
-            </a:extLst>
-          </p:cNvPr>
-          <p:cNvSpPr/>
-          <p:nvPr/>
-        </p:nvSpPr>
-        <p:spPr>
-          <a:xfrm>
-            <a:off x="2449587" y="3835076"/>
-            <a:ext cx="864066" cy="307777"/>
-          </a:xfrm>
-          <a:prstGeom prst="flowChartDecision">
-            <a:avLst/>
-          </a:prstGeom>
-        </p:spPr>
-        <p:style>
-          <a:lnRef idx="2">
-            <a:schemeClr val="accent1"/>
+            <a:schemeClr val="dk1"/>
           </a:lnRef>
           <a:fillRef idx="1">
             <a:schemeClr val="lt1"/>
           </a:fillRef>
           <a:effectRef idx="0">
-            <a:schemeClr val="accent1"/>
+            <a:schemeClr val="dk1"/>
           </a:effectRef>
           <a:fontRef idx="minor">
             <a:schemeClr val="dk1"/>
@@ -10601,53 +9731,21 @@
           <a:lstStyle/>
           <a:p>
             <a:pPr algn="ctr"/>
-            <a:endParaRPr lang="zh-CN" altLang="en-US" dirty="0"/>
-          </a:p>
-        </p:txBody>
-      </p:sp>
-      <p:sp>
-        <p:nvSpPr>
-          <p:cNvPr id="17" name="文本框 16">
-            <a:extLst>
-              <a:ext uri="{FF2B5EF4-FFF2-40B4-BE49-F238E27FC236}">
-                <a16:creationId xmlns:a16="http://schemas.microsoft.com/office/drawing/2014/main" id="{B1062C66-F2CC-D280-3395-7C4B3B3ED7B4}"/>
-              </a:ext>
-            </a:extLst>
-          </p:cNvPr>
-          <p:cNvSpPr txBox="1"/>
-          <p:nvPr/>
-        </p:nvSpPr>
-        <p:spPr>
-          <a:xfrm>
-            <a:off x="2457978" y="3527299"/>
-            <a:ext cx="1015067" cy="307777"/>
-          </a:xfrm>
-          <a:prstGeom prst="rect">
-            <a:avLst/>
-          </a:prstGeom>
-          <a:noFill/>
-        </p:spPr>
-        <p:txBody>
-          <a:bodyPr wrap="square" rtlCol="0">
-            <a:spAutoFit/>
-          </a:bodyPr>
-          <a:lstStyle/>
-          <a:p>
-            <a:r>
-              <a:rPr lang="en-US" altLang="zh-CN" sz="1400" dirty="0" err="1">
+            <a:r>
+              <a:rPr lang="en-US" altLang="zh-CN" sz="900" dirty="0">
+                <a:latin typeface="Times New Roman" panose="02020603050405020304" pitchFamily="18" charset="0"/>
+                <a:cs typeface="Times New Roman" panose="02020603050405020304" pitchFamily="18" charset="0"/>
+              </a:rPr>
+              <a:t>query-</a:t>
+            </a:r>
+            <a:r>
+              <a:rPr lang="en-US" altLang="zh-CN" sz="900" dirty="0" err="1">
                 <a:latin typeface="Times New Roman" panose="02020603050405020304" pitchFamily="18" charset="0"/>
                 <a:cs typeface="Times New Roman" panose="02020603050405020304" pitchFamily="18" charset="0"/>
               </a:rPr>
               <a:t>conv_id</a:t>
             </a:r>
-            <a:r>
-              <a:rPr lang="en-US" altLang="zh-CN" sz="1400" dirty="0">
-                <a:latin typeface="Times New Roman" panose="02020603050405020304" pitchFamily="18" charset="0"/>
-                <a:cs typeface="Times New Roman" panose="02020603050405020304" pitchFamily="18" charset="0"/>
-              </a:rPr>
-              <a:t>?</a:t>
-            </a:r>
-            <a:endParaRPr lang="zh-CN" altLang="en-US" sz="1400" dirty="0">
+            <a:endParaRPr lang="zh-CN" altLang="en-US" sz="900" dirty="0">
               <a:latin typeface="Times New Roman" panose="02020603050405020304" pitchFamily="18" charset="0"/>
               <a:cs typeface="Times New Roman" panose="02020603050405020304" pitchFamily="18" charset="0"/>
             </a:endParaRPr>
@@ -10656,342 +9754,22 @@
       </p:sp>
       <p:cxnSp>
         <p:nvCxnSpPr>
-          <p:cNvPr id="19" name="连接符: 肘形 18">
-            <a:extLst>
-              <a:ext uri="{FF2B5EF4-FFF2-40B4-BE49-F238E27FC236}">
-                <a16:creationId xmlns:a16="http://schemas.microsoft.com/office/drawing/2014/main" id="{E881866B-8372-4BE2-BBBF-087632A0F825}"/>
+          <p:cNvPr id="52" name="直接箭头连接符 51">
+            <a:extLst>
+              <a:ext uri="{FF2B5EF4-FFF2-40B4-BE49-F238E27FC236}">
+                <a16:creationId xmlns:a16="http://schemas.microsoft.com/office/drawing/2014/main" id="{987637F0-6056-0957-BC61-30FACD3A4217}"/>
               </a:ext>
             </a:extLst>
           </p:cNvPr>
           <p:cNvCxnSpPr>
-            <a:cxnSpLocks/>
-            <a:stCxn id="15" idx="3"/>
-          </p:cNvCxnSpPr>
-          <p:nvPr/>
-        </p:nvCxnSpPr>
-        <p:spPr>
-          <a:xfrm>
-            <a:off x="3313653" y="3988965"/>
-            <a:ext cx="1275125" cy="1166070"/>
-          </a:xfrm>
-          <a:prstGeom prst="bentConnector3">
-            <a:avLst>
-              <a:gd name="adj1" fmla="val 16118"/>
-            </a:avLst>
-          </a:prstGeom>
-          <a:ln>
-            <a:tailEnd type="triangle"/>
-          </a:ln>
-        </p:spPr>
-        <p:style>
-          <a:lnRef idx="2">
-            <a:schemeClr val="accent1"/>
-          </a:lnRef>
-          <a:fillRef idx="0">
-            <a:schemeClr val="accent1"/>
-          </a:fillRef>
-          <a:effectRef idx="1">
-            <a:schemeClr val="accent1"/>
-          </a:effectRef>
-          <a:fontRef idx="minor">
-            <a:schemeClr val="tx1"/>
-          </a:fontRef>
-        </p:style>
-      </p:cxnSp>
-      <p:cxnSp>
-        <p:nvCxnSpPr>
-          <p:cNvPr id="22" name="连接符: 肘形 21">
-            <a:extLst>
-              <a:ext uri="{FF2B5EF4-FFF2-40B4-BE49-F238E27FC236}">
-                <a16:creationId xmlns:a16="http://schemas.microsoft.com/office/drawing/2014/main" id="{F9859621-6921-F9B8-DE48-4BB4082754CF}"/>
-              </a:ext>
-            </a:extLst>
-          </p:cNvPr>
-          <p:cNvCxnSpPr>
-            <a:cxnSpLocks/>
-            <a:stCxn id="15" idx="3"/>
-          </p:cNvCxnSpPr>
-          <p:nvPr/>
-        </p:nvCxnSpPr>
-        <p:spPr>
-          <a:xfrm flipV="1">
-            <a:off x="3313653" y="2952924"/>
-            <a:ext cx="1333848" cy="1036041"/>
-          </a:xfrm>
-          <a:prstGeom prst="bentConnector3">
-            <a:avLst>
-              <a:gd name="adj1" fmla="val 15723"/>
-            </a:avLst>
-          </a:prstGeom>
-          <a:ln>
-            <a:tailEnd type="triangle"/>
-          </a:ln>
-        </p:spPr>
-        <p:style>
-          <a:lnRef idx="2">
-            <a:schemeClr val="accent1"/>
-          </a:lnRef>
-          <a:fillRef idx="0">
-            <a:schemeClr val="accent1"/>
-          </a:fillRef>
-          <a:effectRef idx="1">
-            <a:schemeClr val="accent1"/>
-          </a:effectRef>
-          <a:fontRef idx="minor">
-            <a:schemeClr val="tx1"/>
-          </a:fontRef>
-        </p:style>
-      </p:cxnSp>
-      <p:sp>
-        <p:nvSpPr>
-          <p:cNvPr id="28" name="文本框 27">
-            <a:extLst>
-              <a:ext uri="{FF2B5EF4-FFF2-40B4-BE49-F238E27FC236}">
-                <a16:creationId xmlns:a16="http://schemas.microsoft.com/office/drawing/2014/main" id="{CA2293A6-27AA-CE88-43EA-6C8CF0FDD735}"/>
-              </a:ext>
-            </a:extLst>
-          </p:cNvPr>
-          <p:cNvSpPr txBox="1"/>
-          <p:nvPr/>
-        </p:nvSpPr>
-        <p:spPr>
-          <a:xfrm>
-            <a:off x="3896686" y="2669006"/>
-            <a:ext cx="302004" cy="307777"/>
-          </a:xfrm>
-          <a:prstGeom prst="rect">
-            <a:avLst/>
-          </a:prstGeom>
-          <a:noFill/>
-        </p:spPr>
-        <p:txBody>
-          <a:bodyPr wrap="square" rtlCol="0">
-            <a:spAutoFit/>
-          </a:bodyPr>
-          <a:lstStyle/>
-          <a:p>
-            <a:r>
-              <a:rPr lang="en-US" altLang="zh-CN" sz="1400" dirty="0">
-                <a:latin typeface="Times New Roman" panose="02020603050405020304" pitchFamily="18" charset="0"/>
-                <a:cs typeface="Times New Roman" panose="02020603050405020304" pitchFamily="18" charset="0"/>
-              </a:rPr>
-              <a:t>Y</a:t>
-            </a:r>
-            <a:endParaRPr lang="zh-CN" altLang="en-US" sz="1400" dirty="0">
-              <a:latin typeface="Times New Roman" panose="02020603050405020304" pitchFamily="18" charset="0"/>
-              <a:cs typeface="Times New Roman" panose="02020603050405020304" pitchFamily="18" charset="0"/>
-            </a:endParaRPr>
-          </a:p>
-        </p:txBody>
-      </p:sp>
-      <p:sp>
-        <p:nvSpPr>
-          <p:cNvPr id="30" name="文本框 29">
-            <a:extLst>
-              <a:ext uri="{FF2B5EF4-FFF2-40B4-BE49-F238E27FC236}">
-                <a16:creationId xmlns:a16="http://schemas.microsoft.com/office/drawing/2014/main" id="{04A7E50C-7E39-8C57-A140-57491C3CD32C}"/>
-              </a:ext>
-            </a:extLst>
-          </p:cNvPr>
-          <p:cNvSpPr txBox="1"/>
-          <p:nvPr/>
-        </p:nvSpPr>
-        <p:spPr>
-          <a:xfrm>
-            <a:off x="3896686" y="4847258"/>
-            <a:ext cx="302004" cy="307777"/>
-          </a:xfrm>
-          <a:prstGeom prst="rect">
-            <a:avLst/>
-          </a:prstGeom>
-          <a:noFill/>
-        </p:spPr>
-        <p:txBody>
-          <a:bodyPr wrap="square" rtlCol="0">
-            <a:spAutoFit/>
-          </a:bodyPr>
-          <a:lstStyle/>
-          <a:p>
-            <a:r>
-              <a:rPr lang="en-US" altLang="zh-CN" sz="1400" dirty="0">
-                <a:latin typeface="Times New Roman" panose="02020603050405020304" pitchFamily="18" charset="0"/>
-                <a:cs typeface="Times New Roman" panose="02020603050405020304" pitchFamily="18" charset="0"/>
-              </a:rPr>
-              <a:t>N</a:t>
-            </a:r>
-            <a:endParaRPr lang="zh-CN" altLang="en-US" sz="1400" dirty="0">
-              <a:latin typeface="Times New Roman" panose="02020603050405020304" pitchFamily="18" charset="0"/>
-              <a:cs typeface="Times New Roman" panose="02020603050405020304" pitchFamily="18" charset="0"/>
-            </a:endParaRPr>
-          </a:p>
-        </p:txBody>
-      </p:sp>
-      <p:sp>
-        <p:nvSpPr>
-          <p:cNvPr id="32" name="文本框 31">
-            <a:extLst>
-              <a:ext uri="{FF2B5EF4-FFF2-40B4-BE49-F238E27FC236}">
-                <a16:creationId xmlns:a16="http://schemas.microsoft.com/office/drawing/2014/main" id="{EAACF695-62D1-9146-9A6B-DB8E0AE09A83}"/>
-              </a:ext>
-            </a:extLst>
-          </p:cNvPr>
-          <p:cNvSpPr txBox="1"/>
-          <p:nvPr/>
-        </p:nvSpPr>
-        <p:spPr>
-          <a:xfrm>
-            <a:off x="4588778" y="4970369"/>
-            <a:ext cx="4496151" cy="307777"/>
-          </a:xfrm>
-          <a:prstGeom prst="rect">
-            <a:avLst/>
-          </a:prstGeom>
-          <a:noFill/>
-        </p:spPr>
-        <p:txBody>
-          <a:bodyPr wrap="square">
-            <a:spAutoFit/>
-          </a:bodyPr>
-          <a:lstStyle/>
-          <a:p>
-            <a:pPr>
-              <a:buNone/>
-            </a:pPr>
-            <a:r>
-              <a:rPr lang="zh-CN" altLang="zh-CN" sz="1400" dirty="0">
-                <a:solidFill>
-                  <a:srgbClr val="080808"/>
-                </a:solidFill>
-                <a:effectLst/>
-                <a:latin typeface="Times New Roman" panose="02020603050405020304" pitchFamily="18" charset="0"/>
-                <a:cs typeface="Times New Roman" panose="02020603050405020304" pitchFamily="18" charset="0"/>
-              </a:rPr>
-              <a:t>conv = Conversation(title=request.query[:</a:t>
-            </a:r>
-            <a:r>
-              <a:rPr lang="zh-CN" altLang="zh-CN" sz="1400" dirty="0">
-                <a:solidFill>
-                  <a:srgbClr val="1750EB"/>
-                </a:solidFill>
-                <a:effectLst/>
-                <a:latin typeface="Times New Roman" panose="02020603050405020304" pitchFamily="18" charset="0"/>
-                <a:cs typeface="Times New Roman" panose="02020603050405020304" pitchFamily="18" charset="0"/>
-              </a:rPr>
-              <a:t>80</a:t>
-            </a:r>
-            <a:r>
-              <a:rPr lang="zh-CN" altLang="zh-CN" sz="1400" dirty="0">
-                <a:solidFill>
-                  <a:srgbClr val="080808"/>
-                </a:solidFill>
-                <a:effectLst/>
-                <a:latin typeface="Times New Roman" panose="02020603050405020304" pitchFamily="18" charset="0"/>
-                <a:cs typeface="Times New Roman" panose="02020603050405020304" pitchFamily="18" charset="0"/>
-              </a:rPr>
-              <a:t>])</a:t>
-            </a:r>
-          </a:p>
-        </p:txBody>
-      </p:sp>
-      <p:sp>
-        <p:nvSpPr>
-          <p:cNvPr id="34" name="文本框 33">
-            <a:extLst>
-              <a:ext uri="{FF2B5EF4-FFF2-40B4-BE49-F238E27FC236}">
-                <a16:creationId xmlns:a16="http://schemas.microsoft.com/office/drawing/2014/main" id="{7DAC07FE-B673-C127-C7FB-A2A57E517617}"/>
-              </a:ext>
-            </a:extLst>
-          </p:cNvPr>
-          <p:cNvSpPr txBox="1"/>
-          <p:nvPr/>
-        </p:nvSpPr>
-        <p:spPr>
-          <a:xfrm>
-            <a:off x="4588778" y="2768258"/>
-            <a:ext cx="6096698" cy="307777"/>
-          </a:xfrm>
-          <a:prstGeom prst="rect">
-            <a:avLst/>
-          </a:prstGeom>
-          <a:noFill/>
-        </p:spPr>
-        <p:txBody>
-          <a:bodyPr wrap="square">
-            <a:spAutoFit/>
-          </a:bodyPr>
-          <a:lstStyle/>
-          <a:p>
-            <a:pPr>
-              <a:buNone/>
-            </a:pPr>
-            <a:r>
-              <a:rPr lang="zh-CN" altLang="zh-CN" sz="1400" dirty="0">
-                <a:solidFill>
-                  <a:srgbClr val="080808"/>
-                </a:solidFill>
-                <a:effectLst/>
-                <a:latin typeface="Times New Roman" panose="02020603050405020304" pitchFamily="18" charset="0"/>
-                <a:cs typeface="Times New Roman" panose="02020603050405020304" pitchFamily="18" charset="0"/>
-              </a:rPr>
-              <a:t>conv = db.query(Conversation).filter_by(id=conv_id).first()</a:t>
-            </a:r>
-          </a:p>
-        </p:txBody>
-      </p:sp>
-      <p:cxnSp>
-        <p:nvCxnSpPr>
-          <p:cNvPr id="36" name="直接连接符 35">
-            <a:extLst>
-              <a:ext uri="{FF2B5EF4-FFF2-40B4-BE49-F238E27FC236}">
-                <a16:creationId xmlns:a16="http://schemas.microsoft.com/office/drawing/2014/main" id="{B548C03A-122F-65AE-E6D2-B85CB9E11212}"/>
-              </a:ext>
-            </a:extLst>
-          </p:cNvPr>
-          <p:cNvCxnSpPr>
-            <a:cxnSpLocks/>
+            <a:stCxn id="31" idx="2"/>
           </p:cNvCxnSpPr>
           <p:nvPr/>
         </p:nvCxnSpPr>
         <p:spPr>
           <a:xfrm flipH="1">
-            <a:off x="1891717" y="4420888"/>
-            <a:ext cx="343949" cy="0"/>
-          </a:xfrm>
-          <a:prstGeom prst="line">
-            <a:avLst/>
-          </a:prstGeom>
-        </p:spPr>
-        <p:style>
-          <a:lnRef idx="2">
-            <a:schemeClr val="accent1"/>
-          </a:lnRef>
-          <a:fillRef idx="0">
-            <a:schemeClr val="accent1"/>
-          </a:fillRef>
-          <a:effectRef idx="1">
-            <a:schemeClr val="accent1"/>
-          </a:effectRef>
-          <a:fontRef idx="minor">
-            <a:schemeClr val="tx1"/>
-          </a:fontRef>
-        </p:style>
-      </p:cxnSp>
-      <p:cxnSp>
-        <p:nvCxnSpPr>
-          <p:cNvPr id="42" name="直接箭头连接符 41">
-            <a:extLst>
-              <a:ext uri="{FF2B5EF4-FFF2-40B4-BE49-F238E27FC236}">
-                <a16:creationId xmlns:a16="http://schemas.microsoft.com/office/drawing/2014/main" id="{FAB3CD96-83DE-0C7A-F014-6A795AAA35A3}"/>
-              </a:ext>
-            </a:extLst>
-          </p:cNvPr>
-          <p:cNvCxnSpPr/>
-          <p:nvPr/>
-        </p:nvCxnSpPr>
-        <p:spPr>
-          <a:xfrm>
-            <a:off x="8514826" y="4133156"/>
-            <a:ext cx="734036" cy="9697"/>
+            <a:off x="8282646" y="2549434"/>
+            <a:ext cx="1263" cy="512038"/>
           </a:xfrm>
           <a:prstGeom prst="straightConnector1">
             <a:avLst/>
@@ -11002,13 +9780,13 @@
         </p:spPr>
         <p:style>
           <a:lnRef idx="2">
-            <a:schemeClr val="accent1"/>
+            <a:schemeClr val="dk1"/>
           </a:lnRef>
           <a:fillRef idx="0">
-            <a:schemeClr val="accent1"/>
+            <a:schemeClr val="dk1"/>
           </a:fillRef>
           <a:effectRef idx="1">
-            <a:schemeClr val="accent1"/>
+            <a:schemeClr val="dk1"/>
           </a:effectRef>
           <a:fontRef idx="minor">
             <a:schemeClr val="tx1"/>
@@ -11017,34 +9795,330 @@
       </p:cxnSp>
       <p:cxnSp>
         <p:nvCxnSpPr>
-          <p:cNvPr id="44" name="直接连接符 43">
-            <a:extLst>
-              <a:ext uri="{FF2B5EF4-FFF2-40B4-BE49-F238E27FC236}">
-                <a16:creationId xmlns:a16="http://schemas.microsoft.com/office/drawing/2014/main" id="{9248DB02-1D15-E8FF-B204-C7B2E804EEFB}"/>
-              </a:ext>
-            </a:extLst>
-          </p:cNvPr>
-          <p:cNvCxnSpPr/>
+          <p:cNvPr id="56" name="连接符: 肘形 55">
+            <a:extLst>
+              <a:ext uri="{FF2B5EF4-FFF2-40B4-BE49-F238E27FC236}">
+                <a16:creationId xmlns:a16="http://schemas.microsoft.com/office/drawing/2014/main" id="{D1BBACB9-0967-7ED0-A536-35A5F111FBF6}"/>
+              </a:ext>
+            </a:extLst>
+          </p:cNvPr>
+          <p:cNvCxnSpPr>
+            <a:cxnSpLocks/>
+            <a:stCxn id="47" idx="2"/>
+          </p:cNvCxnSpPr>
           <p:nvPr/>
         </p:nvCxnSpPr>
         <p:spPr>
-          <a:xfrm flipV="1">
-            <a:off x="8514826" y="3076035"/>
-            <a:ext cx="0" cy="1057121"/>
+          <a:xfrm rot="5400000">
+            <a:off x="9040880" y="1842984"/>
+            <a:ext cx="264338" cy="1780806"/>
           </a:xfrm>
-          <a:prstGeom prst="line">
+          <a:prstGeom prst="bentConnector2">
             <a:avLst/>
           </a:prstGeom>
         </p:spPr>
         <p:style>
           <a:lnRef idx="2">
-            <a:schemeClr val="accent1"/>
+            <a:schemeClr val="dk1"/>
           </a:lnRef>
           <a:fillRef idx="0">
-            <a:schemeClr val="accent1"/>
+            <a:schemeClr val="dk1"/>
           </a:fillRef>
           <a:effectRef idx="1">
-            <a:schemeClr val="accent1"/>
+            <a:schemeClr val="dk1"/>
+          </a:effectRef>
+          <a:fontRef idx="minor">
+            <a:schemeClr val="tx1"/>
+          </a:fontRef>
+        </p:style>
+      </p:cxnSp>
+      <p:sp>
+        <p:nvSpPr>
+          <p:cNvPr id="59" name="矩形 58">
+            <a:extLst>
+              <a:ext uri="{FF2B5EF4-FFF2-40B4-BE49-F238E27FC236}">
+                <a16:creationId xmlns:a16="http://schemas.microsoft.com/office/drawing/2014/main" id="{F0706197-B914-01A7-0565-27C8E0BE56DD}"/>
+              </a:ext>
+            </a:extLst>
+          </p:cNvPr>
+          <p:cNvSpPr/>
+          <p:nvPr/>
+        </p:nvSpPr>
+        <p:spPr>
+          <a:xfrm>
+            <a:off x="7788188" y="3075592"/>
+            <a:ext cx="988915" cy="323097"/>
+          </a:xfrm>
+          <a:prstGeom prst="rect">
+            <a:avLst/>
+          </a:prstGeom>
+        </p:spPr>
+        <p:style>
+          <a:lnRef idx="2">
+            <a:schemeClr val="dk1"/>
+          </a:lnRef>
+          <a:fillRef idx="1">
+            <a:schemeClr val="lt1"/>
+          </a:fillRef>
+          <a:effectRef idx="0">
+            <a:schemeClr val="dk1"/>
+          </a:effectRef>
+          <a:fontRef idx="minor">
+            <a:schemeClr val="dk1"/>
+          </a:fontRef>
+        </p:style>
+        <p:txBody>
+          <a:bodyPr rtlCol="0" anchor="ctr"/>
+          <a:lstStyle/>
+          <a:p>
+            <a:pPr algn="ctr"/>
+            <a:r>
+              <a:rPr lang="en-US" altLang="zh-CN" sz="1600" dirty="0" err="1">
+                <a:latin typeface="Times New Roman" panose="02020603050405020304" pitchFamily="18" charset="0"/>
+                <a:cs typeface="Times New Roman" panose="02020603050405020304" pitchFamily="18" charset="0"/>
+              </a:rPr>
+              <a:t>user_msg</a:t>
+            </a:r>
+            <a:endParaRPr lang="zh-CN" altLang="en-US" sz="1600" dirty="0">
+              <a:latin typeface="Times New Roman" panose="02020603050405020304" pitchFamily="18" charset="0"/>
+              <a:cs typeface="Times New Roman" panose="02020603050405020304" pitchFamily="18" charset="0"/>
+            </a:endParaRPr>
+          </a:p>
+        </p:txBody>
+      </p:sp>
+      <p:sp>
+        <p:nvSpPr>
+          <p:cNvPr id="60" name="矩形 59">
+            <a:extLst>
+              <a:ext uri="{FF2B5EF4-FFF2-40B4-BE49-F238E27FC236}">
+                <a16:creationId xmlns:a16="http://schemas.microsoft.com/office/drawing/2014/main" id="{98EE0B36-C881-33BF-CD06-6A0278EAE1DD}"/>
+              </a:ext>
+            </a:extLst>
+          </p:cNvPr>
+          <p:cNvSpPr/>
+          <p:nvPr/>
+        </p:nvSpPr>
+        <p:spPr>
+          <a:xfrm>
+            <a:off x="7788188" y="3728510"/>
+            <a:ext cx="988915" cy="323098"/>
+          </a:xfrm>
+          <a:prstGeom prst="rect">
+            <a:avLst/>
+          </a:prstGeom>
+        </p:spPr>
+        <p:style>
+          <a:lnRef idx="2">
+            <a:schemeClr val="dk1"/>
+          </a:lnRef>
+          <a:fillRef idx="1">
+            <a:schemeClr val="lt1"/>
+          </a:fillRef>
+          <a:effectRef idx="0">
+            <a:schemeClr val="dk1"/>
+          </a:effectRef>
+          <a:fontRef idx="minor">
+            <a:schemeClr val="dk1"/>
+          </a:fontRef>
+        </p:style>
+        <p:txBody>
+          <a:bodyPr rtlCol="0" anchor="ctr"/>
+          <a:lstStyle/>
+          <a:p>
+            <a:pPr algn="ctr"/>
+            <a:r>
+              <a:rPr lang="en-US" altLang="zh-CN" dirty="0">
+                <a:latin typeface="Times New Roman" panose="02020603050405020304" pitchFamily="18" charset="0"/>
+                <a:cs typeface="Times New Roman" panose="02020603050405020304" pitchFamily="18" charset="0"/>
+              </a:rPr>
+              <a:t>record</a:t>
+            </a:r>
+            <a:endParaRPr lang="zh-CN" altLang="en-US" dirty="0">
+              <a:latin typeface="Times New Roman" panose="02020603050405020304" pitchFamily="18" charset="0"/>
+              <a:cs typeface="Times New Roman" panose="02020603050405020304" pitchFamily="18" charset="0"/>
+            </a:endParaRPr>
+          </a:p>
+        </p:txBody>
+      </p:sp>
+      <p:cxnSp>
+        <p:nvCxnSpPr>
+          <p:cNvPr id="62" name="直接箭头连接符 61">
+            <a:extLst>
+              <a:ext uri="{FF2B5EF4-FFF2-40B4-BE49-F238E27FC236}">
+                <a16:creationId xmlns:a16="http://schemas.microsoft.com/office/drawing/2014/main" id="{D9C8A978-B696-97A1-CB56-47DC01F6CB99}"/>
+              </a:ext>
+            </a:extLst>
+          </p:cNvPr>
+          <p:cNvCxnSpPr>
+            <a:cxnSpLocks/>
+            <a:stCxn id="59" idx="2"/>
+            <a:endCxn id="60" idx="0"/>
+          </p:cNvCxnSpPr>
+          <p:nvPr/>
+        </p:nvCxnSpPr>
+        <p:spPr>
+          <a:xfrm>
+            <a:off x="8282646" y="3398689"/>
+            <a:ext cx="0" cy="329821"/>
+          </a:xfrm>
+          <a:prstGeom prst="straightConnector1">
+            <a:avLst/>
+          </a:prstGeom>
+          <a:ln>
+            <a:tailEnd type="triangle"/>
+          </a:ln>
+        </p:spPr>
+        <p:style>
+          <a:lnRef idx="2">
+            <a:schemeClr val="dk1"/>
+          </a:lnRef>
+          <a:fillRef idx="0">
+            <a:schemeClr val="dk1"/>
+          </a:fillRef>
+          <a:effectRef idx="1">
+            <a:schemeClr val="dk1"/>
+          </a:effectRef>
+          <a:fontRef idx="minor">
+            <a:schemeClr val="tx1"/>
+          </a:fontRef>
+        </p:style>
+      </p:cxnSp>
+      <p:sp>
+        <p:nvSpPr>
+          <p:cNvPr id="66" name="矩形 65">
+            <a:extLst>
+              <a:ext uri="{FF2B5EF4-FFF2-40B4-BE49-F238E27FC236}">
+                <a16:creationId xmlns:a16="http://schemas.microsoft.com/office/drawing/2014/main" id="{817E4C5B-0914-3FB9-7A2E-07E380EA7650}"/>
+              </a:ext>
+            </a:extLst>
+          </p:cNvPr>
+          <p:cNvSpPr/>
+          <p:nvPr/>
+        </p:nvSpPr>
+        <p:spPr>
+          <a:xfrm>
+            <a:off x="7788188" y="4381429"/>
+            <a:ext cx="988915" cy="383947"/>
+          </a:xfrm>
+          <a:prstGeom prst="rect">
+            <a:avLst/>
+          </a:prstGeom>
+        </p:spPr>
+        <p:style>
+          <a:lnRef idx="2">
+            <a:schemeClr val="dk1"/>
+          </a:lnRef>
+          <a:fillRef idx="1">
+            <a:schemeClr val="lt1"/>
+          </a:fillRef>
+          <a:effectRef idx="0">
+            <a:schemeClr val="dk1"/>
+          </a:effectRef>
+          <a:fontRef idx="minor">
+            <a:schemeClr val="dk1"/>
+          </a:fontRef>
+        </p:style>
+        <p:txBody>
+          <a:bodyPr rtlCol="0" anchor="ctr"/>
+          <a:lstStyle/>
+          <a:p>
+            <a:pPr algn="ctr"/>
+            <a:r>
+              <a:rPr lang="zh-CN" altLang="zh-CN" sz="700" dirty="0">
+                <a:latin typeface="Times New Roman" panose="02020603050405020304" pitchFamily="18" charset="0"/>
+                <a:cs typeface="Times New Roman" panose="02020603050405020304" pitchFamily="18" charset="0"/>
+              </a:rPr>
+              <a:t>StreamingResponse</a:t>
+            </a:r>
+          </a:p>
+        </p:txBody>
+      </p:sp>
+      <p:sp>
+        <p:nvSpPr>
+          <p:cNvPr id="67" name="矩形 66">
+            <a:extLst>
+              <a:ext uri="{FF2B5EF4-FFF2-40B4-BE49-F238E27FC236}">
+                <a16:creationId xmlns:a16="http://schemas.microsoft.com/office/drawing/2014/main" id="{0E070F54-61E4-5BA3-40F3-1B4041199629}"/>
+              </a:ext>
+            </a:extLst>
+          </p:cNvPr>
+          <p:cNvSpPr/>
+          <p:nvPr/>
+        </p:nvSpPr>
+        <p:spPr>
+          <a:xfrm>
+            <a:off x="9568994" y="4381429"/>
+            <a:ext cx="988915" cy="383947"/>
+          </a:xfrm>
+          <a:prstGeom prst="rect">
+            <a:avLst/>
+          </a:prstGeom>
+        </p:spPr>
+        <p:style>
+          <a:lnRef idx="2">
+            <a:schemeClr val="dk1"/>
+          </a:lnRef>
+          <a:fillRef idx="1">
+            <a:schemeClr val="lt1"/>
+          </a:fillRef>
+          <a:effectRef idx="0">
+            <a:schemeClr val="dk1"/>
+          </a:effectRef>
+          <a:fontRef idx="minor">
+            <a:schemeClr val="dk1"/>
+          </a:fontRef>
+        </p:style>
+        <p:txBody>
+          <a:bodyPr rtlCol="0" anchor="ctr"/>
+          <a:lstStyle/>
+          <a:p>
+            <a:pPr algn="ctr"/>
+            <a:r>
+              <a:rPr lang="zh-CN" altLang="zh-CN" sz="1100" dirty="0">
+                <a:latin typeface="Times New Roman" panose="02020603050405020304" pitchFamily="18" charset="0"/>
+                <a:cs typeface="Times New Roman" panose="02020603050405020304" pitchFamily="18" charset="0"/>
+              </a:rPr>
+              <a:t>event_stream()</a:t>
+            </a:r>
+          </a:p>
+        </p:txBody>
+      </p:sp>
+      <p:cxnSp>
+        <p:nvCxnSpPr>
+          <p:cNvPr id="69" name="直接箭头连接符 68">
+            <a:extLst>
+              <a:ext uri="{FF2B5EF4-FFF2-40B4-BE49-F238E27FC236}">
+                <a16:creationId xmlns:a16="http://schemas.microsoft.com/office/drawing/2014/main" id="{BD27C18F-A692-9AB7-9C57-513838AAE463}"/>
+              </a:ext>
+            </a:extLst>
+          </p:cNvPr>
+          <p:cNvCxnSpPr>
+            <a:stCxn id="60" idx="2"/>
+            <a:endCxn id="66" idx="0"/>
+          </p:cNvCxnSpPr>
+          <p:nvPr/>
+        </p:nvCxnSpPr>
+        <p:spPr>
+          <a:xfrm>
+            <a:off x="8282646" y="4051608"/>
+            <a:ext cx="0" cy="329821"/>
+          </a:xfrm>
+          <a:prstGeom prst="straightConnector1">
+            <a:avLst/>
+          </a:prstGeom>
+          <a:ln>
+            <a:tailEnd type="triangle"/>
+          </a:ln>
+        </p:spPr>
+        <p:style>
+          <a:lnRef idx="2">
+            <a:schemeClr val="dk1"/>
+          </a:lnRef>
+          <a:fillRef idx="0">
+            <a:schemeClr val="dk1"/>
+          </a:fillRef>
+          <a:effectRef idx="1">
+            <a:schemeClr val="dk1"/>
           </a:effectRef>
           <a:fontRef idx="minor">
             <a:schemeClr val="tx1"/>
@@ -11053,20 +10127,23 @@
       </p:cxnSp>
       <p:cxnSp>
         <p:nvCxnSpPr>
-          <p:cNvPr id="46" name="直接连接符 45">
-            <a:extLst>
-              <a:ext uri="{FF2B5EF4-FFF2-40B4-BE49-F238E27FC236}">
-                <a16:creationId xmlns:a16="http://schemas.microsoft.com/office/drawing/2014/main" id="{613DC273-9B1D-C045-D08E-AA475BA15BBD}"/>
-              </a:ext>
-            </a:extLst>
-          </p:cNvPr>
-          <p:cNvCxnSpPr/>
+          <p:cNvPr id="71" name="直接连接符 70">
+            <a:extLst>
+              <a:ext uri="{FF2B5EF4-FFF2-40B4-BE49-F238E27FC236}">
+                <a16:creationId xmlns:a16="http://schemas.microsoft.com/office/drawing/2014/main" id="{B3A9EFC9-77FE-03A6-8758-DC0AFAA7A505}"/>
+              </a:ext>
+            </a:extLst>
+          </p:cNvPr>
+          <p:cNvCxnSpPr>
+            <a:stCxn id="66" idx="3"/>
+            <a:endCxn id="67" idx="1"/>
+          </p:cNvCxnSpPr>
           <p:nvPr/>
         </p:nvCxnSpPr>
         <p:spPr>
           <a:xfrm>
-            <a:off x="8514826" y="4133156"/>
-            <a:ext cx="0" cy="1062516"/>
+            <a:off x="8777103" y="4573403"/>
+            <a:ext cx="791891" cy="0"/>
           </a:xfrm>
           <a:prstGeom prst="line">
             <a:avLst/>
@@ -11074,163 +10151,19 @@
         </p:spPr>
         <p:style>
           <a:lnRef idx="2">
-            <a:schemeClr val="accent1"/>
+            <a:schemeClr val="dk1"/>
           </a:lnRef>
           <a:fillRef idx="0">
-            <a:schemeClr val="accent1"/>
+            <a:schemeClr val="dk1"/>
           </a:fillRef>
           <a:effectRef idx="1">
-            <a:schemeClr val="accent1"/>
+            <a:schemeClr val="dk1"/>
           </a:effectRef>
           <a:fontRef idx="minor">
             <a:schemeClr val="tx1"/>
           </a:fontRef>
         </p:style>
       </p:cxnSp>
-      <p:sp>
-        <p:nvSpPr>
-          <p:cNvPr id="48" name="文本框 47">
-            <a:extLst>
-              <a:ext uri="{FF2B5EF4-FFF2-40B4-BE49-F238E27FC236}">
-                <a16:creationId xmlns:a16="http://schemas.microsoft.com/office/drawing/2014/main" id="{4EA3A7E8-5DC8-5F95-1356-B48C8CCDBBD7}"/>
-              </a:ext>
-            </a:extLst>
-          </p:cNvPr>
-          <p:cNvSpPr txBox="1"/>
-          <p:nvPr/>
-        </p:nvSpPr>
-        <p:spPr>
-          <a:xfrm>
-            <a:off x="9218452" y="3953338"/>
-            <a:ext cx="2719081" cy="369332"/>
-          </a:xfrm>
-          <a:prstGeom prst="rect">
-            <a:avLst/>
-          </a:prstGeom>
-          <a:noFill/>
-        </p:spPr>
-        <p:txBody>
-          <a:bodyPr wrap="square">
-            <a:spAutoFit/>
-          </a:bodyPr>
-          <a:lstStyle/>
-          <a:p>
-            <a:r>
-              <a:rPr lang="zh-CN" altLang="zh-CN" sz="1800" dirty="0">
-                <a:solidFill>
-                  <a:srgbClr val="080808"/>
-                </a:solidFill>
-                <a:effectLst/>
-                <a:latin typeface="Times New Roman" panose="02020603050405020304" pitchFamily="18" charset="0"/>
-                <a:cs typeface="Times New Roman" panose="02020603050405020304" pitchFamily="18" charset="0"/>
-              </a:rPr>
-              <a:t>Message</a:t>
-            </a:r>
-            <a:r>
-              <a:rPr lang="en-US" altLang="zh-CN" sz="1800" dirty="0">
-                <a:solidFill>
-                  <a:srgbClr val="080808"/>
-                </a:solidFill>
-                <a:effectLst/>
-                <a:latin typeface="Times New Roman" panose="02020603050405020304" pitchFamily="18" charset="0"/>
-                <a:cs typeface="Times New Roman" panose="02020603050405020304" pitchFamily="18" charset="0"/>
-              </a:rPr>
-              <a:t>&amp;</a:t>
-            </a:r>
-            <a:r>
-              <a:rPr lang="zh-CN" altLang="zh-CN" dirty="0">
-                <a:latin typeface="Times New Roman" panose="02020603050405020304" pitchFamily="18" charset="0"/>
-                <a:cs typeface="Times New Roman" panose="02020603050405020304" pitchFamily="18" charset="0"/>
-              </a:rPr>
-              <a:t>ResearchRecord</a:t>
-            </a:r>
-          </a:p>
-        </p:txBody>
-      </p:sp>
-      <p:cxnSp>
-        <p:nvCxnSpPr>
-          <p:cNvPr id="50" name="直接连接符 49">
-            <a:extLst>
-              <a:ext uri="{FF2B5EF4-FFF2-40B4-BE49-F238E27FC236}">
-                <a16:creationId xmlns:a16="http://schemas.microsoft.com/office/drawing/2014/main" id="{6AC246D3-AAF7-2EC0-F006-9AD79101DC4A}"/>
-              </a:ext>
-            </a:extLst>
-          </p:cNvPr>
-          <p:cNvCxnSpPr/>
-          <p:nvPr/>
-        </p:nvCxnSpPr>
-        <p:spPr>
-          <a:xfrm>
-            <a:off x="11937533" y="1430323"/>
-            <a:ext cx="29362" cy="5222147"/>
-          </a:xfrm>
-          <a:prstGeom prst="line">
-            <a:avLst/>
-          </a:prstGeom>
-          <a:ln>
-            <a:solidFill>
-              <a:schemeClr val="accent1"/>
-            </a:solidFill>
-            <a:prstDash val="sysDot"/>
-          </a:ln>
-        </p:spPr>
-        <p:style>
-          <a:lnRef idx="2">
-            <a:schemeClr val="accent1"/>
-          </a:lnRef>
-          <a:fillRef idx="0">
-            <a:schemeClr val="accent1"/>
-          </a:fillRef>
-          <a:effectRef idx="1">
-            <a:schemeClr val="accent1"/>
-          </a:effectRef>
-          <a:fontRef idx="minor">
-            <a:schemeClr val="tx1"/>
-          </a:fontRef>
-        </p:style>
-      </p:cxnSp>
-      <p:sp>
-        <p:nvSpPr>
-          <p:cNvPr id="51" name="文本框 50">
-            <a:extLst>
-              <a:ext uri="{FF2B5EF4-FFF2-40B4-BE49-F238E27FC236}">
-                <a16:creationId xmlns:a16="http://schemas.microsoft.com/office/drawing/2014/main" id="{4FC0E561-C9A8-A777-8D22-FA831C02D5EA}"/>
-              </a:ext>
-            </a:extLst>
-          </p:cNvPr>
-          <p:cNvSpPr txBox="1"/>
-          <p:nvPr/>
-        </p:nvSpPr>
-        <p:spPr>
-          <a:xfrm>
-            <a:off x="4437775" y="5736330"/>
-            <a:ext cx="2546059" cy="523220"/>
-          </a:xfrm>
-          <a:prstGeom prst="rect">
-            <a:avLst/>
-          </a:prstGeom>
-          <a:noFill/>
-        </p:spPr>
-        <p:txBody>
-          <a:bodyPr wrap="square" rtlCol="0">
-            <a:spAutoFit/>
-          </a:bodyPr>
-          <a:lstStyle/>
-          <a:p>
-            <a:r>
-              <a:rPr lang="zh-CN" altLang="en-US" sz="2800" dirty="0">
-                <a:solidFill>
-                  <a:srgbClr val="FF0000"/>
-                </a:solidFill>
-                <a:latin typeface="黑体" panose="02010609060101010101" pitchFamily="49" charset="-122"/>
-                <a:ea typeface="黑体" panose="02010609060101010101" pitchFamily="49" charset="-122"/>
-                <a:cs typeface="Times New Roman" panose="02020603050405020304" pitchFamily="18" charset="0"/>
-              </a:rPr>
-              <a:t>落库记录请求</a:t>
-            </a:r>
-          </a:p>
-        </p:txBody>
-      </p:sp>
     </p:spTree>
     <p:extLst>
       <p:ext uri="{BB962C8B-B14F-4D97-AF65-F5344CB8AC3E}">

--- a/PPT/Bioinformatics_Agent_Architecture.pptx
+++ b/PPT/Bioinformatics_Agent_Architecture.pptx
@@ -4085,7 +4085,7 @@
         </p:nvSpPr>
         <p:spPr>
           <a:xfrm>
-            <a:off x="3406683" y="4115642"/>
+            <a:off x="4007863" y="760801"/>
             <a:ext cx="399098" cy="399098"/>
           </a:xfrm>
           <a:prstGeom prst="ellipse">
@@ -4139,7 +4139,7 @@
         </p:nvSpPr>
         <p:spPr>
           <a:xfrm>
-            <a:off x="4390967" y="4115642"/>
+            <a:off x="4992147" y="760801"/>
             <a:ext cx="399098" cy="399098"/>
           </a:xfrm>
           <a:prstGeom prst="ellipse">
@@ -4193,7 +4193,7 @@
         </p:nvSpPr>
         <p:spPr>
           <a:xfrm>
-            <a:off x="6357039" y="5007306"/>
+            <a:off x="6958219" y="1652465"/>
             <a:ext cx="399098" cy="399098"/>
           </a:xfrm>
           <a:prstGeom prst="ellipse">
@@ -4247,7 +4247,7 @@
         </p:nvSpPr>
         <p:spPr>
           <a:xfrm>
-            <a:off x="7318582" y="5406404"/>
+            <a:off x="7919762" y="2051563"/>
             <a:ext cx="399098" cy="399098"/>
           </a:xfrm>
           <a:prstGeom prst="ellipse">
@@ -4301,7 +4301,7 @@
         </p:nvSpPr>
         <p:spPr>
           <a:xfrm>
-            <a:off x="8409782" y="5406404"/>
+            <a:off x="9010962" y="2051563"/>
             <a:ext cx="399098" cy="399098"/>
           </a:xfrm>
           <a:prstGeom prst="ellipse">
@@ -4355,7 +4355,7 @@
         </p:nvSpPr>
         <p:spPr>
           <a:xfrm>
-            <a:off x="9385653" y="4161199"/>
+            <a:off x="9986833" y="806358"/>
             <a:ext cx="399098" cy="399098"/>
           </a:xfrm>
           <a:prstGeom prst="ellipse">
@@ -4409,7 +4409,7 @@
         </p:nvSpPr>
         <p:spPr>
           <a:xfrm>
-            <a:off x="5349997" y="4608208"/>
+            <a:off x="5951177" y="1253367"/>
             <a:ext cx="399098" cy="399098"/>
           </a:xfrm>
           <a:prstGeom prst="ellipse">
@@ -4466,7 +4466,7 @@
         </p:nvCxnSpPr>
         <p:spPr>
           <a:xfrm flipV="1">
-            <a:off x="2960433" y="4315191"/>
+            <a:off x="3561613" y="960350"/>
             <a:ext cx="446250" cy="1"/>
           </a:xfrm>
           <a:prstGeom prst="straightConnector1">
@@ -4501,6 +4501,7 @@
             </a:extLst>
           </p:cNvPr>
           <p:cNvCxnSpPr>
+            <a:cxnSpLocks/>
             <a:stCxn id="3" idx="6"/>
             <a:endCxn id="22" idx="2"/>
           </p:cNvCxnSpPr>
@@ -4508,7 +4509,7 @@
         </p:nvCxnSpPr>
         <p:spPr>
           <a:xfrm>
-            <a:off x="3805781" y="4315191"/>
+            <a:off x="4406961" y="960350"/>
             <a:ext cx="585186" cy="0"/>
           </a:xfrm>
           <a:prstGeom prst="straightConnector1">
@@ -4551,7 +4552,7 @@
         </p:nvCxnSpPr>
         <p:spPr>
           <a:xfrm>
-            <a:off x="4790065" y="4315191"/>
+            <a:off x="5391245" y="960350"/>
             <a:ext cx="4595588" cy="45557"/>
           </a:xfrm>
           <a:prstGeom prst="straightConnector1">
@@ -4590,7 +4591,7 @@
         </p:nvSpPr>
         <p:spPr>
           <a:xfrm>
-            <a:off x="6809134" y="4024588"/>
+            <a:off x="7410314" y="669747"/>
             <a:ext cx="211349" cy="369332"/>
           </a:xfrm>
           <a:prstGeom prst="rect">
@@ -4628,13 +4629,14 @@
             </a:extLst>
           </p:cNvPr>
           <p:cNvCxnSpPr>
+            <a:cxnSpLocks/>
             <a:stCxn id="22" idx="6"/>
           </p:cNvCxnSpPr>
           <p:nvPr/>
         </p:nvCxnSpPr>
         <p:spPr>
           <a:xfrm>
-            <a:off x="4790065" y="4315191"/>
+            <a:off x="5391245" y="960350"/>
             <a:ext cx="559932" cy="448784"/>
           </a:xfrm>
           <a:prstGeom prst="straightConnector1">
@@ -4673,7 +4675,7 @@
         </p:nvSpPr>
         <p:spPr>
           <a:xfrm>
-            <a:off x="4790065" y="4438425"/>
+            <a:off x="5391245" y="1083584"/>
             <a:ext cx="191974" cy="369332"/>
           </a:xfrm>
           <a:prstGeom prst="rect">
@@ -4718,7 +4720,7 @@
         </p:nvCxnSpPr>
         <p:spPr>
           <a:xfrm>
-            <a:off x="5749095" y="4807757"/>
+            <a:off x="6350275" y="1452916"/>
             <a:ext cx="607944" cy="399098"/>
           </a:xfrm>
           <a:prstGeom prst="straightConnector1">
@@ -4756,6 +4758,7 @@
             </a:extLst>
           </p:cNvPr>
           <p:cNvCxnSpPr>
+            <a:cxnSpLocks/>
             <a:stCxn id="37" idx="3"/>
             <a:endCxn id="22" idx="3"/>
           </p:cNvCxnSpPr>
@@ -4763,7 +4766,7 @@
         </p:nvCxnSpPr>
         <p:spPr>
           <a:xfrm rot="5400000" flipH="1">
-            <a:off x="4682646" y="4223061"/>
+            <a:off x="5283826" y="868220"/>
             <a:ext cx="492566" cy="959030"/>
           </a:xfrm>
           <a:prstGeom prst="curvedConnector3">
@@ -4804,7 +4807,7 @@
         </p:nvSpPr>
         <p:spPr>
           <a:xfrm>
-            <a:off x="4449414" y="5040860"/>
+            <a:off x="5050594" y="1686019"/>
             <a:ext cx="211349" cy="369332"/>
           </a:xfrm>
           <a:prstGeom prst="rect">
@@ -4846,7 +4849,7 @@
         </p:nvSpPr>
         <p:spPr>
           <a:xfrm>
-            <a:off x="5786489" y="4937298"/>
+            <a:off x="6387669" y="1582457"/>
             <a:ext cx="191974" cy="369332"/>
           </a:xfrm>
           <a:prstGeom prst="rect">
@@ -4891,7 +4894,7 @@
         </p:nvCxnSpPr>
         <p:spPr>
           <a:xfrm>
-            <a:off x="6756137" y="5206855"/>
+            <a:off x="7357317" y="1852014"/>
             <a:ext cx="562445" cy="399098"/>
           </a:xfrm>
           <a:prstGeom prst="straightConnector1">
@@ -4930,7 +4933,7 @@
         </p:nvSpPr>
         <p:spPr>
           <a:xfrm>
-            <a:off x="6763712" y="5406404"/>
+            <a:off x="7364892" y="2051563"/>
             <a:ext cx="191974" cy="369332"/>
           </a:xfrm>
           <a:prstGeom prst="rect">
@@ -4976,7 +4979,7 @@
         </p:nvCxnSpPr>
         <p:spPr>
           <a:xfrm flipV="1">
-            <a:off x="6756137" y="4360748"/>
+            <a:off x="7357317" y="1005907"/>
             <a:ext cx="2629516" cy="846107"/>
           </a:xfrm>
           <a:prstGeom prst="straightConnector1">
@@ -5015,7 +5018,7 @@
         </p:nvSpPr>
         <p:spPr>
           <a:xfrm>
-            <a:off x="7518131" y="4599135"/>
+            <a:off x="8119311" y="1244294"/>
             <a:ext cx="211349" cy="369332"/>
           </a:xfrm>
           <a:prstGeom prst="rect">
@@ -5060,7 +5063,7 @@
         </p:nvCxnSpPr>
         <p:spPr>
           <a:xfrm>
-            <a:off x="7717680" y="5605953"/>
+            <a:off x="8318860" y="2251112"/>
             <a:ext cx="692102" cy="0"/>
           </a:xfrm>
           <a:prstGeom prst="straightConnector1">
@@ -5102,7 +5105,7 @@
         </p:nvCxnSpPr>
         <p:spPr>
           <a:xfrm flipV="1">
-            <a:off x="8808880" y="4360748"/>
+            <a:off x="9410060" y="1005907"/>
             <a:ext cx="576773" cy="1245205"/>
           </a:xfrm>
           <a:prstGeom prst="straightConnector1">
@@ -5141,7 +5144,7 @@
         </p:nvSpPr>
         <p:spPr>
           <a:xfrm>
-            <a:off x="2200112" y="4180776"/>
+            <a:off x="2801292" y="825935"/>
             <a:ext cx="757790" cy="257649"/>
           </a:xfrm>
           <a:prstGeom prst="roundRect">
@@ -5191,7 +5194,7 @@
         </p:nvSpPr>
         <p:spPr>
           <a:xfrm>
-            <a:off x="10497056" y="4263071"/>
+            <a:off x="11098236" y="908230"/>
             <a:ext cx="757790" cy="257649"/>
           </a:xfrm>
           <a:prstGeom prst="roundRect">
@@ -5244,7 +5247,7 @@
         </p:nvCxnSpPr>
         <p:spPr>
           <a:xfrm>
-            <a:off x="9784751" y="4360748"/>
+            <a:off x="10385931" y="1005907"/>
             <a:ext cx="712305" cy="31148"/>
           </a:xfrm>
           <a:prstGeom prst="straightConnector1">
@@ -5745,6 +5748,458 @@
           <a:xfrm>
             <a:off x="1604759" y="3012029"/>
             <a:ext cx="0" cy="322247"/>
+          </a:xfrm>
+          <a:prstGeom prst="straightConnector1">
+            <a:avLst/>
+          </a:prstGeom>
+          <a:ln>
+            <a:tailEnd type="triangle"/>
+          </a:ln>
+        </p:spPr>
+        <p:style>
+          <a:lnRef idx="2">
+            <a:schemeClr val="dk1"/>
+          </a:lnRef>
+          <a:fillRef idx="0">
+            <a:schemeClr val="dk1"/>
+          </a:fillRef>
+          <a:effectRef idx="1">
+            <a:schemeClr val="dk1"/>
+          </a:effectRef>
+          <a:fontRef idx="minor">
+            <a:schemeClr val="tx1"/>
+          </a:fontRef>
+        </p:style>
+      </p:cxnSp>
+      <p:sp>
+        <p:nvSpPr>
+          <p:cNvPr id="6" name="左大括号 5">
+            <a:extLst>
+              <a:ext uri="{FF2B5EF4-FFF2-40B4-BE49-F238E27FC236}">
+                <a16:creationId xmlns:a16="http://schemas.microsoft.com/office/drawing/2014/main" id="{EE064F3D-3454-3F24-411E-D4ED7AD111C3}"/>
+              </a:ext>
+            </a:extLst>
+          </p:cNvPr>
+          <p:cNvSpPr/>
+          <p:nvPr/>
+        </p:nvSpPr>
+        <p:spPr>
+          <a:xfrm>
+            <a:off x="2187659" y="2980949"/>
+            <a:ext cx="126298" cy="1012559"/>
+          </a:xfrm>
+          <a:prstGeom prst="leftBrace">
+            <a:avLst/>
+          </a:prstGeom>
+        </p:spPr>
+        <p:style>
+          <a:lnRef idx="2">
+            <a:schemeClr val="dk1"/>
+          </a:lnRef>
+          <a:fillRef idx="0">
+            <a:schemeClr val="dk1"/>
+          </a:fillRef>
+          <a:effectRef idx="1">
+            <a:schemeClr val="dk1"/>
+          </a:effectRef>
+          <a:fontRef idx="minor">
+            <a:schemeClr val="tx1"/>
+          </a:fontRef>
+        </p:style>
+        <p:txBody>
+          <a:bodyPr rtlCol="0" anchor="ctr"/>
+          <a:lstStyle/>
+          <a:p>
+            <a:pPr algn="ctr"/>
+            <a:endParaRPr lang="zh-CN" altLang="en-US"/>
+          </a:p>
+        </p:txBody>
+      </p:sp>
+      <p:sp>
+        <p:nvSpPr>
+          <p:cNvPr id="8" name="文本框 7">
+            <a:extLst>
+              <a:ext uri="{FF2B5EF4-FFF2-40B4-BE49-F238E27FC236}">
+                <a16:creationId xmlns:a16="http://schemas.microsoft.com/office/drawing/2014/main" id="{DF13B0E6-E7FE-7A2E-6240-733931B221C5}"/>
+              </a:ext>
+            </a:extLst>
+          </p:cNvPr>
+          <p:cNvSpPr txBox="1"/>
+          <p:nvPr/>
+        </p:nvSpPr>
+        <p:spPr>
+          <a:xfrm>
+            <a:off x="2278418" y="2857716"/>
+            <a:ext cx="1687350" cy="243143"/>
+          </a:xfrm>
+          <a:prstGeom prst="rect">
+            <a:avLst/>
+          </a:prstGeom>
+          <a:noFill/>
+        </p:spPr>
+        <p:txBody>
+          <a:bodyPr wrap="square">
+            <a:spAutoFit/>
+          </a:bodyPr>
+          <a:lstStyle/>
+          <a:p>
+            <a:pPr>
+              <a:buNone/>
+            </a:pPr>
+            <a:r>
+              <a:rPr lang="zh-CN" altLang="zh-CN" sz="980" dirty="0">
+                <a:solidFill>
+                  <a:srgbClr val="080808"/>
+                </a:solidFill>
+                <a:effectLst/>
+                <a:latin typeface="JetBrains Mono"/>
+              </a:rPr>
+              <a:t>initial_state</a:t>
+            </a:r>
+            <a:r>
+              <a:rPr lang="en-US" altLang="zh-CN" sz="980" dirty="0">
+                <a:solidFill>
+                  <a:srgbClr val="080808"/>
+                </a:solidFill>
+                <a:effectLst/>
+                <a:latin typeface="JetBrains Mono"/>
+              </a:rPr>
+              <a:t>()</a:t>
+            </a:r>
+            <a:r>
+              <a:rPr lang="zh-CN" altLang="en-US" sz="980" dirty="0">
+                <a:solidFill>
+                  <a:srgbClr val="080808"/>
+                </a:solidFill>
+                <a:effectLst/>
+                <a:latin typeface="JetBrains Mono"/>
+              </a:rPr>
+              <a:t>图的初始状态</a:t>
+            </a:r>
+            <a:endParaRPr lang="zh-CN" altLang="zh-CN" sz="980" dirty="0">
+              <a:solidFill>
+                <a:srgbClr val="080808"/>
+              </a:solidFill>
+              <a:effectLst/>
+              <a:latin typeface="JetBrains Mono"/>
+            </a:endParaRPr>
+          </a:p>
+        </p:txBody>
+      </p:sp>
+      <p:sp>
+        <p:nvSpPr>
+          <p:cNvPr id="12" name="文本框 11">
+            <a:extLst>
+              <a:ext uri="{FF2B5EF4-FFF2-40B4-BE49-F238E27FC236}">
+                <a16:creationId xmlns:a16="http://schemas.microsoft.com/office/drawing/2014/main" id="{5696567B-C687-5DB4-15D7-34770C0EEEB8}"/>
+              </a:ext>
+            </a:extLst>
+          </p:cNvPr>
+          <p:cNvSpPr txBox="1"/>
+          <p:nvPr/>
+        </p:nvSpPr>
+        <p:spPr>
+          <a:xfrm>
+            <a:off x="2232275" y="3343310"/>
+            <a:ext cx="6095158" cy="243143"/>
+          </a:xfrm>
+          <a:prstGeom prst="rect">
+            <a:avLst/>
+          </a:prstGeom>
+          <a:noFill/>
+        </p:spPr>
+        <p:txBody>
+          <a:bodyPr wrap="square">
+            <a:spAutoFit/>
+          </a:bodyPr>
+          <a:lstStyle/>
+          <a:p>
+            <a:pPr>
+              <a:buNone/>
+            </a:pPr>
+            <a:r>
+              <a:rPr lang="zh-CN" altLang="zh-CN" sz="980">
+                <a:solidFill>
+                  <a:srgbClr val="080808"/>
+                </a:solidFill>
+                <a:effectLst/>
+                <a:latin typeface="JetBrains Mono"/>
+              </a:rPr>
+              <a:t>config</a:t>
+            </a:r>
+            <a:endParaRPr lang="zh-CN" altLang="zh-CN" sz="980" dirty="0">
+              <a:solidFill>
+                <a:srgbClr val="080808"/>
+              </a:solidFill>
+              <a:effectLst/>
+              <a:latin typeface="JetBrains Mono"/>
+            </a:endParaRPr>
+          </a:p>
+        </p:txBody>
+      </p:sp>
+      <p:sp>
+        <p:nvSpPr>
+          <p:cNvPr id="15" name="文本框 14">
+            <a:extLst>
+              <a:ext uri="{FF2B5EF4-FFF2-40B4-BE49-F238E27FC236}">
+                <a16:creationId xmlns:a16="http://schemas.microsoft.com/office/drawing/2014/main" id="{964342EC-1E5E-35BA-3C57-E529540C1CEE}"/>
+              </a:ext>
+            </a:extLst>
+          </p:cNvPr>
+          <p:cNvSpPr txBox="1"/>
+          <p:nvPr/>
+        </p:nvSpPr>
+        <p:spPr>
+          <a:xfrm>
+            <a:off x="2273116" y="3855244"/>
+            <a:ext cx="6095158" cy="243143"/>
+          </a:xfrm>
+          <a:prstGeom prst="rect">
+            <a:avLst/>
+          </a:prstGeom>
+          <a:noFill/>
+        </p:spPr>
+        <p:txBody>
+          <a:bodyPr wrap="square">
+            <a:spAutoFit/>
+          </a:bodyPr>
+          <a:lstStyle/>
+          <a:p>
+            <a:pPr>
+              <a:buNone/>
+            </a:pPr>
+            <a:r>
+              <a:rPr lang="zh-CN" altLang="zh-CN" sz="980" dirty="0">
+                <a:solidFill>
+                  <a:srgbClr val="080808"/>
+                </a:solidFill>
+                <a:effectLst/>
+                <a:latin typeface="JetBrains Mono"/>
+              </a:rPr>
+              <a:t>stream_mode=</a:t>
+            </a:r>
+            <a:r>
+              <a:rPr lang="zh-CN" altLang="zh-CN" sz="980" dirty="0">
+                <a:solidFill>
+                  <a:srgbClr val="067D17"/>
+                </a:solidFill>
+                <a:effectLst/>
+                <a:latin typeface="JetBrains Mono"/>
+              </a:rPr>
+              <a:t>“values“</a:t>
+            </a:r>
+            <a:r>
+              <a:rPr lang="en-US" altLang="zh-CN" sz="980" dirty="0">
+                <a:solidFill>
+                  <a:srgbClr val="067D17"/>
+                </a:solidFill>
+                <a:effectLst/>
+                <a:latin typeface="JetBrains Mono"/>
+              </a:rPr>
+              <a:t> </a:t>
+            </a:r>
+            <a:r>
+              <a:rPr lang="zh-CN" altLang="en-US" sz="980" dirty="0">
+                <a:solidFill>
+                  <a:srgbClr val="067D17"/>
+                </a:solidFill>
+                <a:effectLst/>
+                <a:latin typeface="JetBrains Mono"/>
+              </a:rPr>
+              <a:t>每次输出一个完整的状态</a:t>
+            </a:r>
+            <a:endParaRPr lang="zh-CN" altLang="zh-CN" sz="980" dirty="0">
+              <a:solidFill>
+                <a:srgbClr val="080808"/>
+              </a:solidFill>
+              <a:effectLst/>
+              <a:latin typeface="JetBrains Mono"/>
+            </a:endParaRPr>
+          </a:p>
+        </p:txBody>
+      </p:sp>
+      <p:sp>
+        <p:nvSpPr>
+          <p:cNvPr id="23" name="矩形 22">
+            <a:extLst>
+              <a:ext uri="{FF2B5EF4-FFF2-40B4-BE49-F238E27FC236}">
+                <a16:creationId xmlns:a16="http://schemas.microsoft.com/office/drawing/2014/main" id="{B70811B1-6B88-A314-EA44-38C9CBD16A3D}"/>
+              </a:ext>
+            </a:extLst>
+          </p:cNvPr>
+          <p:cNvSpPr/>
+          <p:nvPr/>
+        </p:nvSpPr>
+        <p:spPr>
+          <a:xfrm>
+            <a:off x="1041895" y="3992524"/>
+            <a:ext cx="1125727" cy="409158"/>
+          </a:xfrm>
+          <a:prstGeom prst="rect">
+            <a:avLst/>
+          </a:prstGeom>
+        </p:spPr>
+        <p:style>
+          <a:lnRef idx="2">
+            <a:schemeClr val="dk1"/>
+          </a:lnRef>
+          <a:fillRef idx="1">
+            <a:schemeClr val="lt1"/>
+          </a:fillRef>
+          <a:effectRef idx="0">
+            <a:schemeClr val="dk1"/>
+          </a:effectRef>
+          <a:fontRef idx="minor">
+            <a:schemeClr val="dk1"/>
+          </a:fontRef>
+        </p:style>
+        <p:txBody>
+          <a:bodyPr rtlCol="0" anchor="ctr"/>
+          <a:lstStyle/>
+          <a:p>
+            <a:pPr algn="ctr"/>
+            <a:r>
+              <a:rPr lang="zh-CN" altLang="zh-CN" sz="1100" dirty="0">
+                <a:latin typeface="Times New Roman" panose="02020603050405020304" pitchFamily="18" charset="0"/>
+                <a:cs typeface="Times New Roman" panose="02020603050405020304" pitchFamily="18" charset="0"/>
+              </a:rPr>
+              <a:t>get_graph()</a:t>
+            </a:r>
+            <a:r>
+              <a:rPr lang="en-US" altLang="zh-CN" sz="1100" dirty="0">
+                <a:latin typeface="Times New Roman" panose="02020603050405020304" pitchFamily="18" charset="0"/>
+                <a:cs typeface="Times New Roman" panose="02020603050405020304" pitchFamily="18" charset="0"/>
+              </a:rPr>
+              <a:t>/</a:t>
+            </a:r>
+          </a:p>
+          <a:p>
+            <a:pPr algn="ctr"/>
+            <a:r>
+              <a:rPr lang="zh-CN" altLang="zh-CN" sz="1100" dirty="0">
+                <a:latin typeface="Times New Roman" panose="02020603050405020304" pitchFamily="18" charset="0"/>
+                <a:cs typeface="Times New Roman" panose="02020603050405020304" pitchFamily="18" charset="0"/>
+              </a:rPr>
+              <a:t>_compiled_grap</a:t>
+            </a:r>
+          </a:p>
+        </p:txBody>
+      </p:sp>
+      <p:cxnSp>
+        <p:nvCxnSpPr>
+          <p:cNvPr id="25" name="直接箭头连接符 24">
+            <a:extLst>
+              <a:ext uri="{FF2B5EF4-FFF2-40B4-BE49-F238E27FC236}">
+                <a16:creationId xmlns:a16="http://schemas.microsoft.com/office/drawing/2014/main" id="{9F154CDE-5B0D-9B14-2846-459CB7B672ED}"/>
+              </a:ext>
+            </a:extLst>
+          </p:cNvPr>
+          <p:cNvCxnSpPr>
+            <a:stCxn id="20" idx="2"/>
+            <a:endCxn id="23" idx="0"/>
+          </p:cNvCxnSpPr>
+          <p:nvPr/>
+        </p:nvCxnSpPr>
+        <p:spPr>
+          <a:xfrm>
+            <a:off x="1604759" y="3640183"/>
+            <a:ext cx="0" cy="352341"/>
+          </a:xfrm>
+          <a:prstGeom prst="straightConnector1">
+            <a:avLst/>
+          </a:prstGeom>
+          <a:ln>
+            <a:tailEnd type="triangle"/>
+          </a:ln>
+        </p:spPr>
+        <p:style>
+          <a:lnRef idx="2">
+            <a:schemeClr val="dk1"/>
+          </a:lnRef>
+          <a:fillRef idx="0">
+            <a:schemeClr val="dk1"/>
+          </a:fillRef>
+          <a:effectRef idx="1">
+            <a:schemeClr val="dk1"/>
+          </a:effectRef>
+          <a:fontRef idx="minor">
+            <a:schemeClr val="tx1"/>
+          </a:fontRef>
+        </p:style>
+      </p:cxnSp>
+      <p:sp>
+        <p:nvSpPr>
+          <p:cNvPr id="29" name="矩形 28">
+            <a:extLst>
+              <a:ext uri="{FF2B5EF4-FFF2-40B4-BE49-F238E27FC236}">
+                <a16:creationId xmlns:a16="http://schemas.microsoft.com/office/drawing/2014/main" id="{6FD14CA3-5D23-95CA-9FF0-2CADA6E19FAB}"/>
+              </a:ext>
+            </a:extLst>
+          </p:cNvPr>
+          <p:cNvSpPr/>
+          <p:nvPr/>
+        </p:nvSpPr>
+        <p:spPr>
+          <a:xfrm>
+            <a:off x="1041895" y="4754023"/>
+            <a:ext cx="1145764" cy="403718"/>
+          </a:xfrm>
+          <a:prstGeom prst="rect">
+            <a:avLst/>
+          </a:prstGeom>
+        </p:spPr>
+        <p:style>
+          <a:lnRef idx="2">
+            <a:schemeClr val="dk1"/>
+          </a:lnRef>
+          <a:fillRef idx="1">
+            <a:schemeClr val="lt1"/>
+          </a:fillRef>
+          <a:effectRef idx="0">
+            <a:schemeClr val="dk1"/>
+          </a:effectRef>
+          <a:fontRef idx="minor">
+            <a:schemeClr val="dk1"/>
+          </a:fontRef>
+        </p:style>
+        <p:txBody>
+          <a:bodyPr rtlCol="0" anchor="ctr"/>
+          <a:lstStyle/>
+          <a:p>
+            <a:pPr algn="ctr"/>
+            <a:r>
+              <a:rPr lang="zh-CN" altLang="zh-CN" sz="1400" dirty="0">
+                <a:latin typeface="Times New Roman" panose="02020603050405020304" pitchFamily="18" charset="0"/>
+                <a:cs typeface="Times New Roman" panose="02020603050405020304" pitchFamily="18" charset="0"/>
+              </a:rPr>
+              <a:t>build_graph().compile</a:t>
+            </a:r>
+            <a:endParaRPr lang="zh-CN" altLang="en-US" sz="1400" dirty="0">
+              <a:latin typeface="Times New Roman" panose="02020603050405020304" pitchFamily="18" charset="0"/>
+              <a:cs typeface="Times New Roman" panose="02020603050405020304" pitchFamily="18" charset="0"/>
+            </a:endParaRPr>
+          </a:p>
+        </p:txBody>
+      </p:sp>
+      <p:cxnSp>
+        <p:nvCxnSpPr>
+          <p:cNvPr id="31" name="直接箭头连接符 30">
+            <a:extLst>
+              <a:ext uri="{FF2B5EF4-FFF2-40B4-BE49-F238E27FC236}">
+                <a16:creationId xmlns:a16="http://schemas.microsoft.com/office/drawing/2014/main" id="{E9114FE5-1C03-FBD9-F31F-BDF8B567D441}"/>
+              </a:ext>
+            </a:extLst>
+          </p:cNvPr>
+          <p:cNvCxnSpPr>
+            <a:stCxn id="23" idx="2"/>
+            <a:endCxn id="29" idx="0"/>
+          </p:cNvCxnSpPr>
+          <p:nvPr/>
+        </p:nvCxnSpPr>
+        <p:spPr>
+          <a:xfrm>
+            <a:off x="1604759" y="4401682"/>
+            <a:ext cx="10018" cy="352341"/>
           </a:xfrm>
           <a:prstGeom prst="straightConnector1">
             <a:avLst/>
